--- a/presentations/1.13-etalony-otstupy/Etalony_otstupy_SYN_flood.pptx
+++ b/presentations/1.13-etalony-otstupy/Etalony_otstupy_SYN_flood.pptx
@@ -2,35 +2,36 @@
 <file path=ppt/presentation.xml><?xml version="1.0" encoding="utf-8"?>
 <p:presentation xmlns:p="http://schemas.openxmlformats.org/presentationml/2006/main">
   <p:sldMasterIdLst>
-    <p:sldMasterId xmlns:r="http://schemas.openxmlformats.org/officeDocument/2006/relationships" id="2147483648" r:id="Rd0238698aa754a1a"/>
+    <p:sldMasterId xmlns:r="http://schemas.openxmlformats.org/officeDocument/2006/relationships" id="2147483648" r:id="R9d4df98ba8cc4286"/>
   </p:sldMasterIdLst>
   <p:notesMasterIdLst>
-    <p:notesMasterId xmlns:r="http://schemas.openxmlformats.org/officeDocument/2006/relationships" r:id="R096ac2416d43493e"/>
+    <p:notesMasterId xmlns:r="http://schemas.openxmlformats.org/officeDocument/2006/relationships" r:id="R23585f133a0640e3"/>
   </p:notesMasterIdLst>
   <p:sldIdLst>
-    <p:sldId xmlns:r="http://schemas.openxmlformats.org/officeDocument/2006/relationships" id="256" r:id="R5d5b6336e41c4b1d"/>
-    <p:sldId xmlns:r="http://schemas.openxmlformats.org/officeDocument/2006/relationships" id="257" r:id="Ra6a99dace13f4311"/>
-    <p:sldId xmlns:r="http://schemas.openxmlformats.org/officeDocument/2006/relationships" id="258" r:id="Rda50d7a2d0fa46ab"/>
-    <p:sldId xmlns:r="http://schemas.openxmlformats.org/officeDocument/2006/relationships" id="259" r:id="R3e5f5475412c4ca1"/>
-    <p:sldId xmlns:r="http://schemas.openxmlformats.org/officeDocument/2006/relationships" id="260" r:id="R64b101c747eb4584"/>
-    <p:sldId xmlns:r="http://schemas.openxmlformats.org/officeDocument/2006/relationships" id="261" r:id="R90961fa3168248a5"/>
-    <p:sldId xmlns:r="http://schemas.openxmlformats.org/officeDocument/2006/relationships" id="262" r:id="R6ac81651e4ba4b99"/>
-    <p:sldId xmlns:r="http://schemas.openxmlformats.org/officeDocument/2006/relationships" id="263" r:id="R2b4fc627ee244439"/>
-    <p:sldId xmlns:r="http://schemas.openxmlformats.org/officeDocument/2006/relationships" id="264" r:id="R1b189ebc2b1f4c01"/>
-    <p:sldId xmlns:r="http://schemas.openxmlformats.org/officeDocument/2006/relationships" id="265" r:id="R04cc584d156f440a"/>
-    <p:sldId xmlns:r="http://schemas.openxmlformats.org/officeDocument/2006/relationships" id="266" r:id="R4b9c45ed2d2b4fce"/>
-    <p:sldId xmlns:r="http://schemas.openxmlformats.org/officeDocument/2006/relationships" id="267" r:id="R9ad50435f7a84401"/>
-    <p:sldId xmlns:r="http://schemas.openxmlformats.org/officeDocument/2006/relationships" id="268" r:id="R3905a127f112486f"/>
-    <p:sldId xmlns:r="http://schemas.openxmlformats.org/officeDocument/2006/relationships" id="269" r:id="Rb0d80105c98643cf"/>
-    <p:sldId xmlns:r="http://schemas.openxmlformats.org/officeDocument/2006/relationships" id="270" r:id="Rcdba2ea9a8a64340"/>
-    <p:sldId xmlns:r="http://schemas.openxmlformats.org/officeDocument/2006/relationships" id="271" r:id="R5008b57ab3f24221"/>
-    <p:sldId xmlns:r="http://schemas.openxmlformats.org/officeDocument/2006/relationships" id="272" r:id="R10c50689549046c2"/>
-    <p:sldId xmlns:r="http://schemas.openxmlformats.org/officeDocument/2006/relationships" id="273" r:id="R30d16fd621304117"/>
-    <p:sldId xmlns:r="http://schemas.openxmlformats.org/officeDocument/2006/relationships" id="274" r:id="Rc2dd598b6d704604"/>
-    <p:sldId xmlns:r="http://schemas.openxmlformats.org/officeDocument/2006/relationships" id="275" r:id="R5c655bb7ff8447a0"/>
-    <p:sldId xmlns:r="http://schemas.openxmlformats.org/officeDocument/2006/relationships" id="276" r:id="R05b25a8ce824493d"/>
-    <p:sldId xmlns:r="http://schemas.openxmlformats.org/officeDocument/2006/relationships" id="277" r:id="Rc1f82257236947d7"/>
-    <p:sldId xmlns:r="http://schemas.openxmlformats.org/officeDocument/2006/relationships" id="278" r:id="Rb538e85b02b44062"/>
+    <p:sldId xmlns:r="http://schemas.openxmlformats.org/officeDocument/2006/relationships" id="256" r:id="Rcf5e3ab8d1ab46a1"/>
+    <p:sldId xmlns:r="http://schemas.openxmlformats.org/officeDocument/2006/relationships" id="257" r:id="Rd3887c9228b04139"/>
+    <p:sldId xmlns:r="http://schemas.openxmlformats.org/officeDocument/2006/relationships" id="258" r:id="R0b1631065d3f4fb4"/>
+    <p:sldId xmlns:r="http://schemas.openxmlformats.org/officeDocument/2006/relationships" id="259" r:id="R41bf1ab99c924ba0"/>
+    <p:sldId xmlns:r="http://schemas.openxmlformats.org/officeDocument/2006/relationships" id="260" r:id="Ra0d06bf67b334b8d"/>
+    <p:sldId xmlns:r="http://schemas.openxmlformats.org/officeDocument/2006/relationships" id="261" r:id="R0890b441bf5b40b1"/>
+    <p:sldId xmlns:r="http://schemas.openxmlformats.org/officeDocument/2006/relationships" id="262" r:id="R3433511d757542ca"/>
+    <p:sldId xmlns:r="http://schemas.openxmlformats.org/officeDocument/2006/relationships" id="263" r:id="R8a676e32597f4aab"/>
+    <p:sldId xmlns:r="http://schemas.openxmlformats.org/officeDocument/2006/relationships" id="264" r:id="Rd676a9e7892a44c5"/>
+    <p:sldId xmlns:r="http://schemas.openxmlformats.org/officeDocument/2006/relationships" id="265" r:id="Rf24580063c8a4bf9"/>
+    <p:sldId xmlns:r="http://schemas.openxmlformats.org/officeDocument/2006/relationships" id="266" r:id="R7c04347af066436e"/>
+    <p:sldId xmlns:r="http://schemas.openxmlformats.org/officeDocument/2006/relationships" id="267" r:id="R5d6bb7e87a0c4ff3"/>
+    <p:sldId xmlns:r="http://schemas.openxmlformats.org/officeDocument/2006/relationships" id="268" r:id="R9e8363f2825a4755"/>
+    <p:sldId xmlns:r="http://schemas.openxmlformats.org/officeDocument/2006/relationships" id="269" r:id="R3b86fc5670ff4348"/>
+    <p:sldId xmlns:r="http://schemas.openxmlformats.org/officeDocument/2006/relationships" id="270" r:id="Rcf2fed21f62446b0"/>
+    <p:sldId xmlns:r="http://schemas.openxmlformats.org/officeDocument/2006/relationships" id="271" r:id="R55ec5fb7c1894524"/>
+    <p:sldId xmlns:r="http://schemas.openxmlformats.org/officeDocument/2006/relationships" id="272" r:id="Re89f89e0d2d84885"/>
+    <p:sldId xmlns:r="http://schemas.openxmlformats.org/officeDocument/2006/relationships" id="273" r:id="Rde328577e3d94136"/>
+    <p:sldId xmlns:r="http://schemas.openxmlformats.org/officeDocument/2006/relationships" id="274" r:id="R152b8adfc86349cf"/>
+    <p:sldId xmlns:r="http://schemas.openxmlformats.org/officeDocument/2006/relationships" id="275" r:id="Rf4e9a0947e4e4716"/>
+    <p:sldId xmlns:r="http://schemas.openxmlformats.org/officeDocument/2006/relationships" id="276" r:id="R2f8be9a99890424d"/>
+    <p:sldId xmlns:r="http://schemas.openxmlformats.org/officeDocument/2006/relationships" id="277" r:id="R932ff2a0615941ea"/>
+    <p:sldId xmlns:r="http://schemas.openxmlformats.org/officeDocument/2006/relationships" id="278" r:id="R16a6c913c1364de9"/>
+    <p:sldId xmlns:r="http://schemas.openxmlformats.org/officeDocument/2006/relationships" id="279" r:id="R46a9f05152144aab"/>
   </p:sldIdLst>
   <p:sldSz cx="12192000" cy="6858000"/>
   <p:notesSz cx="6858000" cy="9144000"/>
@@ -464,7 +465,7 @@
           <a:lstStyle xmlns:a="http://schemas.openxmlformats.org/drawingml/2006/main"/>
           <a:p xmlns:a="http://schemas.openxmlformats.org/drawingml/2006/main">
             <a:r>
-              <a:t>Тема работы — «Понятие эталона. Отступы и классификация объектов качества». Чтобы разобраться в ней без специальной подготовки по машинному обучению, сначала последовательно определим основные понятия. Начнём с объекта и его описания, затем введём эталон, правило классификации и отступ. После всей теории разберём одну задачу информационной безопасности: различение нормального трафика и SYN-flood. Проследим путь от измерений до решения модели, а затем до действий аналитика. Числа и код доступны в ноутбуке Google Colab. Начальная точка любого такого метода — понимание того, что именно исследуется и к какой группе это нужно отнести.</a:t>
+              <a:t>Разберём, как программа относит объекты к разным классам и как можно объяснить её решение. Сначала разберём основные понятия: объект, признаки, модель, эталон и отступ. Потом на одном примере посмотрим, как всё это работает с сетевым трафиком. Будем отличать обычную нагрузку от SYN-flood. Возьмём одно и то же наблюдение, проверим его двумя способами и разберём, почему ответы получились разными. Затем посмотрим на остальные окна и решим, какую информацию стоит передать аналитику ИБ. Для начала договоримся о словах, которые будут встречаться дальше.</a:t>
             </a:r>
           </a:p>
           <a:p xmlns:a="http://schemas.openxmlformats.org/drawingml/2006/main">
@@ -554,7 +555,7 @@
           <a:lstStyle xmlns:a="http://schemas.openxmlformats.org/drawingml/2006/main"/>
           <a:p xmlns:a="http://schemas.openxmlformats.org/drawingml/2006/main">
             <a:r>
-              <a:t>Зазор SVM — полоса вокруг разделяющей границы, которую алгоритм стремится сделать широкой. Такая постановка учитывает, насколько близко обучающие объекты подходят к границе. Мягкий зазор допускает, что отдельные объекты попадут внутрь полосы или даже на неверную сторону. За нарушения назначается штраф. Параметр C определяет их цену относительно стремления сделать полосу шире. Опорные векторы — обучающие объекты, участвующие в определении границы. Это роль в обучении модели, тогда как эталон выполняет роль образца класса. Термины поэтому не взаимозаменяемы. Когда обучение завершено, можно перестать обсуждать подбор прямой и измерить расстояние до уже готовой границы для любого объекта.</a:t>
+              <a:t>SVM старается оставить вокруг границы широкую полосу. Её называют зазором. Положение ближайших обучающих объектов влияет на то, какой получится эта полоса. В варианте с мягким зазором допускаются трудные случаи: отдельные точки могут находиться внутри полосы и даже на неверной стороне границы. За такие нарушения назначается штраф. Параметр C задаёт, насколько дорого они обходятся при обучении. Опорными векторами называют обучающие объекты, участвующие в определении границы. На схеме они отмечены кольцами. После обучения граница уже построена. Теперь можно измерять, насколько близко к ней находится любое новое наблюдение.</a:t>
             </a:r>
           </a:p>
           <a:p xmlns:a="http://schemas.openxmlformats.org/drawingml/2006/main">
@@ -649,7 +650,7 @@
           <a:lstStyle xmlns:a="http://schemas.openxmlformats.org/drawingml/2006/main"/>
           <a:p xmlns:a="http://schemas.openxmlformats.org/drawingml/2006/main">
             <a:r>
-              <a:t>Геометрический отступ — расстояние до границы со знаком: плюс на правильной стороне и минус на ошибочной. Для проверки правильности снова требуется истинная метка. Обозначим этот отступ буквой γ. Его модуль — неотрицательное расстояние r, доступное и без известной метки. Для линейной модели это запас сохранения текущего ответа: изменение признаков меньшей длины не пересечёт границу. Расстояние выражено в выбранном масштабе и не является вероятностью. Большой запас способен сохранять ошибочный ответ. Разность расстояний до эталонов и геометрический отступ SVM имеют разные определения. Малый запас выделяет решения, которые легко изменить.</a:t>
+              <a:t>Геометрический отступ показывает расстояние до границы со знаком. Если известна правильная метка, плюс означает верный ответ, минус ошибку. В таблицах обозначим этот отступ буквой γ. Если взять его модуль, получим расстояние r без знака. Его можно вычислить и для нового объекта, у которого ещё нет известной метки. Для линейной модели это расстояние показывает, насколько нужно изменить признаки, чтобы дойти до границы. Меньшее изменение не пересечёт её. В этом смысле говорим о запасе прочности решения. Он измерен в выбранном масштабе и не является вероятностью. Далеко от границы тоже можно ошибиться. Геометрический отступ считаем по границе, а отступ для эталонов по расстояниям до образцов. Эти значения напрямую не сравниваем. Малое расстояние до границы помогает найти пограничные случаи.</a:t>
             </a:r>
           </a:p>
           <a:p xmlns:a="http://schemas.openxmlformats.org/drawingml/2006/main">
@@ -739,7 +740,7 @@
           <a:lstStyle xmlns:a="http://schemas.openxmlformats.org/drawingml/2006/main"/>
           <a:p xmlns:a="http://schemas.openxmlformats.org/drawingml/2006/main">
             <a:r>
-              <a:t>Пограничный объект расположен близко к границе: небольшое изменение его признаков может сменить прогноз. Пограничными бывают оба класса, правильные решения и ошибки. Чтобы отбирать такие объекты, после обучения выбирают порог расстояния для дополнительной проверки. Здесь нужно разделить две полосы. Зазор SVM участвует в обучении и выборе границы. Полоса перепроверки нужна для анализа готовых результатов и задаётся отдельным порогом. Этот порог не следует автоматически из параметра C. По расстоянию нельзя узнать правильный класс, зато можно выделить чувствительные к изменению признаков ответы. Теперь определения готовы: применим их последовательно к одной задаче сетевой безопасности.</a:t>
+              <a:t>Пограничным называем объект, который находится близко к границе. Его признаки достаточно немного изменить, чтобы модель могла выбрать другой класс. Здесь встречаются оба класса, правильные ответы и ошибки. Для отбора таких случаев после обучения задают отдельный порог расстояния. Важно различать порог перепроверки и зазор SVM. Зазор участвует в обучении и влияет на построение границы. Порог перепроверки используют уже после обучения, когда анализируют готовые ответы. Он не получается автоматически из C. Теперь мы знаем все нужные понятия. Дальше применим их к одной задаче ИБ и будем разбирать только её.</a:t>
             </a:r>
           </a:p>
           <a:p xmlns:a="http://schemas.openxmlformats.org/drawingml/2006/main">
@@ -829,7 +830,7 @@
           <a:lstStyle xmlns:a="http://schemas.openxmlformats.org/drawingml/2006/main"/>
           <a:p xmlns:a="http://schemas.openxmlformats.org/drawingml/2006/main">
             <a:r>
-              <a:t>Рассмотрим нормальный трафик и SYN-flood. Обычное TCP-соединение начинается с рукопожатия: клиент отправляет SYN, сервер отвечает SYN-ACK, клиент завершает обмен подтверждением ACK. При SYN-flood множество начатых подключений не завершается. Если сервер хранит их состояние, очередь незавершённых подключений и ресурсы могут оказаться заняты, мешая обычным клиентам. Наша задача — классифицировать окна наблюдения за трафиком: нормальная работа или SYN-flood. При этом большое количество подключений встречается и при легитимной нагрузке, а незавершённость бывает связана с проблемами сети. Поэтому нужен набор измеримых признаков, а не предположение, что всякий рост активности означает атаку.</a:t>
+              <a:t>Разберём обычный трафик и SYN-flood. TCP-соединение начинается с трёх сообщений: клиент отправляет SYN, сервер отвечает SYN-ACK, клиент подтверждает ответ сообщением ACK. Так завершается рукопожатие. При SYN-flood приходит много начатых подключений, которые не завершаются. Если сервер хранит их состояние, очередь незавершённых подключений может занять ресурсы и мешать обычным клиентам. Будем относить окна трафика к нормальной работе или к SYN-flood. Большое число запросов само по себе ещё не доказывает атаку. Так может выглядеть и обычный рост нагрузки. Поэтому посмотрим одновременно на интенсивность SYN и на завершение подключений.</a:t>
             </a:r>
           </a:p>
           <a:p xmlns:a="http://schemas.openxmlformats.org/drawingml/2006/main">
@@ -914,7 +915,7 @@
           <a:lstStyle xmlns:a="http://schemas.openxmlformats.org/drawingml/2006/main"/>
           <a:p xmlns:a="http://schemas.openxmlformats.org/drawingml/2006/main">
             <a:r>
-              <a:t>Один объект — окно десять секунд к одному IP-адресу и TCP-порту. Первый признак — среднее количество входящих SYN в секунду. Второй — доля начатых попыток без полного рукопожатия за три секунды. Скорость учитывает повторные SYN, а при подсчёте попыток повторы объединяют. Нужны оба направления обмена; окна без SYN исключаем. Последним попыткам окна даём время завершиться, поэтому измерение получается с задержкой. Для расчётов SYN в секунду делим на тысячу, проценты — на сто. Учебная таблица содержит двадцать обучающих окон, поровну двух классов, и восемь специально выбранных проверок. Все значения синтетические. По обучающим окнам теперь выберем два медоида.</a:t>
+              <a:t>В нашем примере одно окно включает десять секунд трафика к одному IP-адресу и TCP-порту. Каждое такое окно будет отдельным объектом. Берём два признака: среднее число входящих SYN в секунду и долю попыток, у которых рукопожатие не завершилось за три секунды. В скорость входят повторные SYN. Для доли попыток повторы объединяются. Нужны оба направления обмена, а окна без SYN исключаем. Последним попыткам окна даём время завершиться, поэтому результат приходит с задержкой. В расчётах скорость делим на тысячу, проценты на сто. У нас двадцать обучающих окон, поровну нормы и атаки, и восемь проверок. Все значения придуманы для учебного разбора.</a:t>
             </a:r>
           </a:p>
           <a:p xmlns:a="http://schemas.openxmlformats.org/drawingml/2006/main">
@@ -1004,7 +1005,7 @@
           <a:lstStyle xmlns:a="http://schemas.openxmlformats.org/drawingml/2006/main"/>
           <a:p xmlns:a="http://schemas.openxmlformats.org/drawingml/2006/main">
             <a:r>
-              <a:t>Эталоном нормального трафика стал объект N05: 600 SYN в секунду и 15 процентов незавершённых попыток. Эталоном SYN-flood стал A06: 1300 SYN в секунду и 65 процентов. В ноутбуке для каждого кандидата проверена сумма расстояний до остальных обучающих объектов своего класса. Названные объекты дают минимумы этих сумм. Так выполнен именно тот алгоритм выбора медоида, который мы разобрали в теории. Числа описывают наши учебные образцы и не являются универсальными порогами атаки для любого сервера. Один и тот же уровень нагрузки у разных сервисов имеет разный смысл. Проверим выбранное правило на конкретном окне T07.</a:t>
+              <a:t>По обучающим окнам нашли два медоида. Для нормы выбран N05: 600 SYN в секунду и 15 процентов незавершённых попыток. Для атаки выбран A06: 1300 SYN в секунду и 65 процентов. В ноутбуке посчитаны суммы расстояний для всех кандидатов. У этих двух объектов получились минимальные суммы внутри своих классов. Так мы получили конкретные эталоны, которые можно показать в исходных единицах. Эти числа описывают нашу учебную таблицу. Они не задают общую границу атаки для любого сервиса, поскольку обычная нагрузка у серверов разная. Проверим правило ближайшего эталона на окне T07.</a:t>
             </a:r>
           </a:p>
           <a:p xmlns:a="http://schemas.openxmlformats.org/drawingml/2006/main">
@@ -1089,7 +1090,7 @@
           <a:lstStyle xmlns:a="http://schemas.openxmlformats.org/drawingml/2006/main"/>
           <a:p xmlns:a="http://schemas.openxmlformats.org/drawingml/2006/main">
             <a:r>
-              <a:t>У T07 скорость 1200 SYN в секунду, незавершённость 16 процентов. Истинный класс в нашей учебной таблице — норма. После масштабирования получаем координаты 1,20 и 0,16. Расстояние до нормального эталона примерно 0,600083, до эталона атаки — 0,500100. Ближе оказался эталон атаки, поэтому правило ошиблось. Для известного нормального класса отступ — чужое расстояние минус своё: 0,500100 минус 0,600083, то есть примерно минус 0,099983. Отрицательный знак согласуется с ошибкой. Высокая легитимная нагрузка иллюстрирует ограничение описания класса одним образцом. Не меняя данные, построим альтернативное правило SVM на той же обучающей выборке.</a:t>
+              <a:t>В окне T07 пришло 1200 SYN в секунду, а незавершёнными остались 16 процентов попыток. В учебной таблице это нормальный трафик. После масштабирования получаем 1,20 и 0,16. Расстояние до нормального образца около 0,600, до образца атаки около 0,500. Ближе оказалась атака, и правило дало неправильный ответ. Для известного нормального класса вычитаем своё расстояние из чужого. Получаем отступ примерно минус 0,100. Здесь хорошо видно ограничение одного образца: высокая обычная нагрузка сделала окно ближе к эталону атаки. Оставим те же измерения и проверим, что ответит SVM.</a:t>
             </a:r>
           </a:p>
           <a:p xmlns:a="http://schemas.openxmlformats.org/drawingml/2006/main">
@@ -1179,7 +1180,7 @@
           <a:lstStyle xmlns:a="http://schemas.openxmlformats.org/drawingml/2006/main"/>
           <a:p xmlns:a="http://schemas.openxmlformats.org/drawingml/2006/main">
             <a:r>
-              <a:t>В Colab используем SVC из библиотеки scikit-learn — реализацию SVM. Обучаем линейную модель с C, равным единице, на всех двадцати объектах. В коде также зафиксированы точность вычисления и остальные настройки для воспроизводимости. Масштаб признаков и разделение данных остаются прежними. Эталоны не заменяют обучающую выборку и не являются единственными примерами для SVM. В коде норме назначена метка минус один, SYN-flood — плюс один. Одна ячейка обучает модель, следующая получает прогноз и расстояние. Подробные коэффициенты доступны в ноутбуке; для сравнения нам сейчас важнее поведение правила. Поэтому снова подадим T07 с теми же измерениями.</a:t>
+              <a:t>Обучим линейную SVM в библиотеке scikit-learn. В ней используется SVC, готовая реализация этого метода. Берём все двадцать обучающих окон, тот же масштаб признаков и C, равное единице. Все двадцать окон участвуют в обучении, а два эталона остаются для первого способа сравнения. В коде нормальный класс обозначен минус единицей, SYN-flood плюс единицей. В ноутбуке есть отдельная ячейка обучения, а затем ячейка для получения ответа и расстояния. На выступлении достаточно показать, какие данные подаются модели и что получилось. Разбирать код построчно не требуется. Вернёмся к T07: количество SYN и доля незавершённых попыток у него остаются прежними.</a:t>
             </a:r>
           </a:p>
           <a:p xmlns:a="http://schemas.openxmlformats.org/drawingml/2006/main">
@@ -1269,7 +1270,7 @@
           <a:lstStyle xmlns:a="http://schemas.openxmlformats.org/drawingml/2006/main"/>
           <a:p xmlns:a="http://schemas.openxmlformats.org/drawingml/2006/main">
             <a:r>
-              <a:t>Для T07 SVM выбирает нормальный трафик, что совпадает с известной учебной меткой. Числовая оценка f примерно минус 0,248833: в нашей кодировке отрицательный знак выбирает норму. Геометрический отступ γ при этом положительный, около 0,101921, поскольку ответ правильный. Расстояние r равно 0,101921. Таким образом, знак оценки выбирает класс, а знак размеченного отступа показывает правильность. Этот запас относится к изменению масштабированных признаков. Его нельзя напрямую сравнивать с минус 0,099983 у эталонного правила: определения разные. Исправление одной иллюстрации также не доказывает, что SVM всегда лучше. Теперь вычислим те же характеристики для остальных проверочных окон.</a:t>
+              <a:t>SVM относит T07 к нормальному трафику. По условию примера T07 относится к норме, значит, модель ответила правильно. Число f получилось примерно минус 0,249. Минус здесь выбирает норму, как мы договорились при обозначении классов. Геометрический отступ при этом положительный, около 0,102, потому что модель ответила верно. Расстояние r тоже около 0,102. Получается, у оценки f и отступа γ разные задачи: первая выбирает класс, второй позволяет проверить правильность по известной метке. Число отступа у эталонов напрямую с этим расстоянием не сравниваем. Определения разные. На одном примере SVM помогла, но это ещё не доказывает, что она всегда лучше.</a:t>
             </a:r>
           </a:p>
           <a:p xmlns:a="http://schemas.openxmlformats.org/drawingml/2006/main">
@@ -1359,7 +1360,7 @@
           <a:lstStyle xmlns:a="http://schemas.openxmlformats.org/drawingml/2006/main"/>
           <a:p xmlns:a="http://schemas.openxmlformats.org/drawingml/2006/main">
             <a:r>
-              <a:t>В таблице собраны все восемь окон от T01 до T08: истинный класс, прогноз SVM, геометрический отступ со знаком и запас без знака. Для T04 и T05 геометрический отступ отрицателен — здесь модель ошиблась. Для остальных он положителен. Запас r во всех случаях неотрицателен и равен модулю γ, поэтому сам по себе не сообщает, правильный ли ответ. Таблица позволяет проверить вычисления и сравнить положение наблюдений относительно одной готовой границы. Однако специально подобранные синтетические примеры не являются независимым тестом качества детектора. Из этой таблицы выделим малые запасы и разберём значение двух ошибок.</a:t>
+              <a:t>Повторим расчёт для всех восьми проверочных окон. В таблице рядом стоят известный класс, прогноз SVM, геометрический отступ γ и расстояние r. У T04 и T05 отступ отрицательный. Значит, здесь ответы модели разошлись с метками. У остальных отступ положительный. Расстояние во всех строках неотрицательное, потому что это модуль γ. По одному этому столбцу нельзя определить, верно ли выбран класс. Восемь примеров специально подобраны для объяснения метода, поэтому по ним не оцениваем качество готового сетевого детектора. Чтобы легче понять положение окон, перенесём эту же таблицу на график.</a:t>
             </a:r>
           </a:p>
           <a:p xmlns:a="http://schemas.openxmlformats.org/drawingml/2006/main">
@@ -1444,7 +1445,7 @@
           <a:lstStyle xmlns:a="http://schemas.openxmlformats.org/drawingml/2006/main"/>
           <a:p xmlns:a="http://schemas.openxmlformats.org/drawingml/2006/main">
             <a:r>
-              <a:t>Объект — то, что мы исследуем. Чтобы с объектом могла работать программа, его описывают признаками: измеримыми свойствами, которые можно записать как набор значений. Важно, чтобы для разных объектов использовался один и тот же набор признаков. Класс — одна из заранее заданных групп, к которой нужно отнести объект. Классификация — выбор класса на основе признаков. Это четыре разные роли: объект существует в исследуемой задаче, признаки дают его описание, классы задают возможные ответы, а классификация выполняет выбор ответа. Сам набор чисел ещё ничего не классифицирует. Для выбора необходимо определить правило, связывающее описание объекта с классом.</a:t>
+              <a:t>Объектом называем то, что исследуем. Признаки описывают его через измеримые свойства. Для программы это набор значений, причём у всех объектов должен быть одинаковый набор признаков. Классом называем одну из заданных групп, к которой хотим отнести объект. Классификация как раз и состоит в выборе такой группы по признакам. Здесь важно различать сам объект, его описание и ответ, который мы ищем. Значения признаков ещё не говорят программе, какой класс выбрать. Нужно правило, которое связывает эти значения с ответом. Такое правило можно задать вручную, а можно подобрать по примерам.</a:t>
             </a:r>
           </a:p>
           <a:p xmlns:a="http://schemas.openxmlformats.org/drawingml/2006/main">
@@ -1529,7 +1530,7 @@
           <a:lstStyle xmlns:a="http://schemas.openxmlformats.org/drawingml/2006/main"/>
           <a:p xmlns:a="http://schemas.openxmlformats.org/drawingml/2006/main">
             <a:r>
-              <a:t>Для демонстрации выбираем порог r меньше 0,10. В перепроверку попадают T03, T04, T05 и T06. Это отдельное правило обработки результатов, а не зазор SVM при обучении. T04 — пропуск атаки: по метке это SYN-flood, а модель ответила «норма». T05 — ложная тревога: нормальный объект назван атакой. Пропуск создаёт риск оставить атаку без внимания, ложная тревога нагружает аналитика и может мешать пользователям при необоснованной реакции. Обе ошибки здесь оказались пограничными, но это не гарантирует выявление всех ошибок на реальном трафике. Значит, полезно передавать специалисту ИБ и прогноз, и отдельный признак пограничности.</a:t>
+              <a:t>Ту же таблицу теперь видим на рисунке. Здесь все восемь знакомых окон. По горизонтали читаем число SYN в секунду, по вертикали процент незавершённых попыток. Цвет точки показывает известный класс из учебной таблицы: бирюзовым обозначена норма, красным SYN-flood. Чёрная линия разделяет ответы SVM: выше неё модель выбирает атаку, ниже норму. Поэтому видно, где она ошиблась. T04 находится со стороны нормы, хотя это атака. T05 попало со стороны атаки, хотя это обычный трафик. T07 лежит ниже линии, на стороне нормы. Серая полоса выделяет расстояния меньше 0,10. По ней удобно увидеть окна, которые находятся совсем близко к смене ответа.</a:t>
             </a:r>
           </a:p>
           <a:p xmlns:a="http://schemas.openxmlformats.org/drawingml/2006/main">
@@ -1544,7 +1545,7 @@
           </a:p>
           <a:p xmlns:a="http://schemas.openxmlformats.org/drawingml/2006/main">
             <a:r>
-              <a:t>https://csrc.nist.gov/pubs/sp/800/94/final</a:t>
+              <a:t/>
             </a:r>
           </a:p>
         </p:txBody>
@@ -1614,7 +1615,7 @@
           <a:lstStyle xmlns:a="http://schemas.openxmlformats.org/drawingml/2006/main"/>
           <a:p xmlns:a="http://schemas.openxmlformats.org/drawingml/2006/main">
             <a:r>
-              <a:t>Вводим два отдельных флага. attack_alert означает прогноз атаки при любом запасе. boundary_review означает малый запас при любом прогнозе. triage — наша учебная функция первичной сортировки. Для входа 900 и 40 она выдаёт норму, первый флаг False, второй True. Здесь False означает «нет», True — «да». Для 1550 и 88 — SYN-flood, True и False: отсутствие пограничности не отменяет сигнал атаки. SOC — команда мониторинга и реагирования информационной безопасности. Аналитик сопоставляет результат с журналами, доступностью сервиса, очередью соединений, потерями и контекстом нагрузки. Наш прототип не выполняет автоматическую блокировку и не внедрён в сеть. Валидация — проверка на отдельно выделенных данных. Для рабочей системы нужны реальные данные, валидация с разделением по времени и оценка пропусков и ложных тревог. Так запас дополняет решение, сохраняя свой исходный смысл.</a:t>
+              <a:t>Для перепроверки берём окна с расстоянием меньше 0,10. В этот список попадают T03, T04, T05 и T06. Здесь есть оба класса и оба типа результата. T04 показывает пропуск атаки: модель назвала вредоносное окно нормальным. T05 показывает ложную тревогу: обычное окно названо атакой. Пропуск опасен тем, что атака может остаться без внимания. Ложная тревога отнимает время аналитика, а необоснованная блокировка может помешать пользователям. В наших данных обе ошибки оказались рядом с границей. Рассчитывать, что так будут найдены все реальные ошибки, нельзя. Порог перепроверки выбран отдельно после обучения и не равен зазору SVM.</a:t>
             </a:r>
           </a:p>
           <a:p xmlns:a="http://schemas.openxmlformats.org/drawingml/2006/main">
@@ -1630,11 +1631,6 @@
           <a:p xmlns:a="http://schemas.openxmlformats.org/drawingml/2006/main">
             <a:r>
               <a:t>https://csrc.nist.gov/pubs/sp/800/94/final</a:t>
-            </a:r>
-          </a:p>
-          <a:p xmlns:a="http://schemas.openxmlformats.org/drawingml/2006/main">
-            <a:r>
-              <a:t>https://www.rfc-editor.org/rfc/rfc4987.html</a:t>
             </a:r>
           </a:p>
         </p:txBody>
@@ -1704,7 +1700,7 @@
           <a:lstStyle xmlns:a="http://schemas.openxmlformats.org/drawingml/2006/main"/>
           <a:p xmlns:a="http://schemas.openxmlformats.org/drawingml/2006/main">
             <a:r>
-              <a:t>Сквозной пример связал введённые понятия. Мы выбрали эталоны нормы N05 и атаки A06 по понятному критерию медоида. Одно окно T07 последовательно прошло правило ближайшего эталона и SVM: первое ошиблось, второе дало правильный ответ для известной метки. Затем вычислены отступы всех восьми проверочных объектов. Малый запас выделил T03–T06, включая две известные ошибки. Это помогает объяснять решение и назначать дополнительную проверку. При этом ни эталон, ни отступ не гарантируют правильность классификации или защищённость сервера. Числа получены из учебной таблицы, а определения и методы опираются на опубликованные источники.</a:t>
+              <a:t>Передадим аналитику два отдельных сигнала. Один сообщает, что модель увидела атаку, при любом расстоянии. Другой просит проверить пограничное окно, какой бы класс ни был выбран. Учебная функция triage делает такую первичную сортировку. При 900 SYN в секунду и 40 процентах она отвечает «норма», но просит перепроверку. При 1550 SYN и 88 процентах сообщает об атаке, хотя окно вне пограничной полосы. Такие сигналы поступают в SOC, команду мониторинга и реагирования ИБ. Аналитик проверит журналы, доступность, очередь подключений, потери и обычную нагрузку. Для внедрения нужны реальные данные и валидация, то есть проверка на отдельно выделенных данных с разделением по времени.</a:t>
             </a:r>
           </a:p>
           <a:p xmlns:a="http://schemas.openxmlformats.org/drawingml/2006/main">
@@ -1719,17 +1715,12 @@
           </a:p>
           <a:p xmlns:a="http://schemas.openxmlformats.org/drawingml/2006/main">
             <a:r>
-              <a:t>https://arxiv.org/abs/1810.05691</a:t>
-            </a:r>
-          </a:p>
-          <a:p xmlns:a="http://schemas.openxmlformats.org/drawingml/2006/main">
-            <a:r>
-              <a:t>https://see.stanford.edu/materials/aimlcs229/cs229-notes3.pdf</a:t>
-            </a:r>
-          </a:p>
-          <a:p xmlns:a="http://schemas.openxmlformats.org/drawingml/2006/main">
-            <a:r>
               <a:t>https://csrc.nist.gov/pubs/sp/800/94/final</a:t>
+            </a:r>
+          </a:p>
+          <a:p xmlns:a="http://schemas.openxmlformats.org/drawingml/2006/main">
+            <a:r>
+              <a:t>https://www.rfc-editor.org/rfc/rfc4987.html</a:t>
             </a:r>
           </a:p>
         </p:txBody>
@@ -1799,7 +1790,102 @@
           <a:lstStyle xmlns:a="http://schemas.openxmlformats.org/drawingml/2006/main"/>
           <a:p xmlns:a="http://schemas.openxmlformats.org/drawingml/2006/main">
             <a:r>
-              <a:t>Основы SVM приведены в статье Кортеса и Вапника, конспекте Stanford CS229 и документации scikit-learn. Выбор медоидов описан у Шуберта и Руссеу. RFC 4987 объясняет SYN-flood и способы противодействия. Работа DeepFool рассматривает геометрию изменения решения; здесь используется линейный случай. CICDDoS2019 указан как возможный материал следующего этапа и в расчётах не использован. Руководство NIST SP 800-94 служит источником общих понятий об обнаружении вторжений и проверке тревог. Полная учебная таблица, расчёты и короткая демонстрация доступны в ноутбуке.</a:t>
+              <a:t>На этом примере мы связали все понятия. Нашли эталоны нормы N05 и атаки A06. Сравнили T07 с ними, затем получили для того же окна ответ SVM. После этого проверили все восемь окон и увидели их на графике. По малому расстоянию выделили T03, T04, T05 и T06, включая две известные ошибки. По расстоянию видно, как близко точка к границе. Если она совсем рядом, ответ полезно перепроверить. Большое расстояние до границы само по себе не доказывает, что ответ верный.</a:t>
+            </a:r>
+          </a:p>
+          <a:p xmlns:a="http://schemas.openxmlformats.org/drawingml/2006/main">
+            <a:r>
+              <a:t/>
+            </a:r>
+          </a:p>
+          <a:p xmlns:a="http://schemas.openxmlformats.org/drawingml/2006/main">
+            <a:r>
+              <a:t>Источники:</a:t>
+            </a:r>
+          </a:p>
+          <a:p xmlns:a="http://schemas.openxmlformats.org/drawingml/2006/main">
+            <a:r>
+              <a:t>https://arxiv.org/abs/1810.05691</a:t>
+            </a:r>
+          </a:p>
+          <a:p xmlns:a="http://schemas.openxmlformats.org/drawingml/2006/main">
+            <a:r>
+              <a:t>https://see.stanford.edu/materials/aimlcs229/cs229-notes3.pdf</a:t>
+            </a:r>
+          </a:p>
+          <a:p xmlns:a="http://schemas.openxmlformats.org/drawingml/2006/main">
+            <a:r>
+              <a:t>https://csrc.nist.gov/pubs/sp/800/94/final</a:t>
+            </a:r>
+          </a:p>
+        </p:txBody>
+      </p:sp>
+      <p:sp>
+        <p:nvSpPr>
+          <p:cNvPr id="4" name="Slide Number Placeholder 3"/>
+          <p:cNvSpPr>
+            <a:spLocks xmlns:a="http://schemas.openxmlformats.org/drawingml/2006/main" noGrp="1"/>
+          </p:cNvSpPr>
+          <p:nvPr>
+            <p:ph type="sldNum" idx="5"/>
+          </p:nvPr>
+        </p:nvSpPr>
+        <p:spPr/>
+        <p:txBody>
+          <a:bodyPr xmlns:a="http://schemas.openxmlformats.org/drawingml/2006/main"/>
+          <a:lstStyle xmlns:a="http://schemas.openxmlformats.org/drawingml/2006/main"/>
+          <a:p xmlns:a="http://schemas.openxmlformats.org/drawingml/2006/main"/>
+        </p:txBody>
+      </p:sp>
+    </p:spTree>
+  </p:cSld>
+  <p:clrMapOvr>
+    <a:masterClrMapping xmlns:a="http://schemas.openxmlformats.org/drawingml/2006/main"/>
+  </p:clrMapOvr>
+</p:notes>
+</file>
+
+<file path=ppt/notesSlides/notesSlide24.xml><?xml version="1.0" encoding="utf-8"?>
+<p:notes xmlns:p="http://schemas.openxmlformats.org/presentationml/2006/main">
+  <p:cSld>
+    <p:spTree>
+      <p:nvGrpSpPr>
+        <p:cNvPr id="1" name=""/>
+        <p:cNvGrpSpPr/>
+        <p:nvPr/>
+      </p:nvGrpSpPr>
+      <p:grpSpPr>
+        <a:xfrm xmlns:a="http://schemas.openxmlformats.org/drawingml/2006/main"/>
+      </p:grpSpPr>
+      <p:sp>
+        <p:nvSpPr>
+          <p:cNvPr id="2" name="Slide Image Placeholder 1"/>
+          <p:cNvSpPr>
+            <a:spLocks xmlns:a="http://schemas.openxmlformats.org/drawingml/2006/main" noGrp="1"/>
+          </p:cNvSpPr>
+          <p:nvPr>
+            <p:ph type="sldImg" idx="0"/>
+          </p:nvPr>
+        </p:nvSpPr>
+        <p:spPr/>
+      </p:sp>
+      <p:sp>
+        <p:nvSpPr>
+          <p:cNvPr id="3" name="Notes Placeholder 2"/>
+          <p:cNvSpPr>
+            <a:spLocks xmlns:a="http://schemas.openxmlformats.org/drawingml/2006/main" noGrp="1"/>
+          </p:cNvSpPr>
+          <p:nvPr>
+            <p:ph type="body" idx="1"/>
+          </p:nvPr>
+        </p:nvSpPr>
+        <p:spPr/>
+        <p:txBody>
+          <a:bodyPr xmlns:a="http://schemas.openxmlformats.org/drawingml/2006/main"/>
+          <a:lstStyle xmlns:a="http://schemas.openxmlformats.org/drawingml/2006/main"/>
+          <a:p xmlns:a="http://schemas.openxmlformats.org/drawingml/2006/main">
+            <a:r>
+              <a:t>Определения и методы можно проверить по этим источникам. Теория SVM есть в статье Кортеса и Вапника, материалах Stanford CS229 и документации scikit-learn. Медоиды описаны в работе Шуберта и Руссеу. RFC 4987 объясняет SYN-flood, а DeepFool рассматривает связь границы модели с изменением признаков. CICDDoS2019 указан как возможный набор данных для продолжения работы. В наших расчётах он не использован. Руководство NIST помогает разобраться в обнаружении вторжений и проверке тревог. Учебные данные, подробные расчёты и демонстрация доступны в ноутбуке Google Colab.</a:t>
             </a:r>
           </a:p>
           <a:p xmlns:a="http://schemas.openxmlformats.org/drawingml/2006/main">
@@ -1919,7 +2005,7 @@
           <a:lstStyle xmlns:a="http://schemas.openxmlformats.org/drawingml/2006/main"/>
           <a:p xmlns:a="http://schemas.openxmlformats.org/drawingml/2006/main">
             <a:r>
-              <a:t>Такое правило называют классификатором, или моделью. На вход модель получает признаки, на выходе сообщает выбранный класс. Обучающая выборка — набор объектов, для которых классы заранее известны. Эти известные ответы называют метками. Обучение означает подбор правила по таким примерам, чтобы оно могло классифицировать и другие объекты. При этом известная метка и прогноз модели — разные вещи. Метка задаёт правильный ответ в размеченной выборке, а прогноз является результатом работы правила и может оказаться ошибочным. Поэтому одного факта обучения недостаточно для доверия каждому ответу. Начнём с простого варианта модели: сравнения исследуемого объекта с образцами классов.</a:t>
+              <a:t>Правило выбора класса называется классификатором, или моделью. Оно получает признаки и возвращает ответ. Чтобы подобрать модель по примерам, собирают обучающую выборку. В ней для каждого объекта уже известен правильный класс. Этот ответ называют меткой. Во время обучения алгоритм подбирает правило по таким размеченным объектам. Потом правило применяют к другим наблюдениям. Известная метка и прогноз модели могут различаться: модель способна ошибиться. Поэтому будем отдельно показывать, какой класс задан в учебных данных и какой класс выбрала программа. Начнём с простого правила, которое опирается на образцы классов.</a:t>
             </a:r>
           </a:p>
           <a:p xmlns:a="http://schemas.openxmlformats.org/drawingml/2006/main">
@@ -2009,7 +2095,7 @@
           <a:lstStyle xmlns:a="http://schemas.openxmlformats.org/drawingml/2006/main"/>
           <a:p xmlns:a="http://schemas.openxmlformats.org/drawingml/2006/main">
             <a:r>
-              <a:t>Эталон класса — образец этого класса, принятый для сравнения с другими объектами. Для каждого класса выбирают свой образец. Если новое наблюдение похоже на определённый эталон, это даёт основание отнести его к соответствующему классу. Сначала важно понять именно роль эталона: он служит точкой сравнения. Конкретный алгоритм выбора образца — уже отдельный вопрос. Определение эталона само по себе ещё не требует выбирать самый центральный объект или обязательно брать существующий пример. В нашей работе будет выбран определённый способ, но до него нужно решить, что означает «похож». Для программы это должна быть заданная численная мера.</a:t>
+              <a:t>Эталоном класса называем образец, который приняли для сравнения с другими объектами. У каждого класса будет свой эталон. Когда приходит новое наблюдение, мы сравниваем его с этими образцами и смотрим, на какой оно больше похоже. Пока мы определили только роль эталона. Само это понятие ещё не указывает, как именно выбрать образец. Можно использовать разные способы, и от способа зависит результат. В нашей работе выбор будет сделан по расстояниям между объектами. Поэтому прежде, чем искать эталон, нужно объяснить, что программа будет считать похожестью.</a:t>
             </a:r>
           </a:p>
           <a:p xmlns:a="http://schemas.openxmlformats.org/drawingml/2006/main">
@@ -2094,7 +2180,7 @@
           <a:lstStyle xmlns:a="http://schemas.openxmlformats.org/drawingml/2006/main"/>
           <a:p xmlns:a="http://schemas.openxmlformats.org/drawingml/2006/main">
             <a:r>
-              <a:t>Похожесть будем оценивать расстоянием между описаниями объектов. Чем меньше расстояние, тем ближе объекты в выбранной метрике. Метрика — правило вычисления расстояния. Значения двух признаков — координаты точки. Здесь используем евклидово расстояние: длину прямого отрезка между точками после приведения признаков к выбранному масштабу. Важен масштаб координат. Если значения одного признака численно намного больше другого, первый может определять почти всё расстояние, даже если второй тоже содержательно важен. Поэтому заранее выбирают согласованный масштаб признаков. Он становится частью метода: при его изменении могут измениться расстояния и решения. В выбранном масштабе можно не только сравнивать объекты, но и искать образец, представляющий свой класс.</a:t>
+              <a:t>Похожесть будем измерять расстоянием. Чем меньше расстояние между описаниями двух объектов, тем они ближе по выбранному правилу. Такое правило называют метрикой. При двух признаках их значения становятся координатами точки. Евклидово расстояние измеряет прямой отрезок между точками после приведения признаков к выбранному масштабу. Масштаб здесь важен: если значения одного признака намного больше другого, они могут почти целиком определять расстояние. Поэтому заранее выбираем, как привести признаки к согласованным величинам. От этого выбора зависят и расстояния, и дальнейшие решения. В том же масштабе будем искать образцы классов.</a:t>
             </a:r>
           </a:p>
           <a:p xmlns:a="http://schemas.openxmlformats.org/drawingml/2006/main">
@@ -2184,7 +2270,7 @@
           <a:lstStyle xmlns:a="http://schemas.openxmlformats.org/drawingml/2006/main"/>
           <a:p xmlns:a="http://schemas.openxmlformats.org/drawingml/2006/main">
             <a:r>
-              <a:t>Для выбора эталона используем медоид. Медоид — объект с наименьшей суммой расстояний до остальных объектов своего класса. Алгоритм понятен без сложной формулы: берём первого кандидата, складываем расстояния от него до всех остальных; повторяем для каждого кандидата и выбираем наименьшую сумму. Затем независимо делаем то же для другого класса. Используем только обучающие объекты, чтобы проверочные примеры не влияли на построение правила. Полученные эталоны совпадут с существующими объектами: это свойство выбранного метода, а не обязательная часть общего определения эталона. Теперь у каждого класса есть образец, и можно полностью описать правило выбора класса нового объекта.</a:t>
+              <a:t>Для каждого класса выберем медоид. Так называют объект, у которого сумма расстояний до остальных объектов своего класса наименьшая. Посчитать его можно по шагам. Берём одного кандидата и складываем расстояния от него до остальных. Повторяем расчёт для всех кандидатов. Тот, у кого сумма меньше всего, становится нашим эталоном. Затем отдельно повторяем процедуру для другого класса. Используем только обучающую выборку. Проверочные объекты пока оставляем в стороне. При таком способе эталон всегда совпадает с существующим примером. Это особенность медоида. Когда оба образца найдены, можно описать правило классификации.</a:t>
             </a:r>
           </a:p>
           <a:p xmlns:a="http://schemas.openxmlformats.org/drawingml/2006/main">
@@ -2269,7 +2355,7 @@
           <a:lstStyle xmlns:a="http://schemas.openxmlformats.org/drawingml/2006/main"/>
           <a:p xmlns:a="http://schemas.openxmlformats.org/drawingml/2006/main">
             <a:r>
-              <a:t>Правило ближайшего эталона работает следующим образом. Для нового объекта вычисляем расстояние до образца каждого класса. Сравниваем эти расстояния и выбираем класс ближайшего образца. Это уже полноценный классификатор: у него есть входные признаки и однозначно описанный способ получения ответа, кроме случая точного равенства, для которого нужно отдельное правило. Но одинаковый выбранный класс ещё не означает одинаковое преимущество. В одном случае свой образец может быть значительно ближе, в другом расстояния почти совпадают. Поэтому полезно сохранять не только ответ, но и численную характеристику преимущества одного класса над другим. Так мы приходим к понятию отступа.</a:t>
+              <a:t>Правило ближайшего эталона устроено просто. Для нового объекта считаем расстояние до каждого образца и выбираем класс того, который оказался ближе. При точном равенстве расстояний понадобится заранее оговорённое правило выбора. Уже можно получить ответ, но хочется понять, насколько сильно один класс выигрывает у другого. Иногда один эталон значительно ближе. Иногда расстояния почти одинаковы, и небольшое изменение признаков может поменять результат сравнения. Если сохранять только название выбранного класса, эта разница потеряется. Поэтому к ответу добавим число, которое показывает преимущество правильного класса над конкурирующим. Это число называется отступом.</a:t>
             </a:r>
           </a:p>
           <a:p xmlns:a="http://schemas.openxmlformats.org/drawingml/2006/main">
@@ -2359,7 +2445,7 @@
           <a:lstStyle xmlns:a="http://schemas.openxmlformats.org/drawingml/2006/main"/>
           <a:p xmlns:a="http://schemas.openxmlformats.org/drawingml/2006/main">
             <a:r>
-              <a:t>Отступ — разность оценок истинного класса и конкурирующего класса. Оценка показывает, насколько правило предпочитает соответствующий класс. Дальше рассматриваем два класса, поэтому конкурент только один. В правиле ближайшего эталона меньшему расстоянию соответствует лучшее предпочтение. Оценка класса здесь равна минус расстоянию до его эталона. Поэтому отступ вычисляем так: расстояние до чужого эталона минус расстояние до своего. Положительное значение означает, что свой эталон ближе и ответ верный. Отрицательное означает выбор чужого класса, ноль — равенство оценок. Чтобы назвать класс своим и оценить правильность по знаку, нужна истинная метка объекта. Однако один образец может грубо описывать разнообразие класса. Альтернативный подход — обучить разделяющую границу по всей выборке.</a:t>
+              <a:t>Отступом называют разность оценок истинного класса и конкурирующего класса. Оценка показывает, насколько правило предпочитает класс. Для двух классов нам нужно сравнить всего две оценки. У ближайшего эталона оценка равна минус расстоянию: близкий образец получает большую оценку. Поэтому отступ получается как расстояние до чужого эталона минус расстояние до своего. При положительном отступе выбран правильный класс, при отрицательном чужой. Ноль означает равенство оценок. Чтобы проверить правильность по знаку, нужна истинная метка объекта. Но один образец не всегда хорошо описывает весь класс. Попробуем другой подход и обучим границу по всей выборке.</a:t>
             </a:r>
           </a:p>
           <a:p xmlns:a="http://schemas.openxmlformats.org/drawingml/2006/main">
@@ -2449,7 +2535,7 @@
           <a:lstStyle xmlns:a="http://schemas.openxmlformats.org/drawingml/2006/main"/>
           <a:p xmlns:a="http://schemas.openxmlformats.org/drawingml/2006/main">
             <a:r>
-              <a:t>SVM, или машина опорных векторов, — алгоритм обучения классификатора. Линейная SVM при двух признаках строит прямую, разделяющую плоскость на области выбора классов. Граница решения — положения, при пересечении которых меняется выбираемый класс. Число f — результат вычисления линейного правила: его знак выбирает класс, а f=0 задаёт границу. Это другой способ построения правила: SVM рассматривает всю обучающую выборку, а не только два эталона. Эталоны остаются отдельным способом сравнения объектов; их нельзя считать заменой данных для обучения SVM. После обучения положение прямой фиксируется, и новое наблюдение получает класс по тому, с какой стороны оно оказалось. Но между примерами можно провести разные границы. Чтобы выбрать одну, SVM учитывает расположение ближайших обучающих объектов.</a:t>
+              <a:t>SVM, или машина опорных векторов, помогает обучить такое правило. В линейном варианте с двумя признаками она строит прямую, которая разделяет области выбора классов. Эта прямая называется границей решения. Когда точка пересекает её, меняется прогноз. Линейное правило вычисляет число f. По его знаку выбирается класс, а при нуле точка находится на границе. SVM обучается на всей обучающей выборке. Два эталона нужны для отдельного способа сравнения, они не заменяют эти данные. Возможных разделяющих прямых может быть много. Дальше посмотрим, что учитывает SVM, когда выбирает границу.</a:t>
             </a:r>
           </a:p>
           <a:p xmlns:a="http://schemas.openxmlformats.org/drawingml/2006/main">
@@ -2521,7 +2607,7 @@
           <p:cNvPr id="3" name="Title">
             <a:extLst xmlns:a="http://schemas.openxmlformats.org/drawingml/2006/main">
               <a:ext uri="{FF2B5EF4-FFF2-40B4-BE49-F238E27FC236}">
-                <a16:creationId xmlns:a16="http://schemas.microsoft.com/office/drawing/2014/main" id="{803B9C66-5A24-4907-8BBA-1BE5D5A52EEC}"/>
+                <a16:creationId xmlns:a16="http://schemas.microsoft.com/office/drawing/2014/main" id="{B872C744-CD6B-4F43-9D38-8A825255A9B4}"/>
               </a:ext>
             </a:extLst>
           </p:cNvPr>
@@ -2678,7 +2764,7 @@
           <p:cNvPr id="2" name="Subtitle">
             <a:extLst xmlns:a="http://schemas.openxmlformats.org/drawingml/2006/main">
               <a:ext uri="{FF2B5EF4-FFF2-40B4-BE49-F238E27FC236}">
-                <a16:creationId xmlns:a16="http://schemas.microsoft.com/office/drawing/2014/main" id="{35846D61-E01A-4B19-91A8-FE2F4C6BD623}"/>
+                <a16:creationId xmlns:a16="http://schemas.microsoft.com/office/drawing/2014/main" id="{619B2316-9FAB-4A1F-8860-8E25DC1D43E1}"/>
               </a:ext>
             </a:extLst>
           </p:cNvPr>
@@ -2852,7 +2938,7 @@
           <p:cNvPr id="2" name="Section title">
             <a:extLst xmlns:a="http://schemas.openxmlformats.org/drawingml/2006/main">
               <a:ext uri="{FF2B5EF4-FFF2-40B4-BE49-F238E27FC236}">
-                <a16:creationId xmlns:a16="http://schemas.microsoft.com/office/drawing/2014/main" id="{C1C30A11-12F1-48EF-A34F-D3125A615BBD}"/>
+                <a16:creationId xmlns:a16="http://schemas.microsoft.com/office/drawing/2014/main" id="{958DDA08-AA9F-419D-8992-E44301B20AF6}"/>
               </a:ext>
             </a:extLst>
           </p:cNvPr>
@@ -3026,7 +3112,7 @@
           <p:cNvPr id="3" name="Title">
             <a:extLst xmlns:a="http://schemas.openxmlformats.org/drawingml/2006/main">
               <a:ext uri="{FF2B5EF4-FFF2-40B4-BE49-F238E27FC236}">
-                <a16:creationId xmlns:a16="http://schemas.microsoft.com/office/drawing/2014/main" id="{F71C7265-30EA-4241-8258-6258C1C0C1E4}"/>
+                <a16:creationId xmlns:a16="http://schemas.microsoft.com/office/drawing/2014/main" id="{DA440C1D-5AB5-49CF-A07A-669DA29B6150}"/>
               </a:ext>
             </a:extLst>
           </p:cNvPr>
@@ -3183,7 +3269,7 @@
           <p:cNvPr id="2" name="Body">
             <a:extLst xmlns:a="http://schemas.openxmlformats.org/drawingml/2006/main">
               <a:ext uri="{FF2B5EF4-FFF2-40B4-BE49-F238E27FC236}">
-                <a16:creationId xmlns:a16="http://schemas.microsoft.com/office/drawing/2014/main" id="{B7CAB691-E453-4D86-A951-7491DD232D86}"/>
+                <a16:creationId xmlns:a16="http://schemas.microsoft.com/office/drawing/2014/main" id="{3E5D65B3-77FD-4072-A41B-27E91B8194D5}"/>
               </a:ext>
             </a:extLst>
           </p:cNvPr>
@@ -3357,7 +3443,7 @@
           <p:cNvPr id="4" name="Title">
             <a:extLst xmlns:a="http://schemas.openxmlformats.org/drawingml/2006/main">
               <a:ext uri="{FF2B5EF4-FFF2-40B4-BE49-F238E27FC236}">
-                <a16:creationId xmlns:a16="http://schemas.microsoft.com/office/drawing/2014/main" id="{4BAB1EAD-554F-4D03-AD16-D0B5F0D5A29E}"/>
+                <a16:creationId xmlns:a16="http://schemas.microsoft.com/office/drawing/2014/main" id="{9CC0121A-B71B-4140-9954-0F0533A7B2D4}"/>
               </a:ext>
             </a:extLst>
           </p:cNvPr>
@@ -3514,7 +3600,7 @@
           <p:cNvPr id="2" name="Left column">
             <a:extLst xmlns:a="http://schemas.openxmlformats.org/drawingml/2006/main">
               <a:ext uri="{FF2B5EF4-FFF2-40B4-BE49-F238E27FC236}">
-                <a16:creationId xmlns:a16="http://schemas.microsoft.com/office/drawing/2014/main" id="{B716A2CB-7D35-40FF-9F33-5534E06ACA75}"/>
+                <a16:creationId xmlns:a16="http://schemas.microsoft.com/office/drawing/2014/main" id="{C625F4EF-039E-4B9D-856F-E72E0376B856}"/>
               </a:ext>
             </a:extLst>
           </p:cNvPr>
@@ -3671,7 +3757,7 @@
           <p:cNvPr id="3" name="Right column">
             <a:extLst xmlns:a="http://schemas.openxmlformats.org/drawingml/2006/main">
               <a:ext uri="{FF2B5EF4-FFF2-40B4-BE49-F238E27FC236}">
-                <a16:creationId xmlns:a16="http://schemas.microsoft.com/office/drawing/2014/main" id="{48FEB472-1D35-4E00-8A8E-3893D4B10DD8}"/>
+                <a16:creationId xmlns:a16="http://schemas.microsoft.com/office/drawing/2014/main" id="{792F4962-1696-4722-8D7E-BB2506C8EBAE}"/>
               </a:ext>
             </a:extLst>
           </p:cNvPr>
@@ -3845,7 +3931,7 @@
           <p:cNvPr id="3" name="Title">
             <a:extLst xmlns:a="http://schemas.openxmlformats.org/drawingml/2006/main">
               <a:ext uri="{FF2B5EF4-FFF2-40B4-BE49-F238E27FC236}">
-                <a16:creationId xmlns:a16="http://schemas.microsoft.com/office/drawing/2014/main" id="{68A5A96A-7FA7-4FC1-B466-792D22DA408C}"/>
+                <a16:creationId xmlns:a16="http://schemas.microsoft.com/office/drawing/2014/main" id="{5EC217E1-8C86-47D2-97A3-ACBE19B05D5C}"/>
               </a:ext>
             </a:extLst>
           </p:cNvPr>
@@ -4002,7 +4088,7 @@
           <p:cNvPr id="2" name="Left column">
             <a:extLst xmlns:a="http://schemas.openxmlformats.org/drawingml/2006/main">
               <a:ext uri="{FF2B5EF4-FFF2-40B4-BE49-F238E27FC236}">
-                <a16:creationId xmlns:a16="http://schemas.microsoft.com/office/drawing/2014/main" id="{781621A8-F46B-4DEB-B773-1B3F30AB6EEE}"/>
+                <a16:creationId xmlns:a16="http://schemas.microsoft.com/office/drawing/2014/main" id="{BE0C380E-AD83-4F2D-B3EA-D3370892D3C1}"/>
               </a:ext>
             </a:extLst>
           </p:cNvPr>
@@ -4197,12 +4283,12 @@
   </p:cSld>
   <p:clrMap bg1="lt1" tx1="dk1" bg2="lt2" tx2="dk2" accent1="accent1" accent2="accent2" accent3="accent3" accent4="accent4" accent5="accent5" accent6="accent6" hlink="hlink" folHlink="folHlink"/>
   <p:sldLayoutIdLst>
-    <p:sldLayoutId xmlns:r="http://schemas.openxmlformats.org/officeDocument/2006/relationships" id="2147483649" r:id="R7a3ceccb8add4b59"/>
-    <p:sldLayoutId xmlns:r="http://schemas.openxmlformats.org/officeDocument/2006/relationships" id="2147483650" r:id="Rba057f3f7e5b4a59"/>
-    <p:sldLayoutId xmlns:r="http://schemas.openxmlformats.org/officeDocument/2006/relationships" id="2147483651" r:id="R61cb292779f849d3"/>
-    <p:sldLayoutId xmlns:r="http://schemas.openxmlformats.org/officeDocument/2006/relationships" id="2147483652" r:id="R17ab28f013cc49a9"/>
-    <p:sldLayoutId xmlns:r="http://schemas.openxmlformats.org/officeDocument/2006/relationships" id="2147483653" r:id="Rc73122982dfe4c74"/>
-    <p:sldLayoutId xmlns:r="http://schemas.openxmlformats.org/officeDocument/2006/relationships" id="2147483654" r:id="Rfa2ed47e72c34560"/>
+    <p:sldLayoutId xmlns:r="http://schemas.openxmlformats.org/officeDocument/2006/relationships" id="2147483649" r:id="Rb5f1e6b5f2cc4151"/>
+    <p:sldLayoutId xmlns:r="http://schemas.openxmlformats.org/officeDocument/2006/relationships" id="2147483650" r:id="R1fa468d9ef5744a4"/>
+    <p:sldLayoutId xmlns:r="http://schemas.openxmlformats.org/officeDocument/2006/relationships" id="2147483651" r:id="Rd917ffb17f8b4e56"/>
+    <p:sldLayoutId xmlns:r="http://schemas.openxmlformats.org/officeDocument/2006/relationships" id="2147483652" r:id="Re77e545867ae4740"/>
+    <p:sldLayoutId xmlns:r="http://schemas.openxmlformats.org/officeDocument/2006/relationships" id="2147483653" r:id="R5de4f10393224f41"/>
+    <p:sldLayoutId xmlns:r="http://schemas.openxmlformats.org/officeDocument/2006/relationships" id="2147483654" r:id="R5d2a443dd99b43f6"/>
   </p:sldLayoutIdLst>
   <p:txStyles>
     <p:titleStyle>
@@ -4753,7 +4839,7 @@
           <p:cNvPr id="8" name="text-1">
             <a:extLst xmlns:a="http://schemas.openxmlformats.org/drawingml/2006/main">
               <a:ext uri="{FF2B5EF4-FFF2-40B4-BE49-F238E27FC236}">
-                <a16:creationId xmlns:a16="http://schemas.microsoft.com/office/drawing/2014/main" id="{F629799E-8CA9-494D-8DDA-02CBA47BF661}"/>
+                <a16:creationId xmlns:a16="http://schemas.microsoft.com/office/drawing/2014/main" id="{FA5BF94D-3DC6-409A-A2F0-1442169484A0}"/>
               </a:ext>
             </a:extLst>
           </p:cNvPr>
@@ -4803,7 +4889,7 @@
           <p:cNvPr id="2" name="">
             <a:extLst xmlns:a="http://schemas.openxmlformats.org/drawingml/2006/main">
               <a:ext uri="{FF2B5EF4-FFF2-40B4-BE49-F238E27FC236}">
-                <a16:creationId xmlns:a16="http://schemas.microsoft.com/office/drawing/2014/main" id="{34DCEFD0-7862-4BE9-934B-E6A9216BCE61}"/>
+                <a16:creationId xmlns:a16="http://schemas.microsoft.com/office/drawing/2014/main" id="{C5464F3E-8F4C-4733-B899-B44401692EFA}"/>
               </a:ext>
             </a:extLst>
           </p:cNvPr>
@@ -4833,7 +4919,7 @@
           <p:cNvPr id="3" name="text-2">
             <a:extLst xmlns:a="http://schemas.openxmlformats.org/drawingml/2006/main">
               <a:ext uri="{FF2B5EF4-FFF2-40B4-BE49-F238E27FC236}">
-                <a16:creationId xmlns:a16="http://schemas.microsoft.com/office/drawing/2014/main" id="{621E54CE-33B2-4E37-8434-8988A147A319}"/>
+                <a16:creationId xmlns:a16="http://schemas.microsoft.com/office/drawing/2014/main" id="{2D657A2C-25A4-409E-8C46-D4742CA5A116}"/>
               </a:ext>
             </a:extLst>
           </p:cNvPr>
@@ -4901,7 +4987,7 @@
           <p:cNvPr id="4" name="text-3">
             <a:extLst xmlns:a="http://schemas.openxmlformats.org/drawingml/2006/main">
               <a:ext uri="{FF2B5EF4-FFF2-40B4-BE49-F238E27FC236}">
-                <a16:creationId xmlns:a16="http://schemas.microsoft.com/office/drawing/2014/main" id="{309BBB06-3418-4DB7-B372-3F7479B6D7DC}"/>
+                <a16:creationId xmlns:a16="http://schemas.microsoft.com/office/drawing/2014/main" id="{FEC9ACA3-2402-44F1-B027-B634EE7B3DB3}"/>
               </a:ext>
             </a:extLst>
           </p:cNvPr>
@@ -4969,7 +5055,7 @@
           <p:cNvPr id="5" name="text-4">
             <a:extLst xmlns:a="http://schemas.openxmlformats.org/drawingml/2006/main">
               <a:ext uri="{FF2B5EF4-FFF2-40B4-BE49-F238E27FC236}">
-                <a16:creationId xmlns:a16="http://schemas.microsoft.com/office/drawing/2014/main" id="{06F98C63-F723-4E24-9224-E86D34630C85}"/>
+                <a16:creationId xmlns:a16="http://schemas.microsoft.com/office/drawing/2014/main" id="{9E0B6790-D2F0-43BD-B3BA-1140AE884E97}"/>
               </a:ext>
             </a:extLst>
           </p:cNvPr>
@@ -5027,7 +5113,7 @@
                 <a:ea typeface="DejaVu Sans"/>
                 <a:cs typeface="DejaVu Sans"/>
               </a:rPr>
-              <a:t>1.13  ·  КЛАССИФИКАЦИЯ В ИНФОРМАЦИОННОЙ БЕЗОПАСНОСТИ</a:t>
+              <a:t>1.13  КЛАССИФИКАЦИЯ В ИНФОРМАЦИОННОЙ БЕЗОПАСНОСТИ</a:t>
             </a:r>
           </a:p>
         </p:txBody>
@@ -5037,7 +5123,7 @@
           <p:cNvPr id="6" name="text-5">
             <a:extLst xmlns:a="http://schemas.openxmlformats.org/drawingml/2006/main">
               <a:ext uri="{FF2B5EF4-FFF2-40B4-BE49-F238E27FC236}">
-                <a16:creationId xmlns:a16="http://schemas.microsoft.com/office/drawing/2014/main" id="{F0BEF66B-097D-49DC-96AF-BCF854BA040E}"/>
+                <a16:creationId xmlns:a16="http://schemas.microsoft.com/office/drawing/2014/main" id="{127A8929-29ED-4EC4-857D-83DA24E7868E}"/>
               </a:ext>
             </a:extLst>
           </p:cNvPr>
@@ -5151,7 +5237,7 @@
           <p:cNvPr id="7" name="text-6">
             <a:extLst xmlns:a="http://schemas.openxmlformats.org/drawingml/2006/main">
               <a:ext uri="{FF2B5EF4-FFF2-40B4-BE49-F238E27FC236}">
-                <a16:creationId xmlns:a16="http://schemas.microsoft.com/office/drawing/2014/main" id="{C8924A35-F84D-42EC-AB81-AE29E83B6B0E}"/>
+                <a16:creationId xmlns:a16="http://schemas.microsoft.com/office/drawing/2014/main" id="{0C2B3077-C907-4F63-8F1D-F09FF08AA64A}"/>
               </a:ext>
             </a:extLst>
           </p:cNvPr>
@@ -5209,7 +5295,30 @@
                 <a:ea typeface="DejaVu Sans"/>
                 <a:cs typeface="DejaVu Sans"/>
               </a:rPr>
-              <a:t>От основных понятий — к разбору нормального трафика и SYN-flood</a:t>
+              <a:t>Как отличить обычный трафик от SYN-flood</a:t>
+            </a:r>
+          </a:p>
+          <a:p xmlns:a="http://schemas.openxmlformats.org/drawingml/2006/main">
+            <a:pPr>
+              <a:defRPr sz="2250" b="0">
+                <a:solidFill>
+                  <a:srgbClr val="A9DDE0"/>
+                </a:solidFill>
+                <a:latin typeface="DejaVu Sans"/>
+                <a:ea typeface="DejaVu Sans"/>
+                <a:cs typeface="DejaVu Sans"/>
+              </a:defRPr>
+            </a:pPr>
+            <a:r>
+              <a:rPr sz="2250" b="0">
+                <a:solidFill>
+                  <a:srgbClr val="A9DDE0"/>
+                </a:solidFill>
+                <a:latin typeface="DejaVu Sans"/>
+                <a:ea typeface="DejaVu Sans"/>
+                <a:cs typeface="DejaVu Sans"/>
+              </a:rPr>
+              <a:t>и понять, насколько устойчив ответ модели</a:t>
             </a:r>
           </a:p>
         </p:txBody>
@@ -5217,7 +5326,7 @@
     </p:spTree>
     <p:extLst>
       <p:ext uri="{BB962C8B-B14F-4D97-AF65-F5344CB8AC3E}">
-        <p14:creationId xmlns:p14="http://schemas.microsoft.com/office/powerpoint/2010/main" val="1179667175"/>
+        <p14:creationId xmlns:p14="http://schemas.microsoft.com/office/powerpoint/2010/main" val="1063524429"/>
       </p:ext>
     </p:extLst>
   </p:cSld>
@@ -5248,7 +5357,7 @@
           <p:cNvPr id="37" name="text-72">
             <a:extLst xmlns:a="http://schemas.openxmlformats.org/drawingml/2006/main">
               <a:ext uri="{FF2B5EF4-FFF2-40B4-BE49-F238E27FC236}">
-                <a16:creationId xmlns:a16="http://schemas.microsoft.com/office/drawing/2014/main" id="{C86360A9-4198-4BD1-88AC-D3EB933A235E}"/>
+                <a16:creationId xmlns:a16="http://schemas.microsoft.com/office/drawing/2014/main" id="{437E29FB-F59A-4E83-97A2-2AB1E9DB0C00}"/>
               </a:ext>
             </a:extLst>
           </p:cNvPr>
@@ -5306,7 +5415,7 @@
                 <a:ea typeface="DejaVu Sans"/>
                 <a:cs typeface="DejaVu Sans"/>
               </a:rPr>
-              <a:t>Зазор и мягкий зазор SVM</a:t>
+              <a:t>Зачем SVM нужен мягкий зазор</a:t>
             </a:r>
           </a:p>
         </p:txBody>
@@ -5316,7 +5425,7 @@
           <p:cNvPr id="2" name="text-73">
             <a:extLst xmlns:a="http://schemas.openxmlformats.org/drawingml/2006/main">
               <a:ext uri="{FF2B5EF4-FFF2-40B4-BE49-F238E27FC236}">
-                <a16:creationId xmlns:a16="http://schemas.microsoft.com/office/drawing/2014/main" id="{67BA044D-4C09-440E-A268-E35635B9D2C3}"/>
+                <a16:creationId xmlns:a16="http://schemas.microsoft.com/office/drawing/2014/main" id="{9DD8DE9A-7C2C-44EE-BD36-47ACB7DC6AD1}"/>
               </a:ext>
             </a:extLst>
           </p:cNvPr>
@@ -5374,7 +5483,7 @@
                 <a:ea typeface="DejaVu Sans"/>
                 <a:cs typeface="DejaVu Sans"/>
               </a:rPr>
-              <a:t>Зазор — полоса вокруг границы, которую SVM стремится сделать широкой</a:t>
+              <a:t>Полосу вокруг границы называют зазором. SVM стремится сделать её широкой.</a:t>
             </a:r>
           </a:p>
         </p:txBody>
@@ -5384,7 +5493,7 @@
           <p:cNvPr id="3" name="">
             <a:extLst xmlns:a="http://schemas.openxmlformats.org/drawingml/2006/main">
               <a:ext uri="{FF2B5EF4-FFF2-40B4-BE49-F238E27FC236}">
-                <a16:creationId xmlns:a16="http://schemas.microsoft.com/office/drawing/2014/main" id="{7CEA7331-F549-4236-BC47-9BA480C76C40}"/>
+                <a16:creationId xmlns:a16="http://schemas.microsoft.com/office/drawing/2014/main" id="{C3AF34C2-24B5-4C28-8238-822FADB0C7F3}"/>
               </a:ext>
             </a:extLst>
           </p:cNvPr>
@@ -5414,7 +5523,7 @@
           <p:cNvPr id="4" name="text-74">
             <a:extLst xmlns:a="http://schemas.openxmlformats.org/drawingml/2006/main">
               <a:ext uri="{FF2B5EF4-FFF2-40B4-BE49-F238E27FC236}">
-                <a16:creationId xmlns:a16="http://schemas.microsoft.com/office/drawing/2014/main" id="{F6C397B9-EB39-43ED-BB75-6E9A12E7456D}"/>
+                <a16:creationId xmlns:a16="http://schemas.microsoft.com/office/drawing/2014/main" id="{27A8A751-A70D-4BB3-955F-010AE1C8E910}"/>
               </a:ext>
             </a:extLst>
           </p:cNvPr>
@@ -5472,7 +5581,7 @@
                 <a:ea typeface="DejaVu Sans"/>
                 <a:cs typeface="DejaVu Sans"/>
               </a:rPr>
-              <a:t>1.13  •  [1, 2, 5]</a:t>
+              <a:t>1.13   [1, 2, 5]</a:t>
             </a:r>
           </a:p>
         </p:txBody>
@@ -5482,7 +5591,7 @@
           <p:cNvPr id="5" name="text-75">
             <a:extLst xmlns:a="http://schemas.openxmlformats.org/drawingml/2006/main">
               <a:ext uri="{FF2B5EF4-FFF2-40B4-BE49-F238E27FC236}">
-                <a16:creationId xmlns:a16="http://schemas.microsoft.com/office/drawing/2014/main" id="{1D1669AC-2EF9-4748-AC91-0B6165FDD29C}"/>
+                <a16:creationId xmlns:a16="http://schemas.microsoft.com/office/drawing/2014/main" id="{B44E5B3C-DEAC-4DB1-9493-325B44241AD4}"/>
               </a:ext>
             </a:extLst>
           </p:cNvPr>
@@ -5550,7 +5659,7 @@
           <p:cNvPr id="6" name="">
             <a:extLst xmlns:a="http://schemas.openxmlformats.org/drawingml/2006/main">
               <a:ext uri="{FF2B5EF4-FFF2-40B4-BE49-F238E27FC236}">
-                <a16:creationId xmlns:a16="http://schemas.microsoft.com/office/drawing/2014/main" id="{B0BFF347-8D33-40F8-B949-554B519C230B}"/>
+                <a16:creationId xmlns:a16="http://schemas.microsoft.com/office/drawing/2014/main" id="{AF4560F2-3E8B-466D-9808-96A238429057}"/>
               </a:ext>
             </a:extLst>
           </p:cNvPr>
@@ -5590,7 +5699,7 @@
           <p:cNvPr id="7" name="">
             <a:extLst xmlns:a="http://schemas.openxmlformats.org/drawingml/2006/main">
               <a:ext uri="{FF2B5EF4-FFF2-40B4-BE49-F238E27FC236}">
-                <a16:creationId xmlns:a16="http://schemas.microsoft.com/office/drawing/2014/main" id="{93F0ED03-059A-49D6-BAC4-20A5D4129FAB}"/>
+                <a16:creationId xmlns:a16="http://schemas.microsoft.com/office/drawing/2014/main" id="{193B1EDE-A661-4507-8A28-953FA567F349}"/>
               </a:ext>
             </a:extLst>
           </p:cNvPr>
@@ -5630,7 +5739,7 @@
           <p:cNvPr id="8" name="text-76">
             <a:extLst xmlns:a="http://schemas.openxmlformats.org/drawingml/2006/main">
               <a:ext uri="{FF2B5EF4-FFF2-40B4-BE49-F238E27FC236}">
-                <a16:creationId xmlns:a16="http://schemas.microsoft.com/office/drawing/2014/main" id="{9A452E9B-7C12-4434-A812-9B14B651D147}"/>
+                <a16:creationId xmlns:a16="http://schemas.microsoft.com/office/drawing/2014/main" id="{F63826A4-F751-4D7C-8878-F536C924867C}"/>
               </a:ext>
             </a:extLst>
           </p:cNvPr>
@@ -5698,7 +5807,7 @@
           <p:cNvPr id="9" name="text-77">
             <a:extLst xmlns:a="http://schemas.openxmlformats.org/drawingml/2006/main">
               <a:ext uri="{FF2B5EF4-FFF2-40B4-BE49-F238E27FC236}">
-                <a16:creationId xmlns:a16="http://schemas.microsoft.com/office/drawing/2014/main" id="{A24FF463-2555-4E1A-82B3-1EC36E9F8C7F}"/>
+                <a16:creationId xmlns:a16="http://schemas.microsoft.com/office/drawing/2014/main" id="{FA518532-C5D0-4422-A4C5-49833F7AD07C}"/>
               </a:ext>
             </a:extLst>
           </p:cNvPr>
@@ -5766,7 +5875,7 @@
           <p:cNvPr id="10" name="">
             <a:extLst xmlns:a="http://schemas.openxmlformats.org/drawingml/2006/main">
               <a:ext uri="{FF2B5EF4-FFF2-40B4-BE49-F238E27FC236}">
-                <a16:creationId xmlns:a16="http://schemas.microsoft.com/office/drawing/2014/main" id="{E62A5E6C-F458-46FC-9C32-0684B72AC9F3}"/>
+                <a16:creationId xmlns:a16="http://schemas.microsoft.com/office/drawing/2014/main" id="{4FD68380-3C34-4013-8168-BBA0907AB6CB}"/>
               </a:ext>
             </a:extLst>
           </p:cNvPr>
@@ -5812,7 +5921,7 @@
           <p:cNvPr id="11" name="">
             <a:extLst xmlns:a="http://schemas.openxmlformats.org/drawingml/2006/main">
               <a:ext uri="{FF2B5EF4-FFF2-40B4-BE49-F238E27FC236}">
-                <a16:creationId xmlns:a16="http://schemas.microsoft.com/office/drawing/2014/main" id="{96753374-23E6-4F25-86A6-753B9E056CE4}"/>
+                <a16:creationId xmlns:a16="http://schemas.microsoft.com/office/drawing/2014/main" id="{3E1465CB-AADD-4028-B5CF-A2552B265EF0}"/>
               </a:ext>
             </a:extLst>
           </p:cNvPr>
@@ -5852,7 +5961,7 @@
           <p:cNvPr id="12" name="">
             <a:extLst xmlns:a="http://schemas.openxmlformats.org/drawingml/2006/main">
               <a:ext uri="{FF2B5EF4-FFF2-40B4-BE49-F238E27FC236}">
-                <a16:creationId xmlns:a16="http://schemas.microsoft.com/office/drawing/2014/main" id="{51EBF8DC-FD94-460E-8D2F-0F79F2579BA4}"/>
+                <a16:creationId xmlns:a16="http://schemas.microsoft.com/office/drawing/2014/main" id="{7F278BD6-D59E-4B5A-9DDD-BCB354EC537E}"/>
               </a:ext>
             </a:extLst>
           </p:cNvPr>
@@ -5892,7 +6001,7 @@
           <p:cNvPr id="13" name="">
             <a:extLst xmlns:a="http://schemas.openxmlformats.org/drawingml/2006/main">
               <a:ext uri="{FF2B5EF4-FFF2-40B4-BE49-F238E27FC236}">
-                <a16:creationId xmlns:a16="http://schemas.microsoft.com/office/drawing/2014/main" id="{18215A82-2161-439F-92F6-4BA61A4B3B4D}"/>
+                <a16:creationId xmlns:a16="http://schemas.microsoft.com/office/drawing/2014/main" id="{50A55EF8-981A-4926-B532-F8F3E3AB8632}"/>
               </a:ext>
             </a:extLst>
           </p:cNvPr>
@@ -5932,7 +6041,7 @@
           <p:cNvPr id="14" name="">
             <a:extLst xmlns:a="http://schemas.openxmlformats.org/drawingml/2006/main">
               <a:ext uri="{FF2B5EF4-FFF2-40B4-BE49-F238E27FC236}">
-                <a16:creationId xmlns:a16="http://schemas.microsoft.com/office/drawing/2014/main" id="{4472FAFF-0B5C-4A91-B04A-88EDC3316C89}"/>
+                <a16:creationId xmlns:a16="http://schemas.microsoft.com/office/drawing/2014/main" id="{A291EEE5-AB34-49FD-A4F3-6BB711C0A522}"/>
               </a:ext>
             </a:extLst>
           </p:cNvPr>
@@ -5964,7 +6073,7 @@
           <p:cNvPr id="15" name="">
             <a:extLst xmlns:a="http://schemas.openxmlformats.org/drawingml/2006/main">
               <a:ext uri="{FF2B5EF4-FFF2-40B4-BE49-F238E27FC236}">
-                <a16:creationId xmlns:a16="http://schemas.microsoft.com/office/drawing/2014/main" id="{3E2143FB-8FB0-4B2C-9942-02A1587F49D5}"/>
+                <a16:creationId xmlns:a16="http://schemas.microsoft.com/office/drawing/2014/main" id="{0AF3485A-A486-43D1-BEC0-77CC347E07FB}"/>
               </a:ext>
             </a:extLst>
           </p:cNvPr>
@@ -5996,7 +6105,7 @@
           <p:cNvPr id="16" name="">
             <a:extLst xmlns:a="http://schemas.openxmlformats.org/drawingml/2006/main">
               <a:ext uri="{FF2B5EF4-FFF2-40B4-BE49-F238E27FC236}">
-                <a16:creationId xmlns:a16="http://schemas.microsoft.com/office/drawing/2014/main" id="{2909030D-C785-47CC-8410-248621CACCD1}"/>
+                <a16:creationId xmlns:a16="http://schemas.microsoft.com/office/drawing/2014/main" id="{4742687D-249C-4AB2-9BB9-04956C68FD4D}"/>
               </a:ext>
             </a:extLst>
           </p:cNvPr>
@@ -6028,7 +6137,7 @@
           <p:cNvPr id="17" name="">
             <a:extLst xmlns:a="http://schemas.openxmlformats.org/drawingml/2006/main">
               <a:ext uri="{FF2B5EF4-FFF2-40B4-BE49-F238E27FC236}">
-                <a16:creationId xmlns:a16="http://schemas.microsoft.com/office/drawing/2014/main" id="{8D528CEF-9F44-4569-ADA2-86AF4B7647FB}"/>
+                <a16:creationId xmlns:a16="http://schemas.microsoft.com/office/drawing/2014/main" id="{834AEACA-4EFC-4715-B188-03B1B30F80AF}"/>
               </a:ext>
             </a:extLst>
           </p:cNvPr>
@@ -6060,7 +6169,7 @@
           <p:cNvPr id="18" name="">
             <a:extLst xmlns:a="http://schemas.openxmlformats.org/drawingml/2006/main">
               <a:ext uri="{FF2B5EF4-FFF2-40B4-BE49-F238E27FC236}">
-                <a16:creationId xmlns:a16="http://schemas.microsoft.com/office/drawing/2014/main" id="{E8F0E259-AC6E-4552-A350-62FEA27CCEF7}"/>
+                <a16:creationId xmlns:a16="http://schemas.microsoft.com/office/drawing/2014/main" id="{706D169D-35ED-4E55-B2EE-BEEC3CA6B7D1}"/>
               </a:ext>
             </a:extLst>
           </p:cNvPr>
@@ -6092,7 +6201,7 @@
           <p:cNvPr id="19" name="">
             <a:extLst xmlns:a="http://schemas.openxmlformats.org/drawingml/2006/main">
               <a:ext uri="{FF2B5EF4-FFF2-40B4-BE49-F238E27FC236}">
-                <a16:creationId xmlns:a16="http://schemas.microsoft.com/office/drawing/2014/main" id="{37CC5D06-1C90-499A-BA33-E06FA0AADB9E}"/>
+                <a16:creationId xmlns:a16="http://schemas.microsoft.com/office/drawing/2014/main" id="{6475AEA5-9D52-45A0-BBAE-4CB2B6B195B0}"/>
               </a:ext>
             </a:extLst>
           </p:cNvPr>
@@ -6124,7 +6233,7 @@
           <p:cNvPr id="20" name="">
             <a:extLst xmlns:a="http://schemas.openxmlformats.org/drawingml/2006/main">
               <a:ext uri="{FF2B5EF4-FFF2-40B4-BE49-F238E27FC236}">
-                <a16:creationId xmlns:a16="http://schemas.microsoft.com/office/drawing/2014/main" id="{A42A0213-4791-4BB1-BA2E-3B537B15B72E}"/>
+                <a16:creationId xmlns:a16="http://schemas.microsoft.com/office/drawing/2014/main" id="{C2C690B5-3460-4951-A3FA-10B0F333B274}"/>
               </a:ext>
             </a:extLst>
           </p:cNvPr>
@@ -6156,7 +6265,7 @@
           <p:cNvPr id="21" name="">
             <a:extLst xmlns:a="http://schemas.openxmlformats.org/drawingml/2006/main">
               <a:ext uri="{FF2B5EF4-FFF2-40B4-BE49-F238E27FC236}">
-                <a16:creationId xmlns:a16="http://schemas.microsoft.com/office/drawing/2014/main" id="{956734E5-658E-43FC-873B-73BA10BB6741}"/>
+                <a16:creationId xmlns:a16="http://schemas.microsoft.com/office/drawing/2014/main" id="{0CA221F1-2978-4984-ACA1-4802CCD2C2D5}"/>
               </a:ext>
             </a:extLst>
           </p:cNvPr>
@@ -6188,7 +6297,7 @@
           <p:cNvPr id="22" name="">
             <a:extLst xmlns:a="http://schemas.openxmlformats.org/drawingml/2006/main">
               <a:ext uri="{FF2B5EF4-FFF2-40B4-BE49-F238E27FC236}">
-                <a16:creationId xmlns:a16="http://schemas.microsoft.com/office/drawing/2014/main" id="{281598FD-68E7-4454-AF91-010253E549B9}"/>
+                <a16:creationId xmlns:a16="http://schemas.microsoft.com/office/drawing/2014/main" id="{41962E7D-4BBC-4391-8B6D-ED0345429460}"/>
               </a:ext>
             </a:extLst>
           </p:cNvPr>
@@ -6220,7 +6329,7 @@
           <p:cNvPr id="23" name="">
             <a:extLst xmlns:a="http://schemas.openxmlformats.org/drawingml/2006/main">
               <a:ext uri="{FF2B5EF4-FFF2-40B4-BE49-F238E27FC236}">
-                <a16:creationId xmlns:a16="http://schemas.microsoft.com/office/drawing/2014/main" id="{2EFC1752-642C-44AB-97A3-3C837D9E5E7B}"/>
+                <a16:creationId xmlns:a16="http://schemas.microsoft.com/office/drawing/2014/main" id="{2219E717-49F7-4B2A-B58C-972417749A0D}"/>
               </a:ext>
             </a:extLst>
           </p:cNvPr>
@@ -6252,7 +6361,7 @@
           <p:cNvPr id="24" name="">
             <a:extLst xmlns:a="http://schemas.openxmlformats.org/drawingml/2006/main">
               <a:ext uri="{FF2B5EF4-FFF2-40B4-BE49-F238E27FC236}">
-                <a16:creationId xmlns:a16="http://schemas.microsoft.com/office/drawing/2014/main" id="{F3A4A622-9A6C-4944-B6A6-B354105A4EB0}"/>
+                <a16:creationId xmlns:a16="http://schemas.microsoft.com/office/drawing/2014/main" id="{699A7F14-A0FD-4E17-93DD-DB6733C023BB}"/>
               </a:ext>
             </a:extLst>
           </p:cNvPr>
@@ -6284,7 +6393,7 @@
           <p:cNvPr id="25" name="">
             <a:extLst xmlns:a="http://schemas.openxmlformats.org/drawingml/2006/main">
               <a:ext uri="{FF2B5EF4-FFF2-40B4-BE49-F238E27FC236}">
-                <a16:creationId xmlns:a16="http://schemas.microsoft.com/office/drawing/2014/main" id="{888CEF36-5506-4BED-AB96-7FDFC2B33C01}"/>
+                <a16:creationId xmlns:a16="http://schemas.microsoft.com/office/drawing/2014/main" id="{35A9365A-072B-4975-8F59-ECA8684A995C}"/>
               </a:ext>
             </a:extLst>
           </p:cNvPr>
@@ -6316,7 +6425,7 @@
           <p:cNvPr id="26" name="">
             <a:extLst xmlns:a="http://schemas.openxmlformats.org/drawingml/2006/main">
               <a:ext uri="{FF2B5EF4-FFF2-40B4-BE49-F238E27FC236}">
-                <a16:creationId xmlns:a16="http://schemas.microsoft.com/office/drawing/2014/main" id="{7CD04FB5-CA19-4AA3-A1F3-D28AFCAD0BE1}"/>
+                <a16:creationId xmlns:a16="http://schemas.microsoft.com/office/drawing/2014/main" id="{6FBAF025-B78F-427B-831D-C9866D00191B}"/>
               </a:ext>
             </a:extLst>
           </p:cNvPr>
@@ -6346,7 +6455,7 @@
           <p:cNvPr id="27" name="">
             <a:extLst xmlns:a="http://schemas.openxmlformats.org/drawingml/2006/main">
               <a:ext uri="{FF2B5EF4-FFF2-40B4-BE49-F238E27FC236}">
-                <a16:creationId xmlns:a16="http://schemas.microsoft.com/office/drawing/2014/main" id="{084DFC95-33B2-477B-9F5D-00D355DB4E43}"/>
+                <a16:creationId xmlns:a16="http://schemas.microsoft.com/office/drawing/2014/main" id="{E4349780-70C8-4C3D-B5FB-E9E8B4295D51}"/>
               </a:ext>
             </a:extLst>
           </p:cNvPr>
@@ -6376,7 +6485,7 @@
           <p:cNvPr id="28" name="">
             <a:extLst xmlns:a="http://schemas.openxmlformats.org/drawingml/2006/main">
               <a:ext uri="{FF2B5EF4-FFF2-40B4-BE49-F238E27FC236}">
-                <a16:creationId xmlns:a16="http://schemas.microsoft.com/office/drawing/2014/main" id="{88A1C21B-5A44-45EF-8585-B385E75B2BCE}"/>
+                <a16:creationId xmlns:a16="http://schemas.microsoft.com/office/drawing/2014/main" id="{3D9050D4-3B89-4584-B705-2A31D8B55F4E}"/>
               </a:ext>
             </a:extLst>
           </p:cNvPr>
@@ -6408,7 +6517,7 @@
           <p:cNvPr id="29" name="">
             <a:extLst xmlns:a="http://schemas.openxmlformats.org/drawingml/2006/main">
               <a:ext uri="{FF2B5EF4-FFF2-40B4-BE49-F238E27FC236}">
-                <a16:creationId xmlns:a16="http://schemas.microsoft.com/office/drawing/2014/main" id="{AD5E249F-80EF-49EB-A2F8-A49C56391B15}"/>
+                <a16:creationId xmlns:a16="http://schemas.microsoft.com/office/drawing/2014/main" id="{1FD1C41E-146A-436E-BD99-E836FF0006C9}"/>
               </a:ext>
             </a:extLst>
           </p:cNvPr>
@@ -6438,7 +6547,7 @@
           <p:cNvPr id="30" name="text-78">
             <a:extLst xmlns:a="http://schemas.openxmlformats.org/drawingml/2006/main">
               <a:ext uri="{FF2B5EF4-FFF2-40B4-BE49-F238E27FC236}">
-                <a16:creationId xmlns:a16="http://schemas.microsoft.com/office/drawing/2014/main" id="{1A2D5FD2-3E1B-4369-BEE1-43B12E0D6C7A}"/>
+                <a16:creationId xmlns:a16="http://schemas.microsoft.com/office/drawing/2014/main" id="{1002839D-1893-4A10-83B0-9A198D0B7CE4}"/>
               </a:ext>
             </a:extLst>
           </p:cNvPr>
@@ -6506,7 +6615,7 @@
           <p:cNvPr id="31" name="text-79">
             <a:extLst xmlns:a="http://schemas.openxmlformats.org/drawingml/2006/main">
               <a:ext uri="{FF2B5EF4-FFF2-40B4-BE49-F238E27FC236}">
-                <a16:creationId xmlns:a16="http://schemas.microsoft.com/office/drawing/2014/main" id="{709FCC33-3003-4C17-A6CC-6B63B1B71AF7}"/>
+                <a16:creationId xmlns:a16="http://schemas.microsoft.com/office/drawing/2014/main" id="{D91A3E85-883A-4303-BB26-8E6FD8AD16CF}"/>
               </a:ext>
             </a:extLst>
           </p:cNvPr>
@@ -6574,7 +6683,7 @@
           <p:cNvPr id="32" name="text-80">
             <a:extLst xmlns:a="http://schemas.openxmlformats.org/drawingml/2006/main">
               <a:ext uri="{FF2B5EF4-FFF2-40B4-BE49-F238E27FC236}">
-                <a16:creationId xmlns:a16="http://schemas.microsoft.com/office/drawing/2014/main" id="{0D425BE8-6EB6-4759-98BA-B2A40E66F293}"/>
+                <a16:creationId xmlns:a16="http://schemas.microsoft.com/office/drawing/2014/main" id="{4CE99752-3FB4-47A9-93E9-661D80F126FC}"/>
               </a:ext>
             </a:extLst>
           </p:cNvPr>
@@ -6642,7 +6751,7 @@
           <p:cNvPr id="33" name="text-81">
             <a:extLst xmlns:a="http://schemas.openxmlformats.org/drawingml/2006/main">
               <a:ext uri="{FF2B5EF4-FFF2-40B4-BE49-F238E27FC236}">
-                <a16:creationId xmlns:a16="http://schemas.microsoft.com/office/drawing/2014/main" id="{5A2E7D88-2A2D-48A5-A80F-2D7719079DBC}"/>
+                <a16:creationId xmlns:a16="http://schemas.microsoft.com/office/drawing/2014/main" id="{D2F0D4F1-9A48-4DB4-B8F0-878F9F7E006D}"/>
               </a:ext>
             </a:extLst>
           </p:cNvPr>
@@ -6700,7 +6809,7 @@
                 <a:ea typeface="DejaVu Sans"/>
                 <a:cs typeface="DejaVu Sans"/>
               </a:rPr>
-              <a:t>Допускает объекты внутри</a:t>
+              <a:t>Точки бывают в полосе</a:t>
             </a:r>
           </a:p>
           <a:p xmlns:a="http://schemas.openxmlformats.org/drawingml/2006/main">
@@ -6723,7 +6832,7 @@
                 <a:ea typeface="DejaVu Sans"/>
                 <a:cs typeface="DejaVu Sans"/>
               </a:rPr>
-              <a:t>полосы и на неверной стороне.</a:t>
+              <a:t>и на неверной стороне.</a:t>
             </a:r>
           </a:p>
           <a:p xmlns:a="http://schemas.openxmlformats.org/drawingml/2006/main">
@@ -6746,7 +6855,7 @@
                 <a:ea typeface="DejaVu Sans"/>
                 <a:cs typeface="DejaVu Sans"/>
               </a:rPr>
-              <a:t>За нарушения есть штраф.</a:t>
+              <a:t>За это есть штраф.</a:t>
             </a:r>
           </a:p>
         </p:txBody>
@@ -6756,7 +6865,7 @@
           <p:cNvPr id="34" name="text-82">
             <a:extLst xmlns:a="http://schemas.openxmlformats.org/drawingml/2006/main">
               <a:ext uri="{FF2B5EF4-FFF2-40B4-BE49-F238E27FC236}">
-                <a16:creationId xmlns:a16="http://schemas.microsoft.com/office/drawing/2014/main" id="{BED5CFB6-87BC-4C92-BBCC-DCD0FEBAF1B2}"/>
+                <a16:creationId xmlns:a16="http://schemas.microsoft.com/office/drawing/2014/main" id="{AB76E6A9-F1F6-479C-B354-C5C11D053B91}"/>
               </a:ext>
             </a:extLst>
           </p:cNvPr>
@@ -6814,7 +6923,7 @@
                 <a:ea typeface="DejaVu Sans"/>
                 <a:cs typeface="DejaVu Sans"/>
               </a:rPr>
-              <a:t>C — цена нарушений.</a:t>
+              <a:t>C задаёт цену нарушений.</a:t>
             </a:r>
           </a:p>
         </p:txBody>
@@ -6824,7 +6933,7 @@
           <p:cNvPr id="35" name="text-83">
             <a:extLst xmlns:a="http://schemas.openxmlformats.org/drawingml/2006/main">
               <a:ext uri="{FF2B5EF4-FFF2-40B4-BE49-F238E27FC236}">
-                <a16:creationId xmlns:a16="http://schemas.microsoft.com/office/drawing/2014/main" id="{C455E75B-8E54-431C-B8D7-474FC0604335}"/>
+                <a16:creationId xmlns:a16="http://schemas.microsoft.com/office/drawing/2014/main" id="{999D7529-62EF-41FA-9A96-759AF848C336}"/>
               </a:ext>
             </a:extLst>
           </p:cNvPr>
@@ -6882,7 +6991,7 @@
                 <a:ea typeface="DejaVu Sans"/>
                 <a:cs typeface="DejaVu Sans"/>
               </a:rPr>
-              <a:t>Опорные векторы — примеры,</a:t>
+              <a:t>Опорные векторы участвуют</a:t>
             </a:r>
           </a:p>
           <a:p xmlns:a="http://schemas.openxmlformats.org/drawingml/2006/main">
@@ -6905,7 +7014,7 @@
                 <a:ea typeface="DejaVu Sans"/>
                 <a:cs typeface="DejaVu Sans"/>
               </a:rPr>
-              <a:t>участвующие в определении</a:t>
+              <a:t>в выборе границы. На рисунке</a:t>
             </a:r>
           </a:p>
           <a:p xmlns:a="http://schemas.openxmlformats.org/drawingml/2006/main">
@@ -6928,7 +7037,7 @@
                 <a:ea typeface="DejaVu Sans"/>
                 <a:cs typeface="DejaVu Sans"/>
               </a:rPr>
-              <a:t>границы. На схеме — в кольцах.</a:t>
+              <a:t>эти точки обведены кольцами.</a:t>
             </a:r>
           </a:p>
         </p:txBody>
@@ -6938,7 +7047,7 @@
           <p:cNvPr id="36" name="text-84">
             <a:extLst xmlns:a="http://schemas.openxmlformats.org/drawingml/2006/main">
               <a:ext uri="{FF2B5EF4-FFF2-40B4-BE49-F238E27FC236}">
-                <a16:creationId xmlns:a16="http://schemas.microsoft.com/office/drawing/2014/main" id="{055E3EB8-A50C-44D4-8C53-F9D15FEDF1DF}"/>
+                <a16:creationId xmlns:a16="http://schemas.microsoft.com/office/drawing/2014/main" id="{8903E885-76AF-4CB4-BFA8-C1962E99BB17}"/>
               </a:ext>
             </a:extLst>
           </p:cNvPr>
@@ -6996,7 +7105,7 @@
                 <a:ea typeface="DejaVu Sans"/>
                 <a:cs typeface="DejaVu Sans"/>
               </a:rPr>
-              <a:t>Схема обучения; учебные классы пока обозначены условно.</a:t>
+              <a:t>Схема показывает идею обучения. Два класса обозначены условно.</a:t>
             </a:r>
           </a:p>
         </p:txBody>
@@ -7004,7 +7113,7 @@
     </p:spTree>
     <p:extLst>
       <p:ext uri="{BB962C8B-B14F-4D97-AF65-F5344CB8AC3E}">
-        <p14:creationId xmlns:p14="http://schemas.microsoft.com/office/powerpoint/2010/main" val="424190696"/>
+        <p14:creationId xmlns:p14="http://schemas.microsoft.com/office/powerpoint/2010/main" val="1826328517"/>
       </p:ext>
     </p:extLst>
   </p:cSld>
@@ -7035,7 +7144,7 @@
           <p:cNvPr id="9" name="text-85">
             <a:extLst xmlns:a="http://schemas.openxmlformats.org/drawingml/2006/main">
               <a:ext uri="{FF2B5EF4-FFF2-40B4-BE49-F238E27FC236}">
-                <a16:creationId xmlns:a16="http://schemas.microsoft.com/office/drawing/2014/main" id="{946B34F2-CC65-4919-B970-C0C8B2D63CC9}"/>
+                <a16:creationId xmlns:a16="http://schemas.microsoft.com/office/drawing/2014/main" id="{2D315CB7-0807-4FC0-A1F5-7237F856274F}"/>
               </a:ext>
             </a:extLst>
           </p:cNvPr>
@@ -7103,7 +7212,7 @@
           <p:cNvPr id="2" name="text-86">
             <a:extLst xmlns:a="http://schemas.openxmlformats.org/drawingml/2006/main">
               <a:ext uri="{FF2B5EF4-FFF2-40B4-BE49-F238E27FC236}">
-                <a16:creationId xmlns:a16="http://schemas.microsoft.com/office/drawing/2014/main" id="{07105CE1-E9B2-429C-9FB5-DD58C260D4AA}"/>
+                <a16:creationId xmlns:a16="http://schemas.microsoft.com/office/drawing/2014/main" id="{44BF2C36-5169-4C0E-88AD-95D7628E37D1}"/>
               </a:ext>
             </a:extLst>
           </p:cNvPr>
@@ -7161,7 +7270,7 @@
                 <a:ea typeface="DejaVu Sans"/>
                 <a:cs typeface="DejaVu Sans"/>
               </a:rPr>
-              <a:t>Для уже обученной линейной модели</a:t>
+              <a:t>Теперь измеряем расстояние до уже готовой границы</a:t>
             </a:r>
           </a:p>
         </p:txBody>
@@ -7171,7 +7280,7 @@
           <p:cNvPr id="3" name="">
             <a:extLst xmlns:a="http://schemas.openxmlformats.org/drawingml/2006/main">
               <a:ext uri="{FF2B5EF4-FFF2-40B4-BE49-F238E27FC236}">
-                <a16:creationId xmlns:a16="http://schemas.microsoft.com/office/drawing/2014/main" id="{23A07D65-7FBA-4946-84F0-2BF13657CF36}"/>
+                <a16:creationId xmlns:a16="http://schemas.microsoft.com/office/drawing/2014/main" id="{3BF5F579-83BD-4163-92A1-E903CA7B5BA5}"/>
               </a:ext>
             </a:extLst>
           </p:cNvPr>
@@ -7201,7 +7310,7 @@
           <p:cNvPr id="4" name="text-87">
             <a:extLst xmlns:a="http://schemas.openxmlformats.org/drawingml/2006/main">
               <a:ext uri="{FF2B5EF4-FFF2-40B4-BE49-F238E27FC236}">
-                <a16:creationId xmlns:a16="http://schemas.microsoft.com/office/drawing/2014/main" id="{5FB13478-172D-44E2-A79C-AAE26979FF08}"/>
+                <a16:creationId xmlns:a16="http://schemas.microsoft.com/office/drawing/2014/main" id="{A0C87B9C-A7AB-472F-BF34-4D2C49F17351}"/>
               </a:ext>
             </a:extLst>
           </p:cNvPr>
@@ -7259,7 +7368,7 @@
                 <a:ea typeface="DejaVu Sans"/>
                 <a:cs typeface="DejaVu Sans"/>
               </a:rPr>
-              <a:t>1.13  •  [2, 6]</a:t>
+              <a:t>1.13   [2, 6]</a:t>
             </a:r>
           </a:p>
         </p:txBody>
@@ -7269,7 +7378,7 @@
           <p:cNvPr id="5" name="text-88">
             <a:extLst xmlns:a="http://schemas.openxmlformats.org/drawingml/2006/main">
               <a:ext uri="{FF2B5EF4-FFF2-40B4-BE49-F238E27FC236}">
-                <a16:creationId xmlns:a16="http://schemas.microsoft.com/office/drawing/2014/main" id="{088CCD33-3A39-4FAD-9574-64115D1FEAB9}"/>
+                <a16:creationId xmlns:a16="http://schemas.microsoft.com/office/drawing/2014/main" id="{A81B2C9A-DB6E-479F-BC8F-2A17578A6D65}"/>
               </a:ext>
             </a:extLst>
           </p:cNvPr>
@@ -7337,7 +7446,7 @@
           <p:cNvPr id="6" name="">
             <a:extLst xmlns:a="http://schemas.openxmlformats.org/drawingml/2006/main">
               <a:ext uri="{FF2B5EF4-FFF2-40B4-BE49-F238E27FC236}">
-                <a16:creationId xmlns:a16="http://schemas.microsoft.com/office/drawing/2014/main" id="{5DE82DB2-7E1F-439F-B780-708D1A29124F}"/>
+                <a16:creationId xmlns:a16="http://schemas.microsoft.com/office/drawing/2014/main" id="{E91092B7-6CBE-408C-A504-EBB091B22241}"/>
               </a:ext>
             </a:extLst>
           </p:cNvPr>
@@ -7434,7 +7543,7 @@
                           <a:ea typeface="DejaVu Sans"/>
                           <a:cs typeface="DejaVu Sans"/>
                         </a:rPr>
-                        <a:t>Расстояние до границы со знаком</a:t>
+                        <a:t>Расстояние со знаком</a:t>
                       </a:r>
                     </a:p>
                   </a:txBody>
@@ -7458,7 +7567,7 @@
                           <a:ea typeface="DejaVu Sans"/>
                           <a:cs typeface="DejaVu Sans"/>
                         </a:rPr>
-                        <a:t>+ на правильной стороне</a:t>
+                        <a:t>+ при верном ответе, − при ошибке</a:t>
                       </a:r>
                     </a:p>
                     <a:p>
@@ -7471,7 +7580,7 @@
                           <a:ea typeface="DejaVu Sans"/>
                           <a:cs typeface="DejaVu Sans"/>
                         </a:rPr>
-                        <a:t>− на ошибочной; нужна метка</a:t>
+                        <a:t>Для проверки нужна метка</a:t>
                       </a:r>
                     </a:p>
                   </a:txBody>
@@ -7497,7 +7606,7 @@
                           <a:ea typeface="DejaVu Sans"/>
                           <a:cs typeface="DejaVu Sans"/>
                         </a:rPr>
-                        <a:t>Расстояние без знака r = |γ|</a:t>
+                        <a:t>Запас прочности r = |γ|</a:t>
                       </a:r>
                     </a:p>
                     <a:p>
@@ -7510,7 +7619,7 @@
                           <a:ea typeface="DejaVu Sans"/>
                           <a:cs typeface="DejaVu Sans"/>
                         </a:rPr>
-                        <a:t>Запас сохранения текущего ответа</a:t>
+                        <a:t>Расстояние без знака</a:t>
                       </a:r>
                     </a:p>
                   </a:txBody>
@@ -7534,7 +7643,7 @@
                           <a:ea typeface="DejaVu Sans"/>
                           <a:cs typeface="DejaVu Sans"/>
                         </a:rPr>
-                        <a:t>Как мало нужно изменить признаки,</a:t>
+                        <a:t>Какой сдвиг точки нужен,</a:t>
                       </a:r>
                     </a:p>
                     <a:p>
@@ -7567,7 +7676,7 @@
           <p:cNvPr id="7" name="text-89">
             <a:extLst xmlns:a="http://schemas.openxmlformats.org/drawingml/2006/main">
               <a:ext uri="{FF2B5EF4-FFF2-40B4-BE49-F238E27FC236}">
-                <a16:creationId xmlns:a16="http://schemas.microsoft.com/office/drawing/2014/main" id="{6C106C8B-53C4-4796-8719-D094499448C8}"/>
+                <a16:creationId xmlns:a16="http://schemas.microsoft.com/office/drawing/2014/main" id="{3BFB7E62-681D-4769-9545-401F1361A61C}"/>
               </a:ext>
             </a:extLst>
           </p:cNvPr>
@@ -7625,7 +7734,7 @@
                 <a:ea typeface="DejaVu Sans"/>
                 <a:cs typeface="DejaVu Sans"/>
               </a:rPr>
-              <a:t>Это расстояние в выбранном масштабе, а не вероятность.</a:t>
+              <a:t>Пока сдвиг меньше r, линейная модель сохраняет свой ответ.</a:t>
             </a:r>
           </a:p>
           <a:p xmlns:a="http://schemas.openxmlformats.org/drawingml/2006/main">
@@ -7648,7 +7757,7 @@
                 <a:ea typeface="DejaVu Sans"/>
                 <a:cs typeface="DejaVu Sans"/>
               </a:rPr>
-              <a:t>Большой запас может сохранять ошибочный ответ.</a:t>
+              <a:t>Даже далеко от границы ответ может оказаться ошибочным.</a:t>
             </a:r>
           </a:p>
         </p:txBody>
@@ -7658,7 +7767,7 @@
           <p:cNvPr id="8" name="text-90">
             <a:extLst xmlns:a="http://schemas.openxmlformats.org/drawingml/2006/main">
               <a:ext uri="{FF2B5EF4-FFF2-40B4-BE49-F238E27FC236}">
-                <a16:creationId xmlns:a16="http://schemas.microsoft.com/office/drawing/2014/main" id="{636EDA27-423B-4ADD-9C65-974BC893D644}"/>
+                <a16:creationId xmlns:a16="http://schemas.microsoft.com/office/drawing/2014/main" id="{7BF61797-C149-488B-98C3-C604D7A0A435}"/>
               </a:ext>
             </a:extLst>
           </p:cNvPr>
@@ -7716,7 +7825,7 @@
                 <a:ea typeface="DejaVu Sans"/>
                 <a:cs typeface="DejaVu Sans"/>
               </a:rPr>
-              <a:t>Отступ для эталонов и геометрический отступ SVM определены по-разному.</a:t>
+              <a:t>Здесь измеряем расстояние в масштабе признаков. Это не вероятность атаки.</a:t>
             </a:r>
           </a:p>
         </p:txBody>
@@ -7724,7 +7833,7 @@
     </p:spTree>
     <p:extLst>
       <p:ext uri="{BB962C8B-B14F-4D97-AF65-F5344CB8AC3E}">
-        <p14:creationId xmlns:p14="http://schemas.microsoft.com/office/powerpoint/2010/main" val="143402806"/>
+        <p14:creationId xmlns:p14="http://schemas.microsoft.com/office/powerpoint/2010/main" val="2041808894"/>
       </p:ext>
     </p:extLst>
   </p:cSld>
@@ -7755,7 +7864,7 @@
           <p:cNvPr id="9" name="text-91">
             <a:extLst xmlns:a="http://schemas.openxmlformats.org/drawingml/2006/main">
               <a:ext uri="{FF2B5EF4-FFF2-40B4-BE49-F238E27FC236}">
-                <a16:creationId xmlns:a16="http://schemas.microsoft.com/office/drawing/2014/main" id="{46E0BB56-6E6D-41F6-A73D-2D8CCC06027E}"/>
+                <a16:creationId xmlns:a16="http://schemas.microsoft.com/office/drawing/2014/main" id="{F85BAD27-A57C-4FE9-9C0F-D717B4893099}"/>
               </a:ext>
             </a:extLst>
           </p:cNvPr>
@@ -7823,7 +7932,7 @@
           <p:cNvPr id="2" name="">
             <a:extLst xmlns:a="http://schemas.openxmlformats.org/drawingml/2006/main">
               <a:ext uri="{FF2B5EF4-FFF2-40B4-BE49-F238E27FC236}">
-                <a16:creationId xmlns:a16="http://schemas.microsoft.com/office/drawing/2014/main" id="{21EB12B5-A132-439A-A2A1-5731A733A283}"/>
+                <a16:creationId xmlns:a16="http://schemas.microsoft.com/office/drawing/2014/main" id="{0734BC35-75DB-42F3-8D9A-CD267BBB3306}"/>
               </a:ext>
             </a:extLst>
           </p:cNvPr>
@@ -7853,7 +7962,7 @@
           <p:cNvPr id="3" name="text-92">
             <a:extLst xmlns:a="http://schemas.openxmlformats.org/drawingml/2006/main">
               <a:ext uri="{FF2B5EF4-FFF2-40B4-BE49-F238E27FC236}">
-                <a16:creationId xmlns:a16="http://schemas.microsoft.com/office/drawing/2014/main" id="{E8D963CE-9342-4016-9139-6A13B5DA498C}"/>
+                <a16:creationId xmlns:a16="http://schemas.microsoft.com/office/drawing/2014/main" id="{5A1F734A-7169-4861-824C-ABEB2A0EA128}"/>
               </a:ext>
             </a:extLst>
           </p:cNvPr>
@@ -7921,7 +8030,7 @@
           <p:cNvPr id="4" name="text-93">
             <a:extLst xmlns:a="http://schemas.openxmlformats.org/drawingml/2006/main">
               <a:ext uri="{FF2B5EF4-FFF2-40B4-BE49-F238E27FC236}">
-                <a16:creationId xmlns:a16="http://schemas.microsoft.com/office/drawing/2014/main" id="{A47E321E-D034-45FC-92C2-6880F099A45E}"/>
+                <a16:creationId xmlns:a16="http://schemas.microsoft.com/office/drawing/2014/main" id="{199C3616-94C6-4FA7-A0BA-5C742730121E}"/>
               </a:ext>
             </a:extLst>
           </p:cNvPr>
@@ -7989,7 +8098,7 @@
           <p:cNvPr id="5" name="text-94">
             <a:extLst xmlns:a="http://schemas.openxmlformats.org/drawingml/2006/main">
               <a:ext uri="{FF2B5EF4-FFF2-40B4-BE49-F238E27FC236}">
-                <a16:creationId xmlns:a16="http://schemas.microsoft.com/office/drawing/2014/main" id="{79D4C060-AABE-42F3-A3DF-8E94D2D1ABE2}"/>
+                <a16:creationId xmlns:a16="http://schemas.microsoft.com/office/drawing/2014/main" id="{96B005A5-C2ED-403A-BC95-E7F4A287F1BE}"/>
               </a:ext>
             </a:extLst>
           </p:cNvPr>
@@ -8047,7 +8156,7 @@
                 <a:ea typeface="DejaVu Sans"/>
                 <a:cs typeface="DejaVu Sans"/>
               </a:rPr>
-              <a:t>Пограничный объект близок к границе: небольшое изменение</a:t>
+              <a:t>Если точка близка к границе, достаточно немного изменить</a:t>
             </a:r>
           </a:p>
           <a:p xmlns:a="http://schemas.openxmlformats.org/drawingml/2006/main">
@@ -8070,7 +8179,7 @@
                 <a:ea typeface="DejaVu Sans"/>
                 <a:cs typeface="DejaVu Sans"/>
               </a:rPr>
-              <a:t>признаков может изменить прогноз.</a:t>
+              <a:t>признаки, чтобы модель выбрала другой класс.</a:t>
             </a:r>
           </a:p>
         </p:txBody>
@@ -8080,7 +8189,7 @@
           <p:cNvPr id="6" name="">
             <a:extLst xmlns:a="http://schemas.openxmlformats.org/drawingml/2006/main">
               <a:ext uri="{FF2B5EF4-FFF2-40B4-BE49-F238E27FC236}">
-                <a16:creationId xmlns:a16="http://schemas.microsoft.com/office/drawing/2014/main" id="{38767CC0-4F5C-49D0-B3D5-E3C5614838B1}"/>
+                <a16:creationId xmlns:a16="http://schemas.microsoft.com/office/drawing/2014/main" id="{86A858CA-517F-4334-86FB-9960F72C9074}"/>
               </a:ext>
             </a:extLst>
           </p:cNvPr>
@@ -8138,7 +8247,7 @@
                           <a:ea typeface="DejaVu Sans"/>
                           <a:cs typeface="DejaVu Sans"/>
                         </a:rPr>
-                        <a:t>Полоса перепроверки</a:t>
+                        <a:t>Полоса для перепроверки</a:t>
                       </a:r>
                     </a:p>
                   </a:txBody>
@@ -8164,7 +8273,7 @@
                           <a:ea typeface="DejaVu Sans"/>
                           <a:cs typeface="DejaVu Sans"/>
                         </a:rPr>
-                        <a:t>Участвует в обучении модели</a:t>
+                        <a:t>Используется во время обучения</a:t>
                       </a:r>
                     </a:p>
                   </a:txBody>
@@ -8188,7 +8297,7 @@
                           <a:ea typeface="DejaVu Sans"/>
                           <a:cs typeface="DejaVu Sans"/>
                         </a:rPr>
-                        <a:t>Выделяем у готовых результатов</a:t>
+                        <a:t>Выделяет ответы, которые стоит проверить</a:t>
                       </a:r>
                     </a:p>
                   </a:txBody>
@@ -8214,7 +8323,7 @@
                           <a:ea typeface="DejaVu Sans"/>
                           <a:cs typeface="DejaVu Sans"/>
                         </a:rPr>
-                        <a:t>Компромисс регулируется C</a:t>
+                        <a:t>Цену нарушений задаёт C</a:t>
                       </a:r>
                     </a:p>
                   </a:txBody>
@@ -8258,7 +8367,7 @@
           <p:cNvPr id="7" name="">
             <a:extLst xmlns:a="http://schemas.openxmlformats.org/drawingml/2006/main">
               <a:ext uri="{FF2B5EF4-FFF2-40B4-BE49-F238E27FC236}">
-                <a16:creationId xmlns:a16="http://schemas.microsoft.com/office/drawing/2014/main" id="{C6C9B1E4-F600-4DC2-9C4A-03478202B209}"/>
+                <a16:creationId xmlns:a16="http://schemas.microsoft.com/office/drawing/2014/main" id="{A20F08DB-2416-4766-81AF-4F3205639AF1}"/>
               </a:ext>
             </a:extLst>
           </p:cNvPr>
@@ -8288,7 +8397,7 @@
           <p:cNvPr id="8" name="text-95">
             <a:extLst xmlns:a="http://schemas.openxmlformats.org/drawingml/2006/main">
               <a:ext uri="{FF2B5EF4-FFF2-40B4-BE49-F238E27FC236}">
-                <a16:creationId xmlns:a16="http://schemas.microsoft.com/office/drawing/2014/main" id="{0B793277-4C8D-4206-A6CD-679EE5EA58A2}"/>
+                <a16:creationId xmlns:a16="http://schemas.microsoft.com/office/drawing/2014/main" id="{9DBC0F9D-1D3E-4A86-ACF4-E7D3BB8DD130}"/>
               </a:ext>
             </a:extLst>
           </p:cNvPr>
@@ -8346,7 +8455,7 @@
                 <a:ea typeface="DejaVu Sans"/>
                 <a:cs typeface="DejaVu Sans"/>
               </a:rPr>
-              <a:t>Пограничными бывают оба класса, верные ответы и ошибки</a:t>
+              <a:t>Пограничный ответ может быть и верным, и ошибочным</a:t>
             </a:r>
           </a:p>
         </p:txBody>
@@ -8354,7 +8463,7 @@
     </p:spTree>
     <p:extLst>
       <p:ext uri="{BB962C8B-B14F-4D97-AF65-F5344CB8AC3E}">
-        <p14:creationId xmlns:p14="http://schemas.microsoft.com/office/powerpoint/2010/main" val="303105799"/>
+        <p14:creationId xmlns:p14="http://schemas.microsoft.com/office/powerpoint/2010/main" val="774386806"/>
       </p:ext>
     </p:extLst>
   </p:cSld>
@@ -8385,7 +8494,7 @@
           <p:cNvPr id="13" name="text-96">
             <a:extLst xmlns:a="http://schemas.openxmlformats.org/drawingml/2006/main">
               <a:ext uri="{FF2B5EF4-FFF2-40B4-BE49-F238E27FC236}">
-                <a16:creationId xmlns:a16="http://schemas.microsoft.com/office/drawing/2014/main" id="{BB3D85FB-5730-42ED-A2A7-A1C882D1AEF4}"/>
+                <a16:creationId xmlns:a16="http://schemas.microsoft.com/office/drawing/2014/main" id="{FA931A8D-AEF0-4BE5-8A04-9B9C399CB2FD}"/>
               </a:ext>
             </a:extLst>
           </p:cNvPr>
@@ -8443,7 +8552,7 @@
                 <a:ea typeface="DejaVu Sans"/>
                 <a:cs typeface="DejaVu Sans"/>
               </a:rPr>
-              <a:t>Единый пример: норма и SYN-flood</a:t>
+              <a:t>Пример: обычный трафик или SYN-flood</a:t>
             </a:r>
           </a:p>
         </p:txBody>
@@ -8453,7 +8562,7 @@
           <p:cNvPr id="2" name="text-97">
             <a:extLst xmlns:a="http://schemas.openxmlformats.org/drawingml/2006/main">
               <a:ext uri="{FF2B5EF4-FFF2-40B4-BE49-F238E27FC236}">
-                <a16:creationId xmlns:a16="http://schemas.microsoft.com/office/drawing/2014/main" id="{E1D0F19C-6DAC-43F0-8957-9000873E5B1B}"/>
+                <a16:creationId xmlns:a16="http://schemas.microsoft.com/office/drawing/2014/main" id="{3D99A379-CD8F-4CC7-BBF9-D95AB99500DB}"/>
               </a:ext>
             </a:extLst>
           </p:cNvPr>
@@ -8511,7 +8620,7 @@
                 <a:ea typeface="DejaVu Sans"/>
                 <a:cs typeface="DejaVu Sans"/>
               </a:rPr>
-              <a:t>Классифицируем окна трафика к одному сервису</a:t>
+              <a:t>Попробуем отличить обычный трафик сервера от SYN-flood</a:t>
             </a:r>
           </a:p>
         </p:txBody>
@@ -8521,7 +8630,7 @@
           <p:cNvPr id="3" name="">
             <a:extLst xmlns:a="http://schemas.openxmlformats.org/drawingml/2006/main">
               <a:ext uri="{FF2B5EF4-FFF2-40B4-BE49-F238E27FC236}">
-                <a16:creationId xmlns:a16="http://schemas.microsoft.com/office/drawing/2014/main" id="{68370562-1271-485C-9D60-508C5AD34138}"/>
+                <a16:creationId xmlns:a16="http://schemas.microsoft.com/office/drawing/2014/main" id="{09E9BB3D-F288-4B29-82AC-28CF93335966}"/>
               </a:ext>
             </a:extLst>
           </p:cNvPr>
@@ -8551,7 +8660,7 @@
           <p:cNvPr id="4" name="text-98">
             <a:extLst xmlns:a="http://schemas.openxmlformats.org/drawingml/2006/main">
               <a:ext uri="{FF2B5EF4-FFF2-40B4-BE49-F238E27FC236}">
-                <a16:creationId xmlns:a16="http://schemas.microsoft.com/office/drawing/2014/main" id="{513B0E8D-E7C8-4AC9-878F-89C91E8E1F90}"/>
+                <a16:creationId xmlns:a16="http://schemas.microsoft.com/office/drawing/2014/main" id="{7542BDB2-D168-4472-A5D5-3AFB86D9121A}"/>
               </a:ext>
             </a:extLst>
           </p:cNvPr>
@@ -8609,7 +8718,7 @@
                 <a:ea typeface="DejaVu Sans"/>
                 <a:cs typeface="DejaVu Sans"/>
               </a:rPr>
-              <a:t>1.13  •  [4]</a:t>
+              <a:t>1.13   [4]</a:t>
             </a:r>
           </a:p>
         </p:txBody>
@@ -8619,7 +8728,7 @@
           <p:cNvPr id="5" name="text-99">
             <a:extLst xmlns:a="http://schemas.openxmlformats.org/drawingml/2006/main">
               <a:ext uri="{FF2B5EF4-FFF2-40B4-BE49-F238E27FC236}">
-                <a16:creationId xmlns:a16="http://schemas.microsoft.com/office/drawing/2014/main" id="{D08EF552-F802-4413-BC8E-B50E83E5E8C2}"/>
+                <a16:creationId xmlns:a16="http://schemas.microsoft.com/office/drawing/2014/main" id="{26F008C6-951E-4D1A-8FBE-3793AE5FC6E1}"/>
               </a:ext>
             </a:extLst>
           </p:cNvPr>
@@ -8687,7 +8796,7 @@
           <p:cNvPr id="6" name="text-100">
             <a:extLst xmlns:a="http://schemas.openxmlformats.org/drawingml/2006/main">
               <a:ext uri="{FF2B5EF4-FFF2-40B4-BE49-F238E27FC236}">
-                <a16:creationId xmlns:a16="http://schemas.microsoft.com/office/drawing/2014/main" id="{984FB733-D2D8-4B85-9E49-8349A410A104}"/>
+                <a16:creationId xmlns:a16="http://schemas.microsoft.com/office/drawing/2014/main" id="{E876456C-7F6A-4B76-A651-90428EB43ECC}"/>
               </a:ext>
             </a:extLst>
           </p:cNvPr>
@@ -8755,7 +8864,7 @@
           <p:cNvPr id="7" name="text-101">
             <a:extLst xmlns:a="http://schemas.openxmlformats.org/drawingml/2006/main">
               <a:ext uri="{FF2B5EF4-FFF2-40B4-BE49-F238E27FC236}">
-                <a16:creationId xmlns:a16="http://schemas.microsoft.com/office/drawing/2014/main" id="{DA0C8022-62DF-4E78-8D67-D001C269BEA7}"/>
+                <a16:creationId xmlns:a16="http://schemas.microsoft.com/office/drawing/2014/main" id="{1DB11294-C283-433F-9DE0-8C9420A683C1}"/>
               </a:ext>
             </a:extLst>
           </p:cNvPr>
@@ -8813,7 +8922,7 @@
                 <a:ea typeface="DejaVu Sans"/>
                 <a:cs typeface="DejaVu Sans"/>
               </a:rPr>
-              <a:t>SYN → SYN-ACK → ACK</a:t>
+              <a:t>Клиент отправляет SYN.</a:t>
             </a:r>
           </a:p>
           <a:p xmlns:a="http://schemas.openxmlformats.org/drawingml/2006/main">
@@ -8836,7 +8945,7 @@
                 <a:ea typeface="DejaVu Sans"/>
                 <a:cs typeface="DejaVu Sans"/>
               </a:rPr>
-              <a:t>Клиент и сервер завершают</a:t>
+              <a:t>Сервер отвечает SYN-ACK.</a:t>
             </a:r>
           </a:p>
           <a:p xmlns:a="http://schemas.openxmlformats.org/drawingml/2006/main">
@@ -8859,7 +8968,7 @@
                 <a:ea typeface="DejaVu Sans"/>
                 <a:cs typeface="DejaVu Sans"/>
               </a:rPr>
-              <a:t>трёхэтапное рукопожатие.</a:t>
+              <a:t>Клиент подтверждает: ACK.</a:t>
             </a:r>
           </a:p>
         </p:txBody>
@@ -8869,7 +8978,7 @@
           <p:cNvPr id="8" name="text-102">
             <a:extLst xmlns:a="http://schemas.openxmlformats.org/drawingml/2006/main">
               <a:ext uri="{FF2B5EF4-FFF2-40B4-BE49-F238E27FC236}">
-                <a16:creationId xmlns:a16="http://schemas.microsoft.com/office/drawing/2014/main" id="{ED3C08D3-1F4C-4BB5-8FA9-BB9F12586F55}"/>
+                <a16:creationId xmlns:a16="http://schemas.microsoft.com/office/drawing/2014/main" id="{D79D1827-5AFE-4305-A95B-7E63694DFD6B}"/>
               </a:ext>
             </a:extLst>
           </p:cNvPr>
@@ -8937,7 +9046,7 @@
           <p:cNvPr id="9" name="text-103">
             <a:extLst xmlns:a="http://schemas.openxmlformats.org/drawingml/2006/main">
               <a:ext uri="{FF2B5EF4-FFF2-40B4-BE49-F238E27FC236}">
-                <a16:creationId xmlns:a16="http://schemas.microsoft.com/office/drawing/2014/main" id="{EE6AFE1E-EEEA-4AB6-8A09-A2AF5CDEBB1B}"/>
+                <a16:creationId xmlns:a16="http://schemas.microsoft.com/office/drawing/2014/main" id="{E1F51570-9751-44FF-B613-0C1C94642CFE}"/>
               </a:ext>
             </a:extLst>
           </p:cNvPr>
@@ -8995,7 +9104,7 @@
                 <a:ea typeface="DejaVu Sans"/>
                 <a:cs typeface="DejaVu Sans"/>
               </a:rPr>
-              <a:t>Множество начатых подключений</a:t>
+              <a:t>Сервер получает много SYN,</a:t>
             </a:r>
           </a:p>
           <a:p xmlns:a="http://schemas.openxmlformats.org/drawingml/2006/main">
@@ -9018,7 +9127,7 @@
                 <a:ea typeface="DejaVu Sans"/>
                 <a:cs typeface="DejaVu Sans"/>
               </a:rPr>
-              <a:t>не завершается. Занятая очередь</a:t>
+              <a:t>но рукопожатия не завершаются.</a:t>
             </a:r>
           </a:p>
           <a:p xmlns:a="http://schemas.openxmlformats.org/drawingml/2006/main">
@@ -9041,7 +9150,7 @@
                 <a:ea typeface="DejaVu Sans"/>
                 <a:cs typeface="DejaVu Sans"/>
               </a:rPr>
-              <a:t>может мешать обычным клиентам.</a:t>
+              <a:t>Очередь может заполниться.</a:t>
             </a:r>
           </a:p>
         </p:txBody>
@@ -9051,7 +9160,7 @@
           <p:cNvPr id="10" name="text-104">
             <a:extLst xmlns:a="http://schemas.openxmlformats.org/drawingml/2006/main">
               <a:ext uri="{FF2B5EF4-FFF2-40B4-BE49-F238E27FC236}">
-                <a16:creationId xmlns:a16="http://schemas.microsoft.com/office/drawing/2014/main" id="{C62C3183-B90B-4C54-8DED-6380A153F627}"/>
+                <a16:creationId xmlns:a16="http://schemas.microsoft.com/office/drawing/2014/main" id="{8CB519CE-C491-4572-91BF-569732F5B7B8}"/>
               </a:ext>
             </a:extLst>
           </p:cNvPr>
@@ -9109,7 +9218,7 @@
                 <a:ea typeface="DejaVu Sans"/>
                 <a:cs typeface="DejaVu Sans"/>
               </a:rPr>
-              <a:t>Два класса: нормальный трафик и SYN-flood.</a:t>
+              <a:t>Из-за заполненной очереди обычным клиентам труднее подключиться.</a:t>
             </a:r>
           </a:p>
           <a:p xmlns:a="http://schemas.openxmlformats.org/drawingml/2006/main">
@@ -9132,7 +9241,7 @@
                 <a:ea typeface="DejaVu Sans"/>
                 <a:cs typeface="DejaVu Sans"/>
               </a:rPr>
-              <a:t>Большое число SYN само по себе ещё не доказывает атаку.</a:t>
+              <a:t>Но большое число SYN бывает и при легитимной нагрузке.</a:t>
             </a:r>
           </a:p>
         </p:txBody>
@@ -9142,7 +9251,7 @@
           <p:cNvPr id="11" name="">
             <a:extLst xmlns:a="http://schemas.openxmlformats.org/drawingml/2006/main">
               <a:ext uri="{FF2B5EF4-FFF2-40B4-BE49-F238E27FC236}">
-                <a16:creationId xmlns:a16="http://schemas.microsoft.com/office/drawing/2014/main" id="{15985B5D-5B5C-4759-AF72-84D347CBF833}"/>
+                <a16:creationId xmlns:a16="http://schemas.microsoft.com/office/drawing/2014/main" id="{5409D5A7-978E-4C56-B678-924B878127DC}"/>
               </a:ext>
             </a:extLst>
           </p:cNvPr>
@@ -9172,7 +9281,7 @@
           <p:cNvPr id="12" name="text-105">
             <a:extLst xmlns:a="http://schemas.openxmlformats.org/drawingml/2006/main">
               <a:ext uri="{FF2B5EF4-FFF2-40B4-BE49-F238E27FC236}">
-                <a16:creationId xmlns:a16="http://schemas.microsoft.com/office/drawing/2014/main" id="{834DCDF5-B4AB-455E-971A-B3AE514C5EEA}"/>
+                <a16:creationId xmlns:a16="http://schemas.microsoft.com/office/drawing/2014/main" id="{9CD5084C-FA7C-4FA2-A91D-082E3F5C34A8}"/>
               </a:ext>
             </a:extLst>
           </p:cNvPr>
@@ -9230,7 +9339,7 @@
                 <a:ea typeface="DejaVu Sans"/>
                 <a:cs typeface="DejaVu Sans"/>
               </a:rPr>
-              <a:t>Теперь определим, что именно измеряем в каждом окне</a:t>
+              <a:t>Для решения возьмём два признака трафика</a:t>
             </a:r>
           </a:p>
         </p:txBody>
@@ -9238,7 +9347,7 @@
     </p:spTree>
     <p:extLst>
       <p:ext uri="{BB962C8B-B14F-4D97-AF65-F5344CB8AC3E}">
-        <p14:creationId xmlns:p14="http://schemas.microsoft.com/office/powerpoint/2010/main" val="70765629"/>
+        <p14:creationId xmlns:p14="http://schemas.microsoft.com/office/powerpoint/2010/main" val="724770808"/>
       </p:ext>
     </p:extLst>
   </p:cSld>
@@ -9269,7 +9378,7 @@
           <p:cNvPr id="9" name="text-106">
             <a:extLst xmlns:a="http://schemas.openxmlformats.org/drawingml/2006/main">
               <a:ext uri="{FF2B5EF4-FFF2-40B4-BE49-F238E27FC236}">
-                <a16:creationId xmlns:a16="http://schemas.microsoft.com/office/drawing/2014/main" id="{5652589E-4CC8-456A-B1C7-01B49C56E5CB}"/>
+                <a16:creationId xmlns:a16="http://schemas.microsoft.com/office/drawing/2014/main" id="{E6559989-B76C-49EA-8A7F-68E940A335DE}"/>
               </a:ext>
             </a:extLst>
           </p:cNvPr>
@@ -9337,7 +9446,7 @@
           <p:cNvPr id="2" name="text-107">
             <a:extLst xmlns:a="http://schemas.openxmlformats.org/drawingml/2006/main">
               <a:ext uri="{FF2B5EF4-FFF2-40B4-BE49-F238E27FC236}">
-                <a16:creationId xmlns:a16="http://schemas.microsoft.com/office/drawing/2014/main" id="{F343F4E0-C2C5-46CF-902B-18A64ACF6CBD}"/>
+                <a16:creationId xmlns:a16="http://schemas.microsoft.com/office/drawing/2014/main" id="{49E47AD7-E35B-48DA-81D8-7FBD278D7DB4}"/>
               </a:ext>
             </a:extLst>
           </p:cNvPr>
@@ -9395,7 +9504,7 @@
                 <a:ea typeface="DejaVu Sans"/>
                 <a:cs typeface="DejaVu Sans"/>
               </a:rPr>
-              <a:t>Объект — окно 10 секунд к одному IP и TCP-порту</a:t>
+              <a:t>Наблюдаем трафик к одному IP и порту 10 секунд. Этот отрезок называем окном.</a:t>
             </a:r>
           </a:p>
         </p:txBody>
@@ -9405,7 +9514,7 @@
           <p:cNvPr id="3" name="">
             <a:extLst xmlns:a="http://schemas.openxmlformats.org/drawingml/2006/main">
               <a:ext uri="{FF2B5EF4-FFF2-40B4-BE49-F238E27FC236}">
-                <a16:creationId xmlns:a16="http://schemas.microsoft.com/office/drawing/2014/main" id="{C04BC6B0-D155-4523-A284-4EB34A4FEA70}"/>
+                <a16:creationId xmlns:a16="http://schemas.microsoft.com/office/drawing/2014/main" id="{DA8907C6-DE1F-4ED1-8F3B-30E311E58ADE}"/>
               </a:ext>
             </a:extLst>
           </p:cNvPr>
@@ -9435,7 +9544,7 @@
           <p:cNvPr id="4" name="text-108">
             <a:extLst xmlns:a="http://schemas.openxmlformats.org/drawingml/2006/main">
               <a:ext uri="{FF2B5EF4-FFF2-40B4-BE49-F238E27FC236}">
-                <a16:creationId xmlns:a16="http://schemas.microsoft.com/office/drawing/2014/main" id="{2131DF39-B3FE-4D5D-A7C6-3E1E64C0243A}"/>
+                <a16:creationId xmlns:a16="http://schemas.microsoft.com/office/drawing/2014/main" id="{242AA251-FAB3-42A2-A7AC-D078734B2F16}"/>
               </a:ext>
             </a:extLst>
           </p:cNvPr>
@@ -9493,7 +9602,7 @@
                 <a:ea typeface="DejaVu Sans"/>
                 <a:cs typeface="DejaVu Sans"/>
               </a:rPr>
-              <a:t>1.13  •  [4]; данные и определения измерений — учебные</a:t>
+              <a:t>1.13   [4]. Измерения и данные учебного примера</a:t>
             </a:r>
           </a:p>
         </p:txBody>
@@ -9503,7 +9612,7 @@
           <p:cNvPr id="5" name="text-109">
             <a:extLst xmlns:a="http://schemas.openxmlformats.org/drawingml/2006/main">
               <a:ext uri="{FF2B5EF4-FFF2-40B4-BE49-F238E27FC236}">
-                <a16:creationId xmlns:a16="http://schemas.microsoft.com/office/drawing/2014/main" id="{411AEDE2-8EA8-4796-AB30-EC4831CBC6A1}"/>
+                <a16:creationId xmlns:a16="http://schemas.microsoft.com/office/drawing/2014/main" id="{7B061884-1133-4BB6-BFFF-2295F811CFE4}"/>
               </a:ext>
             </a:extLst>
           </p:cNvPr>
@@ -9571,7 +9680,7 @@
           <p:cNvPr id="6" name="">
             <a:extLst xmlns:a="http://schemas.openxmlformats.org/drawingml/2006/main">
               <a:ext uri="{FF2B5EF4-FFF2-40B4-BE49-F238E27FC236}">
-                <a16:creationId xmlns:a16="http://schemas.microsoft.com/office/drawing/2014/main" id="{33B356AE-056A-4DB8-9F6B-79F92458F818}"/>
+                <a16:creationId xmlns:a16="http://schemas.microsoft.com/office/drawing/2014/main" id="{AFEF1A72-85C9-4B86-8F36-8DB99ABA51A0}"/>
               </a:ext>
             </a:extLst>
           </p:cNvPr>
@@ -9704,7 +9813,7 @@
                           <a:ea typeface="DejaVu Sans"/>
                           <a:cs typeface="DejaVu Sans"/>
                         </a:rPr>
-                        <a:t>Интенсивность начала подключений</a:t>
+                        <a:t>Сколько SYN приходит за секунду</a:t>
                       </a:r>
                     </a:p>
                   </a:txBody>
@@ -9778,7 +9887,7 @@
                           <a:ea typeface="DejaVu Sans"/>
                           <a:cs typeface="DejaVu Sans"/>
                         </a:rPr>
-                        <a:t>Нет полного рукопожатия за 3 с</a:t>
+                        <a:t>Какая доля попыток не завершилась за 3 с</a:t>
                       </a:r>
                     </a:p>
                   </a:txBody>
@@ -9822,7 +9931,7 @@
           <p:cNvPr id="7" name="text-110">
             <a:extLst xmlns:a="http://schemas.openxmlformats.org/drawingml/2006/main">
               <a:ext uri="{FF2B5EF4-FFF2-40B4-BE49-F238E27FC236}">
-                <a16:creationId xmlns:a16="http://schemas.microsoft.com/office/drawing/2014/main" id="{20AE66BC-6A1D-4AB6-B5ED-CFF01AD4A4E4}"/>
+                <a16:creationId xmlns:a16="http://schemas.microsoft.com/office/drawing/2014/main" id="{6897EF0B-7D5A-4AE4-AE98-4D5863BC3D25}"/>
               </a:ext>
             </a:extLst>
           </p:cNvPr>
@@ -9880,7 +9989,7 @@
                 <a:ea typeface="DejaVu Sans"/>
                 <a:cs typeface="DejaVu Sans"/>
               </a:rPr>
-              <a:t>20 окон для обучения: 10 нормы + 10 атаки.</a:t>
+              <a:t>Вручную задаём 20 примеров для обучения: 10 нормы и 10 атаки.</a:t>
             </a:r>
           </a:p>
           <a:p xmlns:a="http://schemas.openxmlformats.org/drawingml/2006/main">
@@ -9903,7 +10012,7 @@
                 <a:ea typeface="DejaVu Sans"/>
                 <a:cs typeface="DejaVu Sans"/>
               </a:rPr>
-              <a:t>8 специально выбранных проверок. Все значения синтетические.</a:t>
+              <a:t>Ещё 8 берём для разбора результатов. Реальный трафик не используем.</a:t>
             </a:r>
           </a:p>
         </p:txBody>
@@ -9913,7 +10022,7 @@
           <p:cNvPr id="8" name="text-111">
             <a:extLst xmlns:a="http://schemas.openxmlformats.org/drawingml/2006/main">
               <a:ext uri="{FF2B5EF4-FFF2-40B4-BE49-F238E27FC236}">
-                <a16:creationId xmlns:a16="http://schemas.microsoft.com/office/drawing/2014/main" id="{1515E0F9-9BBE-4A4C-80C7-B7C8C47932A5}"/>
+                <a16:creationId xmlns:a16="http://schemas.microsoft.com/office/drawing/2014/main" id="{76345DAA-A639-4E8F-82AF-5E12F081BEDC}"/>
               </a:ext>
             </a:extLst>
           </p:cNvPr>
@@ -9971,7 +10080,7 @@
                 <a:ea typeface="DejaVu Sans"/>
                 <a:cs typeface="DejaVu Sans"/>
               </a:rPr>
-              <a:t>Нужны оба направления трафика. Повторы SYN входят в скорость, но объединяются</a:t>
+              <a:t>Для таких измерений нужно видеть оба направления трафика. Повторы учитываем</a:t>
             </a:r>
           </a:p>
           <a:p xmlns:a="http://schemas.openxmlformats.org/drawingml/2006/main">
@@ -9994,7 +10103,7 @@
                 <a:ea typeface="DejaVu Sans"/>
                 <a:cs typeface="DejaVu Sans"/>
               </a:rPr>
-              <a:t>в одну попытку для доли. Окна без SYN исключаем; ждём 3 с для завершения наблюдения.</a:t>
+              <a:t>в скорости, но объединяем в одну попытку при расчёте доли. Окна без SYN исключаем.</a:t>
             </a:r>
           </a:p>
         </p:txBody>
@@ -10002,7 +10111,7 @@
     </p:spTree>
     <p:extLst>
       <p:ext uri="{BB962C8B-B14F-4D97-AF65-F5344CB8AC3E}">
-        <p14:creationId xmlns:p14="http://schemas.microsoft.com/office/powerpoint/2010/main" val="1813993715"/>
+        <p14:creationId xmlns:p14="http://schemas.microsoft.com/office/powerpoint/2010/main" val="1180940678"/>
       </p:ext>
     </p:extLst>
   </p:cSld>
@@ -10033,7 +10142,7 @@
           <p:cNvPr id="10" name="text-112">
             <a:extLst xmlns:a="http://schemas.openxmlformats.org/drawingml/2006/main">
               <a:ext uri="{FF2B5EF4-FFF2-40B4-BE49-F238E27FC236}">
-                <a16:creationId xmlns:a16="http://schemas.microsoft.com/office/drawing/2014/main" id="{BFDE3E3A-7C50-4DE0-AE14-E32A73C0EE38}"/>
+                <a16:creationId xmlns:a16="http://schemas.microsoft.com/office/drawing/2014/main" id="{D77C54B7-B7EB-4A4A-8A1F-D9E9B5D683BB}"/>
               </a:ext>
             </a:extLst>
           </p:cNvPr>
@@ -10101,7 +10210,7 @@
           <p:cNvPr id="2" name="text-113">
             <a:extLst xmlns:a="http://schemas.openxmlformats.org/drawingml/2006/main">
               <a:ext uri="{FF2B5EF4-FFF2-40B4-BE49-F238E27FC236}">
-                <a16:creationId xmlns:a16="http://schemas.microsoft.com/office/drawing/2014/main" id="{D4C67568-340D-496D-BEAA-128F97ED46A1}"/>
+                <a16:creationId xmlns:a16="http://schemas.microsoft.com/office/drawing/2014/main" id="{D897DA4F-DFCE-48C6-A2B1-A14093F34071}"/>
               </a:ext>
             </a:extLst>
           </p:cNvPr>
@@ -10159,7 +10268,7 @@
                 <a:ea typeface="DejaVu Sans"/>
                 <a:cs typeface="DejaVu Sans"/>
               </a:rPr>
-              <a:t>В каждом классе находим медоид среди обучающих окон</a:t>
+              <a:t>Среди обучающих окон ищем медоид каждого класса</a:t>
             </a:r>
           </a:p>
         </p:txBody>
@@ -10169,7 +10278,7 @@
           <p:cNvPr id="3" name="">
             <a:extLst xmlns:a="http://schemas.openxmlformats.org/drawingml/2006/main">
               <a:ext uri="{FF2B5EF4-FFF2-40B4-BE49-F238E27FC236}">
-                <a16:creationId xmlns:a16="http://schemas.microsoft.com/office/drawing/2014/main" id="{B7BC8A0C-662D-404B-8B0E-64E668943F0E}"/>
+                <a16:creationId xmlns:a16="http://schemas.microsoft.com/office/drawing/2014/main" id="{3B0F1475-2C89-4F2D-B5CD-974DD42BC683}"/>
               </a:ext>
             </a:extLst>
           </p:cNvPr>
@@ -10199,7 +10308,7 @@
           <p:cNvPr id="4" name="text-114">
             <a:extLst xmlns:a="http://schemas.openxmlformats.org/drawingml/2006/main">
               <a:ext uri="{FF2B5EF4-FFF2-40B4-BE49-F238E27FC236}">
-                <a16:creationId xmlns:a16="http://schemas.microsoft.com/office/drawing/2014/main" id="{F616F7C2-48D1-4DA1-9C89-51BEC4AD3606}"/>
+                <a16:creationId xmlns:a16="http://schemas.microsoft.com/office/drawing/2014/main" id="{199C44B2-1CD9-4727-B2CC-5B2F49726AD0}"/>
               </a:ext>
             </a:extLst>
           </p:cNvPr>
@@ -10257,7 +10366,7 @@
                 <a:ea typeface="DejaVu Sans"/>
                 <a:cs typeface="DejaVu Sans"/>
               </a:rPr>
-              <a:t>1.13  •  [3]; собственный расчёт в Colab</a:t>
+              <a:t>1.13   [3]. Расчёт в Colab</a:t>
             </a:r>
           </a:p>
         </p:txBody>
@@ -10267,7 +10376,7 @@
           <p:cNvPr id="5" name="text-115">
             <a:extLst xmlns:a="http://schemas.openxmlformats.org/drawingml/2006/main">
               <a:ext uri="{FF2B5EF4-FFF2-40B4-BE49-F238E27FC236}">
-                <a16:creationId xmlns:a16="http://schemas.microsoft.com/office/drawing/2014/main" id="{E3F54B0C-E76C-434F-B07E-8F6EADF0892E}"/>
+                <a16:creationId xmlns:a16="http://schemas.microsoft.com/office/drawing/2014/main" id="{E53D0174-1442-4ACC-8448-0E6F06973E88}"/>
               </a:ext>
             </a:extLst>
           </p:cNvPr>
@@ -10335,7 +10444,7 @@
           <p:cNvPr id="6" name="">
             <a:extLst xmlns:a="http://schemas.openxmlformats.org/drawingml/2006/main">
               <a:ext uri="{FF2B5EF4-FFF2-40B4-BE49-F238E27FC236}">
-                <a16:creationId xmlns:a16="http://schemas.microsoft.com/office/drawing/2014/main" id="{FECCF406-B3AD-4258-ADAE-2FD3545EA8B6}"/>
+                <a16:creationId xmlns:a16="http://schemas.microsoft.com/office/drawing/2014/main" id="{91C0E2D4-4D02-4863-8DFA-BA255669B4C0}"/>
               </a:ext>
             </a:extLst>
           </p:cNvPr>
@@ -10659,7 +10768,7 @@
           <p:cNvPr id="7" name="text-116">
             <a:extLst xmlns:a="http://schemas.openxmlformats.org/drawingml/2006/main">
               <a:ext uri="{FF2B5EF4-FFF2-40B4-BE49-F238E27FC236}">
-                <a16:creationId xmlns:a16="http://schemas.microsoft.com/office/drawing/2014/main" id="{CB7AE887-5D32-43EB-8897-8176B64997DF}"/>
+                <a16:creationId xmlns:a16="http://schemas.microsoft.com/office/drawing/2014/main" id="{7F6C5C11-09B8-48B1-BED4-61762B063C0E}"/>
               </a:ext>
             </a:extLst>
           </p:cNvPr>
@@ -10717,7 +10826,7 @@
                 <a:ea typeface="DejaVu Sans"/>
                 <a:cs typeface="DejaVu Sans"/>
               </a:rPr>
-              <a:t>Код складывает расстояния для каждого кандидата.</a:t>
+              <a:t>Код перебирает обучающие окна и складывает расстояния.</a:t>
             </a:r>
           </a:p>
           <a:p xmlns:a="http://schemas.openxmlformats.org/drawingml/2006/main">
@@ -10740,7 +10849,7 @@
                 <a:ea typeface="DejaVu Sans"/>
                 <a:cs typeface="DejaVu Sans"/>
               </a:rPr>
-              <a:t>N05 и A06 дают минимальную сумму в своих классах.</a:t>
+              <a:t>Наименьшие суммы получились у N05 и A06.</a:t>
             </a:r>
           </a:p>
         </p:txBody>
@@ -10750,7 +10859,7 @@
           <p:cNvPr id="8" name="">
             <a:extLst xmlns:a="http://schemas.openxmlformats.org/drawingml/2006/main">
               <a:ext uri="{FF2B5EF4-FFF2-40B4-BE49-F238E27FC236}">
-                <a16:creationId xmlns:a16="http://schemas.microsoft.com/office/drawing/2014/main" id="{903AAC72-6EC3-476A-8A92-5C2F9477CA42}"/>
+                <a16:creationId xmlns:a16="http://schemas.microsoft.com/office/drawing/2014/main" id="{8B83AF5B-5D11-44F5-B155-47043E1F15BA}"/>
               </a:ext>
             </a:extLst>
           </p:cNvPr>
@@ -10780,7 +10889,7 @@
           <p:cNvPr id="9" name="text-117">
             <a:extLst xmlns:a="http://schemas.openxmlformats.org/drawingml/2006/main">
               <a:ext uri="{FF2B5EF4-FFF2-40B4-BE49-F238E27FC236}">
-                <a16:creationId xmlns:a16="http://schemas.microsoft.com/office/drawing/2014/main" id="{B6770731-2C30-4F6D-86BF-92933B6205B7}"/>
+                <a16:creationId xmlns:a16="http://schemas.microsoft.com/office/drawing/2014/main" id="{855DA472-CCDF-4262-BFE0-5C0982EF4F3E}"/>
               </a:ext>
             </a:extLst>
           </p:cNvPr>
@@ -10838,7 +10947,7 @@
                 <a:ea typeface="DejaVu Sans"/>
                 <a:cs typeface="DejaVu Sans"/>
               </a:rPr>
-              <a:t>Это образцы нашей выборки, а не универсальные пороги атаки</a:t>
+              <a:t>Для другой сети эталоны могут получиться другими.</a:t>
             </a:r>
           </a:p>
         </p:txBody>
@@ -10846,7 +10955,7 @@
     </p:spTree>
     <p:extLst>
       <p:ext uri="{BB962C8B-B14F-4D97-AF65-F5344CB8AC3E}">
-        <p14:creationId xmlns:p14="http://schemas.microsoft.com/office/powerpoint/2010/main" val="125117406"/>
+        <p14:creationId xmlns:p14="http://schemas.microsoft.com/office/powerpoint/2010/main" val="1143742802"/>
       </p:ext>
     </p:extLst>
   </p:cSld>
@@ -10877,7 +10986,7 @@
           <p:cNvPr id="11" name="text-118">
             <a:extLst xmlns:a="http://schemas.openxmlformats.org/drawingml/2006/main">
               <a:ext uri="{FF2B5EF4-FFF2-40B4-BE49-F238E27FC236}">
-                <a16:creationId xmlns:a16="http://schemas.microsoft.com/office/drawing/2014/main" id="{396AE670-7780-4CEB-A91F-FDC226E27988}"/>
+                <a16:creationId xmlns:a16="http://schemas.microsoft.com/office/drawing/2014/main" id="{F145BD80-EA51-4A15-9ABD-1820157012A3}"/>
               </a:ext>
             </a:extLst>
           </p:cNvPr>
@@ -10935,7 +11044,7 @@
                 <a:ea typeface="DejaVu Sans"/>
                 <a:cs typeface="DejaVu Sans"/>
               </a:rPr>
-              <a:t>Окно T07: классификация по эталонам</a:t>
+              <a:t>Что эталоны скажут об окне T07</a:t>
             </a:r>
           </a:p>
         </p:txBody>
@@ -10945,7 +11054,7 @@
           <p:cNvPr id="2" name="text-119">
             <a:extLst xmlns:a="http://schemas.openxmlformats.org/drawingml/2006/main">
               <a:ext uri="{FF2B5EF4-FFF2-40B4-BE49-F238E27FC236}">
-                <a16:creationId xmlns:a16="http://schemas.microsoft.com/office/drawing/2014/main" id="{97A6DA22-CA40-43A4-87A0-903D6BCAD87A}"/>
+                <a16:creationId xmlns:a16="http://schemas.microsoft.com/office/drawing/2014/main" id="{B5E0651E-6142-45D9-A0EC-B851EC73719B}"/>
               </a:ext>
             </a:extLst>
           </p:cNvPr>
@@ -11003,7 +11112,7 @@
                 <a:ea typeface="DejaVu Sans"/>
                 <a:cs typeface="DejaVu Sans"/>
               </a:rPr>
-              <a:t>1200 SYN/с и 16% незавершённых; известный учебный класс — норма</a:t>
+              <a:t>В T07 приходит 1200 SYN/с, 16% попыток не завершены. По условию это норма.</a:t>
             </a:r>
           </a:p>
         </p:txBody>
@@ -11013,7 +11122,7 @@
           <p:cNvPr id="3" name="">
             <a:extLst xmlns:a="http://schemas.openxmlformats.org/drawingml/2006/main">
               <a:ext uri="{FF2B5EF4-FFF2-40B4-BE49-F238E27FC236}">
-                <a16:creationId xmlns:a16="http://schemas.microsoft.com/office/drawing/2014/main" id="{51A64BD5-40C1-4E06-B075-D1AD4CDECF1C}"/>
+                <a16:creationId xmlns:a16="http://schemas.microsoft.com/office/drawing/2014/main" id="{83D93A60-ED5F-40DB-A5C0-06272223FC8A}"/>
               </a:ext>
             </a:extLst>
           </p:cNvPr>
@@ -11043,7 +11152,7 @@
           <p:cNvPr id="4" name="text-120">
             <a:extLst xmlns:a="http://schemas.openxmlformats.org/drawingml/2006/main">
               <a:ext uri="{FF2B5EF4-FFF2-40B4-BE49-F238E27FC236}">
-                <a16:creationId xmlns:a16="http://schemas.microsoft.com/office/drawing/2014/main" id="{16B82DBF-A615-44CF-A558-9319657100D2}"/>
+                <a16:creationId xmlns:a16="http://schemas.microsoft.com/office/drawing/2014/main" id="{6932FBC9-780C-43BD-8995-0B9028D5DBE0}"/>
               </a:ext>
             </a:extLst>
           </p:cNvPr>
@@ -11111,7 +11220,7 @@
           <p:cNvPr id="5" name="text-121">
             <a:extLst xmlns:a="http://schemas.openxmlformats.org/drawingml/2006/main">
               <a:ext uri="{FF2B5EF4-FFF2-40B4-BE49-F238E27FC236}">
-                <a16:creationId xmlns:a16="http://schemas.microsoft.com/office/drawing/2014/main" id="{E4FE6064-AC22-4A87-80F4-6BA3883A9B16}"/>
+                <a16:creationId xmlns:a16="http://schemas.microsoft.com/office/drawing/2014/main" id="{83334771-4420-4273-AF46-AFC0BC3E37C4}"/>
               </a:ext>
             </a:extLst>
           </p:cNvPr>
@@ -11179,7 +11288,7 @@
           <p:cNvPr id="6" name="text-122">
             <a:extLst xmlns:a="http://schemas.openxmlformats.org/drawingml/2006/main">
               <a:ext uri="{FF2B5EF4-FFF2-40B4-BE49-F238E27FC236}">
-                <a16:creationId xmlns:a16="http://schemas.microsoft.com/office/drawing/2014/main" id="{FE13FBF6-FCA8-475D-8FB2-5C8F9ECF803E}"/>
+                <a16:creationId xmlns:a16="http://schemas.microsoft.com/office/drawing/2014/main" id="{A659F34D-BEB8-4406-98B3-30CEB6231269}"/>
               </a:ext>
             </a:extLst>
           </p:cNvPr>
@@ -11237,7 +11346,7 @@
                 <a:ea typeface="DejaVu Sans"/>
                 <a:cs typeface="DejaVu Sans"/>
               </a:rPr>
-              <a:t>После масштаба: (1,20; 0,16)</a:t>
+              <a:t>Делим 1200 на 1000, а 16 на 100. Получаем (1,20; 0,16).</a:t>
             </a:r>
           </a:p>
         </p:txBody>
@@ -11247,7 +11356,7 @@
           <p:cNvPr id="7" name="">
             <a:extLst xmlns:a="http://schemas.openxmlformats.org/drawingml/2006/main">
               <a:ext uri="{FF2B5EF4-FFF2-40B4-BE49-F238E27FC236}">
-                <a16:creationId xmlns:a16="http://schemas.microsoft.com/office/drawing/2014/main" id="{9FAAD5B7-9E70-4CD2-91A1-D8FFEF661402}"/>
+                <a16:creationId xmlns:a16="http://schemas.microsoft.com/office/drawing/2014/main" id="{A47C74C9-3E3A-488E-B0C7-4CBFD0F929B3}"/>
               </a:ext>
             </a:extLst>
           </p:cNvPr>
@@ -11331,7 +11440,7 @@
                           <a:ea typeface="DejaVu Sans"/>
                           <a:cs typeface="DejaVu Sans"/>
                         </a:rPr>
-                        <a:t>0,600083</a:t>
+                        <a:t>0,600</a:t>
                       </a:r>
                     </a:p>
                   </a:txBody>
@@ -11355,7 +11464,7 @@
                           <a:ea typeface="DejaVu Sans"/>
                           <a:cs typeface="DejaVu Sans"/>
                         </a:rPr>
-                        <a:t>0,500100</a:t>
+                        <a:t>0,500</a:t>
                       </a:r>
                     </a:p>
                   </a:txBody>
@@ -11375,7 +11484,7 @@
           <p:cNvPr id="8" name="text-123">
             <a:extLst xmlns:a="http://schemas.openxmlformats.org/drawingml/2006/main">
               <a:ext uri="{FF2B5EF4-FFF2-40B4-BE49-F238E27FC236}">
-                <a16:creationId xmlns:a16="http://schemas.microsoft.com/office/drawing/2014/main" id="{6858149E-AF8B-4212-9EB9-621C3806632B}"/>
+                <a16:creationId xmlns:a16="http://schemas.microsoft.com/office/drawing/2014/main" id="{918D8135-FAA7-4632-9BD4-63CF2F0492C5}"/>
               </a:ext>
             </a:extLst>
           </p:cNvPr>
@@ -11433,7 +11542,7 @@
                 <a:ea typeface="DejaVu Sans"/>
                 <a:cs typeface="DejaVu Sans"/>
               </a:rPr>
-              <a:t>Ближе эталон атаки → прогноз «SYN-flood» → ошибка.</a:t>
+              <a:t>Ближе оказался эталон атаки. Правило ошиблось.</a:t>
             </a:r>
           </a:p>
           <a:p xmlns:a="http://schemas.openxmlformats.org/drawingml/2006/main">
@@ -11456,7 +11565,7 @@
                 <a:ea typeface="DejaVu Sans"/>
                 <a:cs typeface="DejaVu Sans"/>
               </a:rPr>
-              <a:t>Отступ = 0,500100 − 0,600083 ≈ −0,099983</a:t>
+              <a:t>Отступ ≈ 0,500 − 0,600 = −0,100</a:t>
             </a:r>
           </a:p>
         </p:txBody>
@@ -11466,7 +11575,7 @@
           <p:cNvPr id="9" name="">
             <a:extLst xmlns:a="http://schemas.openxmlformats.org/drawingml/2006/main">
               <a:ext uri="{FF2B5EF4-FFF2-40B4-BE49-F238E27FC236}">
-                <a16:creationId xmlns:a16="http://schemas.microsoft.com/office/drawing/2014/main" id="{506D45D2-CD63-4096-BB3F-C34554B25390}"/>
+                <a16:creationId xmlns:a16="http://schemas.microsoft.com/office/drawing/2014/main" id="{CE584D60-7DFD-4A36-8CB7-E01A0257FD3B}"/>
               </a:ext>
             </a:extLst>
           </p:cNvPr>
@@ -11496,7 +11605,7 @@
           <p:cNvPr id="10" name="text-124">
             <a:extLst xmlns:a="http://schemas.openxmlformats.org/drawingml/2006/main">
               <a:ext uri="{FF2B5EF4-FFF2-40B4-BE49-F238E27FC236}">
-                <a16:creationId xmlns:a16="http://schemas.microsoft.com/office/drawing/2014/main" id="{CA54F135-3D7C-4E66-B386-48D54066365E}"/>
+                <a16:creationId xmlns:a16="http://schemas.microsoft.com/office/drawing/2014/main" id="{1ACB6896-54C8-4AE7-9D53-9D4D5AF37405}"/>
               </a:ext>
             </a:extLst>
           </p:cNvPr>
@@ -11554,7 +11663,7 @@
                 <a:ea typeface="DejaVu Sans"/>
                 <a:cs typeface="DejaVu Sans"/>
               </a:rPr>
-              <a:t>Один образец грубо описал норму при высокой легитимной нагрузке</a:t>
+              <a:t>В этом примере высокая обычная нагрузка оказалась похожа на атаку</a:t>
             </a:r>
           </a:p>
         </p:txBody>
@@ -11562,7 +11671,7 @@
     </p:spTree>
     <p:extLst>
       <p:ext uri="{BB962C8B-B14F-4D97-AF65-F5344CB8AC3E}">
-        <p14:creationId xmlns:p14="http://schemas.microsoft.com/office/powerpoint/2010/main" val="340933120"/>
+        <p14:creationId xmlns:p14="http://schemas.microsoft.com/office/powerpoint/2010/main" val="18917047"/>
       </p:ext>
     </p:extLst>
   </p:cSld>
@@ -11593,7 +11702,7 @@
           <p:cNvPr id="10" name="text-125">
             <a:extLst xmlns:a="http://schemas.openxmlformats.org/drawingml/2006/main">
               <a:ext uri="{FF2B5EF4-FFF2-40B4-BE49-F238E27FC236}">
-                <a16:creationId xmlns:a16="http://schemas.microsoft.com/office/drawing/2014/main" id="{B1401903-FB3E-4B6A-8EB0-A53D1EE61D56}"/>
+                <a16:creationId xmlns:a16="http://schemas.microsoft.com/office/drawing/2014/main" id="{8A637259-BE99-42B6-AF25-09730BBBBE98}"/>
               </a:ext>
             </a:extLst>
           </p:cNvPr>
@@ -11651,7 +11760,7 @@
                 <a:ea typeface="DejaVu Sans"/>
                 <a:cs typeface="DejaVu Sans"/>
               </a:rPr>
-              <a:t>Обучаем SVM на той же выборке</a:t>
+              <a:t>Теперь обучим SVM на тех же данных</a:t>
             </a:r>
           </a:p>
         </p:txBody>
@@ -11661,7 +11770,7 @@
           <p:cNvPr id="2" name="text-126">
             <a:extLst xmlns:a="http://schemas.openxmlformats.org/drawingml/2006/main">
               <a:ext uri="{FF2B5EF4-FFF2-40B4-BE49-F238E27FC236}">
-                <a16:creationId xmlns:a16="http://schemas.microsoft.com/office/drawing/2014/main" id="{C5336183-65A2-4DC0-AEB4-4F14F0950179}"/>
+                <a16:creationId xmlns:a16="http://schemas.microsoft.com/office/drawing/2014/main" id="{6A193BEA-F824-4154-9074-CFCDB8C9914C}"/>
               </a:ext>
             </a:extLst>
           </p:cNvPr>
@@ -11719,7 +11828,7 @@
                 <a:ea typeface="DejaVu Sans"/>
                 <a:cs typeface="DejaVu Sans"/>
               </a:rPr>
-              <a:t>SVC — реализация алгоритма SVM в библиотеке scikit-learn</a:t>
+              <a:t>В библиотеке scikit-learn этот алгоритм реализует класс SVC</a:t>
             </a:r>
           </a:p>
         </p:txBody>
@@ -11729,7 +11838,7 @@
           <p:cNvPr id="3" name="">
             <a:extLst xmlns:a="http://schemas.openxmlformats.org/drawingml/2006/main">
               <a:ext uri="{FF2B5EF4-FFF2-40B4-BE49-F238E27FC236}">
-                <a16:creationId xmlns:a16="http://schemas.microsoft.com/office/drawing/2014/main" id="{B2BDB7A4-979F-4C35-AB95-55F4131445B3}"/>
+                <a16:creationId xmlns:a16="http://schemas.microsoft.com/office/drawing/2014/main" id="{66BA1136-C994-4607-B50A-07F0F814538C}"/>
               </a:ext>
             </a:extLst>
           </p:cNvPr>
@@ -11759,7 +11868,7 @@
           <p:cNvPr id="4" name="text-127">
             <a:extLst xmlns:a="http://schemas.openxmlformats.org/drawingml/2006/main">
               <a:ext uri="{FF2B5EF4-FFF2-40B4-BE49-F238E27FC236}">
-                <a16:creationId xmlns:a16="http://schemas.microsoft.com/office/drawing/2014/main" id="{56287DC1-C408-4288-B53C-6EE054C67021}"/>
+                <a16:creationId xmlns:a16="http://schemas.microsoft.com/office/drawing/2014/main" id="{55A220C0-1428-4651-9A15-991E20E61E58}"/>
               </a:ext>
             </a:extLst>
           </p:cNvPr>
@@ -11817,7 +11926,7 @@
                 <a:ea typeface="DejaVu Sans"/>
                 <a:cs typeface="DejaVu Sans"/>
               </a:rPr>
-              <a:t>1.13  •  [5]; собственный расчёт</a:t>
+              <a:t>1.13   [5]. Расчёт в Colab</a:t>
             </a:r>
           </a:p>
         </p:txBody>
@@ -11827,7 +11936,7 @@
           <p:cNvPr id="5" name="text-128">
             <a:extLst xmlns:a="http://schemas.openxmlformats.org/drawingml/2006/main">
               <a:ext uri="{FF2B5EF4-FFF2-40B4-BE49-F238E27FC236}">
-                <a16:creationId xmlns:a16="http://schemas.microsoft.com/office/drawing/2014/main" id="{2AF76D68-5029-425F-BD9B-0243CE2F486F}"/>
+                <a16:creationId xmlns:a16="http://schemas.microsoft.com/office/drawing/2014/main" id="{9CB83D84-F845-4915-908D-FD1C2F4621A2}"/>
               </a:ext>
             </a:extLst>
           </p:cNvPr>
@@ -11895,7 +12004,7 @@
           <p:cNvPr id="6" name="text-129">
             <a:extLst xmlns:a="http://schemas.openxmlformats.org/drawingml/2006/main">
               <a:ext uri="{FF2B5EF4-FFF2-40B4-BE49-F238E27FC236}">
-                <a16:creationId xmlns:a16="http://schemas.microsoft.com/office/drawing/2014/main" id="{5EB9FBCE-9C89-426E-A67D-CFD97292E312}"/>
+                <a16:creationId xmlns:a16="http://schemas.microsoft.com/office/drawing/2014/main" id="{5E3E9EDC-1779-4325-A0DE-1305E55B8DFC}"/>
               </a:ext>
             </a:extLst>
           </p:cNvPr>
@@ -12009,7 +12118,7 @@
           <p:cNvPr id="7" name="text-130">
             <a:extLst xmlns:a="http://schemas.openxmlformats.org/drawingml/2006/main">
               <a:ext uri="{FF2B5EF4-FFF2-40B4-BE49-F238E27FC236}">
-                <a16:creationId xmlns:a16="http://schemas.microsoft.com/office/drawing/2014/main" id="{931B9B91-BA75-4CAC-8554-C072EA140776}"/>
+                <a16:creationId xmlns:a16="http://schemas.microsoft.com/office/drawing/2014/main" id="{ACFA8C8E-70D8-4407-AB82-9D323F257330}"/>
               </a:ext>
             </a:extLst>
           </p:cNvPr>
@@ -12067,7 +12176,7 @@
                 <a:ea typeface="DejaVu Sans"/>
                 <a:cs typeface="DejaVu Sans"/>
               </a:rPr>
-              <a:t>X_train — признаки всех 20 обучающих окон.</a:t>
+              <a:t>В X_train записаны признаки всех 20 обучающих окон.</a:t>
             </a:r>
           </a:p>
           <a:p xmlns:a="http://schemas.openxmlformats.org/drawingml/2006/main">
@@ -12090,7 +12199,7 @@
                 <a:ea typeface="DejaVu Sans"/>
                 <a:cs typeface="DejaVu Sans"/>
               </a:rPr>
-              <a:t>y_train — их известные метки: норма = −1, атака = +1.</a:t>
+              <a:t>В y_train хранятся метки: −1 для нормы и +1 для атаки.</a:t>
             </a:r>
           </a:p>
         </p:txBody>
@@ -12100,7 +12209,7 @@
           <p:cNvPr id="8" name="">
             <a:extLst xmlns:a="http://schemas.openxmlformats.org/drawingml/2006/main">
               <a:ext uri="{FF2B5EF4-FFF2-40B4-BE49-F238E27FC236}">
-                <a16:creationId xmlns:a16="http://schemas.microsoft.com/office/drawing/2014/main" id="{6216F8A4-9C00-4226-B009-0791B2E3892C}"/>
+                <a16:creationId xmlns:a16="http://schemas.microsoft.com/office/drawing/2014/main" id="{EA8304BC-4A31-402C-B43B-779265C47469}"/>
               </a:ext>
             </a:extLst>
           </p:cNvPr>
@@ -12130,7 +12239,7 @@
           <p:cNvPr id="9" name="text-131">
             <a:extLst xmlns:a="http://schemas.openxmlformats.org/drawingml/2006/main">
               <a:ext uri="{FF2B5EF4-FFF2-40B4-BE49-F238E27FC236}">
-                <a16:creationId xmlns:a16="http://schemas.microsoft.com/office/drawing/2014/main" id="{F2B2600F-E018-4C62-B280-05989BA19C9D}"/>
+                <a16:creationId xmlns:a16="http://schemas.microsoft.com/office/drawing/2014/main" id="{188E9063-383B-4EC8-8EDC-AAEFB0906739}"/>
               </a:ext>
             </a:extLst>
           </p:cNvPr>
@@ -12188,7 +12297,7 @@
                 <a:ea typeface="DejaVu Sans"/>
                 <a:cs typeface="DejaVu Sans"/>
               </a:rPr>
-              <a:t>Масштаб тот же. Теперь проверим неизменённое окно T07</a:t>
+              <a:t>Подадим в SVM те же измерения T07: 1200 SYN/с и 16%</a:t>
             </a:r>
           </a:p>
         </p:txBody>
@@ -12196,7 +12305,7 @@
     </p:spTree>
     <p:extLst>
       <p:ext uri="{BB962C8B-B14F-4D97-AF65-F5344CB8AC3E}">
-        <p14:creationId xmlns:p14="http://schemas.microsoft.com/office/powerpoint/2010/main" val="1169898748"/>
+        <p14:creationId xmlns:p14="http://schemas.microsoft.com/office/powerpoint/2010/main" val="48918184"/>
       </p:ext>
     </p:extLst>
   </p:cSld>
@@ -12227,7 +12336,7 @@
           <p:cNvPr id="9" name="text-132">
             <a:extLst xmlns:a="http://schemas.openxmlformats.org/drawingml/2006/main">
               <a:ext uri="{FF2B5EF4-FFF2-40B4-BE49-F238E27FC236}">
-                <a16:creationId xmlns:a16="http://schemas.microsoft.com/office/drawing/2014/main" id="{51067CDF-2B30-4FC5-B0CA-7A80CA18C83B}"/>
+                <a16:creationId xmlns:a16="http://schemas.microsoft.com/office/drawing/2014/main" id="{FD6BE90E-9B35-44B7-B6B4-62C7E6C17C4A}"/>
               </a:ext>
             </a:extLst>
           </p:cNvPr>
@@ -12285,7 +12394,7 @@
                 <a:ea typeface="DejaVu Sans"/>
                 <a:cs typeface="DejaVu Sans"/>
               </a:rPr>
-              <a:t>То же окно T07: результат SVM</a:t>
+              <a:t>Как SVM распознаёт то же окно T07</a:t>
             </a:r>
           </a:p>
         </p:txBody>
@@ -12295,7 +12404,7 @@
           <p:cNvPr id="2" name="text-133">
             <a:extLst xmlns:a="http://schemas.openxmlformats.org/drawingml/2006/main">
               <a:ext uri="{FF2B5EF4-FFF2-40B4-BE49-F238E27FC236}">
-                <a16:creationId xmlns:a16="http://schemas.microsoft.com/office/drawing/2014/main" id="{CFB235DB-63FF-41EF-8C56-1C47CBB75349}"/>
+                <a16:creationId xmlns:a16="http://schemas.microsoft.com/office/drawing/2014/main" id="{CA3139DB-41D8-453B-9CE9-F56BD1EF2D09}"/>
               </a:ext>
             </a:extLst>
           </p:cNvPr>
@@ -12353,7 +12462,7 @@
                 <a:ea typeface="DejaVu Sans"/>
                 <a:cs typeface="DejaVu Sans"/>
               </a:rPr>
-              <a:t>1200 SYN/с и 16% → прогноз «норма»; в этом примере ответ верный</a:t>
+              <a:t>SVM выбирает норму. Для T07 этот ответ совпадает с условием примера.</a:t>
             </a:r>
           </a:p>
         </p:txBody>
@@ -12363,7 +12472,7 @@
           <p:cNvPr id="3" name="">
             <a:extLst xmlns:a="http://schemas.openxmlformats.org/drawingml/2006/main">
               <a:ext uri="{FF2B5EF4-FFF2-40B4-BE49-F238E27FC236}">
-                <a16:creationId xmlns:a16="http://schemas.microsoft.com/office/drawing/2014/main" id="{97331B27-2E79-42CD-80D9-6FDF11C34FA6}"/>
+                <a16:creationId xmlns:a16="http://schemas.microsoft.com/office/drawing/2014/main" id="{F3C4AE19-7270-49AB-945A-DBE53875F870}"/>
               </a:ext>
             </a:extLst>
           </p:cNvPr>
@@ -12393,7 +12502,7 @@
           <p:cNvPr id="4" name="text-134">
             <a:extLst xmlns:a="http://schemas.openxmlformats.org/drawingml/2006/main">
               <a:ext uri="{FF2B5EF4-FFF2-40B4-BE49-F238E27FC236}">
-                <a16:creationId xmlns:a16="http://schemas.microsoft.com/office/drawing/2014/main" id="{F57371C9-DDE3-4795-B5E9-09DB9AACBA3F}"/>
+                <a16:creationId xmlns:a16="http://schemas.microsoft.com/office/drawing/2014/main" id="{B07D3231-835A-40D6-99A0-697E660A977D}"/>
               </a:ext>
             </a:extLst>
           </p:cNvPr>
@@ -12461,7 +12570,7 @@
           <p:cNvPr id="5" name="text-135">
             <a:extLst xmlns:a="http://schemas.openxmlformats.org/drawingml/2006/main">
               <a:ext uri="{FF2B5EF4-FFF2-40B4-BE49-F238E27FC236}">
-                <a16:creationId xmlns:a16="http://schemas.microsoft.com/office/drawing/2014/main" id="{C2E16937-49D3-4F8C-9109-5BBA533AF556}"/>
+                <a16:creationId xmlns:a16="http://schemas.microsoft.com/office/drawing/2014/main" id="{46EF8727-3B47-47F4-B3BB-4DE2D3EB5AF2}"/>
               </a:ext>
             </a:extLst>
           </p:cNvPr>
@@ -12529,7 +12638,7 @@
           <p:cNvPr id="6" name="">
             <a:extLst xmlns:a="http://schemas.openxmlformats.org/drawingml/2006/main">
               <a:ext uri="{FF2B5EF4-FFF2-40B4-BE49-F238E27FC236}">
-                <a16:creationId xmlns:a16="http://schemas.microsoft.com/office/drawing/2014/main" id="{D4016346-1113-4685-89D4-DA58E0A2EE62}"/>
+                <a16:creationId xmlns:a16="http://schemas.microsoft.com/office/drawing/2014/main" id="{75DB102E-A6B4-4F1F-8655-CFD0B90ACA74}"/>
               </a:ext>
             </a:extLst>
           </p:cNvPr>
@@ -12564,7 +12673,7 @@
                           <a:ea typeface="DejaVu Sans"/>
                           <a:cs typeface="DejaVu Sans"/>
                         </a:rPr>
-                        <a:t>Число правила f</a:t>
+                        <a:t>Оценка модели f</a:t>
                       </a:r>
                     </a:p>
                   </a:txBody>
@@ -12638,7 +12747,7 @@
                           <a:ea typeface="DejaVu Sans"/>
                           <a:cs typeface="DejaVu Sans"/>
                         </a:rPr>
-                        <a:t>−0,248833</a:t>
+                        <a:t>−0,249</a:t>
                       </a:r>
                     </a:p>
                   </a:txBody>
@@ -12662,7 +12771,7 @@
                           <a:ea typeface="DejaVu Sans"/>
                           <a:cs typeface="DejaVu Sans"/>
                         </a:rPr>
-                        <a:t>+0,101921</a:t>
+                        <a:t>+0,102</a:t>
                       </a:r>
                     </a:p>
                   </a:txBody>
@@ -12686,7 +12795,7 @@
                           <a:ea typeface="DejaVu Sans"/>
                           <a:cs typeface="DejaVu Sans"/>
                         </a:rPr>
-                        <a:t>0,101921</a:t>
+                        <a:t>0,102</a:t>
                       </a:r>
                     </a:p>
                   </a:txBody>
@@ -12706,7 +12815,7 @@
           <p:cNvPr id="7" name="text-136">
             <a:extLst xmlns:a="http://schemas.openxmlformats.org/drawingml/2006/main">
               <a:ext uri="{FF2B5EF4-FFF2-40B4-BE49-F238E27FC236}">
-                <a16:creationId xmlns:a16="http://schemas.microsoft.com/office/drawing/2014/main" id="{F66E89C8-F281-4710-87B4-D2BF799E26EE}"/>
+                <a16:creationId xmlns:a16="http://schemas.microsoft.com/office/drawing/2014/main" id="{58A6F16E-0A02-46BF-86FD-EFFA23D42616}"/>
               </a:ext>
             </a:extLst>
           </p:cNvPr>
@@ -12820,7 +12929,7 @@
           <p:cNvPr id="8" name="text-137">
             <a:extLst xmlns:a="http://schemas.openxmlformats.org/drawingml/2006/main">
               <a:ext uri="{FF2B5EF4-FFF2-40B4-BE49-F238E27FC236}">
-                <a16:creationId xmlns:a16="http://schemas.microsoft.com/office/drawing/2014/main" id="{E5ABBE6B-2F67-4CB0-B996-A0496270F78D}"/>
+                <a16:creationId xmlns:a16="http://schemas.microsoft.com/office/drawing/2014/main" id="{D36544A9-960F-408F-9AC2-8590C36FE698}"/>
               </a:ext>
             </a:extLst>
           </p:cNvPr>
@@ -12878,7 +12987,7 @@
                 <a:ea typeface="DejaVu Sans"/>
                 <a:cs typeface="DejaVu Sans"/>
               </a:rPr>
-              <a:t>T07 — одно из X_check. Запас измерен в масштабе признаков.</a:t>
+              <a:t>Отступ γ положительный, потому что ответ верный. Запас r ≈ 0,102.</a:t>
             </a:r>
           </a:p>
           <a:p xmlns:a="http://schemas.openxmlformats.org/drawingml/2006/main">
@@ -12901,7 +13010,7 @@
                 <a:ea typeface="DejaVu Sans"/>
                 <a:cs typeface="DejaVu Sans"/>
               </a:rPr>
-              <a:t>Исправление одного случая не доказывает превосходство SVM.</a:t>
+              <a:t>По одному исправленному примеру нельзя судить, какой метод лучше в целом.</a:t>
             </a:r>
           </a:p>
         </p:txBody>
@@ -12909,7 +13018,7 @@
     </p:spTree>
     <p:extLst>
       <p:ext uri="{BB962C8B-B14F-4D97-AF65-F5344CB8AC3E}">
-        <p14:creationId xmlns:p14="http://schemas.microsoft.com/office/powerpoint/2010/main" val="173108407"/>
+        <p14:creationId xmlns:p14="http://schemas.microsoft.com/office/powerpoint/2010/main" val="1116797058"/>
       </p:ext>
     </p:extLst>
   </p:cSld>
@@ -12940,7 +13049,7 @@
           <p:cNvPr id="8" name="text-138">
             <a:extLst xmlns:a="http://schemas.openxmlformats.org/drawingml/2006/main">
               <a:ext uri="{FF2B5EF4-FFF2-40B4-BE49-F238E27FC236}">
-                <a16:creationId xmlns:a16="http://schemas.microsoft.com/office/drawing/2014/main" id="{712D9086-CF86-4692-83EF-8B8B9BC129F5}"/>
+                <a16:creationId xmlns:a16="http://schemas.microsoft.com/office/drawing/2014/main" id="{BF2341D4-7AB3-4C96-ACC1-E3558D1DF6C7}"/>
               </a:ext>
             </a:extLst>
           </p:cNvPr>
@@ -12998,7 +13107,7 @@
                 <a:ea typeface="DejaVu Sans"/>
                 <a:cs typeface="DejaVu Sans"/>
               </a:rPr>
-              <a:t>Считаем отступы для восьми окон</a:t>
+              <a:t>Что получилось для всех восьми окон</a:t>
             </a:r>
           </a:p>
         </p:txBody>
@@ -13008,7 +13117,7 @@
           <p:cNvPr id="2" name="text-139">
             <a:extLst xmlns:a="http://schemas.openxmlformats.org/drawingml/2006/main">
               <a:ext uri="{FF2B5EF4-FFF2-40B4-BE49-F238E27FC236}">
-                <a16:creationId xmlns:a16="http://schemas.microsoft.com/office/drawing/2014/main" id="{94977D7D-ED2D-4393-AF5D-657B99AFCA48}"/>
+                <a16:creationId xmlns:a16="http://schemas.microsoft.com/office/drawing/2014/main" id="{323A26A9-5396-4F07-9E5B-1FDA576FEB2B}"/>
               </a:ext>
             </a:extLst>
           </p:cNvPr>
@@ -13066,7 +13175,7 @@
                 <a:ea typeface="DejaVu Sans"/>
                 <a:cs typeface="DejaVu Sans"/>
               </a:rPr>
-              <a:t>Известная метка нужна для знака γ; r — неотрицательное расстояние</a:t>
+              <a:t>Сравним ответы модели с классами, которые мы задали в учебной таблице</a:t>
             </a:r>
           </a:p>
         </p:txBody>
@@ -13076,7 +13185,7 @@
           <p:cNvPr id="3" name="">
             <a:extLst xmlns:a="http://schemas.openxmlformats.org/drawingml/2006/main">
               <a:ext uri="{FF2B5EF4-FFF2-40B4-BE49-F238E27FC236}">
-                <a16:creationId xmlns:a16="http://schemas.microsoft.com/office/drawing/2014/main" id="{890D6EFB-94DE-46D3-A559-79FC17D1B356}"/>
+                <a16:creationId xmlns:a16="http://schemas.microsoft.com/office/drawing/2014/main" id="{F5142409-8318-4B4E-9DD7-7DBFF34ED6D7}"/>
               </a:ext>
             </a:extLst>
           </p:cNvPr>
@@ -13106,7 +13215,7 @@
           <p:cNvPr id="4" name="text-140">
             <a:extLst xmlns:a="http://schemas.openxmlformats.org/drawingml/2006/main">
               <a:ext uri="{FF2B5EF4-FFF2-40B4-BE49-F238E27FC236}">
-                <a16:creationId xmlns:a16="http://schemas.microsoft.com/office/drawing/2014/main" id="{E55D04DD-1B94-4468-A858-D5978831FDA5}"/>
+                <a16:creationId xmlns:a16="http://schemas.microsoft.com/office/drawing/2014/main" id="{66065485-1F47-453D-8883-526565E48659}"/>
               </a:ext>
             </a:extLst>
           </p:cNvPr>
@@ -13174,7 +13283,7 @@
           <p:cNvPr id="5" name="text-141">
             <a:extLst xmlns:a="http://schemas.openxmlformats.org/drawingml/2006/main">
               <a:ext uri="{FF2B5EF4-FFF2-40B4-BE49-F238E27FC236}">
-                <a16:creationId xmlns:a16="http://schemas.microsoft.com/office/drawing/2014/main" id="{3E066CA7-B4C8-4AF8-96A3-B9FE9BA726DF}"/>
+                <a16:creationId xmlns:a16="http://schemas.microsoft.com/office/drawing/2014/main" id="{8EC1A4DC-9CD8-46E2-862E-3A88504E3B33}"/>
               </a:ext>
             </a:extLst>
           </p:cNvPr>
@@ -13242,7 +13351,7 @@
           <p:cNvPr id="6" name="">
             <a:extLst xmlns:a="http://schemas.openxmlformats.org/drawingml/2006/main">
               <a:ext uri="{FF2B5EF4-FFF2-40B4-BE49-F238E27FC236}">
-                <a16:creationId xmlns:a16="http://schemas.microsoft.com/office/drawing/2014/main" id="{9EE7F7E4-62EA-448F-B5EC-BA1EA09C3353}"/>
+                <a16:creationId xmlns:a16="http://schemas.microsoft.com/office/drawing/2014/main" id="{89D43362-A026-4EAA-8CD5-6C08126B7955}"/>
               </a:ext>
             </a:extLst>
           </p:cNvPr>
@@ -14371,7 +14480,7 @@
           <p:cNvPr id="7" name="text-142">
             <a:extLst xmlns:a="http://schemas.openxmlformats.org/drawingml/2006/main">
               <a:ext uri="{FF2B5EF4-FFF2-40B4-BE49-F238E27FC236}">
-                <a16:creationId xmlns:a16="http://schemas.microsoft.com/office/drawing/2014/main" id="{BF042B15-CAF7-4057-8E45-9EB100BED8F3}"/>
+                <a16:creationId xmlns:a16="http://schemas.microsoft.com/office/drawing/2014/main" id="{1CBFFE22-FE34-4230-A9D2-FB8F518E203E}"/>
               </a:ext>
             </a:extLst>
           </p:cNvPr>
@@ -14429,7 +14538,7 @@
                 <a:ea typeface="DejaVu Sans"/>
                 <a:cs typeface="DejaVu Sans"/>
               </a:rPr>
-              <a:t>γ &lt; 0 — ошибка: T04 и T05. Остальные γ &gt; 0. Во всех строках r = |γ|.</a:t>
+              <a:t>У T04 и T05 отступ γ &lt; 0: модель ошиблась. Запас r = |γ| всегда без минуса.</a:t>
             </a:r>
           </a:p>
         </p:txBody>
@@ -14437,7 +14546,7 @@
     </p:spTree>
     <p:extLst>
       <p:ext uri="{BB962C8B-B14F-4D97-AF65-F5344CB8AC3E}">
-        <p14:creationId xmlns:p14="http://schemas.microsoft.com/office/powerpoint/2010/main" val="1130351640"/>
+        <p14:creationId xmlns:p14="http://schemas.microsoft.com/office/powerpoint/2010/main" val="710587091"/>
       </p:ext>
     </p:extLst>
   </p:cSld>
@@ -14468,7 +14577,7 @@
           <p:cNvPr id="8" name="text-7">
             <a:extLst xmlns:a="http://schemas.openxmlformats.org/drawingml/2006/main">
               <a:ext uri="{FF2B5EF4-FFF2-40B4-BE49-F238E27FC236}">
-                <a16:creationId xmlns:a16="http://schemas.microsoft.com/office/drawing/2014/main" id="{E7D63F50-9696-4539-A660-13F6844E2171}"/>
+                <a16:creationId xmlns:a16="http://schemas.microsoft.com/office/drawing/2014/main" id="{994F1737-6D4D-4555-BF44-22FFD29F1FE3}"/>
               </a:ext>
             </a:extLst>
           </p:cNvPr>
@@ -14536,7 +14645,7 @@
           <p:cNvPr id="2" name="">
             <a:extLst xmlns:a="http://schemas.openxmlformats.org/drawingml/2006/main">
               <a:ext uri="{FF2B5EF4-FFF2-40B4-BE49-F238E27FC236}">
-                <a16:creationId xmlns:a16="http://schemas.microsoft.com/office/drawing/2014/main" id="{0375E5FA-0037-43D4-BDFC-674E2E5F3BF4}"/>
+                <a16:creationId xmlns:a16="http://schemas.microsoft.com/office/drawing/2014/main" id="{E8B42F8E-F207-444E-B9EB-0F1626341626}"/>
               </a:ext>
             </a:extLst>
           </p:cNvPr>
@@ -14566,7 +14675,7 @@
           <p:cNvPr id="3" name="text-8">
             <a:extLst xmlns:a="http://schemas.openxmlformats.org/drawingml/2006/main">
               <a:ext uri="{FF2B5EF4-FFF2-40B4-BE49-F238E27FC236}">
-                <a16:creationId xmlns:a16="http://schemas.microsoft.com/office/drawing/2014/main" id="{34027BBB-6167-434F-B0F9-01665007E0A7}"/>
+                <a16:creationId xmlns:a16="http://schemas.microsoft.com/office/drawing/2014/main" id="{8D58C1A9-5D20-40F7-A81E-E9030EFC5399}"/>
               </a:ext>
             </a:extLst>
           </p:cNvPr>
@@ -14634,7 +14743,7 @@
           <p:cNvPr id="4" name="text-9">
             <a:extLst xmlns:a="http://schemas.openxmlformats.org/drawingml/2006/main">
               <a:ext uri="{FF2B5EF4-FFF2-40B4-BE49-F238E27FC236}">
-                <a16:creationId xmlns:a16="http://schemas.microsoft.com/office/drawing/2014/main" id="{392522CD-969D-45AC-8975-55E38D49B972}"/>
+                <a16:creationId xmlns:a16="http://schemas.microsoft.com/office/drawing/2014/main" id="{E8CF72FA-8E60-4FD9-89AF-B9B9B31ACAE7}"/>
               </a:ext>
             </a:extLst>
           </p:cNvPr>
@@ -14702,7 +14811,7 @@
           <p:cNvPr id="5" name="">
             <a:extLst xmlns:a="http://schemas.openxmlformats.org/drawingml/2006/main">
               <a:ext uri="{FF2B5EF4-FFF2-40B4-BE49-F238E27FC236}">
-                <a16:creationId xmlns:a16="http://schemas.microsoft.com/office/drawing/2014/main" id="{152BC524-D891-4F63-9363-814AAA597E5A}"/>
+                <a16:creationId xmlns:a16="http://schemas.microsoft.com/office/drawing/2014/main" id="{D7E587A7-D4BC-452D-845B-C9A8F829D751}"/>
               </a:ext>
             </a:extLst>
           </p:cNvPr>
@@ -14980,7 +15089,7 @@
           <p:cNvPr id="6" name="">
             <a:extLst xmlns:a="http://schemas.openxmlformats.org/drawingml/2006/main">
               <a:ext uri="{FF2B5EF4-FFF2-40B4-BE49-F238E27FC236}">
-                <a16:creationId xmlns:a16="http://schemas.microsoft.com/office/drawing/2014/main" id="{1E4D5F45-9C7D-452A-A3EB-9FB67B9E61BF}"/>
+                <a16:creationId xmlns:a16="http://schemas.microsoft.com/office/drawing/2014/main" id="{97847B59-B83F-4BEF-B2E5-9803852E3D9C}"/>
               </a:ext>
             </a:extLst>
           </p:cNvPr>
@@ -15010,7 +15119,7 @@
           <p:cNvPr id="7" name="text-10">
             <a:extLst xmlns:a="http://schemas.openxmlformats.org/drawingml/2006/main">
               <a:ext uri="{FF2B5EF4-FFF2-40B4-BE49-F238E27FC236}">
-                <a16:creationId xmlns:a16="http://schemas.microsoft.com/office/drawing/2014/main" id="{C195DF89-061A-4565-AC12-4C7F80C38DF8}"/>
+                <a16:creationId xmlns:a16="http://schemas.microsoft.com/office/drawing/2014/main" id="{C66C1B9C-A4AC-427F-B3F4-243EF5261C63}"/>
               </a:ext>
             </a:extLst>
           </p:cNvPr>
@@ -15076,7 +15185,7 @@
     </p:spTree>
     <p:extLst>
       <p:ext uri="{BB962C8B-B14F-4D97-AF65-F5344CB8AC3E}">
-        <p14:creationId xmlns:p14="http://schemas.microsoft.com/office/powerpoint/2010/main" val="2044689037"/>
+        <p14:creationId xmlns:p14="http://schemas.microsoft.com/office/powerpoint/2010/main" val="1541858832"/>
       </p:ext>
     </p:extLst>
   </p:cSld>
@@ -15104,10 +15213,10 @@
       </p:grpSpPr>
       <p:sp>
         <p:nvSpPr>
-          <p:cNvPr id="12" name="text-143">
-            <a:extLst xmlns:a="http://schemas.openxmlformats.org/drawingml/2006/main">
-              <a:ext uri="{FF2B5EF4-FFF2-40B4-BE49-F238E27FC236}">
-                <a16:creationId xmlns:a16="http://schemas.microsoft.com/office/drawing/2014/main" id="{91A89C7A-C525-403A-852D-950290F4A5A8}"/>
+          <p:cNvPr id="8" name="text-143">
+            <a:extLst xmlns:a="http://schemas.openxmlformats.org/drawingml/2006/main">
+              <a:ext uri="{FF2B5EF4-FFF2-40B4-BE49-F238E27FC236}">
+                <a16:creationId xmlns:a16="http://schemas.microsoft.com/office/drawing/2014/main" id="{A5FF35D4-F155-488C-840C-D4E50162CAC8}"/>
               </a:ext>
             </a:extLst>
           </p:cNvPr>
@@ -15165,7 +15274,7 @@
                 <a:ea typeface="DejaVu Sans"/>
                 <a:cs typeface="DejaVu Sans"/>
               </a:rPr>
-              <a:t>Пограничные окна и две ошибки</a:t>
+              <a:t>Те же восемь окон на графике</a:t>
             </a:r>
           </a:p>
         </p:txBody>
@@ -15175,7 +15284,7 @@
           <p:cNvPr id="2" name="text-144">
             <a:extLst xmlns:a="http://schemas.openxmlformats.org/drawingml/2006/main">
               <a:ext uri="{FF2B5EF4-FFF2-40B4-BE49-F238E27FC236}">
-                <a16:creationId xmlns:a16="http://schemas.microsoft.com/office/drawing/2014/main" id="{76FDD849-7B30-45E9-8652-1DEE114E5D9A}"/>
+                <a16:creationId xmlns:a16="http://schemas.microsoft.com/office/drawing/2014/main" id="{7DDBAAFF-A8A3-4CC3-AAE6-ED22E4CD7F41}"/>
               </a:ext>
             </a:extLst>
           </p:cNvPr>
@@ -15233,7 +15342,30 @@
                 <a:ea typeface="DejaVu Sans"/>
                 <a:cs typeface="DejaVu Sans"/>
               </a:rPr>
-              <a:t>Для демонстрации выбираем перепроверку при r &lt; 0,10</a:t>
+              <a:t>Выше линии модель выбирает атаку, ниже норму.</a:t>
+            </a:r>
+          </a:p>
+          <a:p xmlns:a="http://schemas.openxmlformats.org/drawingml/2006/main">
+            <a:pPr>
+              <a:defRPr sz="1725" b="0">
+                <a:solidFill>
+                  <a:srgbClr val="536377"/>
+                </a:solidFill>
+                <a:latin typeface="DejaVu Sans"/>
+                <a:ea typeface="DejaVu Sans"/>
+                <a:cs typeface="DejaVu Sans"/>
+              </a:defRPr>
+            </a:pPr>
+            <a:r>
+              <a:rPr sz="1725" b="0">
+                <a:solidFill>
+                  <a:srgbClr val="536377"/>
+                </a:solidFill>
+                <a:latin typeface="DejaVu Sans"/>
+                <a:ea typeface="DejaVu Sans"/>
+                <a:cs typeface="DejaVu Sans"/>
+              </a:rPr>
+              <a:t>Цвет точки показывает класс из условия.</a:t>
             </a:r>
           </a:p>
         </p:txBody>
@@ -15243,7 +15375,7 @@
           <p:cNvPr id="3" name="">
             <a:extLst xmlns:a="http://schemas.openxmlformats.org/drawingml/2006/main">
               <a:ext uri="{FF2B5EF4-FFF2-40B4-BE49-F238E27FC236}">
-                <a16:creationId xmlns:a16="http://schemas.microsoft.com/office/drawing/2014/main" id="{45D4EF93-E166-469E-965A-C2F1A7C79F34}"/>
+                <a16:creationId xmlns:a16="http://schemas.microsoft.com/office/drawing/2014/main" id="{BD00AB0F-E9A1-4CB1-956C-260872D7D0FB}"/>
               </a:ext>
             </a:extLst>
           </p:cNvPr>
@@ -15273,7 +15405,7 @@
           <p:cNvPr id="4" name="text-145">
             <a:extLst xmlns:a="http://schemas.openxmlformats.org/drawingml/2006/main">
               <a:ext uri="{FF2B5EF4-FFF2-40B4-BE49-F238E27FC236}">
-                <a16:creationId xmlns:a16="http://schemas.microsoft.com/office/drawing/2014/main" id="{6EAA62E6-62A3-4B4B-B362-CCDC5BA13E4F}"/>
+                <a16:creationId xmlns:a16="http://schemas.microsoft.com/office/drawing/2014/main" id="{BC7431D0-04A2-4AD9-A392-7A2C40209E64}"/>
               </a:ext>
             </a:extLst>
           </p:cNvPr>
@@ -15331,7 +15463,7 @@
                 <a:ea typeface="DejaVu Sans"/>
                 <a:cs typeface="DejaVu Sans"/>
               </a:rPr>
-              <a:t>1.13</a:t>
+              <a:t>1.13   Расчёт и график из Colab</a:t>
             </a:r>
           </a:p>
         </p:txBody>
@@ -15341,7 +15473,7 @@
           <p:cNvPr id="5" name="text-146">
             <a:extLst xmlns:a="http://schemas.openxmlformats.org/drawingml/2006/main">
               <a:ext uri="{FF2B5EF4-FFF2-40B4-BE49-F238E27FC236}">
-                <a16:creationId xmlns:a16="http://schemas.microsoft.com/office/drawing/2014/main" id="{E4C6576F-81F0-47C7-B353-2D56027C6814}"/>
+                <a16:creationId xmlns:a16="http://schemas.microsoft.com/office/drawing/2014/main" id="{DE73E1D4-3561-4818-90FE-A1DDE83D8C4B}"/>
               </a:ext>
             </a:extLst>
           </p:cNvPr>
@@ -15404,24 +15536,52 @@
           </a:p>
         </p:txBody>
       </p:sp>
-      <p:sp>
-        <p:nvSpPr>
-          <p:cNvPr id="6" name="text-147">
-            <a:extLst xmlns:a="http://schemas.openxmlformats.org/drawingml/2006/main">
-              <a:ext uri="{FF2B5EF4-FFF2-40B4-BE49-F238E27FC236}">
-                <a16:creationId xmlns:a16="http://schemas.microsoft.com/office/drawing/2014/main" id="{CFA966FE-4C4A-4690-A423-666836ED9E57}"/>
-              </a:ext>
-            </a:extLst>
-          </p:cNvPr>
-          <p:cNvSpPr>
-            <a:spLocks xmlns:a="http://schemas.openxmlformats.org/drawingml/2006/main" noGrp="1"/>
-          </p:cNvSpPr>
-          <p:nvPr/>
-        </p:nvSpPr>
-        <p:spPr>
-          <a:xfrm xmlns:a="http://schemas.openxmlformats.org/drawingml/2006/main">
-            <a:off x="571500" y="2057400"/>
-            <a:ext cx="11049000" cy="552450"/>
+      <p:pic>
+        <p:nvPicPr>
+          <p:cNvPr id="6" name="">
+            <a:extLst xmlns:a="http://schemas.openxmlformats.org/drawingml/2006/main">
+              <a:ext uri="{FF2B5EF4-FFF2-40B4-BE49-F238E27FC236}">
+                <a16:creationId xmlns:a16="http://schemas.microsoft.com/office/drawing/2014/main" id="{25860CA5-3CBC-4BC2-99BD-EB393E541CC9}"/>
+              </a:ext>
+            </a:extLst>
+          </p:cNvPr>
+          <p:cNvPicPr>
+            <a:picLocks xmlns:a="http://schemas.openxmlformats.org/drawingml/2006/main" noChangeAspect="1"/>
+          </p:cNvPicPr>
+          <p:nvPr/>
+        </p:nvPicPr>
+        <p:blipFill>
+          <a:blip xmlns:r="http://schemas.openxmlformats.org/officeDocument/2006/relationships" xmlns:a="http://schemas.openxmlformats.org/drawingml/2006/main" r:embed="R2b93a33d29414099"/>
+          <a:stretch xmlns:a="http://schemas.openxmlformats.org/drawingml/2006/main"/>
+        </p:blipFill>
+        <p:spPr>
+          <a:xfrm xmlns:a="http://schemas.openxmlformats.org/drawingml/2006/main">
+            <a:off x="575151" y="1895475"/>
+            <a:ext cx="11041698" cy="3990975"/>
+          </a:xfrm>
+          <a:prstGeom xmlns:a="http://schemas.openxmlformats.org/drawingml/2006/main" prst="rect">
+            <a:avLst/>
+          </a:prstGeom>
+        </p:spPr>
+      </p:pic>
+      <p:sp>
+        <p:nvSpPr>
+          <p:cNvPr id="7" name="text-147">
+            <a:extLst xmlns:a="http://schemas.openxmlformats.org/drawingml/2006/main">
+              <a:ext uri="{FF2B5EF4-FFF2-40B4-BE49-F238E27FC236}">
+                <a16:creationId xmlns:a16="http://schemas.microsoft.com/office/drawing/2014/main" id="{0ABD0F9D-6990-4249-BC7F-34F9996C8BD4}"/>
+              </a:ext>
+            </a:extLst>
+          </p:cNvPr>
+          <p:cNvSpPr>
+            <a:spLocks xmlns:a="http://schemas.openxmlformats.org/drawingml/2006/main" noGrp="1"/>
+          </p:cNvSpPr>
+          <p:nvPr/>
+        </p:nvSpPr>
+        <p:spPr>
+          <a:xfrm xmlns:a="http://schemas.openxmlformats.org/drawingml/2006/main">
+            <a:off x="571500" y="5991225"/>
+            <a:ext cx="11049000" cy="304800"/>
           </a:xfrm>
           <a:prstGeom xmlns:a="http://schemas.openxmlformats.org/drawingml/2006/main" prst="rect">
             <a:avLst/>
@@ -15437,9 +15597,9 @@
           </a:bodyPr>
           <a:lstStyle xmlns:a="http://schemas.openxmlformats.org/drawingml/2006/main">
             <a:defPPr>
-              <a:defRPr sz="2550" b="1">
-                <a:solidFill>
-                  <a:srgbClr val="9C700C"/>
+              <a:defRPr sz="1575" b="1">
+                <a:solidFill>
+                  <a:srgbClr val="008C95"/>
                 </a:solidFill>
                 <a:latin typeface="DejaVu Sans"/>
                 <a:ea typeface="DejaVu Sans"/>
@@ -15449,9 +15609,9 @@
           </a:lstStyle>
           <a:p xmlns:a="http://schemas.openxmlformats.org/drawingml/2006/main">
             <a:pPr>
-              <a:defRPr sz="2550" b="1">
-                <a:solidFill>
-                  <a:srgbClr val="9C700C"/>
+              <a:defRPr sz="1575" b="1">
+                <a:solidFill>
+                  <a:srgbClr val="008C95"/>
                 </a:solidFill>
                 <a:latin typeface="DejaVu Sans"/>
                 <a:ea typeface="DejaVu Sans"/>
@@ -15459,470 +15619,15 @@
               </a:defRPr>
             </a:pPr>
             <a:r>
-              <a:rPr sz="2550" b="1">
-                <a:solidFill>
-                  <a:srgbClr val="9C700C"/>
+              <a:rPr sz="1575" b="1">
+                <a:solidFill>
+                  <a:srgbClr val="008C95"/>
                 </a:solidFill>
                 <a:latin typeface="DejaVu Sans"/>
                 <a:ea typeface="DejaVu Sans"/>
                 <a:cs typeface="DejaVu Sans"/>
               </a:rPr>
-              <a:t>Малый запас: T03, T04, T05, T06</a:t>
-            </a:r>
-          </a:p>
-        </p:txBody>
-      </p:sp>
-      <p:sp>
-        <p:nvSpPr>
-          <p:cNvPr id="7" name="text-148">
-            <a:extLst xmlns:a="http://schemas.openxmlformats.org/drawingml/2006/main">
-              <a:ext uri="{FF2B5EF4-FFF2-40B4-BE49-F238E27FC236}">
-                <a16:creationId xmlns:a16="http://schemas.microsoft.com/office/drawing/2014/main" id="{D6294FA8-3191-4A3B-8480-2438A7A631B3}"/>
-              </a:ext>
-            </a:extLst>
-          </p:cNvPr>
-          <p:cNvSpPr>
-            <a:spLocks xmlns:a="http://schemas.openxmlformats.org/drawingml/2006/main" noGrp="1"/>
-          </p:cNvSpPr>
-          <p:nvPr/>
-        </p:nvSpPr>
-        <p:spPr>
-          <a:xfrm xmlns:a="http://schemas.openxmlformats.org/drawingml/2006/main">
-            <a:off x="571500" y="3124200"/>
-            <a:ext cx="5238750" cy="428625"/>
-          </a:xfrm>
-          <a:prstGeom xmlns:a="http://schemas.openxmlformats.org/drawingml/2006/main" prst="rect">
-            <a:avLst/>
-          </a:prstGeom>
-          <a:noFill xmlns:a="http://schemas.openxmlformats.org/drawingml/2006/main"/>
-          <a:ln xmlns:a="http://schemas.openxmlformats.org/drawingml/2006/main" w="0">
-            <a:noFill/>
-          </a:ln>
-        </p:spPr>
-        <p:txBody>
-          <a:bodyPr xmlns:a="http://schemas.openxmlformats.org/drawingml/2006/main" wrap="square" lIns="0" tIns="0" rIns="0" bIns="0">
-            <a:noAutofit/>
-          </a:bodyPr>
-          <a:lstStyle xmlns:a="http://schemas.openxmlformats.org/drawingml/2006/main">
-            <a:defPPr>
-              <a:defRPr sz="2175" b="1">
-                <a:solidFill>
-                  <a:srgbClr val="E85555"/>
-                </a:solidFill>
-                <a:latin typeface="DejaVu Sans"/>
-                <a:ea typeface="DejaVu Sans"/>
-                <a:cs typeface="DejaVu Sans"/>
-              </a:defRPr>
-            </a:defPPr>
-          </a:lstStyle>
-          <a:p xmlns:a="http://schemas.openxmlformats.org/drawingml/2006/main">
-            <a:pPr>
-              <a:defRPr sz="2175" b="1">
-                <a:solidFill>
-                  <a:srgbClr val="E85555"/>
-                </a:solidFill>
-                <a:latin typeface="DejaVu Sans"/>
-                <a:ea typeface="DejaVu Sans"/>
-                <a:cs typeface="DejaVu Sans"/>
-              </a:defRPr>
-            </a:pPr>
-            <a:r>
-              <a:rPr sz="2175" b="1">
-                <a:solidFill>
-                  <a:srgbClr val="E85555"/>
-                </a:solidFill>
-                <a:latin typeface="DejaVu Sans"/>
-                <a:ea typeface="DejaVu Sans"/>
-                <a:cs typeface="DejaVu Sans"/>
-              </a:rPr>
-              <a:t>T04 · пропуск атаки</a:t>
-            </a:r>
-          </a:p>
-        </p:txBody>
-      </p:sp>
-      <p:sp>
-        <p:nvSpPr>
-          <p:cNvPr id="8" name="text-149">
-            <a:extLst xmlns:a="http://schemas.openxmlformats.org/drawingml/2006/main">
-              <a:ext uri="{FF2B5EF4-FFF2-40B4-BE49-F238E27FC236}">
-                <a16:creationId xmlns:a16="http://schemas.microsoft.com/office/drawing/2014/main" id="{58174028-4BAF-4240-B40F-23CCE17E7FDC}"/>
-              </a:ext>
-            </a:extLst>
-          </p:cNvPr>
-          <p:cNvSpPr>
-            <a:spLocks xmlns:a="http://schemas.openxmlformats.org/drawingml/2006/main" noGrp="1"/>
-          </p:cNvSpPr>
-          <p:nvPr/>
-        </p:nvSpPr>
-        <p:spPr>
-          <a:xfrm xmlns:a="http://schemas.openxmlformats.org/drawingml/2006/main">
-            <a:off x="571500" y="3657600"/>
-            <a:ext cx="5238750" cy="1285875"/>
-          </a:xfrm>
-          <a:prstGeom xmlns:a="http://schemas.openxmlformats.org/drawingml/2006/main" prst="rect">
-            <a:avLst/>
-          </a:prstGeom>
-          <a:noFill xmlns:a="http://schemas.openxmlformats.org/drawingml/2006/main"/>
-          <a:ln xmlns:a="http://schemas.openxmlformats.org/drawingml/2006/main" w="0">
-            <a:noFill/>
-          </a:ln>
-        </p:spPr>
-        <p:txBody>
-          <a:bodyPr xmlns:a="http://schemas.openxmlformats.org/drawingml/2006/main" wrap="square" lIns="0" tIns="0" rIns="0" bIns="0">
-            <a:noAutofit/>
-          </a:bodyPr>
-          <a:lstStyle xmlns:a="http://schemas.openxmlformats.org/drawingml/2006/main">
-            <a:defPPr>
-              <a:defRPr sz="1875" b="0">
-                <a:solidFill>
-                  <a:srgbClr val="101C32"/>
-                </a:solidFill>
-                <a:latin typeface="DejaVu Sans"/>
-                <a:ea typeface="DejaVu Sans"/>
-                <a:cs typeface="DejaVu Sans"/>
-              </a:defRPr>
-            </a:defPPr>
-          </a:lstStyle>
-          <a:p xmlns:a="http://schemas.openxmlformats.org/drawingml/2006/main">
-            <a:pPr>
-              <a:defRPr sz="1875" b="0">
-                <a:solidFill>
-                  <a:srgbClr val="101C32"/>
-                </a:solidFill>
-                <a:latin typeface="DejaVu Sans"/>
-                <a:ea typeface="DejaVu Sans"/>
-                <a:cs typeface="DejaVu Sans"/>
-              </a:defRPr>
-            </a:pPr>
-            <a:r>
-              <a:rPr sz="1875" b="0">
-                <a:solidFill>
-                  <a:srgbClr val="101C32"/>
-                </a:solidFill>
-                <a:latin typeface="DejaVu Sans"/>
-                <a:ea typeface="DejaVu Sans"/>
-                <a:cs typeface="DejaVu Sans"/>
-              </a:rPr>
-              <a:t>Была атака → прогноз «норма».</a:t>
-            </a:r>
-          </a:p>
-          <a:p xmlns:a="http://schemas.openxmlformats.org/drawingml/2006/main">
-            <a:pPr>
-              <a:defRPr sz="1875" b="0">
-                <a:solidFill>
-                  <a:srgbClr val="101C32"/>
-                </a:solidFill>
-                <a:latin typeface="DejaVu Sans"/>
-                <a:ea typeface="DejaVu Sans"/>
-                <a:cs typeface="DejaVu Sans"/>
-              </a:defRPr>
-            </a:pPr>
-            <a:r>
-              <a:rPr sz="1875" b="0">
-                <a:solidFill>
-                  <a:srgbClr val="101C32"/>
-                </a:solidFill>
-                <a:latin typeface="DejaVu Sans"/>
-                <a:ea typeface="DejaVu Sans"/>
-                <a:cs typeface="DejaVu Sans"/>
-              </a:rPr>
-              <a:t>Можно пропустить угрозу</a:t>
-            </a:r>
-          </a:p>
-          <a:p xmlns:a="http://schemas.openxmlformats.org/drawingml/2006/main">
-            <a:pPr>
-              <a:defRPr sz="1875" b="0">
-                <a:solidFill>
-                  <a:srgbClr val="101C32"/>
-                </a:solidFill>
-                <a:latin typeface="DejaVu Sans"/>
-                <a:ea typeface="DejaVu Sans"/>
-                <a:cs typeface="DejaVu Sans"/>
-              </a:defRPr>
-            </a:pPr>
-            <a:r>
-              <a:rPr sz="1875" b="0">
-                <a:solidFill>
-                  <a:srgbClr val="101C32"/>
-                </a:solidFill>
-                <a:latin typeface="DejaVu Sans"/>
-                <a:ea typeface="DejaVu Sans"/>
-                <a:cs typeface="DejaVu Sans"/>
-              </a:rPr>
-              <a:t>доступности сервиса.</a:t>
-            </a:r>
-          </a:p>
-        </p:txBody>
-      </p:sp>
-      <p:sp>
-        <p:nvSpPr>
-          <p:cNvPr id="9" name="text-150">
-            <a:extLst xmlns:a="http://schemas.openxmlformats.org/drawingml/2006/main">
-              <a:ext uri="{FF2B5EF4-FFF2-40B4-BE49-F238E27FC236}">
-                <a16:creationId xmlns:a16="http://schemas.microsoft.com/office/drawing/2014/main" id="{1903B3C1-626C-4956-8562-A9A36AD0C79F}"/>
-              </a:ext>
-            </a:extLst>
-          </p:cNvPr>
-          <p:cNvSpPr>
-            <a:spLocks xmlns:a="http://schemas.openxmlformats.org/drawingml/2006/main" noGrp="1"/>
-          </p:cNvSpPr>
-          <p:nvPr/>
-        </p:nvSpPr>
-        <p:spPr>
-          <a:xfrm xmlns:a="http://schemas.openxmlformats.org/drawingml/2006/main">
-            <a:off x="6381750" y="3124200"/>
-            <a:ext cx="5238750" cy="428625"/>
-          </a:xfrm>
-          <a:prstGeom xmlns:a="http://schemas.openxmlformats.org/drawingml/2006/main" prst="rect">
-            <a:avLst/>
-          </a:prstGeom>
-          <a:noFill xmlns:a="http://schemas.openxmlformats.org/drawingml/2006/main"/>
-          <a:ln xmlns:a="http://schemas.openxmlformats.org/drawingml/2006/main" w="0">
-            <a:noFill/>
-          </a:ln>
-        </p:spPr>
-        <p:txBody>
-          <a:bodyPr xmlns:a="http://schemas.openxmlformats.org/drawingml/2006/main" wrap="square" lIns="0" tIns="0" rIns="0" bIns="0">
-            <a:noAutofit/>
-          </a:bodyPr>
-          <a:lstStyle xmlns:a="http://schemas.openxmlformats.org/drawingml/2006/main">
-            <a:defPPr>
-              <a:defRPr sz="2175" b="1">
-                <a:solidFill>
-                  <a:srgbClr val="9C700C"/>
-                </a:solidFill>
-                <a:latin typeface="DejaVu Sans"/>
-                <a:ea typeface="DejaVu Sans"/>
-                <a:cs typeface="DejaVu Sans"/>
-              </a:defRPr>
-            </a:defPPr>
-          </a:lstStyle>
-          <a:p xmlns:a="http://schemas.openxmlformats.org/drawingml/2006/main">
-            <a:pPr>
-              <a:defRPr sz="2175" b="1">
-                <a:solidFill>
-                  <a:srgbClr val="9C700C"/>
-                </a:solidFill>
-                <a:latin typeface="DejaVu Sans"/>
-                <a:ea typeface="DejaVu Sans"/>
-                <a:cs typeface="DejaVu Sans"/>
-              </a:defRPr>
-            </a:pPr>
-            <a:r>
-              <a:rPr sz="2175" b="1">
-                <a:solidFill>
-                  <a:srgbClr val="9C700C"/>
-                </a:solidFill>
-                <a:latin typeface="DejaVu Sans"/>
-                <a:ea typeface="DejaVu Sans"/>
-                <a:cs typeface="DejaVu Sans"/>
-              </a:rPr>
-              <a:t>T05 · ложная тревога</a:t>
-            </a:r>
-          </a:p>
-        </p:txBody>
-      </p:sp>
-      <p:sp>
-        <p:nvSpPr>
-          <p:cNvPr id="10" name="text-151">
-            <a:extLst xmlns:a="http://schemas.openxmlformats.org/drawingml/2006/main">
-              <a:ext uri="{FF2B5EF4-FFF2-40B4-BE49-F238E27FC236}">
-                <a16:creationId xmlns:a16="http://schemas.microsoft.com/office/drawing/2014/main" id="{17F9BBDB-E17B-407D-8E84-BAB30027BAAD}"/>
-              </a:ext>
-            </a:extLst>
-          </p:cNvPr>
-          <p:cNvSpPr>
-            <a:spLocks xmlns:a="http://schemas.openxmlformats.org/drawingml/2006/main" noGrp="1"/>
-          </p:cNvSpPr>
-          <p:nvPr/>
-        </p:nvSpPr>
-        <p:spPr>
-          <a:xfrm xmlns:a="http://schemas.openxmlformats.org/drawingml/2006/main">
-            <a:off x="6381750" y="3657600"/>
-            <a:ext cx="5238750" cy="1285875"/>
-          </a:xfrm>
-          <a:prstGeom xmlns:a="http://schemas.openxmlformats.org/drawingml/2006/main" prst="rect">
-            <a:avLst/>
-          </a:prstGeom>
-          <a:noFill xmlns:a="http://schemas.openxmlformats.org/drawingml/2006/main"/>
-          <a:ln xmlns:a="http://schemas.openxmlformats.org/drawingml/2006/main" w="0">
-            <a:noFill/>
-          </a:ln>
-        </p:spPr>
-        <p:txBody>
-          <a:bodyPr xmlns:a="http://schemas.openxmlformats.org/drawingml/2006/main" wrap="square" lIns="0" tIns="0" rIns="0" bIns="0">
-            <a:noAutofit/>
-          </a:bodyPr>
-          <a:lstStyle xmlns:a="http://schemas.openxmlformats.org/drawingml/2006/main">
-            <a:defPPr>
-              <a:defRPr sz="1875" b="0">
-                <a:solidFill>
-                  <a:srgbClr val="101C32"/>
-                </a:solidFill>
-                <a:latin typeface="DejaVu Sans"/>
-                <a:ea typeface="DejaVu Sans"/>
-                <a:cs typeface="DejaVu Sans"/>
-              </a:defRPr>
-            </a:defPPr>
-          </a:lstStyle>
-          <a:p xmlns:a="http://schemas.openxmlformats.org/drawingml/2006/main">
-            <a:pPr>
-              <a:defRPr sz="1875" b="0">
-                <a:solidFill>
-                  <a:srgbClr val="101C32"/>
-                </a:solidFill>
-                <a:latin typeface="DejaVu Sans"/>
-                <a:ea typeface="DejaVu Sans"/>
-                <a:cs typeface="DejaVu Sans"/>
-              </a:defRPr>
-            </a:pPr>
-            <a:r>
-              <a:rPr sz="1875" b="0">
-                <a:solidFill>
-                  <a:srgbClr val="101C32"/>
-                </a:solidFill>
-                <a:latin typeface="DejaVu Sans"/>
-                <a:ea typeface="DejaVu Sans"/>
-                <a:cs typeface="DejaVu Sans"/>
-              </a:rPr>
-              <a:t>Была норма → прогноз «атака».</a:t>
-            </a:r>
-          </a:p>
-          <a:p xmlns:a="http://schemas.openxmlformats.org/drawingml/2006/main">
-            <a:pPr>
-              <a:defRPr sz="1875" b="0">
-                <a:solidFill>
-                  <a:srgbClr val="101C32"/>
-                </a:solidFill>
-                <a:latin typeface="DejaVu Sans"/>
-                <a:ea typeface="DejaVu Sans"/>
-                <a:cs typeface="DejaVu Sans"/>
-              </a:defRPr>
-            </a:pPr>
-            <a:r>
-              <a:rPr sz="1875" b="0">
-                <a:solidFill>
-                  <a:srgbClr val="101C32"/>
-                </a:solidFill>
-                <a:latin typeface="DejaVu Sans"/>
-                <a:ea typeface="DejaVu Sans"/>
-                <a:cs typeface="DejaVu Sans"/>
-              </a:rPr>
-              <a:t>Реакция может помешать</a:t>
-            </a:r>
-          </a:p>
-          <a:p xmlns:a="http://schemas.openxmlformats.org/drawingml/2006/main">
-            <a:pPr>
-              <a:defRPr sz="1875" b="0">
-                <a:solidFill>
-                  <a:srgbClr val="101C32"/>
-                </a:solidFill>
-                <a:latin typeface="DejaVu Sans"/>
-                <a:ea typeface="DejaVu Sans"/>
-                <a:cs typeface="DejaVu Sans"/>
-              </a:defRPr>
-            </a:pPr>
-            <a:r>
-              <a:rPr sz="1875" b="0">
-                <a:solidFill>
-                  <a:srgbClr val="101C32"/>
-                </a:solidFill>
-                <a:latin typeface="DejaVu Sans"/>
-                <a:ea typeface="DejaVu Sans"/>
-                <a:cs typeface="DejaVu Sans"/>
-              </a:rPr>
-              <a:t>легитимным клиентам.</a:t>
-            </a:r>
-          </a:p>
-        </p:txBody>
-      </p:sp>
-      <p:sp>
-        <p:nvSpPr>
-          <p:cNvPr id="11" name="text-152">
-            <a:extLst xmlns:a="http://schemas.openxmlformats.org/drawingml/2006/main">
-              <a:ext uri="{FF2B5EF4-FFF2-40B4-BE49-F238E27FC236}">
-                <a16:creationId xmlns:a16="http://schemas.microsoft.com/office/drawing/2014/main" id="{2C486757-865E-4A8E-B613-0AE97658DB00}"/>
-              </a:ext>
-            </a:extLst>
-          </p:cNvPr>
-          <p:cNvSpPr>
-            <a:spLocks xmlns:a="http://schemas.openxmlformats.org/drawingml/2006/main" noGrp="1"/>
-          </p:cNvSpPr>
-          <p:nvPr/>
-        </p:nvSpPr>
-        <p:spPr>
-          <a:xfrm xmlns:a="http://schemas.openxmlformats.org/drawingml/2006/main">
-            <a:off x="571500" y="5534025"/>
-            <a:ext cx="11049000" cy="695325"/>
-          </a:xfrm>
-          <a:prstGeom xmlns:a="http://schemas.openxmlformats.org/drawingml/2006/main" prst="rect">
-            <a:avLst/>
-          </a:prstGeom>
-          <a:noFill xmlns:a="http://schemas.openxmlformats.org/drawingml/2006/main"/>
-          <a:ln xmlns:a="http://schemas.openxmlformats.org/drawingml/2006/main" w="0">
-            <a:noFill/>
-          </a:ln>
-        </p:spPr>
-        <p:txBody>
-          <a:bodyPr xmlns:a="http://schemas.openxmlformats.org/drawingml/2006/main" wrap="square" lIns="0" tIns="0" rIns="0" bIns="0">
-            <a:noAutofit/>
-          </a:bodyPr>
-          <a:lstStyle xmlns:a="http://schemas.openxmlformats.org/drawingml/2006/main">
-            <a:defPPr>
-              <a:defRPr sz="1800" b="1">
-                <a:solidFill>
-                  <a:srgbClr val="101C32"/>
-                </a:solidFill>
-                <a:latin typeface="DejaVu Sans"/>
-                <a:ea typeface="DejaVu Sans"/>
-                <a:cs typeface="DejaVu Sans"/>
-              </a:defRPr>
-            </a:defPPr>
-          </a:lstStyle>
-          <a:p xmlns:a="http://schemas.openxmlformats.org/drawingml/2006/main">
-            <a:pPr>
-              <a:defRPr sz="1800" b="1">
-                <a:solidFill>
-                  <a:srgbClr val="101C32"/>
-                </a:solidFill>
-                <a:latin typeface="DejaVu Sans"/>
-                <a:ea typeface="DejaVu Sans"/>
-                <a:cs typeface="DejaVu Sans"/>
-              </a:defRPr>
-            </a:pPr>
-            <a:r>
-              <a:rPr sz="1800" b="1">
-                <a:solidFill>
-                  <a:srgbClr val="101C32"/>
-                </a:solidFill>
-                <a:latin typeface="DejaVu Sans"/>
-                <a:ea typeface="DejaVu Sans"/>
-                <a:cs typeface="DejaVu Sans"/>
-              </a:rPr>
-              <a:t>Обе ошибки здесь пограничные. В реальной сети так бывает не всегда.</a:t>
-            </a:r>
-          </a:p>
-          <a:p xmlns:a="http://schemas.openxmlformats.org/drawingml/2006/main">
-            <a:pPr>
-              <a:defRPr sz="1800" b="1">
-                <a:solidFill>
-                  <a:srgbClr val="101C32"/>
-                </a:solidFill>
-                <a:latin typeface="DejaVu Sans"/>
-                <a:ea typeface="DejaVu Sans"/>
-                <a:cs typeface="DejaVu Sans"/>
-              </a:defRPr>
-            </a:pPr>
-            <a:r>
-              <a:rPr sz="1800" b="1">
-                <a:solidFill>
-                  <a:srgbClr val="101C32"/>
-                </a:solidFill>
-                <a:latin typeface="DejaVu Sans"/>
-                <a:ea typeface="DejaVu Sans"/>
-                <a:cs typeface="DejaVu Sans"/>
-              </a:rPr>
-              <a:t>Порог 0,10 — правило перепроверки; это не зазор обучения SVM.</a:t>
+              <a:t>Серая полоса выделяет окна с r &lt; 0,10. Их ответ легче меняется при сдвиге точки.</a:t>
             </a:r>
           </a:p>
         </p:txBody>
@@ -15930,7 +15635,7 @@
     </p:spTree>
     <p:extLst>
       <p:ext uri="{BB962C8B-B14F-4D97-AF65-F5344CB8AC3E}">
-        <p14:creationId xmlns:p14="http://schemas.microsoft.com/office/powerpoint/2010/main" val="544254674"/>
+        <p14:creationId xmlns:p14="http://schemas.microsoft.com/office/powerpoint/2010/main" val="657912735"/>
       </p:ext>
     </p:extLst>
   </p:cSld>
@@ -15958,10 +15663,10 @@
       </p:grpSpPr>
       <p:sp>
         <p:nvSpPr>
-          <p:cNvPr id="9" name="text-153">
-            <a:extLst xmlns:a="http://schemas.openxmlformats.org/drawingml/2006/main">
-              <a:ext uri="{FF2B5EF4-FFF2-40B4-BE49-F238E27FC236}">
-                <a16:creationId xmlns:a16="http://schemas.microsoft.com/office/drawing/2014/main" id="{8FC97AAB-C7D0-4B0B-9358-458B2AACB4A0}"/>
+          <p:cNvPr id="12" name="text-148">
+            <a:extLst xmlns:a="http://schemas.openxmlformats.org/drawingml/2006/main">
+              <a:ext uri="{FF2B5EF4-FFF2-40B4-BE49-F238E27FC236}">
+                <a16:creationId xmlns:a16="http://schemas.microsoft.com/office/drawing/2014/main" id="{002707BE-5DE7-4979-8AB0-C42B67644669}"/>
               </a:ext>
             </a:extLst>
           </p:cNvPr>
@@ -16019,17 +15724,17 @@
                 <a:ea typeface="DejaVu Sans"/>
                 <a:cs typeface="DejaVu Sans"/>
               </a:rPr>
-              <a:t>Как использовать результат в ИБ</a:t>
+              <a:t>Какие ответы стоит перепроверить</a:t>
             </a:r>
           </a:p>
         </p:txBody>
       </p:sp>
       <p:sp>
         <p:nvSpPr>
-          <p:cNvPr id="2" name="text-154">
-            <a:extLst xmlns:a="http://schemas.openxmlformats.org/drawingml/2006/main">
-              <a:ext uri="{FF2B5EF4-FFF2-40B4-BE49-F238E27FC236}">
-                <a16:creationId xmlns:a16="http://schemas.microsoft.com/office/drawing/2014/main" id="{E93B87D2-AE22-43F4-B101-A3DEB894A52C}"/>
+          <p:cNvPr id="2" name="text-149">
+            <a:extLst xmlns:a="http://schemas.openxmlformats.org/drawingml/2006/main">
+              <a:ext uri="{FF2B5EF4-FFF2-40B4-BE49-F238E27FC236}">
+                <a16:creationId xmlns:a16="http://schemas.microsoft.com/office/drawing/2014/main" id="{F6D77234-70D5-4443-AA50-CA0629590E3E}"/>
               </a:ext>
             </a:extLst>
           </p:cNvPr>
@@ -16087,7 +15792,7 @@
                 <a:ea typeface="DejaVu Sans"/>
                 <a:cs typeface="DejaVu Sans"/>
               </a:rPr>
-              <a:t>triage — учебная функция первичной сортировки; SOC — команда мониторинга ИБ</a:t>
+              <a:t>В нашем примере отправляем на перепроверку окна с r &lt; 0,10</a:t>
             </a:r>
           </a:p>
         </p:txBody>
@@ -16097,7 +15802,7 @@
           <p:cNvPr id="3" name="">
             <a:extLst xmlns:a="http://schemas.openxmlformats.org/drawingml/2006/main">
               <a:ext uri="{FF2B5EF4-FFF2-40B4-BE49-F238E27FC236}">
-                <a16:creationId xmlns:a16="http://schemas.microsoft.com/office/drawing/2014/main" id="{990C7112-AB55-44AC-9C07-3629382E6324}"/>
+                <a16:creationId xmlns:a16="http://schemas.microsoft.com/office/drawing/2014/main" id="{8436B995-514B-4852-82C1-BEF0497B6737}"/>
               </a:ext>
             </a:extLst>
           </p:cNvPr>
@@ -16124,10 +15829,10 @@
       </p:sp>
       <p:sp>
         <p:nvSpPr>
-          <p:cNvPr id="4" name="text-155">
-            <a:extLst xmlns:a="http://schemas.openxmlformats.org/drawingml/2006/main">
-              <a:ext uri="{FF2B5EF4-FFF2-40B4-BE49-F238E27FC236}">
-                <a16:creationId xmlns:a16="http://schemas.microsoft.com/office/drawing/2014/main" id="{6BB69A2D-6F43-4C44-8A5F-95A2E173693A}"/>
+          <p:cNvPr id="4" name="text-150">
+            <a:extLst xmlns:a="http://schemas.openxmlformats.org/drawingml/2006/main">
+              <a:ext uri="{FF2B5EF4-FFF2-40B4-BE49-F238E27FC236}">
+                <a16:creationId xmlns:a16="http://schemas.microsoft.com/office/drawing/2014/main" id="{87C6F22D-712D-40B9-9AA0-36A040A4BDA4}"/>
               </a:ext>
             </a:extLst>
           </p:cNvPr>
@@ -16185,17 +15890,17 @@
                 <a:ea typeface="DejaVu Sans"/>
                 <a:cs typeface="DejaVu Sans"/>
               </a:rPr>
-              <a:t>1.13  •  [8]; предлагаемый сценарий</a:t>
+              <a:t>1.13</a:t>
             </a:r>
           </a:p>
         </p:txBody>
       </p:sp>
       <p:sp>
         <p:nvSpPr>
-          <p:cNvPr id="5" name="text-156">
-            <a:extLst xmlns:a="http://schemas.openxmlformats.org/drawingml/2006/main">
-              <a:ext uri="{FF2B5EF4-FFF2-40B4-BE49-F238E27FC236}">
-                <a16:creationId xmlns:a16="http://schemas.microsoft.com/office/drawing/2014/main" id="{94C3E061-F18B-469F-ACEF-98E101FB819C}"/>
+          <p:cNvPr id="5" name="text-151">
+            <a:extLst xmlns:a="http://schemas.openxmlformats.org/drawingml/2006/main">
+              <a:ext uri="{FF2B5EF4-FFF2-40B4-BE49-F238E27FC236}">
+                <a16:creationId xmlns:a16="http://schemas.microsoft.com/office/drawing/2014/main" id="{E3896432-BDAF-4C46-8AD7-8CBDE2821196}"/>
               </a:ext>
             </a:extLst>
           </p:cNvPr>
@@ -16258,12 +15963,866 @@
           </a:p>
         </p:txBody>
       </p:sp>
+      <p:sp>
+        <p:nvSpPr>
+          <p:cNvPr id="6" name="text-152">
+            <a:extLst xmlns:a="http://schemas.openxmlformats.org/drawingml/2006/main">
+              <a:ext uri="{FF2B5EF4-FFF2-40B4-BE49-F238E27FC236}">
+                <a16:creationId xmlns:a16="http://schemas.microsoft.com/office/drawing/2014/main" id="{AE631797-1F69-4F16-B0A6-44A011AEE68D}"/>
+              </a:ext>
+            </a:extLst>
+          </p:cNvPr>
+          <p:cNvSpPr>
+            <a:spLocks xmlns:a="http://schemas.openxmlformats.org/drawingml/2006/main" noGrp="1"/>
+          </p:cNvSpPr>
+          <p:nvPr/>
+        </p:nvSpPr>
+        <p:spPr>
+          <a:xfrm xmlns:a="http://schemas.openxmlformats.org/drawingml/2006/main">
+            <a:off x="571500" y="2057400"/>
+            <a:ext cx="11049000" cy="552450"/>
+          </a:xfrm>
+          <a:prstGeom xmlns:a="http://schemas.openxmlformats.org/drawingml/2006/main" prst="rect">
+            <a:avLst/>
+          </a:prstGeom>
+          <a:noFill xmlns:a="http://schemas.openxmlformats.org/drawingml/2006/main"/>
+          <a:ln xmlns:a="http://schemas.openxmlformats.org/drawingml/2006/main" w="0">
+            <a:noFill/>
+          </a:ln>
+        </p:spPr>
+        <p:txBody>
+          <a:bodyPr xmlns:a="http://schemas.openxmlformats.org/drawingml/2006/main" wrap="square" lIns="0" tIns="0" rIns="0" bIns="0">
+            <a:noAutofit/>
+          </a:bodyPr>
+          <a:lstStyle xmlns:a="http://schemas.openxmlformats.org/drawingml/2006/main">
+            <a:defPPr>
+              <a:defRPr sz="2550" b="1">
+                <a:solidFill>
+                  <a:srgbClr val="9C700C"/>
+                </a:solidFill>
+                <a:latin typeface="DejaVu Sans"/>
+                <a:ea typeface="DejaVu Sans"/>
+                <a:cs typeface="DejaVu Sans"/>
+              </a:defRPr>
+            </a:defPPr>
+          </a:lstStyle>
+          <a:p xmlns:a="http://schemas.openxmlformats.org/drawingml/2006/main">
+            <a:pPr>
+              <a:defRPr sz="2550" b="1">
+                <a:solidFill>
+                  <a:srgbClr val="9C700C"/>
+                </a:solidFill>
+                <a:latin typeface="DejaVu Sans"/>
+                <a:ea typeface="DejaVu Sans"/>
+                <a:cs typeface="DejaVu Sans"/>
+              </a:defRPr>
+            </a:pPr>
+            <a:r>
+              <a:rPr sz="2550" b="1">
+                <a:solidFill>
+                  <a:srgbClr val="9C700C"/>
+                </a:solidFill>
+                <a:latin typeface="DejaVu Sans"/>
+                <a:ea typeface="DejaVu Sans"/>
+                <a:cs typeface="DejaVu Sans"/>
+              </a:rPr>
+              <a:t>Малый запас: T03, T04, T05, T06</a:t>
+            </a:r>
+          </a:p>
+        </p:txBody>
+      </p:sp>
+      <p:sp>
+        <p:nvSpPr>
+          <p:cNvPr id="7" name="text-153">
+            <a:extLst xmlns:a="http://schemas.openxmlformats.org/drawingml/2006/main">
+              <a:ext uri="{FF2B5EF4-FFF2-40B4-BE49-F238E27FC236}">
+                <a16:creationId xmlns:a16="http://schemas.microsoft.com/office/drawing/2014/main" id="{D937D014-40A1-4F94-BDA5-DBFD841CFC82}"/>
+              </a:ext>
+            </a:extLst>
+          </p:cNvPr>
+          <p:cNvSpPr>
+            <a:spLocks xmlns:a="http://schemas.openxmlformats.org/drawingml/2006/main" noGrp="1"/>
+          </p:cNvSpPr>
+          <p:nvPr/>
+        </p:nvSpPr>
+        <p:spPr>
+          <a:xfrm xmlns:a="http://schemas.openxmlformats.org/drawingml/2006/main">
+            <a:off x="571500" y="3124200"/>
+            <a:ext cx="5238750" cy="428625"/>
+          </a:xfrm>
+          <a:prstGeom xmlns:a="http://schemas.openxmlformats.org/drawingml/2006/main" prst="rect">
+            <a:avLst/>
+          </a:prstGeom>
+          <a:noFill xmlns:a="http://schemas.openxmlformats.org/drawingml/2006/main"/>
+          <a:ln xmlns:a="http://schemas.openxmlformats.org/drawingml/2006/main" w="0">
+            <a:noFill/>
+          </a:ln>
+        </p:spPr>
+        <p:txBody>
+          <a:bodyPr xmlns:a="http://schemas.openxmlformats.org/drawingml/2006/main" wrap="square" lIns="0" tIns="0" rIns="0" bIns="0">
+            <a:noAutofit/>
+          </a:bodyPr>
+          <a:lstStyle xmlns:a="http://schemas.openxmlformats.org/drawingml/2006/main">
+            <a:defPPr>
+              <a:defRPr sz="2175" b="1">
+                <a:solidFill>
+                  <a:srgbClr val="E85555"/>
+                </a:solidFill>
+                <a:latin typeface="DejaVu Sans"/>
+                <a:ea typeface="DejaVu Sans"/>
+                <a:cs typeface="DejaVu Sans"/>
+              </a:defRPr>
+            </a:defPPr>
+          </a:lstStyle>
+          <a:p xmlns:a="http://schemas.openxmlformats.org/drawingml/2006/main">
+            <a:pPr>
+              <a:defRPr sz="2175" b="1">
+                <a:solidFill>
+                  <a:srgbClr val="E85555"/>
+                </a:solidFill>
+                <a:latin typeface="DejaVu Sans"/>
+                <a:ea typeface="DejaVu Sans"/>
+                <a:cs typeface="DejaVu Sans"/>
+              </a:defRPr>
+            </a:pPr>
+            <a:r>
+              <a:rPr sz="2175" b="1">
+                <a:solidFill>
+                  <a:srgbClr val="E85555"/>
+                </a:solidFill>
+                <a:latin typeface="DejaVu Sans"/>
+                <a:ea typeface="DejaVu Sans"/>
+                <a:cs typeface="DejaVu Sans"/>
+              </a:rPr>
+              <a:t>T04: пропуск атаки</a:t>
+            </a:r>
+          </a:p>
+        </p:txBody>
+      </p:sp>
+      <p:sp>
+        <p:nvSpPr>
+          <p:cNvPr id="8" name="text-154">
+            <a:extLst xmlns:a="http://schemas.openxmlformats.org/drawingml/2006/main">
+              <a:ext uri="{FF2B5EF4-FFF2-40B4-BE49-F238E27FC236}">
+                <a16:creationId xmlns:a16="http://schemas.microsoft.com/office/drawing/2014/main" id="{B365A90D-6B11-40FB-8B48-3CFCB3B5CEB7}"/>
+              </a:ext>
+            </a:extLst>
+          </p:cNvPr>
+          <p:cNvSpPr>
+            <a:spLocks xmlns:a="http://schemas.openxmlformats.org/drawingml/2006/main" noGrp="1"/>
+          </p:cNvSpPr>
+          <p:nvPr/>
+        </p:nvSpPr>
+        <p:spPr>
+          <a:xfrm xmlns:a="http://schemas.openxmlformats.org/drawingml/2006/main">
+            <a:off x="571500" y="3657600"/>
+            <a:ext cx="5238750" cy="1285875"/>
+          </a:xfrm>
+          <a:prstGeom xmlns:a="http://schemas.openxmlformats.org/drawingml/2006/main" prst="rect">
+            <a:avLst/>
+          </a:prstGeom>
+          <a:noFill xmlns:a="http://schemas.openxmlformats.org/drawingml/2006/main"/>
+          <a:ln xmlns:a="http://schemas.openxmlformats.org/drawingml/2006/main" w="0">
+            <a:noFill/>
+          </a:ln>
+        </p:spPr>
+        <p:txBody>
+          <a:bodyPr xmlns:a="http://schemas.openxmlformats.org/drawingml/2006/main" wrap="square" lIns="0" tIns="0" rIns="0" bIns="0">
+            <a:noAutofit/>
+          </a:bodyPr>
+          <a:lstStyle xmlns:a="http://schemas.openxmlformats.org/drawingml/2006/main">
+            <a:defPPr>
+              <a:defRPr sz="1875" b="0">
+                <a:solidFill>
+                  <a:srgbClr val="101C32"/>
+                </a:solidFill>
+                <a:latin typeface="DejaVu Sans"/>
+                <a:ea typeface="DejaVu Sans"/>
+                <a:cs typeface="DejaVu Sans"/>
+              </a:defRPr>
+            </a:defPPr>
+          </a:lstStyle>
+          <a:p xmlns:a="http://schemas.openxmlformats.org/drawingml/2006/main">
+            <a:pPr>
+              <a:defRPr sz="1875" b="0">
+                <a:solidFill>
+                  <a:srgbClr val="101C32"/>
+                </a:solidFill>
+                <a:latin typeface="DejaVu Sans"/>
+                <a:ea typeface="DejaVu Sans"/>
+                <a:cs typeface="DejaVu Sans"/>
+              </a:defRPr>
+            </a:pPr>
+            <a:r>
+              <a:rPr sz="1875" b="0">
+                <a:solidFill>
+                  <a:srgbClr val="101C32"/>
+                </a:solidFill>
+                <a:latin typeface="DejaVu Sans"/>
+                <a:ea typeface="DejaVu Sans"/>
+                <a:cs typeface="DejaVu Sans"/>
+              </a:rPr>
+              <a:t>В примере это атака,</a:t>
+            </a:r>
+          </a:p>
+          <a:p xmlns:a="http://schemas.openxmlformats.org/drawingml/2006/main">
+            <a:pPr>
+              <a:defRPr sz="1875" b="0">
+                <a:solidFill>
+                  <a:srgbClr val="101C32"/>
+                </a:solidFill>
+                <a:latin typeface="DejaVu Sans"/>
+                <a:ea typeface="DejaVu Sans"/>
+                <a:cs typeface="DejaVu Sans"/>
+              </a:defRPr>
+            </a:pPr>
+            <a:r>
+              <a:rPr sz="1875" b="0">
+                <a:solidFill>
+                  <a:srgbClr val="101C32"/>
+                </a:solidFill>
+                <a:latin typeface="DejaVu Sans"/>
+                <a:ea typeface="DejaVu Sans"/>
+                <a:cs typeface="DejaVu Sans"/>
+              </a:rPr>
+              <a:t>но модель сказала «норма».</a:t>
+            </a:r>
+          </a:p>
+          <a:p xmlns:a="http://schemas.openxmlformats.org/drawingml/2006/main">
+            <a:pPr>
+              <a:defRPr sz="1875" b="0">
+                <a:solidFill>
+                  <a:srgbClr val="101C32"/>
+                </a:solidFill>
+                <a:latin typeface="DejaVu Sans"/>
+                <a:ea typeface="DejaVu Sans"/>
+                <a:cs typeface="DejaVu Sans"/>
+              </a:defRPr>
+            </a:pPr>
+            <a:r>
+              <a:rPr sz="1875" b="0">
+                <a:solidFill>
+                  <a:srgbClr val="101C32"/>
+                </a:solidFill>
+                <a:latin typeface="DejaVu Sans"/>
+                <a:ea typeface="DejaVu Sans"/>
+                <a:cs typeface="DejaVu Sans"/>
+              </a:rPr>
+              <a:t>Так можно не заметить угрозу.</a:t>
+            </a:r>
+          </a:p>
+        </p:txBody>
+      </p:sp>
+      <p:sp>
+        <p:nvSpPr>
+          <p:cNvPr id="9" name="text-155">
+            <a:extLst xmlns:a="http://schemas.openxmlformats.org/drawingml/2006/main">
+              <a:ext uri="{FF2B5EF4-FFF2-40B4-BE49-F238E27FC236}">
+                <a16:creationId xmlns:a16="http://schemas.microsoft.com/office/drawing/2014/main" id="{1A2B2FC3-DAC3-47BF-A556-6D4B3B3924FA}"/>
+              </a:ext>
+            </a:extLst>
+          </p:cNvPr>
+          <p:cNvSpPr>
+            <a:spLocks xmlns:a="http://schemas.openxmlformats.org/drawingml/2006/main" noGrp="1"/>
+          </p:cNvSpPr>
+          <p:nvPr/>
+        </p:nvSpPr>
+        <p:spPr>
+          <a:xfrm xmlns:a="http://schemas.openxmlformats.org/drawingml/2006/main">
+            <a:off x="6381750" y="3124200"/>
+            <a:ext cx="5238750" cy="428625"/>
+          </a:xfrm>
+          <a:prstGeom xmlns:a="http://schemas.openxmlformats.org/drawingml/2006/main" prst="rect">
+            <a:avLst/>
+          </a:prstGeom>
+          <a:noFill xmlns:a="http://schemas.openxmlformats.org/drawingml/2006/main"/>
+          <a:ln xmlns:a="http://schemas.openxmlformats.org/drawingml/2006/main" w="0">
+            <a:noFill/>
+          </a:ln>
+        </p:spPr>
+        <p:txBody>
+          <a:bodyPr xmlns:a="http://schemas.openxmlformats.org/drawingml/2006/main" wrap="square" lIns="0" tIns="0" rIns="0" bIns="0">
+            <a:noAutofit/>
+          </a:bodyPr>
+          <a:lstStyle xmlns:a="http://schemas.openxmlformats.org/drawingml/2006/main">
+            <a:defPPr>
+              <a:defRPr sz="2175" b="1">
+                <a:solidFill>
+                  <a:srgbClr val="9C700C"/>
+                </a:solidFill>
+                <a:latin typeface="DejaVu Sans"/>
+                <a:ea typeface="DejaVu Sans"/>
+                <a:cs typeface="DejaVu Sans"/>
+              </a:defRPr>
+            </a:defPPr>
+          </a:lstStyle>
+          <a:p xmlns:a="http://schemas.openxmlformats.org/drawingml/2006/main">
+            <a:pPr>
+              <a:defRPr sz="2175" b="1">
+                <a:solidFill>
+                  <a:srgbClr val="9C700C"/>
+                </a:solidFill>
+                <a:latin typeface="DejaVu Sans"/>
+                <a:ea typeface="DejaVu Sans"/>
+                <a:cs typeface="DejaVu Sans"/>
+              </a:defRPr>
+            </a:pPr>
+            <a:r>
+              <a:rPr sz="2175" b="1">
+                <a:solidFill>
+                  <a:srgbClr val="9C700C"/>
+                </a:solidFill>
+                <a:latin typeface="DejaVu Sans"/>
+                <a:ea typeface="DejaVu Sans"/>
+                <a:cs typeface="DejaVu Sans"/>
+              </a:rPr>
+              <a:t>T05: ложная тревога</a:t>
+            </a:r>
+          </a:p>
+        </p:txBody>
+      </p:sp>
+      <p:sp>
+        <p:nvSpPr>
+          <p:cNvPr id="10" name="text-156">
+            <a:extLst xmlns:a="http://schemas.openxmlformats.org/drawingml/2006/main">
+              <a:ext uri="{FF2B5EF4-FFF2-40B4-BE49-F238E27FC236}">
+                <a16:creationId xmlns:a16="http://schemas.microsoft.com/office/drawing/2014/main" id="{F7BDF165-E23D-4727-874B-1E831E349B06}"/>
+              </a:ext>
+            </a:extLst>
+          </p:cNvPr>
+          <p:cNvSpPr>
+            <a:spLocks xmlns:a="http://schemas.openxmlformats.org/drawingml/2006/main" noGrp="1"/>
+          </p:cNvSpPr>
+          <p:nvPr/>
+        </p:nvSpPr>
+        <p:spPr>
+          <a:xfrm xmlns:a="http://schemas.openxmlformats.org/drawingml/2006/main">
+            <a:off x="6381750" y="3657600"/>
+            <a:ext cx="5238750" cy="1285875"/>
+          </a:xfrm>
+          <a:prstGeom xmlns:a="http://schemas.openxmlformats.org/drawingml/2006/main" prst="rect">
+            <a:avLst/>
+          </a:prstGeom>
+          <a:noFill xmlns:a="http://schemas.openxmlformats.org/drawingml/2006/main"/>
+          <a:ln xmlns:a="http://schemas.openxmlformats.org/drawingml/2006/main" w="0">
+            <a:noFill/>
+          </a:ln>
+        </p:spPr>
+        <p:txBody>
+          <a:bodyPr xmlns:a="http://schemas.openxmlformats.org/drawingml/2006/main" wrap="square" lIns="0" tIns="0" rIns="0" bIns="0">
+            <a:noAutofit/>
+          </a:bodyPr>
+          <a:lstStyle xmlns:a="http://schemas.openxmlformats.org/drawingml/2006/main">
+            <a:defPPr>
+              <a:defRPr sz="1875" b="0">
+                <a:solidFill>
+                  <a:srgbClr val="101C32"/>
+                </a:solidFill>
+                <a:latin typeface="DejaVu Sans"/>
+                <a:ea typeface="DejaVu Sans"/>
+                <a:cs typeface="DejaVu Sans"/>
+              </a:defRPr>
+            </a:defPPr>
+          </a:lstStyle>
+          <a:p xmlns:a="http://schemas.openxmlformats.org/drawingml/2006/main">
+            <a:pPr>
+              <a:defRPr sz="1875" b="0">
+                <a:solidFill>
+                  <a:srgbClr val="101C32"/>
+                </a:solidFill>
+                <a:latin typeface="DejaVu Sans"/>
+                <a:ea typeface="DejaVu Sans"/>
+                <a:cs typeface="DejaVu Sans"/>
+              </a:defRPr>
+            </a:pPr>
+            <a:r>
+              <a:rPr sz="1875" b="0">
+                <a:solidFill>
+                  <a:srgbClr val="101C32"/>
+                </a:solidFill>
+                <a:latin typeface="DejaVu Sans"/>
+                <a:ea typeface="DejaVu Sans"/>
+                <a:cs typeface="DejaVu Sans"/>
+              </a:rPr>
+              <a:t>В примере это обычный трафик,</a:t>
+            </a:r>
+          </a:p>
+          <a:p xmlns:a="http://schemas.openxmlformats.org/drawingml/2006/main">
+            <a:pPr>
+              <a:defRPr sz="1875" b="0">
+                <a:solidFill>
+                  <a:srgbClr val="101C32"/>
+                </a:solidFill>
+                <a:latin typeface="DejaVu Sans"/>
+                <a:ea typeface="DejaVu Sans"/>
+                <a:cs typeface="DejaVu Sans"/>
+              </a:defRPr>
+            </a:pPr>
+            <a:r>
+              <a:rPr sz="1875" b="0">
+                <a:solidFill>
+                  <a:srgbClr val="101C32"/>
+                </a:solidFill>
+                <a:latin typeface="DejaVu Sans"/>
+                <a:ea typeface="DejaVu Sans"/>
+                <a:cs typeface="DejaVu Sans"/>
+              </a:rPr>
+              <a:t>но модель сказала «атака».</a:t>
+            </a:r>
+          </a:p>
+          <a:p xmlns:a="http://schemas.openxmlformats.org/drawingml/2006/main">
+            <a:pPr>
+              <a:defRPr sz="1875" b="0">
+                <a:solidFill>
+                  <a:srgbClr val="101C32"/>
+                </a:solidFill>
+                <a:latin typeface="DejaVu Sans"/>
+                <a:ea typeface="DejaVu Sans"/>
+                <a:cs typeface="DejaVu Sans"/>
+              </a:defRPr>
+            </a:pPr>
+            <a:r>
+              <a:rPr sz="1875" b="0">
+                <a:solidFill>
+                  <a:srgbClr val="101C32"/>
+                </a:solidFill>
+                <a:latin typeface="DejaVu Sans"/>
+                <a:ea typeface="DejaVu Sans"/>
+                <a:cs typeface="DejaVu Sans"/>
+              </a:rPr>
+              <a:t>Блокировка помешает клиентам.</a:t>
+            </a:r>
+          </a:p>
+        </p:txBody>
+      </p:sp>
+      <p:sp>
+        <p:nvSpPr>
+          <p:cNvPr id="11" name="text-157">
+            <a:extLst xmlns:a="http://schemas.openxmlformats.org/drawingml/2006/main">
+              <a:ext uri="{FF2B5EF4-FFF2-40B4-BE49-F238E27FC236}">
+                <a16:creationId xmlns:a16="http://schemas.microsoft.com/office/drawing/2014/main" id="{A1A3CB51-AF3B-4E5F-BC82-2EA546B2AADB}"/>
+              </a:ext>
+            </a:extLst>
+          </p:cNvPr>
+          <p:cNvSpPr>
+            <a:spLocks xmlns:a="http://schemas.openxmlformats.org/drawingml/2006/main" noGrp="1"/>
+          </p:cNvSpPr>
+          <p:nvPr/>
+        </p:nvSpPr>
+        <p:spPr>
+          <a:xfrm xmlns:a="http://schemas.openxmlformats.org/drawingml/2006/main">
+            <a:off x="571500" y="5534025"/>
+            <a:ext cx="11049000" cy="695325"/>
+          </a:xfrm>
+          <a:prstGeom xmlns:a="http://schemas.openxmlformats.org/drawingml/2006/main" prst="rect">
+            <a:avLst/>
+          </a:prstGeom>
+          <a:noFill xmlns:a="http://schemas.openxmlformats.org/drawingml/2006/main"/>
+          <a:ln xmlns:a="http://schemas.openxmlformats.org/drawingml/2006/main" w="0">
+            <a:noFill/>
+          </a:ln>
+        </p:spPr>
+        <p:txBody>
+          <a:bodyPr xmlns:a="http://schemas.openxmlformats.org/drawingml/2006/main" wrap="square" lIns="0" tIns="0" rIns="0" bIns="0">
+            <a:noAutofit/>
+          </a:bodyPr>
+          <a:lstStyle xmlns:a="http://schemas.openxmlformats.org/drawingml/2006/main">
+            <a:defPPr>
+              <a:defRPr sz="1800" b="1">
+                <a:solidFill>
+                  <a:srgbClr val="101C32"/>
+                </a:solidFill>
+                <a:latin typeface="DejaVu Sans"/>
+                <a:ea typeface="DejaVu Sans"/>
+                <a:cs typeface="DejaVu Sans"/>
+              </a:defRPr>
+            </a:defPPr>
+          </a:lstStyle>
+          <a:p xmlns:a="http://schemas.openxmlformats.org/drawingml/2006/main">
+            <a:pPr>
+              <a:defRPr sz="1800" b="1">
+                <a:solidFill>
+                  <a:srgbClr val="101C32"/>
+                </a:solidFill>
+                <a:latin typeface="DejaVu Sans"/>
+                <a:ea typeface="DejaVu Sans"/>
+                <a:cs typeface="DejaVu Sans"/>
+              </a:defRPr>
+            </a:pPr>
+            <a:r>
+              <a:rPr sz="1800" b="1">
+                <a:solidFill>
+                  <a:srgbClr val="101C32"/>
+                </a:solidFill>
+                <a:latin typeface="DejaVu Sans"/>
+                <a:ea typeface="DejaVu Sans"/>
+                <a:cs typeface="DejaVu Sans"/>
+              </a:rPr>
+              <a:t>Здесь обе ошибки попали в перепроверку. Так бывает не всегда.</a:t>
+            </a:r>
+          </a:p>
+          <a:p xmlns:a="http://schemas.openxmlformats.org/drawingml/2006/main">
+            <a:pPr>
+              <a:defRPr sz="1800" b="1">
+                <a:solidFill>
+                  <a:srgbClr val="101C32"/>
+                </a:solidFill>
+                <a:latin typeface="DejaVu Sans"/>
+                <a:ea typeface="DejaVu Sans"/>
+                <a:cs typeface="DejaVu Sans"/>
+              </a:defRPr>
+            </a:pPr>
+            <a:r>
+              <a:rPr sz="1800" b="1">
+                <a:solidFill>
+                  <a:srgbClr val="101C32"/>
+                </a:solidFill>
+                <a:latin typeface="DejaVu Sans"/>
+                <a:ea typeface="DejaVu Sans"/>
+                <a:cs typeface="DejaVu Sans"/>
+              </a:rPr>
+              <a:t>Порог 0,10 выбираем после обучения, отдельно от зазора SVM.</a:t>
+            </a:r>
+          </a:p>
+        </p:txBody>
+      </p:sp>
+    </p:spTree>
+    <p:extLst>
+      <p:ext uri="{BB962C8B-B14F-4D97-AF65-F5344CB8AC3E}">
+        <p14:creationId xmlns:p14="http://schemas.microsoft.com/office/powerpoint/2010/main" val="2124189158"/>
+      </p:ext>
+    </p:extLst>
+  </p:cSld>
+</p:sld>
+</file>
+
+<file path=ppt/slides/slide22.xml><?xml version="1.0" encoding="utf-8"?>
+<p:sld xmlns:p="http://schemas.openxmlformats.org/presentationml/2006/main">
+  <p:cSld>
+    <p:bg>
+      <p:bgPr>
+        <a:solidFill xmlns:a="http://schemas.openxmlformats.org/drawingml/2006/main">
+          <a:srgbClr val="F4F7FA"/>
+        </a:solidFill>
+      </p:bgPr>
+    </p:bg>
+    <p:spTree>
+      <p:nvGrpSpPr>
+        <p:cNvPr id="1" name=""/>
+        <p:cNvGrpSpPr/>
+        <p:nvPr/>
+      </p:nvGrpSpPr>
+      <p:grpSpPr>
+        <a:xfrm xmlns:a="http://schemas.openxmlformats.org/drawingml/2006/main"/>
+      </p:grpSpPr>
+      <p:sp>
+        <p:nvSpPr>
+          <p:cNvPr id="9" name="text-158">
+            <a:extLst xmlns:a="http://schemas.openxmlformats.org/drawingml/2006/main">
+              <a:ext uri="{FF2B5EF4-FFF2-40B4-BE49-F238E27FC236}">
+                <a16:creationId xmlns:a16="http://schemas.microsoft.com/office/drawing/2014/main" id="{7307EDA8-D92D-40BB-B0BE-7F37B9A942AA}"/>
+              </a:ext>
+            </a:extLst>
+          </p:cNvPr>
+          <p:cNvSpPr>
+            <a:spLocks xmlns:a="http://schemas.openxmlformats.org/drawingml/2006/main" noGrp="1"/>
+          </p:cNvSpPr>
+          <p:nvPr/>
+        </p:nvSpPr>
+        <p:spPr>
+          <a:xfrm xmlns:a="http://schemas.openxmlformats.org/drawingml/2006/main">
+            <a:off x="571500" y="419100"/>
+            <a:ext cx="11049000" cy="1000125"/>
+          </a:xfrm>
+          <a:prstGeom xmlns:a="http://schemas.openxmlformats.org/drawingml/2006/main" prst="rect">
+            <a:avLst/>
+          </a:prstGeom>
+          <a:noFill xmlns:a="http://schemas.openxmlformats.org/drawingml/2006/main"/>
+          <a:ln xmlns:a="http://schemas.openxmlformats.org/drawingml/2006/main" w="0">
+            <a:noFill/>
+          </a:ln>
+        </p:spPr>
+        <p:txBody>
+          <a:bodyPr xmlns:a="http://schemas.openxmlformats.org/drawingml/2006/main" wrap="square" lIns="0" tIns="0" rIns="0" bIns="0">
+            <a:noAutofit/>
+          </a:bodyPr>
+          <a:lstStyle xmlns:a="http://schemas.openxmlformats.org/drawingml/2006/main">
+            <a:defPPr>
+              <a:defRPr sz="3000" b="1">
+                <a:solidFill>
+                  <a:srgbClr val="101C32"/>
+                </a:solidFill>
+                <a:latin typeface="DejaVu Sans"/>
+                <a:ea typeface="DejaVu Sans"/>
+                <a:cs typeface="DejaVu Sans"/>
+              </a:defRPr>
+            </a:defPPr>
+          </a:lstStyle>
+          <a:p xmlns:a="http://schemas.openxmlformats.org/drawingml/2006/main">
+            <a:pPr>
+              <a:defRPr sz="3000" b="1">
+                <a:solidFill>
+                  <a:srgbClr val="101C32"/>
+                </a:solidFill>
+                <a:latin typeface="DejaVu Sans"/>
+                <a:ea typeface="DejaVu Sans"/>
+                <a:cs typeface="DejaVu Sans"/>
+              </a:defRPr>
+            </a:pPr>
+            <a:r>
+              <a:rPr sz="3000" b="1">
+                <a:solidFill>
+                  <a:srgbClr val="101C32"/>
+                </a:solidFill>
+                <a:latin typeface="DejaVu Sans"/>
+                <a:ea typeface="DejaVu Sans"/>
+                <a:cs typeface="DejaVu Sans"/>
+              </a:rPr>
+              <a:t>Что с этими результатами делать в ИБ</a:t>
+            </a:r>
+          </a:p>
+        </p:txBody>
+      </p:sp>
+      <p:sp>
+        <p:nvSpPr>
+          <p:cNvPr id="2" name="text-159">
+            <a:extLst xmlns:a="http://schemas.openxmlformats.org/drawingml/2006/main">
+              <a:ext uri="{FF2B5EF4-FFF2-40B4-BE49-F238E27FC236}">
+                <a16:creationId xmlns:a16="http://schemas.microsoft.com/office/drawing/2014/main" id="{0EEF900D-0D0A-4777-81F5-317FEDB85BE2}"/>
+              </a:ext>
+            </a:extLst>
+          </p:cNvPr>
+          <p:cNvSpPr>
+            <a:spLocks xmlns:a="http://schemas.openxmlformats.org/drawingml/2006/main" noGrp="1"/>
+          </p:cNvSpPr>
+          <p:nvPr/>
+        </p:nvSpPr>
+        <p:spPr>
+          <a:xfrm xmlns:a="http://schemas.openxmlformats.org/drawingml/2006/main">
+            <a:off x="571500" y="1362075"/>
+            <a:ext cx="10953750" cy="571500"/>
+          </a:xfrm>
+          <a:prstGeom xmlns:a="http://schemas.openxmlformats.org/drawingml/2006/main" prst="rect">
+            <a:avLst/>
+          </a:prstGeom>
+          <a:noFill xmlns:a="http://schemas.openxmlformats.org/drawingml/2006/main"/>
+          <a:ln xmlns:a="http://schemas.openxmlformats.org/drawingml/2006/main" w="0">
+            <a:noFill/>
+          </a:ln>
+        </p:spPr>
+        <p:txBody>
+          <a:bodyPr xmlns:a="http://schemas.openxmlformats.org/drawingml/2006/main" wrap="square" lIns="0" tIns="0" rIns="0" bIns="0">
+            <a:noAutofit/>
+          </a:bodyPr>
+          <a:lstStyle xmlns:a="http://schemas.openxmlformats.org/drawingml/2006/main">
+            <a:defPPr>
+              <a:defRPr sz="1725" b="0">
+                <a:solidFill>
+                  <a:srgbClr val="536377"/>
+                </a:solidFill>
+                <a:latin typeface="DejaVu Sans"/>
+                <a:ea typeface="DejaVu Sans"/>
+                <a:cs typeface="DejaVu Sans"/>
+              </a:defRPr>
+            </a:defPPr>
+          </a:lstStyle>
+          <a:p xmlns:a="http://schemas.openxmlformats.org/drawingml/2006/main">
+            <a:pPr>
+              <a:defRPr sz="1725" b="0">
+                <a:solidFill>
+                  <a:srgbClr val="536377"/>
+                </a:solidFill>
+                <a:latin typeface="DejaVu Sans"/>
+                <a:ea typeface="DejaVu Sans"/>
+                <a:cs typeface="DejaVu Sans"/>
+              </a:defRPr>
+            </a:pPr>
+            <a:r>
+              <a:rPr sz="1725" b="0">
+                <a:solidFill>
+                  <a:srgbClr val="536377"/>
+                </a:solidFill>
+                <a:latin typeface="DejaVu Sans"/>
+                <a:ea typeface="DejaVu Sans"/>
+                <a:cs typeface="DejaVu Sans"/>
+              </a:rPr>
+              <a:t>Функция triage помогает разобрать ответы модели. SOC занимается мониторингом ИБ.</a:t>
+            </a:r>
+          </a:p>
+        </p:txBody>
+      </p:sp>
+      <p:sp>
+        <p:nvSpPr>
+          <p:cNvPr id="3" name="">
+            <a:extLst xmlns:a="http://schemas.openxmlformats.org/drawingml/2006/main">
+              <a:ext uri="{FF2B5EF4-FFF2-40B4-BE49-F238E27FC236}">
+                <a16:creationId xmlns:a16="http://schemas.microsoft.com/office/drawing/2014/main" id="{3642B8A7-9827-445E-8B5F-51430448381E}"/>
+              </a:ext>
+            </a:extLst>
+          </p:cNvPr>
+          <p:cNvSpPr>
+            <a:spLocks xmlns:a="http://schemas.openxmlformats.org/drawingml/2006/main" noGrp="1"/>
+          </p:cNvSpPr>
+          <p:nvPr/>
+        </p:nvSpPr>
+        <p:spPr>
+          <a:xfrm xmlns:a="http://schemas.openxmlformats.org/drawingml/2006/main">
+            <a:off x="571500" y="6324600"/>
+            <a:ext cx="11049000" cy="19050"/>
+          </a:xfrm>
+          <a:prstGeom xmlns:a="http://schemas.openxmlformats.org/drawingml/2006/main" prst="rect">
+            <a:avLst/>
+          </a:prstGeom>
+          <a:solidFill xmlns:a="http://schemas.openxmlformats.org/drawingml/2006/main">
+            <a:srgbClr val="D8E0E8"/>
+          </a:solidFill>
+          <a:ln xmlns:a="http://schemas.openxmlformats.org/drawingml/2006/main" w="0">
+            <a:noFill/>
+          </a:ln>
+        </p:spPr>
+      </p:sp>
+      <p:sp>
+        <p:nvSpPr>
+          <p:cNvPr id="4" name="text-160">
+            <a:extLst xmlns:a="http://schemas.openxmlformats.org/drawingml/2006/main">
+              <a:ext uri="{FF2B5EF4-FFF2-40B4-BE49-F238E27FC236}">
+                <a16:creationId xmlns:a16="http://schemas.microsoft.com/office/drawing/2014/main" id="{8CEDBF97-1B12-49B5-820B-E19822C612CF}"/>
+              </a:ext>
+            </a:extLst>
+          </p:cNvPr>
+          <p:cNvSpPr>
+            <a:spLocks xmlns:a="http://schemas.openxmlformats.org/drawingml/2006/main" noGrp="1"/>
+          </p:cNvSpPr>
+          <p:nvPr/>
+        </p:nvSpPr>
+        <p:spPr>
+          <a:xfrm xmlns:a="http://schemas.openxmlformats.org/drawingml/2006/main">
+            <a:off x="571500" y="6477000"/>
+            <a:ext cx="10096500" cy="209550"/>
+          </a:xfrm>
+          <a:prstGeom xmlns:a="http://schemas.openxmlformats.org/drawingml/2006/main" prst="rect">
+            <a:avLst/>
+          </a:prstGeom>
+          <a:noFill xmlns:a="http://schemas.openxmlformats.org/drawingml/2006/main"/>
+          <a:ln xmlns:a="http://schemas.openxmlformats.org/drawingml/2006/main" w="0">
+            <a:noFill/>
+          </a:ln>
+        </p:spPr>
+        <p:txBody>
+          <a:bodyPr xmlns:a="http://schemas.openxmlformats.org/drawingml/2006/main" wrap="square" lIns="0" tIns="0" rIns="0" bIns="0">
+            <a:noAutofit/>
+          </a:bodyPr>
+          <a:lstStyle xmlns:a="http://schemas.openxmlformats.org/drawingml/2006/main">
+            <a:defPPr>
+              <a:defRPr sz="1125" b="0">
+                <a:solidFill>
+                  <a:srgbClr val="536377"/>
+                </a:solidFill>
+                <a:latin typeface="DejaVu Sans"/>
+                <a:ea typeface="DejaVu Sans"/>
+                <a:cs typeface="DejaVu Sans"/>
+              </a:defRPr>
+            </a:defPPr>
+          </a:lstStyle>
+          <a:p xmlns:a="http://schemas.openxmlformats.org/drawingml/2006/main">
+            <a:pPr>
+              <a:defRPr sz="1125" b="0">
+                <a:solidFill>
+                  <a:srgbClr val="536377"/>
+                </a:solidFill>
+                <a:latin typeface="DejaVu Sans"/>
+                <a:ea typeface="DejaVu Sans"/>
+                <a:cs typeface="DejaVu Sans"/>
+              </a:defRPr>
+            </a:pPr>
+            <a:r>
+              <a:rPr sz="1125" b="0">
+                <a:solidFill>
+                  <a:srgbClr val="536377"/>
+                </a:solidFill>
+                <a:latin typeface="DejaVu Sans"/>
+                <a:ea typeface="DejaVu Sans"/>
+                <a:cs typeface="DejaVu Sans"/>
+              </a:rPr>
+              <a:t>1.13   [8]. Пример работы аналитика</a:t>
+            </a:r>
+          </a:p>
+        </p:txBody>
+      </p:sp>
+      <p:sp>
+        <p:nvSpPr>
+          <p:cNvPr id="5" name="text-161">
+            <a:extLst xmlns:a="http://schemas.openxmlformats.org/drawingml/2006/main">
+              <a:ext uri="{FF2B5EF4-FFF2-40B4-BE49-F238E27FC236}">
+                <a16:creationId xmlns:a16="http://schemas.microsoft.com/office/drawing/2014/main" id="{6DEB8E9F-E467-4FEC-A006-BC339DC7813C}"/>
+              </a:ext>
+            </a:extLst>
+          </p:cNvPr>
+          <p:cNvSpPr>
+            <a:spLocks xmlns:a="http://schemas.openxmlformats.org/drawingml/2006/main" noGrp="1"/>
+          </p:cNvSpPr>
+          <p:nvPr/>
+        </p:nvSpPr>
+        <p:spPr>
+          <a:xfrm xmlns:a="http://schemas.openxmlformats.org/drawingml/2006/main">
+            <a:off x="11049000" y="6477000"/>
+            <a:ext cx="571500" cy="209550"/>
+          </a:xfrm>
+          <a:prstGeom xmlns:a="http://schemas.openxmlformats.org/drawingml/2006/main" prst="rect">
+            <a:avLst/>
+          </a:prstGeom>
+          <a:noFill xmlns:a="http://schemas.openxmlformats.org/drawingml/2006/main"/>
+          <a:ln xmlns:a="http://schemas.openxmlformats.org/drawingml/2006/main" w="0">
+            <a:noFill/>
+          </a:ln>
+        </p:spPr>
+        <p:txBody>
+          <a:bodyPr xmlns:a="http://schemas.openxmlformats.org/drawingml/2006/main" wrap="square" lIns="0" tIns="0" rIns="0" bIns="0">
+            <a:noAutofit/>
+          </a:bodyPr>
+          <a:lstStyle xmlns:a="http://schemas.openxmlformats.org/drawingml/2006/main">
+            <a:defPPr>
+              <a:defRPr sz="1125" b="0">
+                <a:solidFill>
+                  <a:srgbClr val="536377"/>
+                </a:solidFill>
+                <a:latin typeface="DejaVu Sans"/>
+                <a:ea typeface="DejaVu Sans"/>
+                <a:cs typeface="DejaVu Sans"/>
+              </a:defRPr>
+            </a:defPPr>
+          </a:lstStyle>
+          <a:p xmlns:a="http://schemas.openxmlformats.org/drawingml/2006/main">
+            <a:pPr>
+              <a:defRPr sz="1125" b="0">
+                <a:solidFill>
+                  <a:srgbClr val="536377"/>
+                </a:solidFill>
+                <a:latin typeface="DejaVu Sans"/>
+                <a:ea typeface="DejaVu Sans"/>
+                <a:cs typeface="DejaVu Sans"/>
+              </a:defRPr>
+            </a:pPr>
+            <a:r>
+              <a:rPr sz="1125" b="0">
+                <a:solidFill>
+                  <a:srgbClr val="536377"/>
+                </a:solidFill>
+                <a:latin typeface="DejaVu Sans"/>
+                <a:ea typeface="DejaVu Sans"/>
+                <a:cs typeface="DejaVu Sans"/>
+              </a:rPr>
+              <a:t>22</a:t>
+            </a:r>
+          </a:p>
+        </p:txBody>
+      </p:sp>
       <p:graphicFrame>
         <p:nvGraphicFramePr>
           <p:cNvPr id="6" name="">
             <a:extLst xmlns:a="http://schemas.openxmlformats.org/drawingml/2006/main">
               <a:ext uri="{FF2B5EF4-FFF2-40B4-BE49-F238E27FC236}">
-                <a16:creationId xmlns:a16="http://schemas.microsoft.com/office/drawing/2014/main" id="{AC2FC22E-54DF-4BFD-AEE3-A30D1F1A8B63}"/>
+                <a16:creationId xmlns:a16="http://schemas.microsoft.com/office/drawing/2014/main" id="{0AF51178-0424-47C0-927C-75061EDB219C}"/>
               </a:ext>
             </a:extLst>
           </p:cNvPr>
@@ -16299,7 +16858,7 @@
                           <a:ea typeface="DejaVu Sans"/>
                           <a:cs typeface="DejaVu Sans"/>
                         </a:rPr>
-                        <a:t>Ввод: SYN/с; %</a:t>
+                        <a:t>Ввод: SYN/с и %</a:t>
                       </a:r>
                     </a:p>
                   </a:txBody>
@@ -16584,10 +17143,10 @@
       </p:graphicFrame>
       <p:sp>
         <p:nvSpPr>
-          <p:cNvPr id="7" name="text-157">
-            <a:extLst xmlns:a="http://schemas.openxmlformats.org/drawingml/2006/main">
-              <a:ext uri="{FF2B5EF4-FFF2-40B4-BE49-F238E27FC236}">
-                <a16:creationId xmlns:a16="http://schemas.microsoft.com/office/drawing/2014/main" id="{D43012E3-7BEC-4955-A67C-4A00C9FEACAC}"/>
+          <p:cNvPr id="7" name="text-162">
+            <a:extLst xmlns:a="http://schemas.openxmlformats.org/drawingml/2006/main">
+              <a:ext uri="{FF2B5EF4-FFF2-40B4-BE49-F238E27FC236}">
+                <a16:creationId xmlns:a16="http://schemas.microsoft.com/office/drawing/2014/main" id="{89A1D360-D32D-442F-8AA3-E28302525C75}"/>
               </a:ext>
             </a:extLst>
           </p:cNvPr>
@@ -16645,7 +17204,7 @@
                 <a:ea typeface="DejaVu Sans"/>
                 <a:cs typeface="DejaVu Sans"/>
               </a:rPr>
-              <a:t>Сигнал атаки: прогноз «атака» при любом запасе.</a:t>
+              <a:t>Ответ «атака» всегда даёт сигнал о подозрении.</a:t>
             </a:r>
           </a:p>
           <a:p xmlns:a="http://schemas.openxmlformats.org/drawingml/2006/main">
@@ -16668,17 +17227,17 @@
                 <a:ea typeface="DejaVu Sans"/>
                 <a:cs typeface="DejaVu Sans"/>
               </a:rPr>
-              <a:t>Перепроверка: малый запас при любом прогнозе.</a:t>
+              <a:t>Малый запас добавляет перепроверку, даже если модель выбрала норму.</a:t>
             </a:r>
           </a:p>
         </p:txBody>
       </p:sp>
       <p:sp>
         <p:nvSpPr>
-          <p:cNvPr id="8" name="text-158">
-            <a:extLst xmlns:a="http://schemas.openxmlformats.org/drawingml/2006/main">
-              <a:ext uri="{FF2B5EF4-FFF2-40B4-BE49-F238E27FC236}">
-                <a16:creationId xmlns:a16="http://schemas.microsoft.com/office/drawing/2014/main" id="{EF6A6868-9279-4B7D-B764-4BB2011A86E9}"/>
+          <p:cNvPr id="8" name="text-163">
+            <a:extLst xmlns:a="http://schemas.openxmlformats.org/drawingml/2006/main">
+              <a:ext uri="{FF2B5EF4-FFF2-40B4-BE49-F238E27FC236}">
+                <a16:creationId xmlns:a16="http://schemas.microsoft.com/office/drawing/2014/main" id="{9DC3C31A-57DB-4386-AF97-9DBE9A9923A3}"/>
               </a:ext>
             </a:extLst>
           </p:cNvPr>
@@ -16736,7 +17295,7 @@
                 <a:ea typeface="DejaVu Sans"/>
                 <a:cs typeface="DejaVu Sans"/>
               </a:rPr>
-              <a:t>Аналитик проверяет логи, доступность, очередь соединений и потери.</a:t>
+              <a:t>Аналитик сверяет сигнал с логами и состоянием сервера.</a:t>
             </a:r>
           </a:p>
           <a:p xmlns:a="http://schemas.openxmlformats.org/drawingml/2006/main">
@@ -16759,7 +17318,7 @@
                 <a:ea typeface="DejaVu Sans"/>
                 <a:cs typeface="DejaVu Sans"/>
               </a:rPr>
-              <a:t>Перед внедрением: реальные данные, отдельная проверка во времени,</a:t>
+              <a:t>Перед применением в сети нужны реальные данные и проверка на новых</a:t>
             </a:r>
           </a:p>
           <a:p xmlns:a="http://schemas.openxmlformats.org/drawingml/2006/main">
@@ -16782,7 +17341,7 @@
                 <a:ea typeface="DejaVu Sans"/>
                 <a:cs typeface="DejaVu Sans"/>
               </a:rPr>
-              <a:t>оценка пропусков и ложных тревог. Учебный код не блокирует трафик.</a:t>
+              <a:t>периодах трафика. Наш код показывает результат и не блокирует трафик.</a:t>
             </a:r>
           </a:p>
         </p:txBody>
@@ -16790,14 +17349,14 @@
     </p:spTree>
     <p:extLst>
       <p:ext uri="{BB962C8B-B14F-4D97-AF65-F5344CB8AC3E}">
-        <p14:creationId xmlns:p14="http://schemas.microsoft.com/office/powerpoint/2010/main" val="1193984583"/>
+        <p14:creationId xmlns:p14="http://schemas.microsoft.com/office/powerpoint/2010/main" val="1455982622"/>
       </p:ext>
     </p:extLst>
   </p:cSld>
 </p:sld>
 </file>
 
-<file path=ppt/slides/slide22.xml><?xml version="1.0" encoding="utf-8"?>
+<file path=ppt/slides/slide23.xml><?xml version="1.0" encoding="utf-8"?>
 <p:sld xmlns:p="http://schemas.openxmlformats.org/presentationml/2006/main">
   <p:cSld>
     <p:bg>
@@ -16818,10 +17377,10 @@
       </p:grpSpPr>
       <p:sp>
         <p:nvSpPr>
-          <p:cNvPr id="8" name="text-159">
-            <a:extLst xmlns:a="http://schemas.openxmlformats.org/drawingml/2006/main">
-              <a:ext uri="{FF2B5EF4-FFF2-40B4-BE49-F238E27FC236}">
-                <a16:creationId xmlns:a16="http://schemas.microsoft.com/office/drawing/2014/main" id="{092507EA-4A9B-44D8-BD48-145FF2FB9FFE}"/>
+          <p:cNvPr id="8" name="text-164">
+            <a:extLst xmlns:a="http://schemas.openxmlformats.org/drawingml/2006/main">
+              <a:ext uri="{FF2B5EF4-FFF2-40B4-BE49-F238E27FC236}">
+                <a16:creationId xmlns:a16="http://schemas.microsoft.com/office/drawing/2014/main" id="{4F82F736-A875-44A0-B8FF-FBBC1C7F3D41}"/>
               </a:ext>
             </a:extLst>
           </p:cNvPr>
@@ -16879,7 +17438,7 @@
                 <a:ea typeface="DejaVu Sans"/>
                 <a:cs typeface="DejaVu Sans"/>
               </a:rPr>
-              <a:t>Что показал сквозной пример</a:t>
+              <a:t>Что получилось в нашем примере</a:t>
             </a:r>
           </a:p>
         </p:txBody>
@@ -16889,7 +17448,7 @@
           <p:cNvPr id="2" name="">
             <a:extLst xmlns:a="http://schemas.openxmlformats.org/drawingml/2006/main">
               <a:ext uri="{FF2B5EF4-FFF2-40B4-BE49-F238E27FC236}">
-                <a16:creationId xmlns:a16="http://schemas.microsoft.com/office/drawing/2014/main" id="{8CFB5443-A7DD-4F3C-9374-3C7441C38346}"/>
+                <a16:creationId xmlns:a16="http://schemas.microsoft.com/office/drawing/2014/main" id="{218A5FCC-774E-4E36-9EF4-2F8BB9100C5D}"/>
               </a:ext>
             </a:extLst>
           </p:cNvPr>
@@ -16916,10 +17475,10 @@
       </p:sp>
       <p:sp>
         <p:nvSpPr>
-          <p:cNvPr id="3" name="text-160">
-            <a:extLst xmlns:a="http://schemas.openxmlformats.org/drawingml/2006/main">
-              <a:ext uri="{FF2B5EF4-FFF2-40B4-BE49-F238E27FC236}">
-                <a16:creationId xmlns:a16="http://schemas.microsoft.com/office/drawing/2014/main" id="{C251A30D-6302-41CA-BD41-19628EAED197}"/>
+          <p:cNvPr id="3" name="text-165">
+            <a:extLst xmlns:a="http://schemas.openxmlformats.org/drawingml/2006/main">
+              <a:ext uri="{FF2B5EF4-FFF2-40B4-BE49-F238E27FC236}">
+                <a16:creationId xmlns:a16="http://schemas.microsoft.com/office/drawing/2014/main" id="{7170E875-C74E-4661-AFD9-53945B657AFC}"/>
               </a:ext>
             </a:extLst>
           </p:cNvPr>
@@ -16984,10 +17543,10 @@
       </p:sp>
       <p:sp>
         <p:nvSpPr>
-          <p:cNvPr id="4" name="text-161">
-            <a:extLst xmlns:a="http://schemas.openxmlformats.org/drawingml/2006/main">
-              <a:ext uri="{FF2B5EF4-FFF2-40B4-BE49-F238E27FC236}">
-                <a16:creationId xmlns:a16="http://schemas.microsoft.com/office/drawing/2014/main" id="{2F2DF1FF-6CDC-45D7-8727-46F426A21103}"/>
+          <p:cNvPr id="4" name="text-166">
+            <a:extLst xmlns:a="http://schemas.openxmlformats.org/drawingml/2006/main">
+              <a:ext uri="{FF2B5EF4-FFF2-40B4-BE49-F238E27FC236}">
+                <a16:creationId xmlns:a16="http://schemas.microsoft.com/office/drawing/2014/main" id="{ADCF0F9F-70E2-491F-9626-EBDA375FD997}"/>
               </a:ext>
             </a:extLst>
           </p:cNvPr>
@@ -17045,7 +17604,7 @@
                 <a:ea typeface="DejaVu Sans"/>
                 <a:cs typeface="DejaVu Sans"/>
               </a:rPr>
-              <a:t>22</a:t>
+              <a:t>23</a:t>
             </a:r>
           </a:p>
         </p:txBody>
@@ -17055,7 +17614,7 @@
           <p:cNvPr id="5" name="">
             <a:extLst xmlns:a="http://schemas.openxmlformats.org/drawingml/2006/main">
               <a:ext uri="{FF2B5EF4-FFF2-40B4-BE49-F238E27FC236}">
-                <a16:creationId xmlns:a16="http://schemas.microsoft.com/office/drawing/2014/main" id="{99965726-EFD9-4C44-9EE7-8935224C60C3}"/>
+                <a16:creationId xmlns:a16="http://schemas.microsoft.com/office/drawing/2014/main" id="{F76E02C3-3633-4A7C-873A-F3448B5A3E63}"/>
               </a:ext>
             </a:extLst>
           </p:cNvPr>
@@ -17163,7 +17722,7 @@
                           <a:ea typeface="DejaVu Sans"/>
                           <a:cs typeface="DejaVu Sans"/>
                         </a:rPr>
-                        <a:t>N05 и A06 выбраны как медоиды своих классов</a:t>
+                        <a:t>Выбрали N05 для нормы и A06 для SYN-flood</a:t>
                       </a:r>
                     </a:p>
                   </a:txBody>
@@ -17213,7 +17772,7 @@
                           <a:ea typeface="DejaVu Sans"/>
                           <a:cs typeface="DejaVu Sans"/>
                         </a:rPr>
-                        <a:t>T07 прошёл сравнение с эталонами, затем SVM</a:t>
+                        <a:t>Сравнили T07 с эталонами и проверили через SVM</a:t>
                       </a:r>
                     </a:p>
                   </a:txBody>
@@ -17263,7 +17822,7 @@
                           <a:ea typeface="DejaVu Sans"/>
                           <a:cs typeface="DejaVu Sans"/>
                         </a:rPr>
-                        <a:t>Рассчитаны все 8 окон; малый запас у T03–T06</a:t>
+                        <a:t>Проверили 8 окон и выделили 4 пограничных</a:t>
                       </a:r>
                     </a:p>
                   </a:txBody>
@@ -17313,7 +17872,7 @@
                           <a:ea typeface="DejaVu Sans"/>
                           <a:cs typeface="DejaVu Sans"/>
                         </a:rPr>
-                        <a:t>Прогноз и запас помогают назначить проверку</a:t>
+                        <a:t>Видим, какие ответы стоит проверить</a:t>
                       </a:r>
                     </a:p>
                   </a:txBody>
@@ -17333,7 +17892,7 @@
           <p:cNvPr id="6" name="">
             <a:extLst xmlns:a="http://schemas.openxmlformats.org/drawingml/2006/main">
               <a:ext uri="{FF2B5EF4-FFF2-40B4-BE49-F238E27FC236}">
-                <a16:creationId xmlns:a16="http://schemas.microsoft.com/office/drawing/2014/main" id="{1FEC5658-91E7-4952-BBFC-6B94EAE2E888}"/>
+                <a16:creationId xmlns:a16="http://schemas.microsoft.com/office/drawing/2014/main" id="{DB683238-DA46-46F7-AF1D-A4996326489B}"/>
               </a:ext>
             </a:extLst>
           </p:cNvPr>
@@ -17360,10 +17919,10 @@
       </p:sp>
       <p:sp>
         <p:nvSpPr>
-          <p:cNvPr id="7" name="text-162">
-            <a:extLst xmlns:a="http://schemas.openxmlformats.org/drawingml/2006/main">
-              <a:ext uri="{FF2B5EF4-FFF2-40B4-BE49-F238E27FC236}">
-                <a16:creationId xmlns:a16="http://schemas.microsoft.com/office/drawing/2014/main" id="{9F36B8C1-2918-49E5-8A3F-1A829F12C368}"/>
+          <p:cNvPr id="7" name="text-167">
+            <a:extLst xmlns:a="http://schemas.openxmlformats.org/drawingml/2006/main">
+              <a:ext uri="{FF2B5EF4-FFF2-40B4-BE49-F238E27FC236}">
+                <a16:creationId xmlns:a16="http://schemas.microsoft.com/office/drawing/2014/main" id="{20FBA819-BB13-409B-8EF2-888E76323CAF}"/>
               </a:ext>
             </a:extLst>
           </p:cNvPr>
@@ -17421,7 +17980,7 @@
                 <a:ea typeface="DejaVu Sans"/>
                 <a:cs typeface="DejaVu Sans"/>
               </a:rPr>
-              <a:t>Запас объясняет устойчивость ответа, но не гарантирует его правильность</a:t>
+              <a:t>Запас показывает близость к смене ответа. Правильность проверяем отдельно.</a:t>
             </a:r>
           </a:p>
         </p:txBody>
@@ -17429,14 +17988,14 @@
     </p:spTree>
     <p:extLst>
       <p:ext uri="{BB962C8B-B14F-4D97-AF65-F5344CB8AC3E}">
-        <p14:creationId xmlns:p14="http://schemas.microsoft.com/office/powerpoint/2010/main" val="1769255195"/>
+        <p14:creationId xmlns:p14="http://schemas.microsoft.com/office/powerpoint/2010/main" val="1188684252"/>
       </p:ext>
     </p:extLst>
   </p:cSld>
 </p:sld>
 </file>
 
-<file path=ppt/slides/slide23.xml><?xml version="1.0" encoding="utf-8"?>
+<file path=ppt/slides/slide24.xml><?xml version="1.0" encoding="utf-8"?>
 <p:sld xmlns:p="http://schemas.openxmlformats.org/presentationml/2006/main">
   <p:cSld>
     <p:bg>
@@ -17457,10 +18016,10 @@
       </p:grpSpPr>
       <p:sp>
         <p:nvSpPr>
-          <p:cNvPr id="22" name="text-163">
-            <a:extLst xmlns:a="http://schemas.openxmlformats.org/drawingml/2006/main">
-              <a:ext uri="{FF2B5EF4-FFF2-40B4-BE49-F238E27FC236}">
-                <a16:creationId xmlns:a16="http://schemas.microsoft.com/office/drawing/2014/main" id="{D8F8E75E-DDCA-4FEB-A2D8-D7FECE850272}"/>
+          <p:cNvPr id="22" name="text-168">
+            <a:extLst xmlns:a="http://schemas.openxmlformats.org/drawingml/2006/main">
+              <a:ext uri="{FF2B5EF4-FFF2-40B4-BE49-F238E27FC236}">
+                <a16:creationId xmlns:a16="http://schemas.microsoft.com/office/drawing/2014/main" id="{3F368AF7-FC75-4277-B88B-B598CD7FCAFD}"/>
               </a:ext>
             </a:extLst>
           </p:cNvPr>
@@ -17525,10 +18084,10 @@
       </p:sp>
       <p:sp>
         <p:nvSpPr>
-          <p:cNvPr id="2" name="text-164">
-            <a:extLst xmlns:a="http://schemas.openxmlformats.org/drawingml/2006/main">
-              <a:ext uri="{FF2B5EF4-FFF2-40B4-BE49-F238E27FC236}">
-                <a16:creationId xmlns:a16="http://schemas.microsoft.com/office/drawing/2014/main" id="{4B590E13-9B57-4B89-805A-931F434C4B4E}"/>
+          <p:cNvPr id="2" name="text-169">
+            <a:extLst xmlns:a="http://schemas.openxmlformats.org/drawingml/2006/main">
+              <a:ext uri="{FF2B5EF4-FFF2-40B4-BE49-F238E27FC236}">
+                <a16:creationId xmlns:a16="http://schemas.microsoft.com/office/drawing/2014/main" id="{1FD43A88-40AE-4865-A439-293DD5E3AF16}"/>
               </a:ext>
             </a:extLst>
           </p:cNvPr>
@@ -17586,7 +18145,7 @@
                 <a:ea typeface="DejaVu Sans"/>
                 <a:cs typeface="DejaVu Sans"/>
               </a:rPr>
-              <a:t>Первоисточники и официальные документы; ссылки активны</a:t>
+              <a:t>Публикации и официальные документы. Ссылки открываются по нажатию.</a:t>
             </a:r>
           </a:p>
         </p:txBody>
@@ -17596,7 +18155,7 @@
           <p:cNvPr id="3" name="">
             <a:extLst xmlns:a="http://schemas.openxmlformats.org/drawingml/2006/main">
               <a:ext uri="{FF2B5EF4-FFF2-40B4-BE49-F238E27FC236}">
-                <a16:creationId xmlns:a16="http://schemas.microsoft.com/office/drawing/2014/main" id="{A6C9F0F4-54A3-44C4-B8D2-20F8D29DEE97}"/>
+                <a16:creationId xmlns:a16="http://schemas.microsoft.com/office/drawing/2014/main" id="{E0110009-8A90-467C-A941-734343F28EFF}"/>
               </a:ext>
             </a:extLst>
           </p:cNvPr>
@@ -17623,10 +18182,10 @@
       </p:sp>
       <p:sp>
         <p:nvSpPr>
-          <p:cNvPr id="4" name="text-165">
-            <a:extLst xmlns:a="http://schemas.openxmlformats.org/drawingml/2006/main">
-              <a:ext uri="{FF2B5EF4-FFF2-40B4-BE49-F238E27FC236}">
-                <a16:creationId xmlns:a16="http://schemas.microsoft.com/office/drawing/2014/main" id="{C758DF92-BDBB-41E5-88DC-2EC1767941AE}"/>
+          <p:cNvPr id="4" name="text-170">
+            <a:extLst xmlns:a="http://schemas.openxmlformats.org/drawingml/2006/main">
+              <a:ext uri="{FF2B5EF4-FFF2-40B4-BE49-F238E27FC236}">
+                <a16:creationId xmlns:a16="http://schemas.microsoft.com/office/drawing/2014/main" id="{084002E4-819D-4E71-99A2-27581D24BD15}"/>
               </a:ext>
             </a:extLst>
           </p:cNvPr>
@@ -17691,10 +18250,10 @@
       </p:sp>
       <p:sp>
         <p:nvSpPr>
-          <p:cNvPr id="5" name="text-166">
-            <a:extLst xmlns:a="http://schemas.openxmlformats.org/drawingml/2006/main">
-              <a:ext uri="{FF2B5EF4-FFF2-40B4-BE49-F238E27FC236}">
-                <a16:creationId xmlns:a16="http://schemas.microsoft.com/office/drawing/2014/main" id="{BF0CBFEE-4A44-40D5-940B-71E208B045FC}"/>
+          <p:cNvPr id="5" name="text-171">
+            <a:extLst xmlns:a="http://schemas.openxmlformats.org/drawingml/2006/main">
+              <a:ext uri="{FF2B5EF4-FFF2-40B4-BE49-F238E27FC236}">
+                <a16:creationId xmlns:a16="http://schemas.microsoft.com/office/drawing/2014/main" id="{B4EFDE0B-858D-45B0-B9C0-220B2AD71659}"/>
               </a:ext>
             </a:extLst>
           </p:cNvPr>
@@ -17752,17 +18311,17 @@
                 <a:ea typeface="DejaVu Sans"/>
                 <a:cs typeface="DejaVu Sans"/>
               </a:rPr>
-              <a:t>23</a:t>
+              <a:t>24</a:t>
             </a:r>
           </a:p>
         </p:txBody>
       </p:sp>
       <p:sp>
         <p:nvSpPr>
-          <p:cNvPr id="6" name="text-167">
-            <a:extLst xmlns:a="http://schemas.openxmlformats.org/drawingml/2006/main">
-              <a:ext uri="{FF2B5EF4-FFF2-40B4-BE49-F238E27FC236}">
-                <a16:creationId xmlns:a16="http://schemas.microsoft.com/office/drawing/2014/main" id="{A9200F57-A0D7-4574-AE30-8DDE3F21DB87}"/>
+          <p:cNvPr id="6" name="text-172">
+            <a:extLst xmlns:a="http://schemas.openxmlformats.org/drawingml/2006/main">
+              <a:ext uri="{FF2B5EF4-FFF2-40B4-BE49-F238E27FC236}">
+                <a16:creationId xmlns:a16="http://schemas.microsoft.com/office/drawing/2014/main" id="{85545774-7E5A-459A-8179-DB5B9ECE1BCB}"/>
               </a:ext>
             </a:extLst>
           </p:cNvPr>
@@ -17819,7 +18378,7 @@
                 <a:latin typeface="DejaVu Sans"/>
                 <a:ea typeface="DejaVu Sans"/>
                 <a:cs typeface="DejaVu Sans"/>
-                <a:hlinkClick xmlns:r="http://schemas.openxmlformats.org/officeDocument/2006/relationships" r:id="Rc9d86b128166451e"/>
+                <a:hlinkClick xmlns:r="http://schemas.openxmlformats.org/officeDocument/2006/relationships" r:id="R2aeed29e598e4e3e"/>
               </a:rPr>
               <a:t>[1] Cortes &amp; Vapnik (1995)</a:t>
             </a:r>
@@ -17828,10 +18387,10 @@
       </p:sp>
       <p:sp>
         <p:nvSpPr>
-          <p:cNvPr id="7" name="text-168">
-            <a:extLst xmlns:a="http://schemas.openxmlformats.org/drawingml/2006/main">
-              <a:ext uri="{FF2B5EF4-FFF2-40B4-BE49-F238E27FC236}">
-                <a16:creationId xmlns:a16="http://schemas.microsoft.com/office/drawing/2014/main" id="{2CB7657F-967D-4B5F-A09F-9C2A28AC85EE}"/>
+          <p:cNvPr id="7" name="text-173">
+            <a:extLst xmlns:a="http://schemas.openxmlformats.org/drawingml/2006/main">
+              <a:ext uri="{FF2B5EF4-FFF2-40B4-BE49-F238E27FC236}">
+                <a16:creationId xmlns:a16="http://schemas.microsoft.com/office/drawing/2014/main" id="{20EE3DBB-A222-4A4E-969C-C0CF66A76FBF}"/>
               </a:ext>
             </a:extLst>
           </p:cNvPr>
@@ -17896,10 +18455,10 @@
       </p:sp>
       <p:sp>
         <p:nvSpPr>
-          <p:cNvPr id="8" name="text-169">
-            <a:extLst xmlns:a="http://schemas.openxmlformats.org/drawingml/2006/main">
-              <a:ext uri="{FF2B5EF4-FFF2-40B4-BE49-F238E27FC236}">
-                <a16:creationId xmlns:a16="http://schemas.microsoft.com/office/drawing/2014/main" id="{24CCABBB-BDB4-4DBC-B69B-9CAA93772342}"/>
+          <p:cNvPr id="8" name="text-174">
+            <a:extLst xmlns:a="http://schemas.openxmlformats.org/drawingml/2006/main">
+              <a:ext uri="{FF2B5EF4-FFF2-40B4-BE49-F238E27FC236}">
+                <a16:creationId xmlns:a16="http://schemas.microsoft.com/office/drawing/2014/main" id="{DE1982DD-B645-4F5D-B331-6EBA4155C65B}"/>
               </a:ext>
             </a:extLst>
           </p:cNvPr>
@@ -17956,7 +18515,7 @@
                 <a:latin typeface="DejaVu Sans"/>
                 <a:ea typeface="DejaVu Sans"/>
                 <a:cs typeface="DejaVu Sans"/>
-                <a:hlinkClick xmlns:r="http://schemas.openxmlformats.org/officeDocument/2006/relationships" r:id="R76f149ca911240f2"/>
+                <a:hlinkClick xmlns:r="http://schemas.openxmlformats.org/officeDocument/2006/relationships" r:id="R04c4886f4b66477e"/>
               </a:rPr>
               <a:t>[2] Stanford CS229, A. Ng</a:t>
             </a:r>
@@ -17965,10 +18524,10 @@
       </p:sp>
       <p:sp>
         <p:nvSpPr>
-          <p:cNvPr id="9" name="text-170">
-            <a:extLst xmlns:a="http://schemas.openxmlformats.org/drawingml/2006/main">
-              <a:ext uri="{FF2B5EF4-FFF2-40B4-BE49-F238E27FC236}">
-                <a16:creationId xmlns:a16="http://schemas.microsoft.com/office/drawing/2014/main" id="{50237726-16D6-41FF-81BB-2F5F602ECDAA}"/>
+          <p:cNvPr id="9" name="text-175">
+            <a:extLst xmlns:a="http://schemas.openxmlformats.org/drawingml/2006/main">
+              <a:ext uri="{FF2B5EF4-FFF2-40B4-BE49-F238E27FC236}">
+                <a16:creationId xmlns:a16="http://schemas.microsoft.com/office/drawing/2014/main" id="{DB0A359E-07E7-47EA-B5E4-DEAFF738EA91}"/>
               </a:ext>
             </a:extLst>
           </p:cNvPr>
@@ -18026,17 +18585,17 @@
                 <a:ea typeface="DejaVu Sans"/>
                 <a:cs typeface="DejaVu Sans"/>
               </a:rPr>
-              <a:t>Functional / geometric margin; soft margin</a:t>
+              <a:t>Отступы и мягкий зазор</a:t>
             </a:r>
           </a:p>
         </p:txBody>
       </p:sp>
       <p:sp>
         <p:nvSpPr>
-          <p:cNvPr id="10" name="text-171">
-            <a:extLst xmlns:a="http://schemas.openxmlformats.org/drawingml/2006/main">
-              <a:ext uri="{FF2B5EF4-FFF2-40B4-BE49-F238E27FC236}">
-                <a16:creationId xmlns:a16="http://schemas.microsoft.com/office/drawing/2014/main" id="{34365B7E-A3FC-490C-B187-ACCE0CA37262}"/>
+          <p:cNvPr id="10" name="text-176">
+            <a:extLst xmlns:a="http://schemas.openxmlformats.org/drawingml/2006/main">
+              <a:ext uri="{FF2B5EF4-FFF2-40B4-BE49-F238E27FC236}">
+                <a16:creationId xmlns:a16="http://schemas.microsoft.com/office/drawing/2014/main" id="{74A2FD77-327A-4AA3-9322-7634CD15EB95}"/>
               </a:ext>
             </a:extLst>
           </p:cNvPr>
@@ -18093,7 +18652,7 @@
                 <a:latin typeface="DejaVu Sans"/>
                 <a:ea typeface="DejaVu Sans"/>
                 <a:cs typeface="DejaVu Sans"/>
-                <a:hlinkClick xmlns:r="http://schemas.openxmlformats.org/officeDocument/2006/relationships" r:id="Rc669ec1e75af49b6"/>
+                <a:hlinkClick xmlns:r="http://schemas.openxmlformats.org/officeDocument/2006/relationships" r:id="R85a43466f26d40ef"/>
               </a:rPr>
               <a:t>[3] Schubert &amp; Rousseeuw (2019)</a:t>
             </a:r>
@@ -18102,10 +18661,10 @@
       </p:sp>
       <p:sp>
         <p:nvSpPr>
-          <p:cNvPr id="11" name="text-172">
-            <a:extLst xmlns:a="http://schemas.openxmlformats.org/drawingml/2006/main">
-              <a:ext uri="{FF2B5EF4-FFF2-40B4-BE49-F238E27FC236}">
-                <a16:creationId xmlns:a16="http://schemas.microsoft.com/office/drawing/2014/main" id="{42A89744-747F-46C5-B788-D6C8E053F972}"/>
+          <p:cNvPr id="11" name="text-177">
+            <a:extLst xmlns:a="http://schemas.openxmlformats.org/drawingml/2006/main">
+              <a:ext uri="{FF2B5EF4-FFF2-40B4-BE49-F238E27FC236}">
+                <a16:creationId xmlns:a16="http://schemas.microsoft.com/office/drawing/2014/main" id="{FE49B0BE-6096-4E0B-9094-48FAB2C2A4E1}"/>
               </a:ext>
             </a:extLst>
           </p:cNvPr>
@@ -18170,10 +18729,10 @@
       </p:sp>
       <p:sp>
         <p:nvSpPr>
-          <p:cNvPr id="12" name="text-173">
-            <a:extLst xmlns:a="http://schemas.openxmlformats.org/drawingml/2006/main">
-              <a:ext uri="{FF2B5EF4-FFF2-40B4-BE49-F238E27FC236}">
-                <a16:creationId xmlns:a16="http://schemas.microsoft.com/office/drawing/2014/main" id="{6C8025BB-D87D-4AD1-B0FA-E589D5BB8D67}"/>
+          <p:cNvPr id="12" name="text-178">
+            <a:extLst xmlns:a="http://schemas.openxmlformats.org/drawingml/2006/main">
+              <a:ext uri="{FF2B5EF4-FFF2-40B4-BE49-F238E27FC236}">
+                <a16:creationId xmlns:a16="http://schemas.microsoft.com/office/drawing/2014/main" id="{550A101A-8248-49D5-AF2E-360BDEF224DC}"/>
               </a:ext>
             </a:extLst>
           </p:cNvPr>
@@ -18230,7 +18789,7 @@
                 <a:latin typeface="DejaVu Sans"/>
                 <a:ea typeface="DejaVu Sans"/>
                 <a:cs typeface="DejaVu Sans"/>
-                <a:hlinkClick xmlns:r="http://schemas.openxmlformats.org/officeDocument/2006/relationships" r:id="R6285b7c262f14576"/>
+                <a:hlinkClick xmlns:r="http://schemas.openxmlformats.org/officeDocument/2006/relationships" r:id="R38ec8ddfb9c448c6"/>
               </a:rPr>
               <a:t>[4] Eddy (2007), RFC 4987</a:t>
             </a:r>
@@ -18239,10 +18798,10 @@
       </p:sp>
       <p:sp>
         <p:nvSpPr>
-          <p:cNvPr id="13" name="text-174">
-            <a:extLst xmlns:a="http://schemas.openxmlformats.org/drawingml/2006/main">
-              <a:ext uri="{FF2B5EF4-FFF2-40B4-BE49-F238E27FC236}">
-                <a16:creationId xmlns:a16="http://schemas.microsoft.com/office/drawing/2014/main" id="{5DADC12C-E519-4B24-9DE9-B749A40B8E22}"/>
+          <p:cNvPr id="13" name="text-179">
+            <a:extLst xmlns:a="http://schemas.openxmlformats.org/drawingml/2006/main">
+              <a:ext uri="{FF2B5EF4-FFF2-40B4-BE49-F238E27FC236}">
+                <a16:creationId xmlns:a16="http://schemas.microsoft.com/office/drawing/2014/main" id="{A033C1F3-49A7-42D9-9A24-63012F35DDAC}"/>
               </a:ext>
             </a:extLst>
           </p:cNvPr>
@@ -18307,10 +18866,10 @@
       </p:sp>
       <p:sp>
         <p:nvSpPr>
-          <p:cNvPr id="14" name="text-175">
-            <a:extLst xmlns:a="http://schemas.openxmlformats.org/drawingml/2006/main">
-              <a:ext uri="{FF2B5EF4-FFF2-40B4-BE49-F238E27FC236}">
-                <a16:creationId xmlns:a16="http://schemas.microsoft.com/office/drawing/2014/main" id="{FD74EE4B-D3D3-4B23-A884-3A008477F891}"/>
+          <p:cNvPr id="14" name="text-180">
+            <a:extLst xmlns:a="http://schemas.openxmlformats.org/drawingml/2006/main">
+              <a:ext uri="{FF2B5EF4-FFF2-40B4-BE49-F238E27FC236}">
+                <a16:creationId xmlns:a16="http://schemas.microsoft.com/office/drawing/2014/main" id="{6696C6B4-0283-416C-BDD7-D426D00581E2}"/>
               </a:ext>
             </a:extLst>
           </p:cNvPr>
@@ -18367,7 +18926,7 @@
                 <a:latin typeface="DejaVu Sans"/>
                 <a:ea typeface="DejaVu Sans"/>
                 <a:cs typeface="DejaVu Sans"/>
-                <a:hlinkClick xmlns:r="http://schemas.openxmlformats.org/officeDocument/2006/relationships" r:id="R33f2713d916e4c2a"/>
+                <a:hlinkClick xmlns:r="http://schemas.openxmlformats.org/officeDocument/2006/relationships" r:id="R385c1d1ccc324542"/>
               </a:rPr>
               <a:t>[5] scikit-learn: документация</a:t>
             </a:r>
@@ -18376,10 +18935,10 @@
       </p:sp>
       <p:sp>
         <p:nvSpPr>
-          <p:cNvPr id="15" name="text-176">
-            <a:extLst xmlns:a="http://schemas.openxmlformats.org/drawingml/2006/main">
-              <a:ext uri="{FF2B5EF4-FFF2-40B4-BE49-F238E27FC236}">
-                <a16:creationId xmlns:a16="http://schemas.microsoft.com/office/drawing/2014/main" id="{B3BAD253-B6D7-49AB-B5A1-98B408D90AA8}"/>
+          <p:cNvPr id="15" name="text-181">
+            <a:extLst xmlns:a="http://schemas.openxmlformats.org/drawingml/2006/main">
+              <a:ext uri="{FF2B5EF4-FFF2-40B4-BE49-F238E27FC236}">
+                <a16:creationId xmlns:a16="http://schemas.microsoft.com/office/drawing/2014/main" id="{FB4936AC-3335-4C8D-9B0A-EDA8F5000748}"/>
               </a:ext>
             </a:extLst>
           </p:cNvPr>
@@ -18444,10 +19003,10 @@
       </p:sp>
       <p:sp>
         <p:nvSpPr>
-          <p:cNvPr id="16" name="text-177">
-            <a:extLst xmlns:a="http://schemas.openxmlformats.org/drawingml/2006/main">
-              <a:ext uri="{FF2B5EF4-FFF2-40B4-BE49-F238E27FC236}">
-                <a16:creationId xmlns:a16="http://schemas.microsoft.com/office/drawing/2014/main" id="{8E1625CA-60FF-4AE5-ADEE-7FAB88CFC90F}"/>
+          <p:cNvPr id="16" name="text-182">
+            <a:extLst xmlns:a="http://schemas.openxmlformats.org/drawingml/2006/main">
+              <a:ext uri="{FF2B5EF4-FFF2-40B4-BE49-F238E27FC236}">
+                <a16:creationId xmlns:a16="http://schemas.microsoft.com/office/drawing/2014/main" id="{7A13A174-4C8D-43A2-AFEF-69D861237A3B}"/>
               </a:ext>
             </a:extLst>
           </p:cNvPr>
@@ -18504,7 +19063,7 @@
                 <a:latin typeface="DejaVu Sans"/>
                 <a:ea typeface="DejaVu Sans"/>
                 <a:cs typeface="DejaVu Sans"/>
-                <a:hlinkClick xmlns:r="http://schemas.openxmlformats.org/officeDocument/2006/relationships" r:id="R03105559cef04e7f"/>
+                <a:hlinkClick xmlns:r="http://schemas.openxmlformats.org/officeDocument/2006/relationships" r:id="R07ed952989344822"/>
               </a:rPr>
               <a:t>[6] Moosavi-Dezfooli et al. (CVPR 2016)</a:t>
             </a:r>
@@ -18513,10 +19072,10 @@
       </p:sp>
       <p:sp>
         <p:nvSpPr>
-          <p:cNvPr id="17" name="text-178">
-            <a:extLst xmlns:a="http://schemas.openxmlformats.org/drawingml/2006/main">
-              <a:ext uri="{FF2B5EF4-FFF2-40B4-BE49-F238E27FC236}">
-                <a16:creationId xmlns:a16="http://schemas.microsoft.com/office/drawing/2014/main" id="{7F8B29A0-7FCF-4CA8-BB27-1D84492DB4FD}"/>
+          <p:cNvPr id="17" name="text-183">
+            <a:extLst xmlns:a="http://schemas.openxmlformats.org/drawingml/2006/main">
+              <a:ext uri="{FF2B5EF4-FFF2-40B4-BE49-F238E27FC236}">
+                <a16:creationId xmlns:a16="http://schemas.microsoft.com/office/drawing/2014/main" id="{D34CA220-F864-41A9-BD4F-0D09B0F12A6A}"/>
               </a:ext>
             </a:extLst>
           </p:cNvPr>
@@ -18581,10 +19140,10 @@
       </p:sp>
       <p:sp>
         <p:nvSpPr>
-          <p:cNvPr id="18" name="text-179">
-            <a:extLst xmlns:a="http://schemas.openxmlformats.org/drawingml/2006/main">
-              <a:ext uri="{FF2B5EF4-FFF2-40B4-BE49-F238E27FC236}">
-                <a16:creationId xmlns:a16="http://schemas.microsoft.com/office/drawing/2014/main" id="{1203511E-2DA8-4A4A-9CB3-54BA914F5C92}"/>
+          <p:cNvPr id="18" name="text-184">
+            <a:extLst xmlns:a="http://schemas.openxmlformats.org/drawingml/2006/main">
+              <a:ext uri="{FF2B5EF4-FFF2-40B4-BE49-F238E27FC236}">
+                <a16:creationId xmlns:a16="http://schemas.microsoft.com/office/drawing/2014/main" id="{81AF6E0B-C538-4328-9340-1905BC786521}"/>
               </a:ext>
             </a:extLst>
           </p:cNvPr>
@@ -18641,7 +19200,7 @@
                 <a:latin typeface="DejaVu Sans"/>
                 <a:ea typeface="DejaVu Sans"/>
                 <a:cs typeface="DejaVu Sans"/>
-                <a:hlinkClick xmlns:r="http://schemas.openxmlformats.org/officeDocument/2006/relationships" r:id="R802b6feb644941e4"/>
+                <a:hlinkClick xmlns:r="http://schemas.openxmlformats.org/officeDocument/2006/relationships" r:id="Rb64a86db994f4252"/>
               </a:rPr>
               <a:t>[7] UNB / CICDDoS2019</a:t>
             </a:r>
@@ -18650,10 +19209,10 @@
       </p:sp>
       <p:sp>
         <p:nvSpPr>
-          <p:cNvPr id="19" name="text-180">
-            <a:extLst xmlns:a="http://schemas.openxmlformats.org/drawingml/2006/main">
-              <a:ext uri="{FF2B5EF4-FFF2-40B4-BE49-F238E27FC236}">
-                <a16:creationId xmlns:a16="http://schemas.microsoft.com/office/drawing/2014/main" id="{907B05C6-ED04-4201-9D74-23FA9F984DD8}"/>
+          <p:cNvPr id="19" name="text-185">
+            <a:extLst xmlns:a="http://schemas.openxmlformats.org/drawingml/2006/main">
+              <a:ext uri="{FF2B5EF4-FFF2-40B4-BE49-F238E27FC236}">
+                <a16:creationId xmlns:a16="http://schemas.microsoft.com/office/drawing/2014/main" id="{5AA75CD5-AE6C-4301-9A02-15D41D4E377F}"/>
               </a:ext>
             </a:extLst>
           </p:cNvPr>
@@ -18718,10 +19277,10 @@
       </p:sp>
       <p:sp>
         <p:nvSpPr>
-          <p:cNvPr id="20" name="text-181">
-            <a:extLst xmlns:a="http://schemas.openxmlformats.org/drawingml/2006/main">
-              <a:ext uri="{FF2B5EF4-FFF2-40B4-BE49-F238E27FC236}">
-                <a16:creationId xmlns:a16="http://schemas.microsoft.com/office/drawing/2014/main" id="{963AE40E-90A2-4CB0-8D52-FE5E32AB96C0}"/>
+          <p:cNvPr id="20" name="text-186">
+            <a:extLst xmlns:a="http://schemas.openxmlformats.org/drawingml/2006/main">
+              <a:ext uri="{FF2B5EF4-FFF2-40B4-BE49-F238E27FC236}">
+                <a16:creationId xmlns:a16="http://schemas.microsoft.com/office/drawing/2014/main" id="{57369903-0BE6-454E-96D0-CEEA95DC6173}"/>
               </a:ext>
             </a:extLst>
           </p:cNvPr>
@@ -18778,7 +19337,7 @@
                 <a:latin typeface="DejaVu Sans"/>
                 <a:ea typeface="DejaVu Sans"/>
                 <a:cs typeface="DejaVu Sans"/>
-                <a:hlinkClick xmlns:r="http://schemas.openxmlformats.org/officeDocument/2006/relationships" r:id="R1c7af5f610cd4761"/>
+                <a:hlinkClick xmlns:r="http://schemas.openxmlformats.org/officeDocument/2006/relationships" r:id="R98a419b7c25748f3"/>
               </a:rPr>
               <a:t>[8] NIST SP 800-94</a:t>
             </a:r>
@@ -18787,10 +19346,10 @@
       </p:sp>
       <p:sp>
         <p:nvSpPr>
-          <p:cNvPr id="21" name="text-182">
-            <a:extLst xmlns:a="http://schemas.openxmlformats.org/drawingml/2006/main">
-              <a:ext uri="{FF2B5EF4-FFF2-40B4-BE49-F238E27FC236}">
-                <a16:creationId xmlns:a16="http://schemas.microsoft.com/office/drawing/2014/main" id="{E7EA1007-20AC-4668-BAE7-BEA42F4D5313}"/>
+          <p:cNvPr id="21" name="text-187">
+            <a:extLst xmlns:a="http://schemas.openxmlformats.org/drawingml/2006/main">
+              <a:ext uri="{FF2B5EF4-FFF2-40B4-BE49-F238E27FC236}">
+                <a16:creationId xmlns:a16="http://schemas.microsoft.com/office/drawing/2014/main" id="{4A7F0919-D26B-41C7-835E-5C49347C3868}"/>
               </a:ext>
             </a:extLst>
           </p:cNvPr>
@@ -18856,7 +19415,7 @@
     </p:spTree>
     <p:extLst>
       <p:ext uri="{BB962C8B-B14F-4D97-AF65-F5344CB8AC3E}">
-        <p14:creationId xmlns:p14="http://schemas.microsoft.com/office/powerpoint/2010/main" val="990385450"/>
+        <p14:creationId xmlns:p14="http://schemas.microsoft.com/office/powerpoint/2010/main" val="1616871903"/>
       </p:ext>
     </p:extLst>
   </p:cSld>
@@ -18887,7 +19446,7 @@
           <p:cNvPr id="10" name="text-11">
             <a:extLst xmlns:a="http://schemas.openxmlformats.org/drawingml/2006/main">
               <a:ext uri="{FF2B5EF4-FFF2-40B4-BE49-F238E27FC236}">
-                <a16:creationId xmlns:a16="http://schemas.microsoft.com/office/drawing/2014/main" id="{10CF8543-CB2A-45DB-935F-96BD742DACA5}"/>
+                <a16:creationId xmlns:a16="http://schemas.microsoft.com/office/drawing/2014/main" id="{C5B2F2C9-2A42-4412-AF35-47BC5F36B017}"/>
               </a:ext>
             </a:extLst>
           </p:cNvPr>
@@ -18955,7 +19514,7 @@
           <p:cNvPr id="2" name="text-12">
             <a:extLst xmlns:a="http://schemas.openxmlformats.org/drawingml/2006/main">
               <a:ext uri="{FF2B5EF4-FFF2-40B4-BE49-F238E27FC236}">
-                <a16:creationId xmlns:a16="http://schemas.microsoft.com/office/drawing/2014/main" id="{E110121F-E65E-4CA8-803D-03BDB0D57E25}"/>
+                <a16:creationId xmlns:a16="http://schemas.microsoft.com/office/drawing/2014/main" id="{2FCB649A-33D2-4472-B5B9-2FB3669CA422}"/>
               </a:ext>
             </a:extLst>
           </p:cNvPr>
@@ -19013,7 +19572,7 @@
                 <a:ea typeface="DejaVu Sans"/>
                 <a:cs typeface="DejaVu Sans"/>
               </a:rPr>
-              <a:t>Классификатор, или модель, — правило выбора класса по признакам</a:t>
+              <a:t>Модель получает признаки объекта и по ним выбирает класс</a:t>
             </a:r>
           </a:p>
         </p:txBody>
@@ -19023,7 +19582,7 @@
           <p:cNvPr id="3" name="">
             <a:extLst xmlns:a="http://schemas.openxmlformats.org/drawingml/2006/main">
               <a:ext uri="{FF2B5EF4-FFF2-40B4-BE49-F238E27FC236}">
-                <a16:creationId xmlns:a16="http://schemas.microsoft.com/office/drawing/2014/main" id="{2307F2F3-1FD8-4FC4-9E93-F0A83FE1F353}"/>
+                <a16:creationId xmlns:a16="http://schemas.microsoft.com/office/drawing/2014/main" id="{AA248039-6350-4919-B542-97FC7B78641E}"/>
               </a:ext>
             </a:extLst>
           </p:cNvPr>
@@ -19053,7 +19612,7 @@
           <p:cNvPr id="4" name="text-13">
             <a:extLst xmlns:a="http://schemas.openxmlformats.org/drawingml/2006/main">
               <a:ext uri="{FF2B5EF4-FFF2-40B4-BE49-F238E27FC236}">
-                <a16:creationId xmlns:a16="http://schemas.microsoft.com/office/drawing/2014/main" id="{EDAE3FC1-DCBC-4AD6-9596-059813676F29}"/>
+                <a16:creationId xmlns:a16="http://schemas.microsoft.com/office/drawing/2014/main" id="{1220DDC7-C05D-4605-90D4-53F9C8D61C64}"/>
               </a:ext>
             </a:extLst>
           </p:cNvPr>
@@ -19111,7 +19670,7 @@
                 <a:ea typeface="DejaVu Sans"/>
                 <a:cs typeface="DejaVu Sans"/>
               </a:rPr>
-              <a:t>1.13  •  [2, 5]</a:t>
+              <a:t>1.13   [2, 5]</a:t>
             </a:r>
           </a:p>
         </p:txBody>
@@ -19121,7 +19680,7 @@
           <p:cNvPr id="5" name="text-14">
             <a:extLst xmlns:a="http://schemas.openxmlformats.org/drawingml/2006/main">
               <a:ext uri="{FF2B5EF4-FFF2-40B4-BE49-F238E27FC236}">
-                <a16:creationId xmlns:a16="http://schemas.microsoft.com/office/drawing/2014/main" id="{D97C0711-F60C-454A-B620-DA0A0AEA8E00}"/>
+                <a16:creationId xmlns:a16="http://schemas.microsoft.com/office/drawing/2014/main" id="{02082695-4184-4BD7-9C20-638B8BD322DD}"/>
               </a:ext>
             </a:extLst>
           </p:cNvPr>
@@ -19189,7 +19748,7 @@
           <p:cNvPr id="6" name="">
             <a:extLst xmlns:a="http://schemas.openxmlformats.org/drawingml/2006/main">
               <a:ext uri="{FF2B5EF4-FFF2-40B4-BE49-F238E27FC236}">
-                <a16:creationId xmlns:a16="http://schemas.microsoft.com/office/drawing/2014/main" id="{2A880BD1-F2AB-4294-8E61-DE487D6DA51A}"/>
+                <a16:creationId xmlns:a16="http://schemas.microsoft.com/office/drawing/2014/main" id="{60087056-8387-4155-9626-1723E5E15C23}"/>
               </a:ext>
             </a:extLst>
           </p:cNvPr>
@@ -19247,7 +19806,7 @@
                           <a:ea typeface="DejaVu Sans"/>
                           <a:cs typeface="DejaVu Sans"/>
                         </a:rPr>
-                        <a:t>Применение готовой модели</a:t>
+                        <a:t>После обучения</a:t>
                       </a:r>
                     </a:p>
                   </a:txBody>
@@ -19273,7 +19832,7 @@
                           <a:ea typeface="DejaVu Sans"/>
                           <a:cs typeface="DejaVu Sans"/>
                         </a:rPr>
-                        <a:t>Объекты + известные классы (метки)</a:t>
+                        <a:t>Примеры с уже известными классами</a:t>
                       </a:r>
                     </a:p>
                   </a:txBody>
@@ -19323,7 +19882,7 @@
                           <a:ea typeface="DejaVu Sans"/>
                           <a:cs typeface="DejaVu Sans"/>
                         </a:rPr>
-                        <a:t>Подбираем правило по этим примерам</a:t>
+                        <a:t>Подбираем правило на этих примерах</a:t>
                       </a:r>
                     </a:p>
                   </a:txBody>
@@ -19347,7 +19906,7 @@
                           <a:ea typeface="DejaVu Sans"/>
                           <a:cs typeface="DejaVu Sans"/>
                         </a:rPr>
-                        <a:t>Получаем прогноз класса</a:t>
+                        <a:t>Применяем правило и получаем ответ</a:t>
                       </a:r>
                     </a:p>
                   </a:txBody>
@@ -19367,7 +19926,7 @@
           <p:cNvPr id="7" name="text-15">
             <a:extLst xmlns:a="http://schemas.openxmlformats.org/drawingml/2006/main">
               <a:ext uri="{FF2B5EF4-FFF2-40B4-BE49-F238E27FC236}">
-                <a16:creationId xmlns:a16="http://schemas.microsoft.com/office/drawing/2014/main" id="{2EB63084-8640-4DB1-93BE-A2FA02FD0FCF}"/>
+                <a16:creationId xmlns:a16="http://schemas.microsoft.com/office/drawing/2014/main" id="{F656CC7F-6945-40B6-BCFD-51E4486A1274}"/>
               </a:ext>
             </a:extLst>
           </p:cNvPr>
@@ -19425,7 +19984,7 @@
                 <a:ea typeface="DejaVu Sans"/>
                 <a:cs typeface="DejaVu Sans"/>
               </a:rPr>
-              <a:t>Обучающая выборка — набор примеров с известными метками.</a:t>
+              <a:t>Известные классы называют метками, а набор примеров для обучения</a:t>
             </a:r>
           </a:p>
           <a:p xmlns:a="http://schemas.openxmlformats.org/drawingml/2006/main">
@@ -19448,7 +20007,7 @@
                 <a:ea typeface="DejaVu Sans"/>
                 <a:cs typeface="DejaVu Sans"/>
               </a:rPr>
-              <a:t>Известная метка и прогноз модели могут не совпадать: это ошибка.</a:t>
+              <a:t>называют обучающей выборкой. Ответ модели может быть ошибочным.</a:t>
             </a:r>
           </a:p>
         </p:txBody>
@@ -19458,7 +20017,7 @@
           <p:cNvPr id="8" name="">
             <a:extLst xmlns:a="http://schemas.openxmlformats.org/drawingml/2006/main">
               <a:ext uri="{FF2B5EF4-FFF2-40B4-BE49-F238E27FC236}">
-                <a16:creationId xmlns:a16="http://schemas.microsoft.com/office/drawing/2014/main" id="{074E8A68-D434-40F5-BB34-E64231EAAAA9}"/>
+                <a16:creationId xmlns:a16="http://schemas.microsoft.com/office/drawing/2014/main" id="{B373E0FC-72AE-4A68-9956-CC57676CA7E4}"/>
               </a:ext>
             </a:extLst>
           </p:cNvPr>
@@ -19488,7 +20047,7 @@
           <p:cNvPr id="9" name="text-16">
             <a:extLst xmlns:a="http://schemas.openxmlformats.org/drawingml/2006/main">
               <a:ext uri="{FF2B5EF4-FFF2-40B4-BE49-F238E27FC236}">
-                <a16:creationId xmlns:a16="http://schemas.microsoft.com/office/drawing/2014/main" id="{66C9E171-3888-4FF8-9A1F-18B3720FA42E}"/>
+                <a16:creationId xmlns:a16="http://schemas.microsoft.com/office/drawing/2014/main" id="{20945B91-B948-4490-A14A-9F7E297ACC09}"/>
               </a:ext>
             </a:extLst>
           </p:cNvPr>
@@ -19546,7 +20105,7 @@
                 <a:ea typeface="DejaVu Sans"/>
                 <a:cs typeface="DejaVu Sans"/>
               </a:rPr>
-              <a:t>Начнём с простого правила — сравнения с образцами классов</a:t>
+              <a:t>Сначала попробуем выбирать класс по сходству с образцами</a:t>
             </a:r>
           </a:p>
         </p:txBody>
@@ -19554,7 +20113,7 @@
     </p:spTree>
     <p:extLst>
       <p:ext uri="{BB962C8B-B14F-4D97-AF65-F5344CB8AC3E}">
-        <p14:creationId xmlns:p14="http://schemas.microsoft.com/office/powerpoint/2010/main" val="1568608709"/>
+        <p14:creationId xmlns:p14="http://schemas.microsoft.com/office/powerpoint/2010/main" val="46888652"/>
       </p:ext>
     </p:extLst>
   </p:cSld>
@@ -19585,7 +20144,7 @@
           <p:cNvPr id="12" name="text-17">
             <a:extLst xmlns:a="http://schemas.openxmlformats.org/drawingml/2006/main">
               <a:ext uri="{FF2B5EF4-FFF2-40B4-BE49-F238E27FC236}">
-                <a16:creationId xmlns:a16="http://schemas.microsoft.com/office/drawing/2014/main" id="{4C9C5E4E-6911-43DB-B4F3-026B79CCAE14}"/>
+                <a16:creationId xmlns:a16="http://schemas.microsoft.com/office/drawing/2014/main" id="{3D19690B-EB14-4CA9-BDF7-4E844637D011}"/>
               </a:ext>
             </a:extLst>
           </p:cNvPr>
@@ -19643,7 +20202,7 @@
                 <a:ea typeface="DejaVu Sans"/>
                 <a:cs typeface="DejaVu Sans"/>
               </a:rPr>
-              <a:t>Определение эталона класса</a:t>
+              <a:t>Что называют эталоном класса</a:t>
             </a:r>
           </a:p>
         </p:txBody>
@@ -19653,7 +20212,7 @@
           <p:cNvPr id="2" name="">
             <a:extLst xmlns:a="http://schemas.openxmlformats.org/drawingml/2006/main">
               <a:ext uri="{FF2B5EF4-FFF2-40B4-BE49-F238E27FC236}">
-                <a16:creationId xmlns:a16="http://schemas.microsoft.com/office/drawing/2014/main" id="{1A854047-CB19-4C3A-AF85-443182F27F5B}"/>
+                <a16:creationId xmlns:a16="http://schemas.microsoft.com/office/drawing/2014/main" id="{58E24B7C-437D-4F6E-860A-523E23A3D556}"/>
               </a:ext>
             </a:extLst>
           </p:cNvPr>
@@ -19683,7 +20242,7 @@
           <p:cNvPr id="3" name="text-18">
             <a:extLst xmlns:a="http://schemas.openxmlformats.org/drawingml/2006/main">
               <a:ext uri="{FF2B5EF4-FFF2-40B4-BE49-F238E27FC236}">
-                <a16:creationId xmlns:a16="http://schemas.microsoft.com/office/drawing/2014/main" id="{839ED22A-1FA2-4FB3-8A15-2738A4DFF4A9}"/>
+                <a16:creationId xmlns:a16="http://schemas.microsoft.com/office/drawing/2014/main" id="{19BD6B4E-F753-487D-8085-EB3022E2BEFD}"/>
               </a:ext>
             </a:extLst>
           </p:cNvPr>
@@ -19751,7 +20310,7 @@
           <p:cNvPr id="4" name="text-19">
             <a:extLst xmlns:a="http://schemas.openxmlformats.org/drawingml/2006/main">
               <a:ext uri="{FF2B5EF4-FFF2-40B4-BE49-F238E27FC236}">
-                <a16:creationId xmlns:a16="http://schemas.microsoft.com/office/drawing/2014/main" id="{12A6AB16-5FB6-431D-B3A0-D6EBD516750D}"/>
+                <a16:creationId xmlns:a16="http://schemas.microsoft.com/office/drawing/2014/main" id="{3F7ECB87-76FA-49DE-B25B-09C55D4CEC07}"/>
               </a:ext>
             </a:extLst>
           </p:cNvPr>
@@ -19819,7 +20378,7 @@
           <p:cNvPr id="5" name="text-20">
             <a:extLst xmlns:a="http://schemas.openxmlformats.org/drawingml/2006/main">
               <a:ext uri="{FF2B5EF4-FFF2-40B4-BE49-F238E27FC236}">
-                <a16:creationId xmlns:a16="http://schemas.microsoft.com/office/drawing/2014/main" id="{50884BD0-7335-46F8-A69C-1D4099270FC8}"/>
+                <a16:creationId xmlns:a16="http://schemas.microsoft.com/office/drawing/2014/main" id="{8CCE0F24-475D-49FE-A7BD-563C9E2E682B}"/>
               </a:ext>
             </a:extLst>
           </p:cNvPr>
@@ -19877,7 +20436,7 @@
                 <a:ea typeface="DejaVu Sans"/>
                 <a:cs typeface="DejaVu Sans"/>
               </a:rPr>
-              <a:t>Эталон класса — образец этого класса,</a:t>
+              <a:t>Эталоном класса называют образец этого класса,</a:t>
             </a:r>
           </a:p>
           <a:p xmlns:a="http://schemas.openxmlformats.org/drawingml/2006/main">
@@ -19900,7 +20459,7 @@
                 <a:ea typeface="DejaVu Sans"/>
                 <a:cs typeface="DejaVu Sans"/>
               </a:rPr>
-              <a:t>принятый для сравнения с другими объектами.</a:t>
+              <a:t>выбранный для сравнения с другими объектами.</a:t>
             </a:r>
           </a:p>
         </p:txBody>
@@ -19910,7 +20469,7 @@
           <p:cNvPr id="6" name="text-21">
             <a:extLst xmlns:a="http://schemas.openxmlformats.org/drawingml/2006/main">
               <a:ext uri="{FF2B5EF4-FFF2-40B4-BE49-F238E27FC236}">
-                <a16:creationId xmlns:a16="http://schemas.microsoft.com/office/drawing/2014/main" id="{7882839B-2CBB-4128-A114-9BEA8CBBA111}"/>
+                <a16:creationId xmlns:a16="http://schemas.microsoft.com/office/drawing/2014/main" id="{333632B4-B0C6-45E8-9DB5-4FAB436A4253}"/>
               </a:ext>
             </a:extLst>
           </p:cNvPr>
@@ -19978,7 +20537,7 @@
           <p:cNvPr id="7" name="text-22">
             <a:extLst xmlns:a="http://schemas.openxmlformats.org/drawingml/2006/main">
               <a:ext uri="{FF2B5EF4-FFF2-40B4-BE49-F238E27FC236}">
-                <a16:creationId xmlns:a16="http://schemas.microsoft.com/office/drawing/2014/main" id="{72922AAC-61E9-4E4D-8A94-9E84C30512BD}"/>
+                <a16:creationId xmlns:a16="http://schemas.microsoft.com/office/drawing/2014/main" id="{17561C19-44DA-497C-B9A4-DFB06A874391}"/>
               </a:ext>
             </a:extLst>
           </p:cNvPr>
@@ -20069,7 +20628,7 @@
           <p:cNvPr id="8" name="text-23">
             <a:extLst xmlns:a="http://schemas.openxmlformats.org/drawingml/2006/main">
               <a:ext uri="{FF2B5EF4-FFF2-40B4-BE49-F238E27FC236}">
-                <a16:creationId xmlns:a16="http://schemas.microsoft.com/office/drawing/2014/main" id="{5401B1BB-8DEA-4797-B229-02063B6C523D}"/>
+                <a16:creationId xmlns:a16="http://schemas.microsoft.com/office/drawing/2014/main" id="{301E7121-5C42-4715-A913-9FEF12863EFF}"/>
               </a:ext>
             </a:extLst>
           </p:cNvPr>
@@ -20127,7 +20686,7 @@
                 <a:ea typeface="DejaVu Sans"/>
                 <a:cs typeface="DejaVu Sans"/>
               </a:rPr>
-              <a:t>Как его использовать</a:t>
+              <a:t>Как с ним сравнивать</a:t>
             </a:r>
           </a:p>
         </p:txBody>
@@ -20137,7 +20696,7 @@
           <p:cNvPr id="9" name="text-24">
             <a:extLst xmlns:a="http://schemas.openxmlformats.org/drawingml/2006/main">
               <a:ext uri="{FF2B5EF4-FFF2-40B4-BE49-F238E27FC236}">
-                <a16:creationId xmlns:a16="http://schemas.microsoft.com/office/drawing/2014/main" id="{1FBD92DB-BE03-43B6-BA31-20389194BFF3}"/>
+                <a16:creationId xmlns:a16="http://schemas.microsoft.com/office/drawing/2014/main" id="{F76AFBC1-186D-4F97-810B-B99B02E0B5E3}"/>
               </a:ext>
             </a:extLst>
           </p:cNvPr>
@@ -20195,7 +20754,7 @@
                 <a:ea typeface="DejaVu Sans"/>
                 <a:cs typeface="DejaVu Sans"/>
               </a:rPr>
-              <a:t>Выбрать образец каждого класса</a:t>
+              <a:t>Берём образец каждого класса</a:t>
             </a:r>
           </a:p>
           <a:p xmlns:a="http://schemas.openxmlformats.org/drawingml/2006/main">
@@ -20218,7 +20777,7 @@
                 <a:ea typeface="DejaVu Sans"/>
                 <a:cs typeface="DejaVu Sans"/>
               </a:rPr>
-              <a:t>и сравнить с ними новый объект</a:t>
+              <a:t>и ищем, к какому ближе новый объект</a:t>
             </a:r>
           </a:p>
         </p:txBody>
@@ -20228,7 +20787,7 @@
           <p:cNvPr id="10" name="">
             <a:extLst xmlns:a="http://schemas.openxmlformats.org/drawingml/2006/main">
               <a:ext uri="{FF2B5EF4-FFF2-40B4-BE49-F238E27FC236}">
-                <a16:creationId xmlns:a16="http://schemas.microsoft.com/office/drawing/2014/main" id="{82010857-C785-4081-9146-04BAB96CE60F}"/>
+                <a16:creationId xmlns:a16="http://schemas.microsoft.com/office/drawing/2014/main" id="{F2169B86-8CFC-4459-9932-E6C59AED9D41}"/>
               </a:ext>
             </a:extLst>
           </p:cNvPr>
@@ -20258,7 +20817,7 @@
           <p:cNvPr id="11" name="text-25">
             <a:extLst xmlns:a="http://schemas.openxmlformats.org/drawingml/2006/main">
               <a:ext uri="{FF2B5EF4-FFF2-40B4-BE49-F238E27FC236}">
-                <a16:creationId xmlns:a16="http://schemas.microsoft.com/office/drawing/2014/main" id="{81F50AF9-5424-4754-A6CF-C501FBC499F2}"/>
+                <a16:creationId xmlns:a16="http://schemas.microsoft.com/office/drawing/2014/main" id="{95836FE2-77F8-48E1-92EC-54F94CE548D0}"/>
               </a:ext>
             </a:extLst>
           </p:cNvPr>
@@ -20316,7 +20875,7 @@
                 <a:ea typeface="DejaVu Sans"/>
                 <a:cs typeface="DejaVu Sans"/>
               </a:rPr>
-              <a:t>Определение эталона и способ его выбора — разные вопросы</a:t>
+              <a:t>Теперь нужно понять, как измерять сходство и выбирать образцы</a:t>
             </a:r>
           </a:p>
         </p:txBody>
@@ -20324,7 +20883,7 @@
     </p:spTree>
     <p:extLst>
       <p:ext uri="{BB962C8B-B14F-4D97-AF65-F5344CB8AC3E}">
-        <p14:creationId xmlns:p14="http://schemas.microsoft.com/office/powerpoint/2010/main" val="53508175"/>
+        <p14:creationId xmlns:p14="http://schemas.microsoft.com/office/powerpoint/2010/main" val="1101281840"/>
       </p:ext>
     </p:extLst>
   </p:cSld>
@@ -20355,7 +20914,7 @@
           <p:cNvPr id="13" name="text-26">
             <a:extLst xmlns:a="http://schemas.openxmlformats.org/drawingml/2006/main">
               <a:ext uri="{FF2B5EF4-FFF2-40B4-BE49-F238E27FC236}">
-                <a16:creationId xmlns:a16="http://schemas.microsoft.com/office/drawing/2014/main" id="{9DA4354C-A6E3-4D5D-8079-B348596B2911}"/>
+                <a16:creationId xmlns:a16="http://schemas.microsoft.com/office/drawing/2014/main" id="{CDDFF487-5E30-4103-B930-B403DBAB722E}"/>
               </a:ext>
             </a:extLst>
           </p:cNvPr>
@@ -20413,7 +20972,7 @@
                 <a:ea typeface="DejaVu Sans"/>
                 <a:cs typeface="DejaVu Sans"/>
               </a:rPr>
-              <a:t>Похожесть измеряем расстоянием</a:t>
+              <a:t>Как измерить похожесть</a:t>
             </a:r>
           </a:p>
         </p:txBody>
@@ -20423,7 +20982,7 @@
           <p:cNvPr id="2" name="text-27">
             <a:extLst xmlns:a="http://schemas.openxmlformats.org/drawingml/2006/main">
               <a:ext uri="{FF2B5EF4-FFF2-40B4-BE49-F238E27FC236}">
-                <a16:creationId xmlns:a16="http://schemas.microsoft.com/office/drawing/2014/main" id="{8B6A62B3-F0FF-49A9-BD3D-3016238B7D87}"/>
+                <a16:creationId xmlns:a16="http://schemas.microsoft.com/office/drawing/2014/main" id="{414E29FD-5EAF-426C-B210-FF39EA8208B8}"/>
               </a:ext>
             </a:extLst>
           </p:cNvPr>
@@ -20491,7 +21050,7 @@
           <p:cNvPr id="3" name="">
             <a:extLst xmlns:a="http://schemas.openxmlformats.org/drawingml/2006/main">
               <a:ext uri="{FF2B5EF4-FFF2-40B4-BE49-F238E27FC236}">
-                <a16:creationId xmlns:a16="http://schemas.microsoft.com/office/drawing/2014/main" id="{7A6B4029-CD10-4A88-854C-EC758E9D359D}"/>
+                <a16:creationId xmlns:a16="http://schemas.microsoft.com/office/drawing/2014/main" id="{6DAC7ECE-E73A-4F83-AC51-4BB9039F6E3C}"/>
               </a:ext>
             </a:extLst>
           </p:cNvPr>
@@ -20521,7 +21080,7 @@
           <p:cNvPr id="4" name="text-28">
             <a:extLst xmlns:a="http://schemas.openxmlformats.org/drawingml/2006/main">
               <a:ext uri="{FF2B5EF4-FFF2-40B4-BE49-F238E27FC236}">
-                <a16:creationId xmlns:a16="http://schemas.microsoft.com/office/drawing/2014/main" id="{9EA8D293-4D4D-449E-94D7-3970BD536738}"/>
+                <a16:creationId xmlns:a16="http://schemas.microsoft.com/office/drawing/2014/main" id="{4BCC66BE-7E62-4B6A-90CC-E39146F016CC}"/>
               </a:ext>
             </a:extLst>
           </p:cNvPr>
@@ -20579,7 +21138,7 @@
                 <a:ea typeface="DejaVu Sans"/>
                 <a:cs typeface="DejaVu Sans"/>
               </a:rPr>
-              <a:t>1.13  •  [3, 5]</a:t>
+              <a:t>1.13   [3, 5]</a:t>
             </a:r>
           </a:p>
         </p:txBody>
@@ -20589,7 +21148,7 @@
           <p:cNvPr id="5" name="text-29">
             <a:extLst xmlns:a="http://schemas.openxmlformats.org/drawingml/2006/main">
               <a:ext uri="{FF2B5EF4-FFF2-40B4-BE49-F238E27FC236}">
-                <a16:creationId xmlns:a16="http://schemas.microsoft.com/office/drawing/2014/main" id="{4305079C-2F71-42E2-BA09-8BB98334487D}"/>
+                <a16:creationId xmlns:a16="http://schemas.microsoft.com/office/drawing/2014/main" id="{B4E14AB1-7C2A-43FC-AF81-30ECC017BC6C}"/>
               </a:ext>
             </a:extLst>
           </p:cNvPr>
@@ -20657,7 +21216,7 @@
           <p:cNvPr id="6" name="text-30">
             <a:extLst xmlns:a="http://schemas.openxmlformats.org/drawingml/2006/main">
               <a:ext uri="{FF2B5EF4-FFF2-40B4-BE49-F238E27FC236}">
-                <a16:creationId xmlns:a16="http://schemas.microsoft.com/office/drawing/2014/main" id="{6CEA0434-B508-4B71-97E9-7E9F081BAAB0}"/>
+                <a16:creationId xmlns:a16="http://schemas.microsoft.com/office/drawing/2014/main" id="{C1B68E0B-AEFE-4107-A2B6-C6DA1594524A}"/>
               </a:ext>
             </a:extLst>
           </p:cNvPr>
@@ -20715,7 +21274,7 @@
                 <a:ea typeface="DejaVu Sans"/>
                 <a:cs typeface="DejaVu Sans"/>
               </a:rPr>
-              <a:t>Значения двух признаков — координаты точки.</a:t>
+              <a:t>Два признака можно представить как координаты точки.</a:t>
             </a:r>
           </a:p>
           <a:p xmlns:a="http://schemas.openxmlformats.org/drawingml/2006/main">
@@ -20738,7 +21297,7 @@
                 <a:ea typeface="DejaVu Sans"/>
                 <a:cs typeface="DejaVu Sans"/>
               </a:rPr>
-              <a:t>Евклидово расстояние — расстояние по прямой</a:t>
+              <a:t>Расстояние по прямой между такими точками</a:t>
             </a:r>
           </a:p>
           <a:p xmlns:a="http://schemas.openxmlformats.org/drawingml/2006/main">
@@ -20761,7 +21320,7 @@
                 <a:ea typeface="DejaVu Sans"/>
                 <a:cs typeface="DejaVu Sans"/>
               </a:rPr>
-              <a:t>между точками после выбора масштаба.</a:t>
+              <a:t>называют евклидовым расстоянием.</a:t>
             </a:r>
           </a:p>
         </p:txBody>
@@ -20771,7 +21330,7 @@
           <p:cNvPr id="7" name="text-31">
             <a:extLst xmlns:a="http://schemas.openxmlformats.org/drawingml/2006/main">
               <a:ext uri="{FF2B5EF4-FFF2-40B4-BE49-F238E27FC236}">
-                <a16:creationId xmlns:a16="http://schemas.microsoft.com/office/drawing/2014/main" id="{CA8B402B-CD34-44D0-8A30-A74DFAC94BA7}"/>
+                <a16:creationId xmlns:a16="http://schemas.microsoft.com/office/drawing/2014/main" id="{A0223B10-36C2-480B-8902-53CB74A1228C}"/>
               </a:ext>
             </a:extLst>
           </p:cNvPr>
@@ -20839,7 +21398,7 @@
           <p:cNvPr id="8" name="text-32">
             <a:extLst xmlns:a="http://schemas.openxmlformats.org/drawingml/2006/main">
               <a:ext uri="{FF2B5EF4-FFF2-40B4-BE49-F238E27FC236}">
-                <a16:creationId xmlns:a16="http://schemas.microsoft.com/office/drawing/2014/main" id="{3ADFD644-C95B-4BE0-AEED-2BA9D9078894}"/>
+                <a16:creationId xmlns:a16="http://schemas.microsoft.com/office/drawing/2014/main" id="{85F6C728-3CAA-4080-97B8-A6A7A2455F95}"/>
               </a:ext>
             </a:extLst>
           </p:cNvPr>
@@ -20897,7 +21456,7 @@
                 <a:ea typeface="DejaVu Sans"/>
                 <a:cs typeface="DejaVu Sans"/>
               </a:rPr>
-              <a:t>Объекты ближе друг к другу</a:t>
+              <a:t>Меньше различий в признаках,</a:t>
             </a:r>
           </a:p>
           <a:p xmlns:a="http://schemas.openxmlformats.org/drawingml/2006/main">
@@ -20920,7 +21479,7 @@
                 <a:ea typeface="DejaVu Sans"/>
                 <a:cs typeface="DejaVu Sans"/>
               </a:rPr>
-              <a:t>в выбранном описании</a:t>
+              <a:t>которые мы выбрали для сравнения</a:t>
             </a:r>
           </a:p>
         </p:txBody>
@@ -20930,7 +21489,7 @@
           <p:cNvPr id="9" name="text-33">
             <a:extLst xmlns:a="http://schemas.openxmlformats.org/drawingml/2006/main">
               <a:ext uri="{FF2B5EF4-FFF2-40B4-BE49-F238E27FC236}">
-                <a16:creationId xmlns:a16="http://schemas.microsoft.com/office/drawing/2014/main" id="{8DB5E9EC-42D6-418A-9819-86E94ACB8D00}"/>
+                <a16:creationId xmlns:a16="http://schemas.microsoft.com/office/drawing/2014/main" id="{D7C1E9C1-8D51-4C09-BA10-D6BC7B8B8D1E}"/>
               </a:ext>
             </a:extLst>
           </p:cNvPr>
@@ -20998,7 +21557,7 @@
           <p:cNvPr id="10" name="text-34">
             <a:extLst xmlns:a="http://schemas.openxmlformats.org/drawingml/2006/main">
               <a:ext uri="{FF2B5EF4-FFF2-40B4-BE49-F238E27FC236}">
-                <a16:creationId xmlns:a16="http://schemas.microsoft.com/office/drawing/2014/main" id="{C3906437-4BD7-4351-8816-E6B30C4A1261}"/>
+                <a16:creationId xmlns:a16="http://schemas.microsoft.com/office/drawing/2014/main" id="{2ACD9A80-289B-44E1-A36A-C81B9413CCDE}"/>
               </a:ext>
             </a:extLst>
           </p:cNvPr>
@@ -21056,7 +21615,7 @@
                 <a:ea typeface="DejaVu Sans"/>
                 <a:cs typeface="DejaVu Sans"/>
               </a:rPr>
-              <a:t>Разные единицы и большие числа</a:t>
+              <a:t>Если числа одного признака крупнее,</a:t>
             </a:r>
           </a:p>
           <a:p xmlns:a="http://schemas.openxmlformats.org/drawingml/2006/main">
@@ -21079,7 +21638,7 @@
                 <a:ea typeface="DejaVu Sans"/>
                 <a:cs typeface="DejaVu Sans"/>
               </a:rPr>
-              <a:t>могут подавить другой признак</a:t>
+              <a:t>он может слишком влиять на результат</a:t>
             </a:r>
           </a:p>
         </p:txBody>
@@ -21089,7 +21648,7 @@
           <p:cNvPr id="11" name="">
             <a:extLst xmlns:a="http://schemas.openxmlformats.org/drawingml/2006/main">
               <a:ext uri="{FF2B5EF4-FFF2-40B4-BE49-F238E27FC236}">
-                <a16:creationId xmlns:a16="http://schemas.microsoft.com/office/drawing/2014/main" id="{8805CFC9-31C0-4F81-B05B-6A7A0F2A6344}"/>
+                <a16:creationId xmlns:a16="http://schemas.microsoft.com/office/drawing/2014/main" id="{189C3CFF-F1F9-4591-9E7F-3F2DE0E92DBF}"/>
               </a:ext>
             </a:extLst>
           </p:cNvPr>
@@ -21119,7 +21678,7 @@
           <p:cNvPr id="12" name="text-35">
             <a:extLst xmlns:a="http://schemas.openxmlformats.org/drawingml/2006/main">
               <a:ext uri="{FF2B5EF4-FFF2-40B4-BE49-F238E27FC236}">
-                <a16:creationId xmlns:a16="http://schemas.microsoft.com/office/drawing/2014/main" id="{3C30A591-A43A-4468-B205-33C6EC8DBB12}"/>
+                <a16:creationId xmlns:a16="http://schemas.microsoft.com/office/drawing/2014/main" id="{6539EAFD-162A-4272-AAEF-54B434C0656A}"/>
               </a:ext>
             </a:extLst>
           </p:cNvPr>
@@ -21185,7 +21744,7 @@
     </p:spTree>
     <p:extLst>
       <p:ext uri="{BB962C8B-B14F-4D97-AF65-F5344CB8AC3E}">
-        <p14:creationId xmlns:p14="http://schemas.microsoft.com/office/powerpoint/2010/main" val="628153846"/>
+        <p14:creationId xmlns:p14="http://schemas.microsoft.com/office/powerpoint/2010/main" val="1476976694"/>
       </p:ext>
     </p:extLst>
   </p:cSld>
@@ -21216,7 +21775,7 @@
           <p:cNvPr id="15" name="text-36">
             <a:extLst xmlns:a="http://schemas.openxmlformats.org/drawingml/2006/main">
               <a:ext uri="{FF2B5EF4-FFF2-40B4-BE49-F238E27FC236}">
-                <a16:creationId xmlns:a16="http://schemas.microsoft.com/office/drawing/2014/main" id="{2527611F-94A6-40EB-990E-8F444350A7AC}"/>
+                <a16:creationId xmlns:a16="http://schemas.microsoft.com/office/drawing/2014/main" id="{5FCD189B-EE24-4880-BE96-BE4D037C34B1}"/>
               </a:ext>
             </a:extLst>
           </p:cNvPr>
@@ -21274,7 +21833,7 @@
                 <a:ea typeface="DejaVu Sans"/>
                 <a:cs typeface="DejaVu Sans"/>
               </a:rPr>
-              <a:t>Выбор эталона: медоид</a:t>
+              <a:t>Как выбрать эталон внутри класса</a:t>
             </a:r>
           </a:p>
         </p:txBody>
@@ -21284,7 +21843,7 @@
           <p:cNvPr id="2" name="text-37">
             <a:extLst xmlns:a="http://schemas.openxmlformats.org/drawingml/2006/main">
               <a:ext uri="{FF2B5EF4-FFF2-40B4-BE49-F238E27FC236}">
-                <a16:creationId xmlns:a16="http://schemas.microsoft.com/office/drawing/2014/main" id="{9B92F983-B30F-4D13-9DBB-ABE1A2B6570A}"/>
+                <a16:creationId xmlns:a16="http://schemas.microsoft.com/office/drawing/2014/main" id="{C48631A0-03FC-458F-8EA0-08848CBA690A}"/>
               </a:ext>
             </a:extLst>
           </p:cNvPr>
@@ -21342,7 +21901,7 @@
                 <a:ea typeface="DejaVu Sans"/>
                 <a:cs typeface="DejaVu Sans"/>
               </a:rPr>
-              <a:t>Один из способов выбрать образец класса</a:t>
+              <a:t>В нашей работе таким образцом будет медоид</a:t>
             </a:r>
           </a:p>
         </p:txBody>
@@ -21352,7 +21911,7 @@
           <p:cNvPr id="3" name="">
             <a:extLst xmlns:a="http://schemas.openxmlformats.org/drawingml/2006/main">
               <a:ext uri="{FF2B5EF4-FFF2-40B4-BE49-F238E27FC236}">
-                <a16:creationId xmlns:a16="http://schemas.microsoft.com/office/drawing/2014/main" id="{01CCC790-C248-41C5-BB44-64E7184D0CEC}"/>
+                <a16:creationId xmlns:a16="http://schemas.microsoft.com/office/drawing/2014/main" id="{0060A8A2-463B-4441-A701-79587E467706}"/>
               </a:ext>
             </a:extLst>
           </p:cNvPr>
@@ -21382,7 +21941,7 @@
           <p:cNvPr id="4" name="text-38">
             <a:extLst xmlns:a="http://schemas.openxmlformats.org/drawingml/2006/main">
               <a:ext uri="{FF2B5EF4-FFF2-40B4-BE49-F238E27FC236}">
-                <a16:creationId xmlns:a16="http://schemas.microsoft.com/office/drawing/2014/main" id="{BE6C08FC-B7E3-4C1A-B162-099C20DF189B}"/>
+                <a16:creationId xmlns:a16="http://schemas.microsoft.com/office/drawing/2014/main" id="{09651DAF-09FB-40F0-8C4B-F1364F81B6EA}"/>
               </a:ext>
             </a:extLst>
           </p:cNvPr>
@@ -21440,7 +21999,7 @@
                 <a:ea typeface="DejaVu Sans"/>
                 <a:cs typeface="DejaVu Sans"/>
               </a:rPr>
-              <a:t>1.13  •  [3]</a:t>
+              <a:t>1.13   [3]</a:t>
             </a:r>
           </a:p>
         </p:txBody>
@@ -21450,7 +22009,7 @@
           <p:cNvPr id="5" name="text-39">
             <a:extLst xmlns:a="http://schemas.openxmlformats.org/drawingml/2006/main">
               <a:ext uri="{FF2B5EF4-FFF2-40B4-BE49-F238E27FC236}">
-                <a16:creationId xmlns:a16="http://schemas.microsoft.com/office/drawing/2014/main" id="{C7C9F55B-F9AA-4B88-9B92-BBD4B7B0FB26}"/>
+                <a16:creationId xmlns:a16="http://schemas.microsoft.com/office/drawing/2014/main" id="{68EA2F37-F038-4D84-911D-6BB65D13DF85}"/>
               </a:ext>
             </a:extLst>
           </p:cNvPr>
@@ -21518,7 +22077,7 @@
           <p:cNvPr id="6" name="text-40">
             <a:extLst xmlns:a="http://schemas.openxmlformats.org/drawingml/2006/main">
               <a:ext uri="{FF2B5EF4-FFF2-40B4-BE49-F238E27FC236}">
-                <a16:creationId xmlns:a16="http://schemas.microsoft.com/office/drawing/2014/main" id="{3A0EC616-11A4-42EE-A639-178869C6AF08}"/>
+                <a16:creationId xmlns:a16="http://schemas.microsoft.com/office/drawing/2014/main" id="{67A1DF0A-19EE-47FB-B1B6-436EB706FDE0}"/>
               </a:ext>
             </a:extLst>
           </p:cNvPr>
@@ -21576,7 +22135,7 @@
                 <a:ea typeface="DejaVu Sans"/>
                 <a:cs typeface="DejaVu Sans"/>
               </a:rPr>
-              <a:t>Медоид — объект с наименьшей суммой расстояний</a:t>
+              <a:t>Медоидом называют объект с наименьшей суммой</a:t>
             </a:r>
           </a:p>
           <a:p xmlns:a="http://schemas.openxmlformats.org/drawingml/2006/main">
@@ -21599,7 +22158,7 @@
                 <a:ea typeface="DejaVu Sans"/>
                 <a:cs typeface="DejaVu Sans"/>
               </a:rPr>
-              <a:t>до остальных объектов своего класса.</a:t>
+              <a:t>расстояний до остальных объектов своего класса.</a:t>
             </a:r>
           </a:p>
         </p:txBody>
@@ -21609,7 +22168,7 @@
           <p:cNvPr id="7" name="text-41">
             <a:extLst xmlns:a="http://schemas.openxmlformats.org/drawingml/2006/main">
               <a:ext uri="{FF2B5EF4-FFF2-40B4-BE49-F238E27FC236}">
-                <a16:creationId xmlns:a16="http://schemas.microsoft.com/office/drawing/2014/main" id="{83BADCD3-AA17-4195-AEC9-0DB8AE6B3B49}"/>
+                <a16:creationId xmlns:a16="http://schemas.microsoft.com/office/drawing/2014/main" id="{641676AD-D5A6-4EF0-84A7-A58BA668E725}"/>
               </a:ext>
             </a:extLst>
           </p:cNvPr>
@@ -21677,7 +22236,7 @@
           <p:cNvPr id="8" name="text-42">
             <a:extLst xmlns:a="http://schemas.openxmlformats.org/drawingml/2006/main">
               <a:ext uri="{FF2B5EF4-FFF2-40B4-BE49-F238E27FC236}">
-                <a16:creationId xmlns:a16="http://schemas.microsoft.com/office/drawing/2014/main" id="{41EE4CA0-552A-4B61-AE72-9213F508DF52}"/>
+                <a16:creationId xmlns:a16="http://schemas.microsoft.com/office/drawing/2014/main" id="{203FA317-4625-4C43-B281-58345FD766BE}"/>
               </a:ext>
             </a:extLst>
           </p:cNvPr>
@@ -21735,7 +22294,7 @@
                 <a:ea typeface="DejaVu Sans"/>
                 <a:cs typeface="DejaVu Sans"/>
               </a:rPr>
-              <a:t>Берём кандидата из обучающих объектов класса</a:t>
+              <a:t>Берём один из обучающих объектов класса</a:t>
             </a:r>
           </a:p>
         </p:txBody>
@@ -21745,7 +22304,7 @@
           <p:cNvPr id="9" name="text-43">
             <a:extLst xmlns:a="http://schemas.openxmlformats.org/drawingml/2006/main">
               <a:ext uri="{FF2B5EF4-FFF2-40B4-BE49-F238E27FC236}">
-                <a16:creationId xmlns:a16="http://schemas.microsoft.com/office/drawing/2014/main" id="{0EFF9E9B-6A52-4CD8-9F33-95093F43DA31}"/>
+                <a16:creationId xmlns:a16="http://schemas.microsoft.com/office/drawing/2014/main" id="{29634822-C4F5-421C-9098-E62637522CF7}"/>
               </a:ext>
             </a:extLst>
           </p:cNvPr>
@@ -21813,7 +22372,7 @@
           <p:cNvPr id="10" name="text-44">
             <a:extLst xmlns:a="http://schemas.openxmlformats.org/drawingml/2006/main">
               <a:ext uri="{FF2B5EF4-FFF2-40B4-BE49-F238E27FC236}">
-                <a16:creationId xmlns:a16="http://schemas.microsoft.com/office/drawing/2014/main" id="{59A22476-4DDE-4CEF-B16D-F2390DFE1AFF}"/>
+                <a16:creationId xmlns:a16="http://schemas.microsoft.com/office/drawing/2014/main" id="{7F74A4F0-B769-47F4-93A7-79E9C4ADFDBA}"/>
               </a:ext>
             </a:extLst>
           </p:cNvPr>
@@ -21881,7 +22440,7 @@
           <p:cNvPr id="11" name="text-45">
             <a:extLst xmlns:a="http://schemas.openxmlformats.org/drawingml/2006/main">
               <a:ext uri="{FF2B5EF4-FFF2-40B4-BE49-F238E27FC236}">
-                <a16:creationId xmlns:a16="http://schemas.microsoft.com/office/drawing/2014/main" id="{2C8040A3-C824-415F-A2A2-64D0CF9DFB75}"/>
+                <a16:creationId xmlns:a16="http://schemas.microsoft.com/office/drawing/2014/main" id="{25CEE426-BB97-4383-B925-7B1BF43A6D9F}"/>
               </a:ext>
             </a:extLst>
           </p:cNvPr>
@@ -21949,7 +22508,7 @@
           <p:cNvPr id="12" name="text-46">
             <a:extLst xmlns:a="http://schemas.openxmlformats.org/drawingml/2006/main">
               <a:ext uri="{FF2B5EF4-FFF2-40B4-BE49-F238E27FC236}">
-                <a16:creationId xmlns:a16="http://schemas.microsoft.com/office/drawing/2014/main" id="{A887EED3-0FEE-4B52-AF68-83DB91B3EF16}"/>
+                <a16:creationId xmlns:a16="http://schemas.microsoft.com/office/drawing/2014/main" id="{9D617F48-A83B-431E-84BB-61B98D5B9DA5}"/>
               </a:ext>
             </a:extLst>
           </p:cNvPr>
@@ -22007,7 +22566,7 @@
                 <a:ea typeface="DejaVu Sans"/>
                 <a:cs typeface="DejaVu Sans"/>
               </a:rPr>
-              <a:t>Выбираем кандидата с наименьшей суммой</a:t>
+              <a:t>Сравниваем суммы и выбираем наименьшую</a:t>
             </a:r>
           </a:p>
         </p:txBody>
@@ -22017,7 +22576,7 @@
           <p:cNvPr id="13" name="">
             <a:extLst xmlns:a="http://schemas.openxmlformats.org/drawingml/2006/main">
               <a:ext uri="{FF2B5EF4-FFF2-40B4-BE49-F238E27FC236}">
-                <a16:creationId xmlns:a16="http://schemas.microsoft.com/office/drawing/2014/main" id="{4A4E37BB-E29D-4DA0-B0DD-7154BC46E5B4}"/>
+                <a16:creationId xmlns:a16="http://schemas.microsoft.com/office/drawing/2014/main" id="{5D2609B4-DE10-4483-990E-64BA64C3D1E3}"/>
               </a:ext>
             </a:extLst>
           </p:cNvPr>
@@ -22047,7 +22606,7 @@
           <p:cNvPr id="14" name="text-47">
             <a:extLst xmlns:a="http://schemas.openxmlformats.org/drawingml/2006/main">
               <a:ext uri="{FF2B5EF4-FFF2-40B4-BE49-F238E27FC236}">
-                <a16:creationId xmlns:a16="http://schemas.microsoft.com/office/drawing/2014/main" id="{B24BE0BE-A0D7-4F23-B25B-BB2CF1CCCCD6}"/>
+                <a16:creationId xmlns:a16="http://schemas.microsoft.com/office/drawing/2014/main" id="{3EE500B8-9509-4CA1-8F6F-3366B64528C5}"/>
               </a:ext>
             </a:extLst>
           </p:cNvPr>
@@ -22105,7 +22664,7 @@
                 <a:ea typeface="DejaVu Sans"/>
                 <a:cs typeface="DejaVu Sans"/>
               </a:rPr>
-              <a:t>Повторяем для каждого класса. Проверочные объекты не используем</a:t>
+              <a:t>Выбираем образец для каждого класса только по данным обучения</a:t>
             </a:r>
           </a:p>
         </p:txBody>
@@ -22113,7 +22672,7 @@
     </p:spTree>
     <p:extLst>
       <p:ext uri="{BB962C8B-B14F-4D97-AF65-F5344CB8AC3E}">
-        <p14:creationId xmlns:p14="http://schemas.microsoft.com/office/powerpoint/2010/main" val="906351392"/>
+        <p14:creationId xmlns:p14="http://schemas.microsoft.com/office/powerpoint/2010/main" val="80277562"/>
       </p:ext>
     </p:extLst>
   </p:cSld>
@@ -22144,7 +22703,7 @@
           <p:cNvPr id="9" name="text-48">
             <a:extLst xmlns:a="http://schemas.openxmlformats.org/drawingml/2006/main">
               <a:ext uri="{FF2B5EF4-FFF2-40B4-BE49-F238E27FC236}">
-                <a16:creationId xmlns:a16="http://schemas.microsoft.com/office/drawing/2014/main" id="{8C7B4CD9-8820-47E2-B245-E52AFB45FD56}"/>
+                <a16:creationId xmlns:a16="http://schemas.microsoft.com/office/drawing/2014/main" id="{CB0E31D9-F3C0-4A7A-93D9-8DD3427DFEFF}"/>
               </a:ext>
             </a:extLst>
           </p:cNvPr>
@@ -22202,7 +22761,7 @@
                 <a:ea typeface="DejaVu Sans"/>
                 <a:cs typeface="DejaVu Sans"/>
               </a:rPr>
-              <a:t>Правило ближайшего эталона</a:t>
+              <a:t>Как выбрать класс по эталонам</a:t>
             </a:r>
           </a:p>
         </p:txBody>
@@ -22212,7 +22771,7 @@
           <p:cNvPr id="2" name="">
             <a:extLst xmlns:a="http://schemas.openxmlformats.org/drawingml/2006/main">
               <a:ext uri="{FF2B5EF4-FFF2-40B4-BE49-F238E27FC236}">
-                <a16:creationId xmlns:a16="http://schemas.microsoft.com/office/drawing/2014/main" id="{1A264194-5065-4FD0-9499-EC9669E21804}"/>
+                <a16:creationId xmlns:a16="http://schemas.microsoft.com/office/drawing/2014/main" id="{EAAF2B9A-7275-438B-8030-BF29499600FB}"/>
               </a:ext>
             </a:extLst>
           </p:cNvPr>
@@ -22242,7 +22801,7 @@
           <p:cNvPr id="3" name="text-49">
             <a:extLst xmlns:a="http://schemas.openxmlformats.org/drawingml/2006/main">
               <a:ext uri="{FF2B5EF4-FFF2-40B4-BE49-F238E27FC236}">
-                <a16:creationId xmlns:a16="http://schemas.microsoft.com/office/drawing/2014/main" id="{71DDF41C-BFEE-4760-A935-B405AB3B07D1}"/>
+                <a16:creationId xmlns:a16="http://schemas.microsoft.com/office/drawing/2014/main" id="{56A502BB-C2C2-4F28-96E4-4EB0D17CB9AE}"/>
               </a:ext>
             </a:extLst>
           </p:cNvPr>
@@ -22310,7 +22869,7 @@
           <p:cNvPr id="4" name="text-50">
             <a:extLst xmlns:a="http://schemas.openxmlformats.org/drawingml/2006/main">
               <a:ext uri="{FF2B5EF4-FFF2-40B4-BE49-F238E27FC236}">
-                <a16:creationId xmlns:a16="http://schemas.microsoft.com/office/drawing/2014/main" id="{3D3E6B0F-CF42-4B42-B6B9-FF9DC7FDB81B}"/>
+                <a16:creationId xmlns:a16="http://schemas.microsoft.com/office/drawing/2014/main" id="{CAA30975-00CF-4678-B4D6-1937EDD0B994}"/>
               </a:ext>
             </a:extLst>
           </p:cNvPr>
@@ -22378,7 +22937,7 @@
           <p:cNvPr id="5" name="">
             <a:extLst xmlns:a="http://schemas.openxmlformats.org/drawingml/2006/main">
               <a:ext uri="{FF2B5EF4-FFF2-40B4-BE49-F238E27FC236}">
-                <a16:creationId xmlns:a16="http://schemas.microsoft.com/office/drawing/2014/main" id="{4DB86A8C-C384-4E66-9E76-C4D52A909540}"/>
+                <a16:creationId xmlns:a16="http://schemas.microsoft.com/office/drawing/2014/main" id="{96F571ED-5C29-4BFD-97A2-4B75AE5FB2E3}"/>
               </a:ext>
             </a:extLst>
           </p:cNvPr>
@@ -22486,7 +23045,7 @@
                           <a:ea typeface="DejaVu Sans"/>
                           <a:cs typeface="DejaVu Sans"/>
                         </a:rPr>
-                        <a:t>Получить признаки в том же масштабе</a:t>
+                        <a:t>Привести признаки к выбранному масштабу</a:t>
                       </a:r>
                     </a:p>
                   </a:txBody>
@@ -22606,7 +23165,7 @@
           <p:cNvPr id="6" name="text-51">
             <a:extLst xmlns:a="http://schemas.openxmlformats.org/drawingml/2006/main">
               <a:ext uri="{FF2B5EF4-FFF2-40B4-BE49-F238E27FC236}">
-                <a16:creationId xmlns:a16="http://schemas.microsoft.com/office/drawing/2014/main" id="{5E94C85A-C6EA-41F2-B12B-EC2BC9852D97}"/>
+                <a16:creationId xmlns:a16="http://schemas.microsoft.com/office/drawing/2014/main" id="{DFBD2887-5529-410B-8BE9-E2C8AA91E790}"/>
               </a:ext>
             </a:extLst>
           </p:cNvPr>
@@ -22664,7 +23223,7 @@
                 <a:ea typeface="DejaVu Sans"/>
                 <a:cs typeface="DejaVu Sans"/>
               </a:rPr>
-              <a:t>Если расстояния почти равны, преимущество выбранного класса мало.</a:t>
+              <a:t>Если расстояния почти равны, ни один класс заметно не выигрывает.</a:t>
             </a:r>
           </a:p>
         </p:txBody>
@@ -22674,7 +23233,7 @@
           <p:cNvPr id="7" name="">
             <a:extLst xmlns:a="http://schemas.openxmlformats.org/drawingml/2006/main">
               <a:ext uri="{FF2B5EF4-FFF2-40B4-BE49-F238E27FC236}">
-                <a16:creationId xmlns:a16="http://schemas.microsoft.com/office/drawing/2014/main" id="{C28F79C7-DF50-4584-99C0-43426C8D7A23}"/>
+                <a16:creationId xmlns:a16="http://schemas.microsoft.com/office/drawing/2014/main" id="{B43F0B96-488D-41C3-BA71-0C5CDBC3EFC9}"/>
               </a:ext>
             </a:extLst>
           </p:cNvPr>
@@ -22704,7 +23263,7 @@
           <p:cNvPr id="8" name="text-52">
             <a:extLst xmlns:a="http://schemas.openxmlformats.org/drawingml/2006/main">
               <a:ext uri="{FF2B5EF4-FFF2-40B4-BE49-F238E27FC236}">
-                <a16:creationId xmlns:a16="http://schemas.microsoft.com/office/drawing/2014/main" id="{8F58ACAC-E0D5-48D4-8E8B-2A565BFFF31E}"/>
+                <a16:creationId xmlns:a16="http://schemas.microsoft.com/office/drawing/2014/main" id="{3FB4A058-31CB-4C67-9347-41F3F9051F51}"/>
               </a:ext>
             </a:extLst>
           </p:cNvPr>
@@ -22762,7 +23321,7 @@
                 <a:ea typeface="DejaVu Sans"/>
                 <a:cs typeface="DejaVu Sans"/>
               </a:rPr>
-              <a:t>Как выразить это преимущество числом?</a:t>
+              <a:t>Это преимущество можно выразить числом. Его называют отступом.</a:t>
             </a:r>
           </a:p>
         </p:txBody>
@@ -22770,7 +23329,7 @@
     </p:spTree>
     <p:extLst>
       <p:ext uri="{BB962C8B-B14F-4D97-AF65-F5344CB8AC3E}">
-        <p14:creationId xmlns:p14="http://schemas.microsoft.com/office/powerpoint/2010/main" val="1524652946"/>
+        <p14:creationId xmlns:p14="http://schemas.microsoft.com/office/powerpoint/2010/main" val="71618737"/>
       </p:ext>
     </p:extLst>
   </p:cSld>
@@ -22801,7 +23360,7 @@
           <p:cNvPr id="11" name="text-53">
             <a:extLst xmlns:a="http://schemas.openxmlformats.org/drawingml/2006/main">
               <a:ext uri="{FF2B5EF4-FFF2-40B4-BE49-F238E27FC236}">
-                <a16:creationId xmlns:a16="http://schemas.microsoft.com/office/drawing/2014/main" id="{D412A9F5-CF67-4B16-986C-C33216712875}"/>
+                <a16:creationId xmlns:a16="http://schemas.microsoft.com/office/drawing/2014/main" id="{E050F34A-8BAA-473D-A58E-1C171A1277A5}"/>
               </a:ext>
             </a:extLst>
           </p:cNvPr>
@@ -22859,7 +23418,7 @@
                 <a:ea typeface="DejaVu Sans"/>
                 <a:cs typeface="DejaVu Sans"/>
               </a:rPr>
-              <a:t>Отступ: преимущество своего класса</a:t>
+              <a:t>Что показывает отступ</a:t>
             </a:r>
           </a:p>
         </p:txBody>
@@ -22869,7 +23428,7 @@
           <p:cNvPr id="2" name="text-54">
             <a:extLst xmlns:a="http://schemas.openxmlformats.org/drawingml/2006/main">
               <a:ext uri="{FF2B5EF4-FFF2-40B4-BE49-F238E27FC236}">
-                <a16:creationId xmlns:a16="http://schemas.microsoft.com/office/drawing/2014/main" id="{0232353A-5A3A-4E03-96B6-A67063796B86}"/>
+                <a16:creationId xmlns:a16="http://schemas.microsoft.com/office/drawing/2014/main" id="{EFE64566-ADCC-42A0-BFBE-168F81DD7B89}"/>
               </a:ext>
             </a:extLst>
           </p:cNvPr>
@@ -22927,7 +23486,7 @@
                 <a:ea typeface="DejaVu Sans"/>
                 <a:cs typeface="DejaVu Sans"/>
               </a:rPr>
-              <a:t>Отступ — разность оценок истинного класса и конкурирующего класса</a:t>
+              <a:t>Отступ сравнивает оценку правильного класса с оценкой другого класса</a:t>
             </a:r>
           </a:p>
         </p:txBody>
@@ -22937,7 +23496,7 @@
           <p:cNvPr id="3" name="">
             <a:extLst xmlns:a="http://schemas.openxmlformats.org/drawingml/2006/main">
               <a:ext uri="{FF2B5EF4-FFF2-40B4-BE49-F238E27FC236}">
-                <a16:creationId xmlns:a16="http://schemas.microsoft.com/office/drawing/2014/main" id="{C171CEB5-8929-4B60-B1AE-2F9E59794AD7}"/>
+                <a16:creationId xmlns:a16="http://schemas.microsoft.com/office/drawing/2014/main" id="{371CB2CC-5947-4CEA-91B1-B3CEA5506FE7}"/>
               </a:ext>
             </a:extLst>
           </p:cNvPr>
@@ -22967,7 +23526,7 @@
           <p:cNvPr id="4" name="text-55">
             <a:extLst xmlns:a="http://schemas.openxmlformats.org/drawingml/2006/main">
               <a:ext uri="{FF2B5EF4-FFF2-40B4-BE49-F238E27FC236}">
-                <a16:creationId xmlns:a16="http://schemas.microsoft.com/office/drawing/2014/main" id="{1D6E6F32-03B0-4B09-8E0B-F19B8AE7631C}"/>
+                <a16:creationId xmlns:a16="http://schemas.microsoft.com/office/drawing/2014/main" id="{964824BC-FC2E-44C7-B721-214DF765FBDA}"/>
               </a:ext>
             </a:extLst>
           </p:cNvPr>
@@ -23025,7 +23584,7 @@
                 <a:ea typeface="DejaVu Sans"/>
                 <a:cs typeface="DejaVu Sans"/>
               </a:rPr>
-              <a:t>1.13  •  [2]; правило для эталонов — в этой работе</a:t>
+              <a:t>1.13   [2]. Правило для эталонов принято в этой работе</a:t>
             </a:r>
           </a:p>
         </p:txBody>
@@ -23035,7 +23594,7 @@
           <p:cNvPr id="5" name="text-56">
             <a:extLst xmlns:a="http://schemas.openxmlformats.org/drawingml/2006/main">
               <a:ext uri="{FF2B5EF4-FFF2-40B4-BE49-F238E27FC236}">
-                <a16:creationId xmlns:a16="http://schemas.microsoft.com/office/drawing/2014/main" id="{FC44EE0F-6E2A-4FB9-8B83-36EAD146D87D}"/>
+                <a16:creationId xmlns:a16="http://schemas.microsoft.com/office/drawing/2014/main" id="{1F2F2DFD-4B23-452E-8887-C2DA339CECF8}"/>
               </a:ext>
             </a:extLst>
           </p:cNvPr>
@@ -23103,7 +23662,7 @@
           <p:cNvPr id="6" name="text-57">
             <a:extLst xmlns:a="http://schemas.openxmlformats.org/drawingml/2006/main">
               <a:ext uri="{FF2B5EF4-FFF2-40B4-BE49-F238E27FC236}">
-                <a16:creationId xmlns:a16="http://schemas.microsoft.com/office/drawing/2014/main" id="{58BA0308-C669-48E5-BDB8-74BE6E45E84A}"/>
+                <a16:creationId xmlns:a16="http://schemas.microsoft.com/office/drawing/2014/main" id="{87047E16-B749-4B01-AD8B-90779536B599}"/>
               </a:ext>
             </a:extLst>
           </p:cNvPr>
@@ -23161,7 +23720,7 @@
                 <a:ea typeface="DejaVu Sans"/>
                 <a:cs typeface="DejaVu Sans"/>
               </a:rPr>
-              <a:t>Оценка показывает, насколько правило предпочитает класс.</a:t>
+              <a:t>Из оценки правильного класса вычитаем оценку другого.</a:t>
             </a:r>
           </a:p>
           <a:p xmlns:a="http://schemas.openxmlformats.org/drawingml/2006/main">
@@ -23184,7 +23743,7 @@
                 <a:ea typeface="DejaVu Sans"/>
                 <a:cs typeface="DejaVu Sans"/>
               </a:rPr>
-              <a:t>Для эталона оценка класса = минус расстояние.</a:t>
+              <a:t>Для эталона берём расстояние с минусом: ближе значит лучше.</a:t>
             </a:r>
           </a:p>
         </p:txBody>
@@ -23194,7 +23753,7 @@
           <p:cNvPr id="7" name="text-58">
             <a:extLst xmlns:a="http://schemas.openxmlformats.org/drawingml/2006/main">
               <a:ext uri="{FF2B5EF4-FFF2-40B4-BE49-F238E27FC236}">
-                <a16:creationId xmlns:a16="http://schemas.microsoft.com/office/drawing/2014/main" id="{19C22FA9-415D-4A17-9DEB-D80470FEFC15}"/>
+                <a16:creationId xmlns:a16="http://schemas.microsoft.com/office/drawing/2014/main" id="{3B10745B-086A-46FC-94C3-9BF2DB3674B7}"/>
               </a:ext>
             </a:extLst>
           </p:cNvPr>
@@ -23262,7 +23821,7 @@
           <p:cNvPr id="8" name="">
             <a:extLst xmlns:a="http://schemas.openxmlformats.org/drawingml/2006/main">
               <a:ext uri="{FF2B5EF4-FFF2-40B4-BE49-F238E27FC236}">
-                <a16:creationId xmlns:a16="http://schemas.microsoft.com/office/drawing/2014/main" id="{732C4E7C-490D-4EE0-8EB8-10D3E00E54F5}"/>
+                <a16:creationId xmlns:a16="http://schemas.microsoft.com/office/drawing/2014/main" id="{DB606DD7-3C33-4397-A657-DABD89D1D79B}"/>
               </a:ext>
             </a:extLst>
           </p:cNvPr>
@@ -23439,7 +23998,7 @@
           <p:cNvPr id="9" name="">
             <a:extLst xmlns:a="http://schemas.openxmlformats.org/drawingml/2006/main">
               <a:ext uri="{FF2B5EF4-FFF2-40B4-BE49-F238E27FC236}">
-                <a16:creationId xmlns:a16="http://schemas.microsoft.com/office/drawing/2014/main" id="{64BF8F97-24C6-47F1-A2E8-4205EB24AA15}"/>
+                <a16:creationId xmlns:a16="http://schemas.microsoft.com/office/drawing/2014/main" id="{C01DAF30-D572-4767-86D4-08045195B5F4}"/>
               </a:ext>
             </a:extLst>
           </p:cNvPr>
@@ -23469,7 +24028,7 @@
           <p:cNvPr id="10" name="text-59">
             <a:extLst xmlns:a="http://schemas.openxmlformats.org/drawingml/2006/main">
               <a:ext uri="{FF2B5EF4-FFF2-40B4-BE49-F238E27FC236}">
-                <a16:creationId xmlns:a16="http://schemas.microsoft.com/office/drawing/2014/main" id="{29071EAC-7362-4804-AC37-5E686FA711FE}"/>
+                <a16:creationId xmlns:a16="http://schemas.microsoft.com/office/drawing/2014/main" id="{AAC9E560-9C55-4B2A-AE42-5915D44C8FCB}"/>
               </a:ext>
             </a:extLst>
           </p:cNvPr>
@@ -23527,7 +24086,7 @@
                 <a:ea typeface="DejaVu Sans"/>
                 <a:cs typeface="DejaVu Sans"/>
               </a:rPr>
-              <a:t>Для проверки правильности по знаку нужна истинная метка</a:t>
+              <a:t>Чтобы проверить ответ по знаку отступа, нужен правильный класс</a:t>
             </a:r>
           </a:p>
         </p:txBody>
@@ -23535,7 +24094,7 @@
     </p:spTree>
     <p:extLst>
       <p:ext uri="{BB962C8B-B14F-4D97-AF65-F5344CB8AC3E}">
-        <p14:creationId xmlns:p14="http://schemas.microsoft.com/office/powerpoint/2010/main" val="1741879573"/>
+        <p14:creationId xmlns:p14="http://schemas.microsoft.com/office/powerpoint/2010/main" val="1699463626"/>
       </p:ext>
     </p:extLst>
   </p:cSld>
@@ -23566,7 +24125,7 @@
           <p:cNvPr id="29" name="text-60">
             <a:extLst xmlns:a="http://schemas.openxmlformats.org/drawingml/2006/main">
               <a:ext uri="{FF2B5EF4-FFF2-40B4-BE49-F238E27FC236}">
-                <a16:creationId xmlns:a16="http://schemas.microsoft.com/office/drawing/2014/main" id="{8322AB45-C3DC-418D-B093-40AE5D890D78}"/>
+                <a16:creationId xmlns:a16="http://schemas.microsoft.com/office/drawing/2014/main" id="{6C5CC823-296B-4C94-B1D0-8531AAF99FB8}"/>
               </a:ext>
             </a:extLst>
           </p:cNvPr>
@@ -23624,7 +24183,7 @@
                 <a:ea typeface="DejaVu Sans"/>
                 <a:cs typeface="DejaVu Sans"/>
               </a:rPr>
-              <a:t>SVM: граница по обучающим примерам</a:t>
+              <a:t>Как работает SVM</a:t>
             </a:r>
           </a:p>
         </p:txBody>
@@ -23634,7 +24193,7 @@
           <p:cNvPr id="2" name="text-61">
             <a:extLst xmlns:a="http://schemas.openxmlformats.org/drawingml/2006/main">
               <a:ext uri="{FF2B5EF4-FFF2-40B4-BE49-F238E27FC236}">
-                <a16:creationId xmlns:a16="http://schemas.microsoft.com/office/drawing/2014/main" id="{3F030B26-E44C-42C4-A28D-D65E45BEC3AA}"/>
+                <a16:creationId xmlns:a16="http://schemas.microsoft.com/office/drawing/2014/main" id="{88F18209-140C-4082-92EA-F68B647D8C9E}"/>
               </a:ext>
             </a:extLst>
           </p:cNvPr>
@@ -23692,7 +24251,7 @@
                 <a:ea typeface="DejaVu Sans"/>
                 <a:cs typeface="DejaVu Sans"/>
               </a:rPr>
-              <a:t>SVM — метод опорных векторов. При двух признаках линейная модель строит прямую.</a:t>
+              <a:t>Линейная SVM (метод опорных векторов) строит границу в виде прямой.</a:t>
             </a:r>
           </a:p>
         </p:txBody>
@@ -23702,7 +24261,7 @@
           <p:cNvPr id="3" name="">
             <a:extLst xmlns:a="http://schemas.openxmlformats.org/drawingml/2006/main">
               <a:ext uri="{FF2B5EF4-FFF2-40B4-BE49-F238E27FC236}">
-                <a16:creationId xmlns:a16="http://schemas.microsoft.com/office/drawing/2014/main" id="{B07F31D5-F40E-4D10-9E25-BA779A82B6FE}"/>
+                <a16:creationId xmlns:a16="http://schemas.microsoft.com/office/drawing/2014/main" id="{6DCE5FC6-E6EE-405E-82E5-1C02DFE0B2F6}"/>
               </a:ext>
             </a:extLst>
           </p:cNvPr>
@@ -23732,7 +24291,7 @@
           <p:cNvPr id="4" name="text-62">
             <a:extLst xmlns:a="http://schemas.openxmlformats.org/drawingml/2006/main">
               <a:ext uri="{FF2B5EF4-FFF2-40B4-BE49-F238E27FC236}">
-                <a16:creationId xmlns:a16="http://schemas.microsoft.com/office/drawing/2014/main" id="{426A501E-B40C-4192-AF2E-134B994AF00E}"/>
+                <a16:creationId xmlns:a16="http://schemas.microsoft.com/office/drawing/2014/main" id="{62BA356F-C004-4484-B2DF-AF1A72D817EB}"/>
               </a:ext>
             </a:extLst>
           </p:cNvPr>
@@ -23790,7 +24349,7 @@
                 <a:ea typeface="DejaVu Sans"/>
                 <a:cs typeface="DejaVu Sans"/>
               </a:rPr>
-              <a:t>1.13  •  [1, 2, 5]</a:t>
+              <a:t>1.13   [1, 2, 5]</a:t>
             </a:r>
           </a:p>
         </p:txBody>
@@ -23800,7 +24359,7 @@
           <p:cNvPr id="5" name="text-63">
             <a:extLst xmlns:a="http://schemas.openxmlformats.org/drawingml/2006/main">
               <a:ext uri="{FF2B5EF4-FFF2-40B4-BE49-F238E27FC236}">
-                <a16:creationId xmlns:a16="http://schemas.microsoft.com/office/drawing/2014/main" id="{E986E980-F4AE-4BB2-A904-CA01565C0D92}"/>
+                <a16:creationId xmlns:a16="http://schemas.microsoft.com/office/drawing/2014/main" id="{BB2D785B-DFD7-4022-B8B8-654BC20938C9}"/>
               </a:ext>
             </a:extLst>
           </p:cNvPr>
@@ -23868,7 +24427,7 @@
           <p:cNvPr id="6" name="">
             <a:extLst xmlns:a="http://schemas.openxmlformats.org/drawingml/2006/main">
               <a:ext uri="{FF2B5EF4-FFF2-40B4-BE49-F238E27FC236}">
-                <a16:creationId xmlns:a16="http://schemas.microsoft.com/office/drawing/2014/main" id="{205180E8-649A-494F-933D-B73EE4627037}"/>
+                <a16:creationId xmlns:a16="http://schemas.microsoft.com/office/drawing/2014/main" id="{A6177701-3E16-498D-AB11-D92B80543F24}"/>
               </a:ext>
             </a:extLst>
           </p:cNvPr>
@@ -23908,7 +24467,7 @@
           <p:cNvPr id="7" name="">
             <a:extLst xmlns:a="http://schemas.openxmlformats.org/drawingml/2006/main">
               <a:ext uri="{FF2B5EF4-FFF2-40B4-BE49-F238E27FC236}">
-                <a16:creationId xmlns:a16="http://schemas.microsoft.com/office/drawing/2014/main" id="{3BC6299B-A639-4E8A-BFA1-F7D02B40D1BB}"/>
+                <a16:creationId xmlns:a16="http://schemas.microsoft.com/office/drawing/2014/main" id="{9F24C2CC-DF27-4589-9A3D-C51EDF1D1680}"/>
               </a:ext>
             </a:extLst>
           </p:cNvPr>
@@ -23948,7 +24507,7 @@
           <p:cNvPr id="8" name="text-64">
             <a:extLst xmlns:a="http://schemas.openxmlformats.org/drawingml/2006/main">
               <a:ext uri="{FF2B5EF4-FFF2-40B4-BE49-F238E27FC236}">
-                <a16:creationId xmlns:a16="http://schemas.microsoft.com/office/drawing/2014/main" id="{DDB9B722-E1EC-4E9C-92C6-B8865D90042E}"/>
+                <a16:creationId xmlns:a16="http://schemas.microsoft.com/office/drawing/2014/main" id="{C84DC534-DA48-4920-B60B-9B7B5CC69EF1}"/>
               </a:ext>
             </a:extLst>
           </p:cNvPr>
@@ -24016,7 +24575,7 @@
           <p:cNvPr id="9" name="text-65">
             <a:extLst xmlns:a="http://schemas.openxmlformats.org/drawingml/2006/main">
               <a:ext uri="{FF2B5EF4-FFF2-40B4-BE49-F238E27FC236}">
-                <a16:creationId xmlns:a16="http://schemas.microsoft.com/office/drawing/2014/main" id="{6C0E74B5-12F2-41F3-B48D-D814897DEDD0}"/>
+                <a16:creationId xmlns:a16="http://schemas.microsoft.com/office/drawing/2014/main" id="{EC119A55-96E9-4861-A65E-DEBB6A52C686}"/>
               </a:ext>
             </a:extLst>
           </p:cNvPr>
@@ -24084,7 +24643,7 @@
           <p:cNvPr id="10" name="">
             <a:extLst xmlns:a="http://schemas.openxmlformats.org/drawingml/2006/main">
               <a:ext uri="{FF2B5EF4-FFF2-40B4-BE49-F238E27FC236}">
-                <a16:creationId xmlns:a16="http://schemas.microsoft.com/office/drawing/2014/main" id="{96073BC2-5C9C-459D-8CB4-D6F4E8889B00}"/>
+                <a16:creationId xmlns:a16="http://schemas.microsoft.com/office/drawing/2014/main" id="{9BD90537-006B-4F51-A09B-559103779547}"/>
               </a:ext>
             </a:extLst>
           </p:cNvPr>
@@ -24124,7 +24683,7 @@
           <p:cNvPr id="11" name="">
             <a:extLst xmlns:a="http://schemas.openxmlformats.org/drawingml/2006/main">
               <a:ext uri="{FF2B5EF4-FFF2-40B4-BE49-F238E27FC236}">
-                <a16:creationId xmlns:a16="http://schemas.microsoft.com/office/drawing/2014/main" id="{622FE9F3-5880-4EB8-B89F-1511A88F0CDA}"/>
+                <a16:creationId xmlns:a16="http://schemas.microsoft.com/office/drawing/2014/main" id="{356AC33A-A99B-48F8-9778-BA861A1BFBE1}"/>
               </a:ext>
             </a:extLst>
           </p:cNvPr>
@@ -24156,7 +24715,7 @@
           <p:cNvPr id="12" name="">
             <a:extLst xmlns:a="http://schemas.openxmlformats.org/drawingml/2006/main">
               <a:ext uri="{FF2B5EF4-FFF2-40B4-BE49-F238E27FC236}">
-                <a16:creationId xmlns:a16="http://schemas.microsoft.com/office/drawing/2014/main" id="{D07DC5F5-36E2-4E15-A08A-2DF4A60BE6A2}"/>
+                <a16:creationId xmlns:a16="http://schemas.microsoft.com/office/drawing/2014/main" id="{7395419B-0308-4C5D-8BCA-7ECF8860C3EC}"/>
               </a:ext>
             </a:extLst>
           </p:cNvPr>
@@ -24188,7 +24747,7 @@
           <p:cNvPr id="13" name="">
             <a:extLst xmlns:a="http://schemas.openxmlformats.org/drawingml/2006/main">
               <a:ext uri="{FF2B5EF4-FFF2-40B4-BE49-F238E27FC236}">
-                <a16:creationId xmlns:a16="http://schemas.microsoft.com/office/drawing/2014/main" id="{FC99C0B0-6303-4263-A056-D24FC065D06B}"/>
+                <a16:creationId xmlns:a16="http://schemas.microsoft.com/office/drawing/2014/main" id="{BBC2C4A7-D498-4B97-8BB4-58816496C768}"/>
               </a:ext>
             </a:extLst>
           </p:cNvPr>
@@ -24220,7 +24779,7 @@
           <p:cNvPr id="14" name="">
             <a:extLst xmlns:a="http://schemas.openxmlformats.org/drawingml/2006/main">
               <a:ext uri="{FF2B5EF4-FFF2-40B4-BE49-F238E27FC236}">
-                <a16:creationId xmlns:a16="http://schemas.microsoft.com/office/drawing/2014/main" id="{7BEEFA38-D4DA-4A18-ACC0-493F93E34E65}"/>
+                <a16:creationId xmlns:a16="http://schemas.microsoft.com/office/drawing/2014/main" id="{18A23945-B556-4EE1-B5ED-42587337F280}"/>
               </a:ext>
             </a:extLst>
           </p:cNvPr>
@@ -24252,7 +24811,7 @@
           <p:cNvPr id="15" name="">
             <a:extLst xmlns:a="http://schemas.openxmlformats.org/drawingml/2006/main">
               <a:ext uri="{FF2B5EF4-FFF2-40B4-BE49-F238E27FC236}">
-                <a16:creationId xmlns:a16="http://schemas.microsoft.com/office/drawing/2014/main" id="{A719BB63-DCF8-4C59-9455-B410FC352901}"/>
+                <a16:creationId xmlns:a16="http://schemas.microsoft.com/office/drawing/2014/main" id="{3D6E724B-09F4-40C3-993F-D4C7E9712197}"/>
               </a:ext>
             </a:extLst>
           </p:cNvPr>
@@ -24284,7 +24843,7 @@
           <p:cNvPr id="16" name="">
             <a:extLst xmlns:a="http://schemas.openxmlformats.org/drawingml/2006/main">
               <a:ext uri="{FF2B5EF4-FFF2-40B4-BE49-F238E27FC236}">
-                <a16:creationId xmlns:a16="http://schemas.microsoft.com/office/drawing/2014/main" id="{B50A1FC2-ED82-4369-B7F0-15712444098D}"/>
+                <a16:creationId xmlns:a16="http://schemas.microsoft.com/office/drawing/2014/main" id="{DC8FE551-48BC-494C-A7FA-BD1D6E21C059}"/>
               </a:ext>
             </a:extLst>
           </p:cNvPr>
@@ -24316,7 +24875,7 @@
           <p:cNvPr id="17" name="">
             <a:extLst xmlns:a="http://schemas.openxmlformats.org/drawingml/2006/main">
               <a:ext uri="{FF2B5EF4-FFF2-40B4-BE49-F238E27FC236}">
-                <a16:creationId xmlns:a16="http://schemas.microsoft.com/office/drawing/2014/main" id="{5272A73B-86F9-48BA-8CE7-E05DC1825FA5}"/>
+                <a16:creationId xmlns:a16="http://schemas.microsoft.com/office/drawing/2014/main" id="{E9E505F0-3A79-4E21-ADE1-4CCE153BDF8C}"/>
               </a:ext>
             </a:extLst>
           </p:cNvPr>
@@ -24348,7 +24907,7 @@
           <p:cNvPr id="18" name="">
             <a:extLst xmlns:a="http://schemas.openxmlformats.org/drawingml/2006/main">
               <a:ext uri="{FF2B5EF4-FFF2-40B4-BE49-F238E27FC236}">
-                <a16:creationId xmlns:a16="http://schemas.microsoft.com/office/drawing/2014/main" id="{66518810-F535-4E90-AC9A-A1666D560947}"/>
+                <a16:creationId xmlns:a16="http://schemas.microsoft.com/office/drawing/2014/main" id="{C4AD2822-C376-47F6-A0A2-51CD155DE1BB}"/>
               </a:ext>
             </a:extLst>
           </p:cNvPr>
@@ -24380,7 +24939,7 @@
           <p:cNvPr id="19" name="">
             <a:extLst xmlns:a="http://schemas.openxmlformats.org/drawingml/2006/main">
               <a:ext uri="{FF2B5EF4-FFF2-40B4-BE49-F238E27FC236}">
-                <a16:creationId xmlns:a16="http://schemas.microsoft.com/office/drawing/2014/main" id="{81DBCD47-4A98-4936-890B-11F460AEC77D}"/>
+                <a16:creationId xmlns:a16="http://schemas.microsoft.com/office/drawing/2014/main" id="{A6BF4B8A-3221-4068-A09D-FFAB563B99A3}"/>
               </a:ext>
             </a:extLst>
           </p:cNvPr>
@@ -24412,7 +24971,7 @@
           <p:cNvPr id="20" name="">
             <a:extLst xmlns:a="http://schemas.openxmlformats.org/drawingml/2006/main">
               <a:ext uri="{FF2B5EF4-FFF2-40B4-BE49-F238E27FC236}">
-                <a16:creationId xmlns:a16="http://schemas.microsoft.com/office/drawing/2014/main" id="{ACC814D6-BF77-4B56-99E9-3B80EDE46576}"/>
+                <a16:creationId xmlns:a16="http://schemas.microsoft.com/office/drawing/2014/main" id="{2A8940DA-054A-4207-99AD-8538D7341EA5}"/>
               </a:ext>
             </a:extLst>
           </p:cNvPr>
@@ -24444,7 +25003,7 @@
           <p:cNvPr id="21" name="">
             <a:extLst xmlns:a="http://schemas.openxmlformats.org/drawingml/2006/main">
               <a:ext uri="{FF2B5EF4-FFF2-40B4-BE49-F238E27FC236}">
-                <a16:creationId xmlns:a16="http://schemas.microsoft.com/office/drawing/2014/main" id="{284F5504-1E32-45ED-A9FC-16ED5EAC398D}"/>
+                <a16:creationId xmlns:a16="http://schemas.microsoft.com/office/drawing/2014/main" id="{1D9401D3-2119-48C5-8151-416BC078AC08}"/>
               </a:ext>
             </a:extLst>
           </p:cNvPr>
@@ -24476,7 +25035,7 @@
           <p:cNvPr id="22" name="">
             <a:extLst xmlns:a="http://schemas.openxmlformats.org/drawingml/2006/main">
               <a:ext uri="{FF2B5EF4-FFF2-40B4-BE49-F238E27FC236}">
-                <a16:creationId xmlns:a16="http://schemas.microsoft.com/office/drawing/2014/main" id="{290001AA-14E0-45E0-95FA-9E8353C9F8C8}"/>
+                <a16:creationId xmlns:a16="http://schemas.microsoft.com/office/drawing/2014/main" id="{0E5CC31E-C885-4ED0-8FF3-85738143217D}"/>
               </a:ext>
             </a:extLst>
           </p:cNvPr>
@@ -24508,7 +25067,7 @@
           <p:cNvPr id="23" name="text-66">
             <a:extLst xmlns:a="http://schemas.openxmlformats.org/drawingml/2006/main">
               <a:ext uri="{FF2B5EF4-FFF2-40B4-BE49-F238E27FC236}">
-                <a16:creationId xmlns:a16="http://schemas.microsoft.com/office/drawing/2014/main" id="{388848C9-4E0F-4612-94D5-12B198697063}"/>
+                <a16:creationId xmlns:a16="http://schemas.microsoft.com/office/drawing/2014/main" id="{4CD057BE-782A-47F6-BB69-1EA5887A90B1}"/>
               </a:ext>
             </a:extLst>
           </p:cNvPr>
@@ -24576,7 +25135,7 @@
           <p:cNvPr id="24" name="text-67">
             <a:extLst xmlns:a="http://schemas.openxmlformats.org/drawingml/2006/main">
               <a:ext uri="{FF2B5EF4-FFF2-40B4-BE49-F238E27FC236}">
-                <a16:creationId xmlns:a16="http://schemas.microsoft.com/office/drawing/2014/main" id="{315A0085-C6F2-400E-9062-C48C9F521711}"/>
+                <a16:creationId xmlns:a16="http://schemas.microsoft.com/office/drawing/2014/main" id="{ACDC7C7B-6394-4EC3-82BA-9B88685CE17A}"/>
               </a:ext>
             </a:extLst>
           </p:cNvPr>
@@ -24644,7 +25203,7 @@
           <p:cNvPr id="25" name="text-68">
             <a:extLst xmlns:a="http://schemas.openxmlformats.org/drawingml/2006/main">
               <a:ext uri="{FF2B5EF4-FFF2-40B4-BE49-F238E27FC236}">
-                <a16:creationId xmlns:a16="http://schemas.microsoft.com/office/drawing/2014/main" id="{221F211A-4D72-485B-BFA8-E610F41DBFF8}"/>
+                <a16:creationId xmlns:a16="http://schemas.microsoft.com/office/drawing/2014/main" id="{A276E459-9BE0-41ED-9F52-24BFD3C2AD4F}"/>
               </a:ext>
             </a:extLst>
           </p:cNvPr>
@@ -24712,7 +25271,7 @@
           <p:cNvPr id="26" name="text-69">
             <a:extLst xmlns:a="http://schemas.openxmlformats.org/drawingml/2006/main">
               <a:ext uri="{FF2B5EF4-FFF2-40B4-BE49-F238E27FC236}">
-                <a16:creationId xmlns:a16="http://schemas.microsoft.com/office/drawing/2014/main" id="{8B777DE1-8F53-4E08-8E66-F4068822B69A}"/>
+                <a16:creationId xmlns:a16="http://schemas.microsoft.com/office/drawing/2014/main" id="{63192E8A-3165-4198-BD16-BC35152A56BC}"/>
               </a:ext>
             </a:extLst>
           </p:cNvPr>
@@ -24770,7 +25329,7 @@
                 <a:ea typeface="DejaVu Sans"/>
                 <a:cs typeface="DejaVu Sans"/>
               </a:rPr>
-              <a:t>На ней меняется</a:t>
+              <a:t>При переходе через неё</a:t>
             </a:r>
           </a:p>
           <a:p xmlns:a="http://schemas.openxmlformats.org/drawingml/2006/main">
@@ -24793,7 +25352,7 @@
                 <a:ea typeface="DejaVu Sans"/>
                 <a:cs typeface="DejaVu Sans"/>
               </a:rPr>
-              <a:t>выбираемый класс.</a:t>
+              <a:t>меняется ответ модели.</a:t>
             </a:r>
           </a:p>
         </p:txBody>
@@ -24803,7 +25362,7 @@
           <p:cNvPr id="27" name="text-70">
             <a:extLst xmlns:a="http://schemas.openxmlformats.org/drawingml/2006/main">
               <a:ext uri="{FF2B5EF4-FFF2-40B4-BE49-F238E27FC236}">
-                <a16:creationId xmlns:a16="http://schemas.microsoft.com/office/drawing/2014/main" id="{0D43E67A-F1A3-4BEE-96B9-2F14153E44ED}"/>
+                <a16:creationId xmlns:a16="http://schemas.microsoft.com/office/drawing/2014/main" id="{B25F19E1-0D27-4877-A01B-D74EC3C9E7B7}"/>
               </a:ext>
             </a:extLst>
           </p:cNvPr>
@@ -24861,7 +25420,7 @@
                 <a:ea typeface="DejaVu Sans"/>
                 <a:cs typeface="DejaVu Sans"/>
               </a:rPr>
-              <a:t>Правило вычисляет число f.</a:t>
+              <a:t>Модель вычисляет число f.</a:t>
             </a:r>
           </a:p>
           <a:p xmlns:a="http://schemas.openxmlformats.org/drawingml/2006/main">
@@ -24884,7 +25443,7 @@
                 <a:ea typeface="DejaVu Sans"/>
                 <a:cs typeface="DejaVu Sans"/>
               </a:rPr>
-              <a:t>Его знак выбирает класс;</a:t>
+              <a:t>По его знаку выбираем класс.</a:t>
             </a:r>
           </a:p>
           <a:p xmlns:a="http://schemas.openxmlformats.org/drawingml/2006/main">
@@ -24907,7 +25466,7 @@
                 <a:ea typeface="DejaVu Sans"/>
                 <a:cs typeface="DejaVu Sans"/>
               </a:rPr>
-              <a:t>f = 0 — граница.</a:t>
+              <a:t>На границе f = 0.</a:t>
             </a:r>
           </a:p>
         </p:txBody>
@@ -24917,7 +25476,7 @@
           <p:cNvPr id="28" name="text-71">
             <a:extLst xmlns:a="http://schemas.openxmlformats.org/drawingml/2006/main">
               <a:ext uri="{FF2B5EF4-FFF2-40B4-BE49-F238E27FC236}">
-                <a16:creationId xmlns:a16="http://schemas.microsoft.com/office/drawing/2014/main" id="{BF088910-6FE9-428B-ACC6-263700CECBD6}"/>
+                <a16:creationId xmlns:a16="http://schemas.microsoft.com/office/drawing/2014/main" id="{129B91F8-8B43-4133-A817-B12A9746D799}"/>
               </a:ext>
             </a:extLst>
           </p:cNvPr>
@@ -24975,7 +25534,7 @@
                 <a:ea typeface="DejaVu Sans"/>
                 <a:cs typeface="DejaVu Sans"/>
               </a:rPr>
-              <a:t>SVM обучается на всей выборке,</a:t>
+              <a:t>Для обучения SVM используем</a:t>
             </a:r>
           </a:p>
           <a:p xmlns:a="http://schemas.openxmlformats.org/drawingml/2006/main">
@@ -24998,7 +25557,7 @@
                 <a:ea typeface="DejaVu Sans"/>
                 <a:cs typeface="DejaVu Sans"/>
               </a:rPr>
-              <a:t>а не на двух эталонах.</a:t>
+              <a:t>все обучающие примеры.</a:t>
             </a:r>
           </a:p>
         </p:txBody>
@@ -25006,7 +25565,7 @@
     </p:spTree>
     <p:extLst>
       <p:ext uri="{BB962C8B-B14F-4D97-AF65-F5344CB8AC3E}">
-        <p14:creationId xmlns:p14="http://schemas.microsoft.com/office/powerpoint/2010/main" val="180902255"/>
+        <p14:creationId xmlns:p14="http://schemas.microsoft.com/office/powerpoint/2010/main" val="1788882710"/>
       </p:ext>
     </p:extLst>
   </p:cSld>
